--- a/docs/pptx/auc3/jx-auc3-linsubhr-ratio-hosp10.pptx
+++ b/docs/pptx/auc3/jx-auc3-linsubhr-ratio-hosp10.pptx
@@ -2271,7 +2271,7 @@
           </p:nvSpPr>
           <p:spPr>
             <a:xfrm>
-              <a:off x="817517" y="5114368"/>
+              <a:off x="817517" y="5142518"/>
               <a:ext cx="7799693" cy="0"/>
             </a:xfrm>
             <a:custGeom>
@@ -2314,7 +2314,7 @@
           </p:nvSpPr>
           <p:spPr>
             <a:xfrm>
-              <a:off x="817517" y="4244691"/>
+              <a:off x="817517" y="4313054"/>
               <a:ext cx="7799693" cy="0"/>
             </a:xfrm>
             <a:custGeom>
@@ -2357,7 +2357,7 @@
           </p:nvSpPr>
           <p:spPr>
             <a:xfrm>
-              <a:off x="817517" y="3375014"/>
+              <a:off x="817517" y="3483591"/>
               <a:ext cx="7799693" cy="0"/>
             </a:xfrm>
             <a:custGeom>
@@ -2400,7 +2400,7 @@
           </p:nvSpPr>
           <p:spPr>
             <a:xfrm>
-              <a:off x="817517" y="2505337"/>
+              <a:off x="817517" y="2654127"/>
               <a:ext cx="7799693" cy="0"/>
             </a:xfrm>
             <a:custGeom>
@@ -2443,15 +2443,15 @@
           </p:nvSpPr>
           <p:spPr>
             <a:xfrm>
-              <a:off x="1615213" y="1896563"/>
-              <a:ext cx="0" cy="3826579"/>
+              <a:off x="1615213" y="2073503"/>
+              <a:ext cx="0" cy="3649639"/>
             </a:xfrm>
             <a:custGeom>
               <a:avLst/>
               <a:pathLst>
-                <a:path w="0" h="3826579">
+                <a:path w="0" h="3649639">
                   <a:moveTo>
-                    <a:pt x="0" y="3826579"/>
+                    <a:pt x="0" y="3649639"/>
                   </a:moveTo>
                   <a:lnTo>
                     <a:pt x="0" y="0"/>
@@ -2486,15 +2486,15 @@
           </p:nvSpPr>
           <p:spPr>
             <a:xfrm>
-              <a:off x="3387871" y="1896563"/>
-              <a:ext cx="0" cy="3826579"/>
+              <a:off x="3387871" y="2073503"/>
+              <a:ext cx="0" cy="3649639"/>
             </a:xfrm>
             <a:custGeom>
               <a:avLst/>
               <a:pathLst>
-                <a:path w="0" h="3826579">
+                <a:path w="0" h="3649639">
                   <a:moveTo>
-                    <a:pt x="0" y="3826579"/>
+                    <a:pt x="0" y="3649639"/>
                   </a:moveTo>
                   <a:lnTo>
                     <a:pt x="0" y="0"/>
@@ -2529,15 +2529,15 @@
           </p:nvSpPr>
           <p:spPr>
             <a:xfrm>
-              <a:off x="5160528" y="1896563"/>
-              <a:ext cx="0" cy="3826579"/>
+              <a:off x="5160528" y="2073503"/>
+              <a:ext cx="0" cy="3649639"/>
             </a:xfrm>
             <a:custGeom>
               <a:avLst/>
               <a:pathLst>
-                <a:path w="0" h="3826579">
+                <a:path w="0" h="3649639">
                   <a:moveTo>
-                    <a:pt x="0" y="3826579"/>
+                    <a:pt x="0" y="3649639"/>
                   </a:moveTo>
                   <a:lnTo>
                     <a:pt x="0" y="0"/>
@@ -2572,15 +2572,15 @@
           </p:nvSpPr>
           <p:spPr>
             <a:xfrm>
-              <a:off x="6933186" y="1896563"/>
-              <a:ext cx="0" cy="3826579"/>
+              <a:off x="6933186" y="2073503"/>
+              <a:ext cx="0" cy="3649639"/>
             </a:xfrm>
             <a:custGeom>
               <a:avLst/>
               <a:pathLst>
-                <a:path w="0" h="3826579">
+                <a:path w="0" h="3649639">
                   <a:moveTo>
-                    <a:pt x="0" y="3826579"/>
+                    <a:pt x="0" y="3649639"/>
                   </a:moveTo>
                   <a:lnTo>
                     <a:pt x="0" y="0"/>
@@ -2615,7 +2615,7 @@
           </p:nvSpPr>
           <p:spPr>
             <a:xfrm>
-              <a:off x="817517" y="5549207"/>
+              <a:off x="817517" y="5557249"/>
               <a:ext cx="7799693" cy="0"/>
             </a:xfrm>
             <a:custGeom>
@@ -2658,7 +2658,7 @@
           </p:nvSpPr>
           <p:spPr>
             <a:xfrm>
-              <a:off x="817517" y="4679530"/>
+              <a:off x="817517" y="4727786"/>
               <a:ext cx="7799693" cy="0"/>
             </a:xfrm>
             <a:custGeom>
@@ -2701,7 +2701,7 @@
           </p:nvSpPr>
           <p:spPr>
             <a:xfrm>
-              <a:off x="817517" y="3809853"/>
+              <a:off x="817517" y="3898322"/>
               <a:ext cx="7799693" cy="0"/>
             </a:xfrm>
             <a:custGeom>
@@ -2744,7 +2744,7 @@
           </p:nvSpPr>
           <p:spPr>
             <a:xfrm>
-              <a:off x="817517" y="2940175"/>
+              <a:off x="817517" y="3068859"/>
               <a:ext cx="7799693" cy="0"/>
             </a:xfrm>
             <a:custGeom>
@@ -2787,7 +2787,7 @@
           </p:nvSpPr>
           <p:spPr>
             <a:xfrm>
-              <a:off x="817517" y="2070498"/>
+              <a:off x="817517" y="2239395"/>
               <a:ext cx="7799693" cy="0"/>
             </a:xfrm>
             <a:custGeom>
@@ -2830,15 +2830,15 @@
           </p:nvSpPr>
           <p:spPr>
             <a:xfrm>
-              <a:off x="2501542" y="1896563"/>
-              <a:ext cx="0" cy="3826579"/>
+              <a:off x="2501542" y="2073503"/>
+              <a:ext cx="0" cy="3649639"/>
             </a:xfrm>
             <a:custGeom>
               <a:avLst/>
               <a:pathLst>
-                <a:path w="0" h="3826579">
+                <a:path w="0" h="3649639">
                   <a:moveTo>
-                    <a:pt x="0" y="3826579"/>
+                    <a:pt x="0" y="3649639"/>
                   </a:moveTo>
                   <a:lnTo>
                     <a:pt x="0" y="0"/>
@@ -2873,15 +2873,15 @@
           </p:nvSpPr>
           <p:spPr>
             <a:xfrm>
-              <a:off x="4274200" y="1896563"/>
-              <a:ext cx="0" cy="3826579"/>
+              <a:off x="4274200" y="2073503"/>
+              <a:ext cx="0" cy="3649639"/>
             </a:xfrm>
             <a:custGeom>
               <a:avLst/>
               <a:pathLst>
-                <a:path w="0" h="3826579">
+                <a:path w="0" h="3649639">
                   <a:moveTo>
-                    <a:pt x="0" y="3826579"/>
+                    <a:pt x="0" y="3649639"/>
                   </a:moveTo>
                   <a:lnTo>
                     <a:pt x="0" y="0"/>
@@ -2916,15 +2916,15 @@
           </p:nvSpPr>
           <p:spPr>
             <a:xfrm>
-              <a:off x="6046857" y="1896563"/>
-              <a:ext cx="0" cy="3826579"/>
+              <a:off x="6046857" y="2073503"/>
+              <a:ext cx="0" cy="3649639"/>
             </a:xfrm>
             <a:custGeom>
               <a:avLst/>
               <a:pathLst>
-                <a:path w="0" h="3826579">
+                <a:path w="0" h="3649639">
                   <a:moveTo>
-                    <a:pt x="0" y="3826579"/>
+                    <a:pt x="0" y="3649639"/>
                   </a:moveTo>
                   <a:lnTo>
                     <a:pt x="0" y="0"/>
@@ -2959,15 +2959,15 @@
           </p:nvSpPr>
           <p:spPr>
             <a:xfrm>
-              <a:off x="7819515" y="1896563"/>
-              <a:ext cx="0" cy="3826579"/>
+              <a:off x="7819515" y="2073503"/>
+              <a:ext cx="0" cy="3649639"/>
             </a:xfrm>
             <a:custGeom>
               <a:avLst/>
               <a:pathLst>
-                <a:path w="0" h="3826579">
+                <a:path w="0" h="3649639">
                   <a:moveTo>
-                    <a:pt x="0" y="3826579"/>
+                    <a:pt x="0" y="3649639"/>
                   </a:moveTo>
                   <a:lnTo>
                     <a:pt x="0" y="0"/>
@@ -3002,594 +3002,594 @@
           </p:nvSpPr>
           <p:spPr>
             <a:xfrm>
-              <a:off x="817517" y="3443529"/>
-              <a:ext cx="7392041" cy="1780164"/>
+              <a:off x="817517" y="3548938"/>
+              <a:ext cx="7392041" cy="1697849"/>
             </a:xfrm>
             <a:custGeom>
               <a:avLst/>
               <a:pathLst>
-                <a:path w="7392041" h="1780164">
+                <a:path w="7392041" h="1697849">
                   <a:moveTo>
-                    <a:pt x="0" y="184582"/>
+                    <a:pt x="0" y="176047"/>
                   </a:moveTo>
                   <a:lnTo>
-                    <a:pt x="53901" y="209358"/>
-                  </a:lnTo>
-                  <a:lnTo>
-                    <a:pt x="131145" y="244211"/>
-                  </a:lnTo>
-                  <a:lnTo>
-                    <a:pt x="208389" y="278423"/>
-                  </a:lnTo>
-                  <a:lnTo>
-                    <a:pt x="285632" y="312007"/>
-                  </a:lnTo>
-                  <a:lnTo>
-                    <a:pt x="362876" y="344973"/>
-                  </a:lnTo>
-                  <a:lnTo>
-                    <a:pt x="440119" y="377333"/>
-                  </a:lnTo>
-                  <a:lnTo>
-                    <a:pt x="517363" y="409099"/>
-                  </a:lnTo>
-                  <a:lnTo>
-                    <a:pt x="594606" y="440281"/>
-                  </a:lnTo>
-                  <a:lnTo>
-                    <a:pt x="671850" y="470889"/>
-                  </a:lnTo>
-                  <a:lnTo>
-                    <a:pt x="749094" y="500935"/>
-                  </a:lnTo>
-                  <a:lnTo>
-                    <a:pt x="826337" y="530429"/>
-                  </a:lnTo>
-                  <a:lnTo>
-                    <a:pt x="903581" y="559381"/>
-                  </a:lnTo>
-                  <a:lnTo>
-                    <a:pt x="980824" y="587800"/>
-                  </a:lnTo>
-                  <a:lnTo>
-                    <a:pt x="1058068" y="615698"/>
-                  </a:lnTo>
-                  <a:lnTo>
-                    <a:pt x="1135311" y="643082"/>
-                  </a:lnTo>
-                  <a:lnTo>
-                    <a:pt x="1212555" y="669964"/>
-                  </a:lnTo>
-                  <a:lnTo>
-                    <a:pt x="1289799" y="696351"/>
-                  </a:lnTo>
-                  <a:lnTo>
-                    <a:pt x="1367042" y="722253"/>
-                  </a:lnTo>
-                  <a:lnTo>
-                    <a:pt x="1444286" y="747679"/>
-                  </a:lnTo>
-                  <a:lnTo>
-                    <a:pt x="1521529" y="772638"/>
-                  </a:lnTo>
-                  <a:lnTo>
-                    <a:pt x="1598773" y="797138"/>
-                  </a:lnTo>
-                  <a:lnTo>
-                    <a:pt x="1676016" y="821188"/>
-                  </a:lnTo>
-                  <a:lnTo>
-                    <a:pt x="1753260" y="844796"/>
-                  </a:lnTo>
-                  <a:lnTo>
-                    <a:pt x="1830504" y="867970"/>
-                  </a:lnTo>
-                  <a:lnTo>
-                    <a:pt x="1907747" y="890718"/>
-                  </a:lnTo>
-                  <a:lnTo>
-                    <a:pt x="1984991" y="913048"/>
-                  </a:lnTo>
-                  <a:lnTo>
-                    <a:pt x="2062234" y="934967"/>
-                  </a:lnTo>
-                  <a:lnTo>
-                    <a:pt x="2139478" y="956484"/>
-                  </a:lnTo>
-                  <a:lnTo>
-                    <a:pt x="2216721" y="977605"/>
-                  </a:lnTo>
-                  <a:lnTo>
-                    <a:pt x="2293965" y="998338"/>
-                  </a:lnTo>
-                  <a:lnTo>
-                    <a:pt x="2371209" y="1018690"/>
-                  </a:lnTo>
-                  <a:lnTo>
-                    <a:pt x="2448452" y="1038668"/>
-                  </a:lnTo>
-                  <a:lnTo>
-                    <a:pt x="2525696" y="1058279"/>
-                  </a:lnTo>
-                  <a:lnTo>
-                    <a:pt x="2602939" y="1077529"/>
-                  </a:lnTo>
-                  <a:lnTo>
-                    <a:pt x="2680183" y="1096426"/>
-                  </a:lnTo>
-                  <a:lnTo>
-                    <a:pt x="2757426" y="1114975"/>
-                  </a:lnTo>
-                  <a:lnTo>
-                    <a:pt x="2834670" y="1133183"/>
-                  </a:lnTo>
-                  <a:lnTo>
-                    <a:pt x="2911914" y="1151057"/>
-                  </a:lnTo>
-                  <a:lnTo>
-                    <a:pt x="2989157" y="1168602"/>
-                  </a:lnTo>
-                  <a:lnTo>
-                    <a:pt x="3066401" y="1185825"/>
-                  </a:lnTo>
-                  <a:lnTo>
-                    <a:pt x="3143644" y="1202731"/>
-                  </a:lnTo>
-                  <a:lnTo>
-                    <a:pt x="3220888" y="1219326"/>
-                  </a:lnTo>
-                  <a:lnTo>
-                    <a:pt x="3298131" y="1235617"/>
-                  </a:lnTo>
-                  <a:lnTo>
-                    <a:pt x="3375375" y="1221712"/>
-                  </a:lnTo>
-                  <a:lnTo>
-                    <a:pt x="3452619" y="1206833"/>
-                  </a:lnTo>
-                  <a:lnTo>
-                    <a:pt x="3529862" y="1191704"/>
-                  </a:lnTo>
-                  <a:lnTo>
-                    <a:pt x="3607106" y="1176320"/>
-                  </a:lnTo>
-                  <a:lnTo>
-                    <a:pt x="3684349" y="1160677"/>
-                  </a:lnTo>
-                  <a:lnTo>
-                    <a:pt x="3761593" y="1144771"/>
-                  </a:lnTo>
-                  <a:lnTo>
-                    <a:pt x="3838836" y="1128597"/>
-                  </a:lnTo>
-                  <a:lnTo>
-                    <a:pt x="3916080" y="1112151"/>
-                  </a:lnTo>
-                  <a:lnTo>
-                    <a:pt x="3993324" y="1095428"/>
-                  </a:lnTo>
-                  <a:lnTo>
-                    <a:pt x="4070567" y="1078424"/>
-                  </a:lnTo>
-                  <a:lnTo>
-                    <a:pt x="4147811" y="1061133"/>
-                  </a:lnTo>
-                  <a:lnTo>
-                    <a:pt x="4225054" y="1043551"/>
-                  </a:lnTo>
-                  <a:lnTo>
-                    <a:pt x="4302298" y="1025674"/>
-                  </a:lnTo>
-                  <a:lnTo>
-                    <a:pt x="4379541" y="1007495"/>
-                  </a:lnTo>
-                  <a:lnTo>
-                    <a:pt x="4456785" y="989011"/>
-                  </a:lnTo>
-                  <a:lnTo>
-                    <a:pt x="4534029" y="970215"/>
-                  </a:lnTo>
-                  <a:lnTo>
-                    <a:pt x="4611272" y="951103"/>
-                  </a:lnTo>
-                  <a:lnTo>
-                    <a:pt x="4688516" y="931669"/>
-                  </a:lnTo>
-                  <a:lnTo>
-                    <a:pt x="4765759" y="911909"/>
-                  </a:lnTo>
-                  <a:lnTo>
-                    <a:pt x="4843003" y="891815"/>
-                  </a:lnTo>
-                  <a:lnTo>
-                    <a:pt x="4920246" y="871384"/>
-                  </a:lnTo>
-                  <a:lnTo>
-                    <a:pt x="4997490" y="850608"/>
-                  </a:lnTo>
-                  <a:lnTo>
-                    <a:pt x="5074734" y="829483"/>
-                  </a:lnTo>
-                  <a:lnTo>
-                    <a:pt x="5151977" y="808002"/>
-                  </a:lnTo>
-                  <a:lnTo>
-                    <a:pt x="5229221" y="786160"/>
-                  </a:lnTo>
-                  <a:lnTo>
-                    <a:pt x="5306464" y="763950"/>
-                  </a:lnTo>
-                  <a:lnTo>
-                    <a:pt x="5383708" y="741366"/>
-                  </a:lnTo>
-                  <a:lnTo>
-                    <a:pt x="5460951" y="718402"/>
-                  </a:lnTo>
-                  <a:lnTo>
-                    <a:pt x="5538195" y="695051"/>
-                  </a:lnTo>
-                  <a:lnTo>
-                    <a:pt x="5615439" y="671308"/>
-                  </a:lnTo>
-                  <a:lnTo>
-                    <a:pt x="5692682" y="647165"/>
-                  </a:lnTo>
-                  <a:lnTo>
-                    <a:pt x="5769926" y="622615"/>
-                  </a:lnTo>
-                  <a:lnTo>
-                    <a:pt x="5847169" y="597652"/>
-                  </a:lnTo>
-                  <a:lnTo>
-                    <a:pt x="5924413" y="572269"/>
-                  </a:lnTo>
-                  <a:lnTo>
-                    <a:pt x="6001656" y="546459"/>
-                  </a:lnTo>
-                  <a:lnTo>
-                    <a:pt x="6078900" y="520215"/>
-                  </a:lnTo>
-                  <a:lnTo>
-                    <a:pt x="6156144" y="493528"/>
-                  </a:lnTo>
-                  <a:lnTo>
-                    <a:pt x="6233387" y="466393"/>
-                  </a:lnTo>
-                  <a:lnTo>
-                    <a:pt x="6310631" y="438800"/>
-                  </a:lnTo>
-                  <a:lnTo>
-                    <a:pt x="6387874" y="410744"/>
-                  </a:lnTo>
-                  <a:lnTo>
-                    <a:pt x="6465118" y="382215"/>
-                  </a:lnTo>
-                  <a:lnTo>
-                    <a:pt x="6542361" y="353205"/>
-                  </a:lnTo>
-                  <a:lnTo>
-                    <a:pt x="6619605" y="323708"/>
-                  </a:lnTo>
-                  <a:lnTo>
-                    <a:pt x="6696849" y="293714"/>
-                  </a:lnTo>
-                  <a:lnTo>
-                    <a:pt x="6774092" y="263215"/>
-                  </a:lnTo>
-                  <a:lnTo>
-                    <a:pt x="6851336" y="232203"/>
-                  </a:lnTo>
-                  <a:lnTo>
-                    <a:pt x="6928579" y="200669"/>
-                  </a:lnTo>
-                  <a:lnTo>
-                    <a:pt x="7005823" y="168604"/>
-                  </a:lnTo>
-                  <a:lnTo>
-                    <a:pt x="7083066" y="135999"/>
-                  </a:lnTo>
-                  <a:lnTo>
-                    <a:pt x="7160310" y="102846"/>
-                  </a:lnTo>
-                  <a:lnTo>
-                    <a:pt x="7237554" y="69134"/>
-                  </a:lnTo>
-                  <a:lnTo>
-                    <a:pt x="7314797" y="34855"/>
+                    <a:pt x="53901" y="199678"/>
+                  </a:lnTo>
+                  <a:lnTo>
+                    <a:pt x="131145" y="232919"/>
+                  </a:lnTo>
+                  <a:lnTo>
+                    <a:pt x="208389" y="265549"/>
+                  </a:lnTo>
+                  <a:lnTo>
+                    <a:pt x="285632" y="297580"/>
+                  </a:lnTo>
+                  <a:lnTo>
+                    <a:pt x="362876" y="329022"/>
+                  </a:lnTo>
+                  <a:lnTo>
+                    <a:pt x="440119" y="359885"/>
+                  </a:lnTo>
+                  <a:lnTo>
+                    <a:pt x="517363" y="390182"/>
+                  </a:lnTo>
+                  <a:lnTo>
+                    <a:pt x="594606" y="419922"/>
+                  </a:lnTo>
+                  <a:lnTo>
+                    <a:pt x="671850" y="449115"/>
+                  </a:lnTo>
+                  <a:lnTo>
+                    <a:pt x="749094" y="477772"/>
+                  </a:lnTo>
+                  <a:lnTo>
+                    <a:pt x="826337" y="505902"/>
+                  </a:lnTo>
+                  <a:lnTo>
+                    <a:pt x="903581" y="533515"/>
+                  </a:lnTo>
+                  <a:lnTo>
+                    <a:pt x="980824" y="560621"/>
+                  </a:lnTo>
+                  <a:lnTo>
+                    <a:pt x="1058068" y="587228"/>
+                  </a:lnTo>
+                  <a:lnTo>
+                    <a:pt x="1135311" y="613346"/>
+                  </a:lnTo>
+                  <a:lnTo>
+                    <a:pt x="1212555" y="638985"/>
+                  </a:lnTo>
+                  <a:lnTo>
+                    <a:pt x="1289799" y="664152"/>
+                  </a:lnTo>
+                  <a:lnTo>
+                    <a:pt x="1367042" y="688856"/>
+                  </a:lnTo>
+                  <a:lnTo>
+                    <a:pt x="1444286" y="713107"/>
+                  </a:lnTo>
+                  <a:lnTo>
+                    <a:pt x="1521529" y="736912"/>
+                  </a:lnTo>
+                  <a:lnTo>
+                    <a:pt x="1598773" y="760279"/>
+                  </a:lnTo>
+                  <a:lnTo>
+                    <a:pt x="1676016" y="783217"/>
+                  </a:lnTo>
+                  <a:lnTo>
+                    <a:pt x="1753260" y="805733"/>
+                  </a:lnTo>
+                  <a:lnTo>
+                    <a:pt x="1830504" y="827835"/>
+                  </a:lnTo>
+                  <a:lnTo>
+                    <a:pt x="1907747" y="849531"/>
+                  </a:lnTo>
+                  <a:lnTo>
+                    <a:pt x="1984991" y="870829"/>
+                  </a:lnTo>
+                  <a:lnTo>
+                    <a:pt x="2062234" y="891735"/>
+                  </a:lnTo>
+                  <a:lnTo>
+                    <a:pt x="2139478" y="912257"/>
+                  </a:lnTo>
+                  <a:lnTo>
+                    <a:pt x="2216721" y="932401"/>
+                  </a:lnTo>
+                  <a:lnTo>
+                    <a:pt x="2293965" y="952176"/>
+                  </a:lnTo>
+                  <a:lnTo>
+                    <a:pt x="2371209" y="971586"/>
+                  </a:lnTo>
+                  <a:lnTo>
+                    <a:pt x="2448452" y="990641"/>
+                  </a:lnTo>
+                  <a:lnTo>
+                    <a:pt x="2525696" y="1009345"/>
+                  </a:lnTo>
+                  <a:lnTo>
+                    <a:pt x="2602939" y="1027705"/>
+                  </a:lnTo>
+                  <a:lnTo>
+                    <a:pt x="2680183" y="1045727"/>
+                  </a:lnTo>
+                  <a:lnTo>
+                    <a:pt x="2757426" y="1063419"/>
+                  </a:lnTo>
+                  <a:lnTo>
+                    <a:pt x="2834670" y="1080785"/>
+                  </a:lnTo>
+                  <a:lnTo>
+                    <a:pt x="2911914" y="1097832"/>
+                  </a:lnTo>
+                  <a:lnTo>
+                    <a:pt x="2989157" y="1114566"/>
+                  </a:lnTo>
+                  <a:lnTo>
+                    <a:pt x="3066401" y="1130993"/>
+                  </a:lnTo>
+                  <a:lnTo>
+                    <a:pt x="3143644" y="1147117"/>
+                  </a:lnTo>
+                  <a:lnTo>
+                    <a:pt x="3220888" y="1162945"/>
+                  </a:lnTo>
+                  <a:lnTo>
+                    <a:pt x="3298131" y="1178482"/>
+                  </a:lnTo>
+                  <a:lnTo>
+                    <a:pt x="3375375" y="1165221"/>
+                  </a:lnTo>
+                  <a:lnTo>
+                    <a:pt x="3452619" y="1151030"/>
+                  </a:lnTo>
+                  <a:lnTo>
+                    <a:pt x="3529862" y="1136600"/>
+                  </a:lnTo>
+                  <a:lnTo>
+                    <a:pt x="3607106" y="1121927"/>
+                  </a:lnTo>
+                  <a:lnTo>
+                    <a:pt x="3684349" y="1107008"/>
+                  </a:lnTo>
+                  <a:lnTo>
+                    <a:pt x="3761593" y="1091837"/>
+                  </a:lnTo>
+                  <a:lnTo>
+                    <a:pt x="3838836" y="1076411"/>
+                  </a:lnTo>
+                  <a:lnTo>
+                    <a:pt x="3916080" y="1060726"/>
+                  </a:lnTo>
+                  <a:lnTo>
+                    <a:pt x="3993324" y="1044776"/>
+                  </a:lnTo>
+                  <a:lnTo>
+                    <a:pt x="4070567" y="1028558"/>
+                  </a:lnTo>
+                  <a:lnTo>
+                    <a:pt x="4147811" y="1012067"/>
+                  </a:lnTo>
+                  <a:lnTo>
+                    <a:pt x="4225054" y="995298"/>
+                  </a:lnTo>
+                  <a:lnTo>
+                    <a:pt x="4302298" y="978247"/>
+                  </a:lnTo>
+                  <a:lnTo>
+                    <a:pt x="4379541" y="960909"/>
+                  </a:lnTo>
+                  <a:lnTo>
+                    <a:pt x="4456785" y="943279"/>
+                  </a:lnTo>
+                  <a:lnTo>
+                    <a:pt x="4534029" y="925353"/>
+                  </a:lnTo>
+                  <a:lnTo>
+                    <a:pt x="4611272" y="907124"/>
+                  </a:lnTo>
+                  <a:lnTo>
+                    <a:pt x="4688516" y="888589"/>
+                  </a:lnTo>
+                  <a:lnTo>
+                    <a:pt x="4765759" y="869742"/>
+                  </a:lnTo>
+                  <a:lnTo>
+                    <a:pt x="4843003" y="850578"/>
+                  </a:lnTo>
+                  <a:lnTo>
+                    <a:pt x="4920246" y="831091"/>
+                  </a:lnTo>
+                  <a:lnTo>
+                    <a:pt x="4997490" y="811276"/>
+                  </a:lnTo>
+                  <a:lnTo>
+                    <a:pt x="5074734" y="791128"/>
+                  </a:lnTo>
+                  <a:lnTo>
+                    <a:pt x="5151977" y="770640"/>
+                  </a:lnTo>
+                  <a:lnTo>
+                    <a:pt x="5229221" y="749808"/>
+                  </a:lnTo>
+                  <a:lnTo>
+                    <a:pt x="5306464" y="728625"/>
+                  </a:lnTo>
+                  <a:lnTo>
+                    <a:pt x="5383708" y="707085"/>
+                  </a:lnTo>
+                  <a:lnTo>
+                    <a:pt x="5460951" y="685183"/>
+                  </a:lnTo>
+                  <a:lnTo>
+                    <a:pt x="5538195" y="662912"/>
+                  </a:lnTo>
+                  <a:lnTo>
+                    <a:pt x="5615439" y="640267"/>
+                  </a:lnTo>
+                  <a:lnTo>
+                    <a:pt x="5692682" y="617240"/>
+                  </a:lnTo>
+                  <a:lnTo>
+                    <a:pt x="5769926" y="593826"/>
+                  </a:lnTo>
+                  <a:lnTo>
+                    <a:pt x="5847169" y="570017"/>
+                  </a:lnTo>
+                  <a:lnTo>
+                    <a:pt x="5924413" y="545808"/>
+                  </a:lnTo>
+                  <a:lnTo>
+                    <a:pt x="6001656" y="521191"/>
+                  </a:lnTo>
+                  <a:lnTo>
+                    <a:pt x="6078900" y="496160"/>
+                  </a:lnTo>
+                  <a:lnTo>
+                    <a:pt x="6156144" y="470708"/>
+                  </a:lnTo>
+                  <a:lnTo>
+                    <a:pt x="6233387" y="444827"/>
+                  </a:lnTo>
+                  <a:lnTo>
+                    <a:pt x="6310631" y="418510"/>
+                  </a:lnTo>
+                  <a:lnTo>
+                    <a:pt x="6387874" y="391751"/>
+                  </a:lnTo>
+                  <a:lnTo>
+                    <a:pt x="6465118" y="364541"/>
+                  </a:lnTo>
+                  <a:lnTo>
+                    <a:pt x="6542361" y="336873"/>
+                  </a:lnTo>
+                  <a:lnTo>
+                    <a:pt x="6619605" y="308740"/>
+                  </a:lnTo>
+                  <a:lnTo>
+                    <a:pt x="6696849" y="280133"/>
+                  </a:lnTo>
+                  <a:lnTo>
+                    <a:pt x="6774092" y="251044"/>
+                  </a:lnTo>
+                  <a:lnTo>
+                    <a:pt x="6851336" y="221466"/>
+                  </a:lnTo>
+                  <a:lnTo>
+                    <a:pt x="6928579" y="191390"/>
+                  </a:lnTo>
+                  <a:lnTo>
+                    <a:pt x="7005823" y="160808"/>
+                  </a:lnTo>
+                  <a:lnTo>
+                    <a:pt x="7083066" y="129711"/>
+                  </a:lnTo>
+                  <a:lnTo>
+                    <a:pt x="7160310" y="98090"/>
+                  </a:lnTo>
+                  <a:lnTo>
+                    <a:pt x="7237554" y="65938"/>
+                  </a:lnTo>
+                  <a:lnTo>
+                    <a:pt x="7314797" y="33244"/>
                   </a:lnTo>
                   <a:lnTo>
                     <a:pt x="7392041" y="0"/>
                   </a:lnTo>
                   <a:lnTo>
-                    <a:pt x="7392041" y="1780164"/>
-                  </a:lnTo>
-                  <a:lnTo>
-                    <a:pt x="7314797" y="1774069"/>
-                  </a:lnTo>
-                  <a:lnTo>
-                    <a:pt x="7237554" y="1767860"/>
-                  </a:lnTo>
-                  <a:lnTo>
-                    <a:pt x="7160310" y="1761535"/>
-                  </a:lnTo>
-                  <a:lnTo>
-                    <a:pt x="7083066" y="1755092"/>
-                  </a:lnTo>
-                  <a:lnTo>
-                    <a:pt x="7005823" y="1748527"/>
-                  </a:lnTo>
-                  <a:lnTo>
-                    <a:pt x="6928579" y="1741840"/>
-                  </a:lnTo>
-                  <a:lnTo>
-                    <a:pt x="6851336" y="1735028"/>
-                  </a:lnTo>
-                  <a:lnTo>
-                    <a:pt x="6774092" y="1728088"/>
-                  </a:lnTo>
-                  <a:lnTo>
-                    <a:pt x="6696849" y="1721019"/>
-                  </a:lnTo>
-                  <a:lnTo>
-                    <a:pt x="6619605" y="1713817"/>
-                  </a:lnTo>
-                  <a:lnTo>
-                    <a:pt x="6542361" y="1706480"/>
-                  </a:lnTo>
-                  <a:lnTo>
-                    <a:pt x="6465118" y="1699005"/>
-                  </a:lnTo>
-                  <a:lnTo>
-                    <a:pt x="6387874" y="1691391"/>
-                  </a:lnTo>
-                  <a:lnTo>
-                    <a:pt x="6310631" y="1683634"/>
-                  </a:lnTo>
-                  <a:lnTo>
-                    <a:pt x="6233387" y="1675732"/>
-                  </a:lnTo>
-                  <a:lnTo>
-                    <a:pt x="6156144" y="1667682"/>
-                  </a:lnTo>
-                  <a:lnTo>
-                    <a:pt x="6078900" y="1659482"/>
-                  </a:lnTo>
-                  <a:lnTo>
-                    <a:pt x="6001656" y="1651128"/>
-                  </a:lnTo>
-                  <a:lnTo>
-                    <a:pt x="5924413" y="1642617"/>
-                  </a:lnTo>
-                  <a:lnTo>
-                    <a:pt x="5847169" y="1633947"/>
-                  </a:lnTo>
-                  <a:lnTo>
-                    <a:pt x="5769926" y="1625115"/>
-                  </a:lnTo>
-                  <a:lnTo>
-                    <a:pt x="5692682" y="1616117"/>
-                  </a:lnTo>
-                  <a:lnTo>
-                    <a:pt x="5615439" y="1606951"/>
-                  </a:lnTo>
-                  <a:lnTo>
-                    <a:pt x="5538195" y="1597613"/>
-                  </a:lnTo>
-                  <a:lnTo>
-                    <a:pt x="5460951" y="1588100"/>
-                  </a:lnTo>
-                  <a:lnTo>
-                    <a:pt x="5383708" y="1578409"/>
-                  </a:lnTo>
-                  <a:lnTo>
-                    <a:pt x="5306464" y="1568537"/>
-                  </a:lnTo>
-                  <a:lnTo>
-                    <a:pt x="5229221" y="1558480"/>
-                  </a:lnTo>
-                  <a:lnTo>
-                    <a:pt x="5151977" y="1548235"/>
-                  </a:lnTo>
-                  <a:lnTo>
-                    <a:pt x="5074734" y="1537798"/>
-                  </a:lnTo>
-                  <a:lnTo>
-                    <a:pt x="4997490" y="1527165"/>
-                  </a:lnTo>
-                  <a:lnTo>
-                    <a:pt x="4920246" y="1516334"/>
-                  </a:lnTo>
-                  <a:lnTo>
-                    <a:pt x="4843003" y="1505299"/>
-                  </a:lnTo>
-                  <a:lnTo>
-                    <a:pt x="4765759" y="1494058"/>
-                  </a:lnTo>
-                  <a:lnTo>
-                    <a:pt x="4688516" y="1482607"/>
-                  </a:lnTo>
-                  <a:lnTo>
-                    <a:pt x="4611272" y="1470941"/>
-                  </a:lnTo>
-                  <a:lnTo>
-                    <a:pt x="4534029" y="1459056"/>
-                  </a:lnTo>
-                  <a:lnTo>
-                    <a:pt x="4456785" y="1446949"/>
-                  </a:lnTo>
-                  <a:lnTo>
-                    <a:pt x="4379541" y="1434616"/>
-                  </a:lnTo>
-                  <a:lnTo>
-                    <a:pt x="4302298" y="1422051"/>
-                  </a:lnTo>
-                  <a:lnTo>
-                    <a:pt x="4225054" y="1409252"/>
-                  </a:lnTo>
-                  <a:lnTo>
-                    <a:pt x="4147811" y="1396212"/>
-                  </a:lnTo>
-                  <a:lnTo>
-                    <a:pt x="4070567" y="1382929"/>
-                  </a:lnTo>
-                  <a:lnTo>
-                    <a:pt x="3993324" y="1369397"/>
-                  </a:lnTo>
-                  <a:lnTo>
-                    <a:pt x="3916080" y="1355611"/>
-                  </a:lnTo>
-                  <a:lnTo>
-                    <a:pt x="3838836" y="1341567"/>
-                  </a:lnTo>
-                  <a:lnTo>
-                    <a:pt x="3761593" y="1327261"/>
-                  </a:lnTo>
-                  <a:lnTo>
-                    <a:pt x="3684349" y="1312686"/>
-                  </a:lnTo>
-                  <a:lnTo>
-                    <a:pt x="3607106" y="1297839"/>
-                  </a:lnTo>
-                  <a:lnTo>
-                    <a:pt x="3529862" y="1282713"/>
-                  </a:lnTo>
-                  <a:lnTo>
-                    <a:pt x="3452619" y="1267305"/>
-                  </a:lnTo>
-                  <a:lnTo>
-                    <a:pt x="3375375" y="1251608"/>
-                  </a:lnTo>
-                  <a:lnTo>
-                    <a:pt x="3298131" y="1236345"/>
-                  </a:lnTo>
-                  <a:lnTo>
-                    <a:pt x="3220888" y="1250735"/>
-                  </a:lnTo>
-                  <a:lnTo>
-                    <a:pt x="3143644" y="1264887"/>
-                  </a:lnTo>
-                  <a:lnTo>
-                    <a:pt x="3066401" y="1278805"/>
-                  </a:lnTo>
-                  <a:lnTo>
-                    <a:pt x="2989157" y="1292492"/>
-                  </a:lnTo>
-                  <a:lnTo>
-                    <a:pt x="2911914" y="1305953"/>
-                  </a:lnTo>
-                  <a:lnTo>
-                    <a:pt x="2834670" y="1319191"/>
-                  </a:lnTo>
-                  <a:lnTo>
-                    <a:pt x="2757426" y="1332210"/>
-                  </a:lnTo>
-                  <a:lnTo>
-                    <a:pt x="2680183" y="1345014"/>
-                  </a:lnTo>
-                  <a:lnTo>
-                    <a:pt x="2602939" y="1357605"/>
-                  </a:lnTo>
-                  <a:lnTo>
-                    <a:pt x="2525696" y="1369988"/>
-                  </a:lnTo>
-                  <a:lnTo>
-                    <a:pt x="2448452" y="1382166"/>
-                  </a:lnTo>
-                  <a:lnTo>
-                    <a:pt x="2371209" y="1394143"/>
-                  </a:lnTo>
-                  <a:lnTo>
-                    <a:pt x="2293965" y="1405921"/>
-                  </a:lnTo>
-                  <a:lnTo>
-                    <a:pt x="2216721" y="1417504"/>
-                  </a:lnTo>
-                  <a:lnTo>
-                    <a:pt x="2139478" y="1428896"/>
-                  </a:lnTo>
-                  <a:lnTo>
-                    <a:pt x="2062234" y="1440099"/>
-                  </a:lnTo>
-                  <a:lnTo>
-                    <a:pt x="1984991" y="1451116"/>
-                  </a:lnTo>
-                  <a:lnTo>
-                    <a:pt x="1907747" y="1461951"/>
-                  </a:lnTo>
-                  <a:lnTo>
-                    <a:pt x="1830504" y="1472607"/>
-                  </a:lnTo>
-                  <a:lnTo>
-                    <a:pt x="1753260" y="1483087"/>
-                  </a:lnTo>
-                  <a:lnTo>
-                    <a:pt x="1676016" y="1493392"/>
-                  </a:lnTo>
-                  <a:lnTo>
-                    <a:pt x="1598773" y="1503528"/>
-                  </a:lnTo>
-                  <a:lnTo>
-                    <a:pt x="1521529" y="1513495"/>
-                  </a:lnTo>
-                  <a:lnTo>
-                    <a:pt x="1444286" y="1523298"/>
-                  </a:lnTo>
-                  <a:lnTo>
-                    <a:pt x="1367042" y="1532938"/>
-                  </a:lnTo>
-                  <a:lnTo>
-                    <a:pt x="1289799" y="1542419"/>
-                  </a:lnTo>
-                  <a:lnTo>
-                    <a:pt x="1212555" y="1551743"/>
-                  </a:lnTo>
-                  <a:lnTo>
-                    <a:pt x="1135311" y="1560912"/>
-                  </a:lnTo>
-                  <a:lnTo>
-                    <a:pt x="1058068" y="1569930"/>
-                  </a:lnTo>
-                  <a:lnTo>
-                    <a:pt x="980824" y="1578798"/>
-                  </a:lnTo>
-                  <a:lnTo>
-                    <a:pt x="903581" y="1587520"/>
-                  </a:lnTo>
-                  <a:lnTo>
-                    <a:pt x="826337" y="1596097"/>
-                  </a:lnTo>
-                  <a:lnTo>
-                    <a:pt x="749094" y="1604532"/>
-                  </a:lnTo>
-                  <a:lnTo>
-                    <a:pt x="671850" y="1612828"/>
-                  </a:lnTo>
-                  <a:lnTo>
-                    <a:pt x="594606" y="1620986"/>
-                  </a:lnTo>
-                  <a:lnTo>
-                    <a:pt x="517363" y="1629009"/>
-                  </a:lnTo>
-                  <a:lnTo>
-                    <a:pt x="440119" y="1636900"/>
-                  </a:lnTo>
-                  <a:lnTo>
-                    <a:pt x="362876" y="1644659"/>
-                  </a:lnTo>
-                  <a:lnTo>
-                    <a:pt x="285632" y="1652291"/>
-                  </a:lnTo>
-                  <a:lnTo>
-                    <a:pt x="208389" y="1659796"/>
-                  </a:lnTo>
-                  <a:lnTo>
-                    <a:pt x="131145" y="1667177"/>
-                  </a:lnTo>
-                  <a:lnTo>
-                    <a:pt x="53901" y="1674435"/>
-                  </a:lnTo>
-                  <a:lnTo>
-                    <a:pt x="0" y="1679417"/>
+                    <a:pt x="7392041" y="1697849"/>
+                  </a:lnTo>
+                  <a:lnTo>
+                    <a:pt x="7314797" y="1692037"/>
+                  </a:lnTo>
+                  <a:lnTo>
+                    <a:pt x="7237554" y="1686115"/>
+                  </a:lnTo>
+                  <a:lnTo>
+                    <a:pt x="7160310" y="1680082"/>
+                  </a:lnTo>
+                  <a:lnTo>
+                    <a:pt x="7083066" y="1673937"/>
+                  </a:lnTo>
+                  <a:lnTo>
+                    <a:pt x="7005823" y="1667676"/>
+                  </a:lnTo>
+                  <a:lnTo>
+                    <a:pt x="6928579" y="1661298"/>
+                  </a:lnTo>
+                  <a:lnTo>
+                    <a:pt x="6851336" y="1654801"/>
+                  </a:lnTo>
+                  <a:lnTo>
+                    <a:pt x="6774092" y="1648182"/>
+                  </a:lnTo>
+                  <a:lnTo>
+                    <a:pt x="6696849" y="1641439"/>
+                  </a:lnTo>
+                  <a:lnTo>
+                    <a:pt x="6619605" y="1634570"/>
+                  </a:lnTo>
+                  <a:lnTo>
+                    <a:pt x="6542361" y="1627573"/>
+                  </a:lnTo>
+                  <a:lnTo>
+                    <a:pt x="6465118" y="1620444"/>
+                  </a:lnTo>
+                  <a:lnTo>
+                    <a:pt x="6387874" y="1613182"/>
+                  </a:lnTo>
+                  <a:lnTo>
+                    <a:pt x="6310631" y="1605784"/>
+                  </a:lnTo>
+                  <a:lnTo>
+                    <a:pt x="6233387" y="1598247"/>
+                  </a:lnTo>
+                  <a:lnTo>
+                    <a:pt x="6156144" y="1590569"/>
+                  </a:lnTo>
+                  <a:lnTo>
+                    <a:pt x="6078900" y="1582748"/>
+                  </a:lnTo>
+                  <a:lnTo>
+                    <a:pt x="6001656" y="1574780"/>
+                  </a:lnTo>
+                  <a:lnTo>
+                    <a:pt x="5924413" y="1566663"/>
+                  </a:lnTo>
+                  <a:lnTo>
+                    <a:pt x="5847169" y="1558394"/>
+                  </a:lnTo>
+                  <a:lnTo>
+                    <a:pt x="5769926" y="1549970"/>
+                  </a:lnTo>
+                  <a:lnTo>
+                    <a:pt x="5692682" y="1541388"/>
+                  </a:lnTo>
+                  <a:lnTo>
+                    <a:pt x="5615439" y="1532646"/>
+                  </a:lnTo>
+                  <a:lnTo>
+                    <a:pt x="5538195" y="1523740"/>
+                  </a:lnTo>
+                  <a:lnTo>
+                    <a:pt x="5460951" y="1514667"/>
+                  </a:lnTo>
+                  <a:lnTo>
+                    <a:pt x="5383708" y="1505424"/>
+                  </a:lnTo>
+                  <a:lnTo>
+                    <a:pt x="5306464" y="1496009"/>
+                  </a:lnTo>
+                  <a:lnTo>
+                    <a:pt x="5229221" y="1486417"/>
+                  </a:lnTo>
+                  <a:lnTo>
+                    <a:pt x="5151977" y="1476645"/>
+                  </a:lnTo>
+                  <a:lnTo>
+                    <a:pt x="5074734" y="1466691"/>
+                  </a:lnTo>
+                  <a:lnTo>
+                    <a:pt x="4997490" y="1456550"/>
+                  </a:lnTo>
+                  <a:lnTo>
+                    <a:pt x="4920246" y="1446219"/>
+                  </a:lnTo>
+                  <a:lnTo>
+                    <a:pt x="4843003" y="1435695"/>
+                  </a:lnTo>
+                  <a:lnTo>
+                    <a:pt x="4765759" y="1424973"/>
+                  </a:lnTo>
+                  <a:lnTo>
+                    <a:pt x="4688516" y="1414051"/>
+                  </a:lnTo>
+                  <a:lnTo>
+                    <a:pt x="4611272" y="1402925"/>
+                  </a:lnTo>
+                  <a:lnTo>
+                    <a:pt x="4534029" y="1391590"/>
+                  </a:lnTo>
+                  <a:lnTo>
+                    <a:pt x="4456785" y="1380043"/>
+                  </a:lnTo>
+                  <a:lnTo>
+                    <a:pt x="4379541" y="1368280"/>
+                  </a:lnTo>
+                  <a:lnTo>
+                    <a:pt x="4302298" y="1356296"/>
+                  </a:lnTo>
+                  <a:lnTo>
+                    <a:pt x="4225054" y="1344088"/>
+                  </a:lnTo>
+                  <a:lnTo>
+                    <a:pt x="4147811" y="1331652"/>
+                  </a:lnTo>
+                  <a:lnTo>
+                    <a:pt x="4070567" y="1318983"/>
+                  </a:lnTo>
+                  <a:lnTo>
+                    <a:pt x="3993324" y="1306076"/>
+                  </a:lnTo>
+                  <a:lnTo>
+                    <a:pt x="3916080" y="1292928"/>
+                  </a:lnTo>
+                  <a:lnTo>
+                    <a:pt x="3838836" y="1279534"/>
+                  </a:lnTo>
+                  <a:lnTo>
+                    <a:pt x="3761593" y="1265889"/>
+                  </a:lnTo>
+                  <a:lnTo>
+                    <a:pt x="3684349" y="1251988"/>
+                  </a:lnTo>
+                  <a:lnTo>
+                    <a:pt x="3607106" y="1237827"/>
+                  </a:lnTo>
+                  <a:lnTo>
+                    <a:pt x="3529862" y="1223401"/>
+                  </a:lnTo>
+                  <a:lnTo>
+                    <a:pt x="3452619" y="1208705"/>
+                  </a:lnTo>
+                  <a:lnTo>
+                    <a:pt x="3375375" y="1193734"/>
+                  </a:lnTo>
+                  <a:lnTo>
+                    <a:pt x="3298131" y="1179176"/>
+                  </a:lnTo>
+                  <a:lnTo>
+                    <a:pt x="3220888" y="1192901"/>
+                  </a:lnTo>
+                  <a:lnTo>
+                    <a:pt x="3143644" y="1206399"/>
+                  </a:lnTo>
+                  <a:lnTo>
+                    <a:pt x="3066401" y="1219673"/>
+                  </a:lnTo>
+                  <a:lnTo>
+                    <a:pt x="2989157" y="1232728"/>
+                  </a:lnTo>
+                  <a:lnTo>
+                    <a:pt x="2911914" y="1245566"/>
+                  </a:lnTo>
+                  <a:lnTo>
+                    <a:pt x="2834670" y="1258192"/>
+                  </a:lnTo>
+                  <a:lnTo>
+                    <a:pt x="2757426" y="1270609"/>
+                  </a:lnTo>
+                  <a:lnTo>
+                    <a:pt x="2680183" y="1282821"/>
+                  </a:lnTo>
+                  <a:lnTo>
+                    <a:pt x="2602939" y="1294830"/>
+                  </a:lnTo>
+                  <a:lnTo>
+                    <a:pt x="2525696" y="1306640"/>
+                  </a:lnTo>
+                  <a:lnTo>
+                    <a:pt x="2448452" y="1318255"/>
+                  </a:lnTo>
+                  <a:lnTo>
+                    <a:pt x="2371209" y="1329678"/>
+                  </a:lnTo>
+                  <a:lnTo>
+                    <a:pt x="2293965" y="1340912"/>
+                  </a:lnTo>
+                  <a:lnTo>
+                    <a:pt x="2216721" y="1351959"/>
+                  </a:lnTo>
+                  <a:lnTo>
+                    <a:pt x="2139478" y="1362824"/>
+                  </a:lnTo>
+                  <a:lnTo>
+                    <a:pt x="2062234" y="1373509"/>
+                  </a:lnTo>
+                  <a:lnTo>
+                    <a:pt x="1984991" y="1384017"/>
+                  </a:lnTo>
+                  <a:lnTo>
+                    <a:pt x="1907747" y="1394351"/>
+                  </a:lnTo>
+                  <a:lnTo>
+                    <a:pt x="1830504" y="1404514"/>
+                  </a:lnTo>
+                  <a:lnTo>
+                    <a:pt x="1753260" y="1414509"/>
+                  </a:lnTo>
+                  <a:lnTo>
+                    <a:pt x="1676016" y="1424339"/>
+                  </a:lnTo>
+                  <a:lnTo>
+                    <a:pt x="1598773" y="1434005"/>
+                  </a:lnTo>
+                  <a:lnTo>
+                    <a:pt x="1521529" y="1443512"/>
+                  </a:lnTo>
+                  <a:lnTo>
+                    <a:pt x="1444286" y="1452861"/>
+                  </a:lnTo>
+                  <a:lnTo>
+                    <a:pt x="1367042" y="1462056"/>
+                  </a:lnTo>
+                  <a:lnTo>
+                    <a:pt x="1289799" y="1471098"/>
+                  </a:lnTo>
+                  <a:lnTo>
+                    <a:pt x="1212555" y="1479991"/>
+                  </a:lnTo>
+                  <a:lnTo>
+                    <a:pt x="1135311" y="1488736"/>
+                  </a:lnTo>
+                  <a:lnTo>
+                    <a:pt x="1058068" y="1497337"/>
+                  </a:lnTo>
+                  <a:lnTo>
+                    <a:pt x="980824" y="1505795"/>
+                  </a:lnTo>
+                  <a:lnTo>
+                    <a:pt x="903581" y="1514113"/>
+                  </a:lnTo>
+                  <a:lnTo>
+                    <a:pt x="826337" y="1522294"/>
+                  </a:lnTo>
+                  <a:lnTo>
+                    <a:pt x="749094" y="1530339"/>
+                  </a:lnTo>
+                  <a:lnTo>
+                    <a:pt x="671850" y="1538251"/>
+                  </a:lnTo>
+                  <a:lnTo>
+                    <a:pt x="594606" y="1546032"/>
+                  </a:lnTo>
+                  <a:lnTo>
+                    <a:pt x="517363" y="1553684"/>
+                  </a:lnTo>
+                  <a:lnTo>
+                    <a:pt x="440119" y="1561210"/>
+                  </a:lnTo>
+                  <a:lnTo>
+                    <a:pt x="362876" y="1568611"/>
+                  </a:lnTo>
+                  <a:lnTo>
+                    <a:pt x="285632" y="1575890"/>
+                  </a:lnTo>
+                  <a:lnTo>
+                    <a:pt x="208389" y="1583048"/>
+                  </a:lnTo>
+                  <a:lnTo>
+                    <a:pt x="131145" y="1590087"/>
+                  </a:lnTo>
+                  <a:lnTo>
+                    <a:pt x="53901" y="1597010"/>
+                  </a:lnTo>
+                  <a:lnTo>
+                    <a:pt x="0" y="1601761"/>
                   </a:lnTo>
                   <a:close/>
                 </a:path>
@@ -3615,300 +3615,300 @@
           </p:nvSpPr>
           <p:spPr>
             <a:xfrm>
-              <a:off x="817517" y="3443529"/>
-              <a:ext cx="7392041" cy="1235617"/>
+              <a:off x="817517" y="3548938"/>
+              <a:ext cx="7392041" cy="1178482"/>
             </a:xfrm>
             <a:custGeom>
               <a:avLst/>
               <a:pathLst>
-                <a:path w="7392041" h="1235617">
+                <a:path w="7392041" h="1178482">
                   <a:moveTo>
-                    <a:pt x="0" y="184582"/>
+                    <a:pt x="0" y="176047"/>
                   </a:moveTo>
                   <a:lnTo>
-                    <a:pt x="53901" y="209358"/>
-                  </a:lnTo>
-                  <a:lnTo>
-                    <a:pt x="131145" y="244211"/>
-                  </a:lnTo>
-                  <a:lnTo>
-                    <a:pt x="208389" y="278423"/>
-                  </a:lnTo>
-                  <a:lnTo>
-                    <a:pt x="285632" y="312007"/>
-                  </a:lnTo>
-                  <a:lnTo>
-                    <a:pt x="362876" y="344973"/>
-                  </a:lnTo>
-                  <a:lnTo>
-                    <a:pt x="440119" y="377333"/>
-                  </a:lnTo>
-                  <a:lnTo>
-                    <a:pt x="517363" y="409099"/>
-                  </a:lnTo>
-                  <a:lnTo>
-                    <a:pt x="594606" y="440281"/>
-                  </a:lnTo>
-                  <a:lnTo>
-                    <a:pt x="671850" y="470889"/>
-                  </a:lnTo>
-                  <a:lnTo>
-                    <a:pt x="749094" y="500935"/>
-                  </a:lnTo>
-                  <a:lnTo>
-                    <a:pt x="826337" y="530429"/>
-                  </a:lnTo>
-                  <a:lnTo>
-                    <a:pt x="903581" y="559381"/>
-                  </a:lnTo>
-                  <a:lnTo>
-                    <a:pt x="980824" y="587800"/>
-                  </a:lnTo>
-                  <a:lnTo>
-                    <a:pt x="1058068" y="615698"/>
-                  </a:lnTo>
-                  <a:lnTo>
-                    <a:pt x="1135311" y="643082"/>
-                  </a:lnTo>
-                  <a:lnTo>
-                    <a:pt x="1212555" y="669964"/>
-                  </a:lnTo>
-                  <a:lnTo>
-                    <a:pt x="1289799" y="696351"/>
-                  </a:lnTo>
-                  <a:lnTo>
-                    <a:pt x="1367042" y="722253"/>
-                  </a:lnTo>
-                  <a:lnTo>
-                    <a:pt x="1444286" y="747679"/>
-                  </a:lnTo>
-                  <a:lnTo>
-                    <a:pt x="1521529" y="772638"/>
-                  </a:lnTo>
-                  <a:lnTo>
-                    <a:pt x="1598773" y="797138"/>
-                  </a:lnTo>
-                  <a:lnTo>
-                    <a:pt x="1676016" y="821188"/>
-                  </a:lnTo>
-                  <a:lnTo>
-                    <a:pt x="1753260" y="844796"/>
-                  </a:lnTo>
-                  <a:lnTo>
-                    <a:pt x="1830504" y="867970"/>
-                  </a:lnTo>
-                  <a:lnTo>
-                    <a:pt x="1907747" y="890718"/>
-                  </a:lnTo>
-                  <a:lnTo>
-                    <a:pt x="1984991" y="913048"/>
-                  </a:lnTo>
-                  <a:lnTo>
-                    <a:pt x="2062234" y="934967"/>
-                  </a:lnTo>
-                  <a:lnTo>
-                    <a:pt x="2139478" y="956484"/>
-                  </a:lnTo>
-                  <a:lnTo>
-                    <a:pt x="2216721" y="977605"/>
-                  </a:lnTo>
-                  <a:lnTo>
-                    <a:pt x="2293965" y="998338"/>
-                  </a:lnTo>
-                  <a:lnTo>
-                    <a:pt x="2371209" y="1018690"/>
-                  </a:lnTo>
-                  <a:lnTo>
-                    <a:pt x="2448452" y="1038668"/>
-                  </a:lnTo>
-                  <a:lnTo>
-                    <a:pt x="2525696" y="1058279"/>
-                  </a:lnTo>
-                  <a:lnTo>
-                    <a:pt x="2602939" y="1077529"/>
-                  </a:lnTo>
-                  <a:lnTo>
-                    <a:pt x="2680183" y="1096426"/>
-                  </a:lnTo>
-                  <a:lnTo>
-                    <a:pt x="2757426" y="1114975"/>
-                  </a:lnTo>
-                  <a:lnTo>
-                    <a:pt x="2834670" y="1133183"/>
-                  </a:lnTo>
-                  <a:lnTo>
-                    <a:pt x="2911914" y="1151057"/>
-                  </a:lnTo>
-                  <a:lnTo>
-                    <a:pt x="2989157" y="1168602"/>
-                  </a:lnTo>
-                  <a:lnTo>
-                    <a:pt x="3066401" y="1185825"/>
-                  </a:lnTo>
-                  <a:lnTo>
-                    <a:pt x="3143644" y="1202731"/>
-                  </a:lnTo>
-                  <a:lnTo>
-                    <a:pt x="3220888" y="1219326"/>
-                  </a:lnTo>
-                  <a:lnTo>
-                    <a:pt x="3298131" y="1235617"/>
-                  </a:lnTo>
-                  <a:lnTo>
-                    <a:pt x="3375375" y="1221712"/>
-                  </a:lnTo>
-                  <a:lnTo>
-                    <a:pt x="3452619" y="1206833"/>
-                  </a:lnTo>
-                  <a:lnTo>
-                    <a:pt x="3529862" y="1191704"/>
-                  </a:lnTo>
-                  <a:lnTo>
-                    <a:pt x="3607106" y="1176320"/>
-                  </a:lnTo>
-                  <a:lnTo>
-                    <a:pt x="3684349" y="1160677"/>
-                  </a:lnTo>
-                  <a:lnTo>
-                    <a:pt x="3761593" y="1144771"/>
-                  </a:lnTo>
-                  <a:lnTo>
-                    <a:pt x="3838836" y="1128597"/>
-                  </a:lnTo>
-                  <a:lnTo>
-                    <a:pt x="3916080" y="1112151"/>
-                  </a:lnTo>
-                  <a:lnTo>
-                    <a:pt x="3993324" y="1095428"/>
-                  </a:lnTo>
-                  <a:lnTo>
-                    <a:pt x="4070567" y="1078424"/>
-                  </a:lnTo>
-                  <a:lnTo>
-                    <a:pt x="4147811" y="1061133"/>
-                  </a:lnTo>
-                  <a:lnTo>
-                    <a:pt x="4225054" y="1043551"/>
-                  </a:lnTo>
-                  <a:lnTo>
-                    <a:pt x="4302298" y="1025674"/>
-                  </a:lnTo>
-                  <a:lnTo>
-                    <a:pt x="4379541" y="1007495"/>
-                  </a:lnTo>
-                  <a:lnTo>
-                    <a:pt x="4456785" y="989011"/>
-                  </a:lnTo>
-                  <a:lnTo>
-                    <a:pt x="4534029" y="970215"/>
-                  </a:lnTo>
-                  <a:lnTo>
-                    <a:pt x="4611272" y="951103"/>
-                  </a:lnTo>
-                  <a:lnTo>
-                    <a:pt x="4688516" y="931669"/>
-                  </a:lnTo>
-                  <a:lnTo>
-                    <a:pt x="4765759" y="911909"/>
-                  </a:lnTo>
-                  <a:lnTo>
-                    <a:pt x="4843003" y="891815"/>
-                  </a:lnTo>
-                  <a:lnTo>
-                    <a:pt x="4920246" y="871384"/>
-                  </a:lnTo>
-                  <a:lnTo>
-                    <a:pt x="4997490" y="850608"/>
-                  </a:lnTo>
-                  <a:lnTo>
-                    <a:pt x="5074734" y="829483"/>
-                  </a:lnTo>
-                  <a:lnTo>
-                    <a:pt x="5151977" y="808002"/>
-                  </a:lnTo>
-                  <a:lnTo>
-                    <a:pt x="5229221" y="786160"/>
-                  </a:lnTo>
-                  <a:lnTo>
-                    <a:pt x="5306464" y="763950"/>
-                  </a:lnTo>
-                  <a:lnTo>
-                    <a:pt x="5383708" y="741366"/>
-                  </a:lnTo>
-                  <a:lnTo>
-                    <a:pt x="5460951" y="718402"/>
-                  </a:lnTo>
-                  <a:lnTo>
-                    <a:pt x="5538195" y="695051"/>
-                  </a:lnTo>
-                  <a:lnTo>
-                    <a:pt x="5615439" y="671308"/>
-                  </a:lnTo>
-                  <a:lnTo>
-                    <a:pt x="5692682" y="647165"/>
-                  </a:lnTo>
-                  <a:lnTo>
-                    <a:pt x="5769926" y="622615"/>
-                  </a:lnTo>
-                  <a:lnTo>
-                    <a:pt x="5847169" y="597652"/>
-                  </a:lnTo>
-                  <a:lnTo>
-                    <a:pt x="5924413" y="572269"/>
-                  </a:lnTo>
-                  <a:lnTo>
-                    <a:pt x="6001656" y="546459"/>
-                  </a:lnTo>
-                  <a:lnTo>
-                    <a:pt x="6078900" y="520215"/>
-                  </a:lnTo>
-                  <a:lnTo>
-                    <a:pt x="6156144" y="493528"/>
-                  </a:lnTo>
-                  <a:lnTo>
-                    <a:pt x="6233387" y="466393"/>
-                  </a:lnTo>
-                  <a:lnTo>
-                    <a:pt x="6310631" y="438800"/>
-                  </a:lnTo>
-                  <a:lnTo>
-                    <a:pt x="6387874" y="410744"/>
-                  </a:lnTo>
-                  <a:lnTo>
-                    <a:pt x="6465118" y="382215"/>
-                  </a:lnTo>
-                  <a:lnTo>
-                    <a:pt x="6542361" y="353205"/>
-                  </a:lnTo>
-                  <a:lnTo>
-                    <a:pt x="6619605" y="323708"/>
-                  </a:lnTo>
-                  <a:lnTo>
-                    <a:pt x="6696849" y="293714"/>
-                  </a:lnTo>
-                  <a:lnTo>
-                    <a:pt x="6774092" y="263215"/>
-                  </a:lnTo>
-                  <a:lnTo>
-                    <a:pt x="6851336" y="232203"/>
-                  </a:lnTo>
-                  <a:lnTo>
-                    <a:pt x="6928579" y="200669"/>
-                  </a:lnTo>
-                  <a:lnTo>
-                    <a:pt x="7005823" y="168604"/>
-                  </a:lnTo>
-                  <a:lnTo>
-                    <a:pt x="7083066" y="135999"/>
-                  </a:lnTo>
-                  <a:lnTo>
-                    <a:pt x="7160310" y="102846"/>
-                  </a:lnTo>
-                  <a:lnTo>
-                    <a:pt x="7237554" y="69134"/>
-                  </a:lnTo>
-                  <a:lnTo>
-                    <a:pt x="7314797" y="34855"/>
+                    <a:pt x="53901" y="199678"/>
+                  </a:lnTo>
+                  <a:lnTo>
+                    <a:pt x="131145" y="232919"/>
+                  </a:lnTo>
+                  <a:lnTo>
+                    <a:pt x="208389" y="265549"/>
+                  </a:lnTo>
+                  <a:lnTo>
+                    <a:pt x="285632" y="297580"/>
+                  </a:lnTo>
+                  <a:lnTo>
+                    <a:pt x="362876" y="329022"/>
+                  </a:lnTo>
+                  <a:lnTo>
+                    <a:pt x="440119" y="359885"/>
+                  </a:lnTo>
+                  <a:lnTo>
+                    <a:pt x="517363" y="390182"/>
+                  </a:lnTo>
+                  <a:lnTo>
+                    <a:pt x="594606" y="419922"/>
+                  </a:lnTo>
+                  <a:lnTo>
+                    <a:pt x="671850" y="449115"/>
+                  </a:lnTo>
+                  <a:lnTo>
+                    <a:pt x="749094" y="477772"/>
+                  </a:lnTo>
+                  <a:lnTo>
+                    <a:pt x="826337" y="505902"/>
+                  </a:lnTo>
+                  <a:lnTo>
+                    <a:pt x="903581" y="533515"/>
+                  </a:lnTo>
+                  <a:lnTo>
+                    <a:pt x="980824" y="560621"/>
+                  </a:lnTo>
+                  <a:lnTo>
+                    <a:pt x="1058068" y="587228"/>
+                  </a:lnTo>
+                  <a:lnTo>
+                    <a:pt x="1135311" y="613346"/>
+                  </a:lnTo>
+                  <a:lnTo>
+                    <a:pt x="1212555" y="638985"/>
+                  </a:lnTo>
+                  <a:lnTo>
+                    <a:pt x="1289799" y="664152"/>
+                  </a:lnTo>
+                  <a:lnTo>
+                    <a:pt x="1367042" y="688856"/>
+                  </a:lnTo>
+                  <a:lnTo>
+                    <a:pt x="1444286" y="713107"/>
+                  </a:lnTo>
+                  <a:lnTo>
+                    <a:pt x="1521529" y="736912"/>
+                  </a:lnTo>
+                  <a:lnTo>
+                    <a:pt x="1598773" y="760279"/>
+                  </a:lnTo>
+                  <a:lnTo>
+                    <a:pt x="1676016" y="783217"/>
+                  </a:lnTo>
+                  <a:lnTo>
+                    <a:pt x="1753260" y="805733"/>
+                  </a:lnTo>
+                  <a:lnTo>
+                    <a:pt x="1830504" y="827835"/>
+                  </a:lnTo>
+                  <a:lnTo>
+                    <a:pt x="1907747" y="849531"/>
+                  </a:lnTo>
+                  <a:lnTo>
+                    <a:pt x="1984991" y="870829"/>
+                  </a:lnTo>
+                  <a:lnTo>
+                    <a:pt x="2062234" y="891735"/>
+                  </a:lnTo>
+                  <a:lnTo>
+                    <a:pt x="2139478" y="912257"/>
+                  </a:lnTo>
+                  <a:lnTo>
+                    <a:pt x="2216721" y="932401"/>
+                  </a:lnTo>
+                  <a:lnTo>
+                    <a:pt x="2293965" y="952176"/>
+                  </a:lnTo>
+                  <a:lnTo>
+                    <a:pt x="2371209" y="971586"/>
+                  </a:lnTo>
+                  <a:lnTo>
+                    <a:pt x="2448452" y="990641"/>
+                  </a:lnTo>
+                  <a:lnTo>
+                    <a:pt x="2525696" y="1009345"/>
+                  </a:lnTo>
+                  <a:lnTo>
+                    <a:pt x="2602939" y="1027705"/>
+                  </a:lnTo>
+                  <a:lnTo>
+                    <a:pt x="2680183" y="1045727"/>
+                  </a:lnTo>
+                  <a:lnTo>
+                    <a:pt x="2757426" y="1063419"/>
+                  </a:lnTo>
+                  <a:lnTo>
+                    <a:pt x="2834670" y="1080785"/>
+                  </a:lnTo>
+                  <a:lnTo>
+                    <a:pt x="2911914" y="1097832"/>
+                  </a:lnTo>
+                  <a:lnTo>
+                    <a:pt x="2989157" y="1114566"/>
+                  </a:lnTo>
+                  <a:lnTo>
+                    <a:pt x="3066401" y="1130993"/>
+                  </a:lnTo>
+                  <a:lnTo>
+                    <a:pt x="3143644" y="1147117"/>
+                  </a:lnTo>
+                  <a:lnTo>
+                    <a:pt x="3220888" y="1162945"/>
+                  </a:lnTo>
+                  <a:lnTo>
+                    <a:pt x="3298131" y="1178482"/>
+                  </a:lnTo>
+                  <a:lnTo>
+                    <a:pt x="3375375" y="1165221"/>
+                  </a:lnTo>
+                  <a:lnTo>
+                    <a:pt x="3452619" y="1151030"/>
+                  </a:lnTo>
+                  <a:lnTo>
+                    <a:pt x="3529862" y="1136600"/>
+                  </a:lnTo>
+                  <a:lnTo>
+                    <a:pt x="3607106" y="1121927"/>
+                  </a:lnTo>
+                  <a:lnTo>
+                    <a:pt x="3684349" y="1107008"/>
+                  </a:lnTo>
+                  <a:lnTo>
+                    <a:pt x="3761593" y="1091837"/>
+                  </a:lnTo>
+                  <a:lnTo>
+                    <a:pt x="3838836" y="1076411"/>
+                  </a:lnTo>
+                  <a:lnTo>
+                    <a:pt x="3916080" y="1060726"/>
+                  </a:lnTo>
+                  <a:lnTo>
+                    <a:pt x="3993324" y="1044776"/>
+                  </a:lnTo>
+                  <a:lnTo>
+                    <a:pt x="4070567" y="1028558"/>
+                  </a:lnTo>
+                  <a:lnTo>
+                    <a:pt x="4147811" y="1012067"/>
+                  </a:lnTo>
+                  <a:lnTo>
+                    <a:pt x="4225054" y="995298"/>
+                  </a:lnTo>
+                  <a:lnTo>
+                    <a:pt x="4302298" y="978247"/>
+                  </a:lnTo>
+                  <a:lnTo>
+                    <a:pt x="4379541" y="960909"/>
+                  </a:lnTo>
+                  <a:lnTo>
+                    <a:pt x="4456785" y="943279"/>
+                  </a:lnTo>
+                  <a:lnTo>
+                    <a:pt x="4534029" y="925353"/>
+                  </a:lnTo>
+                  <a:lnTo>
+                    <a:pt x="4611272" y="907124"/>
+                  </a:lnTo>
+                  <a:lnTo>
+                    <a:pt x="4688516" y="888589"/>
+                  </a:lnTo>
+                  <a:lnTo>
+                    <a:pt x="4765759" y="869742"/>
+                  </a:lnTo>
+                  <a:lnTo>
+                    <a:pt x="4843003" y="850578"/>
+                  </a:lnTo>
+                  <a:lnTo>
+                    <a:pt x="4920246" y="831091"/>
+                  </a:lnTo>
+                  <a:lnTo>
+                    <a:pt x="4997490" y="811276"/>
+                  </a:lnTo>
+                  <a:lnTo>
+                    <a:pt x="5074734" y="791128"/>
+                  </a:lnTo>
+                  <a:lnTo>
+                    <a:pt x="5151977" y="770640"/>
+                  </a:lnTo>
+                  <a:lnTo>
+                    <a:pt x="5229221" y="749808"/>
+                  </a:lnTo>
+                  <a:lnTo>
+                    <a:pt x="5306464" y="728625"/>
+                  </a:lnTo>
+                  <a:lnTo>
+                    <a:pt x="5383708" y="707085"/>
+                  </a:lnTo>
+                  <a:lnTo>
+                    <a:pt x="5460951" y="685183"/>
+                  </a:lnTo>
+                  <a:lnTo>
+                    <a:pt x="5538195" y="662912"/>
+                  </a:lnTo>
+                  <a:lnTo>
+                    <a:pt x="5615439" y="640267"/>
+                  </a:lnTo>
+                  <a:lnTo>
+                    <a:pt x="5692682" y="617240"/>
+                  </a:lnTo>
+                  <a:lnTo>
+                    <a:pt x="5769926" y="593826"/>
+                  </a:lnTo>
+                  <a:lnTo>
+                    <a:pt x="5847169" y="570017"/>
+                  </a:lnTo>
+                  <a:lnTo>
+                    <a:pt x="5924413" y="545808"/>
+                  </a:lnTo>
+                  <a:lnTo>
+                    <a:pt x="6001656" y="521191"/>
+                  </a:lnTo>
+                  <a:lnTo>
+                    <a:pt x="6078900" y="496160"/>
+                  </a:lnTo>
+                  <a:lnTo>
+                    <a:pt x="6156144" y="470708"/>
+                  </a:lnTo>
+                  <a:lnTo>
+                    <a:pt x="6233387" y="444827"/>
+                  </a:lnTo>
+                  <a:lnTo>
+                    <a:pt x="6310631" y="418510"/>
+                  </a:lnTo>
+                  <a:lnTo>
+                    <a:pt x="6387874" y="391751"/>
+                  </a:lnTo>
+                  <a:lnTo>
+                    <a:pt x="6465118" y="364541"/>
+                  </a:lnTo>
+                  <a:lnTo>
+                    <a:pt x="6542361" y="336873"/>
+                  </a:lnTo>
+                  <a:lnTo>
+                    <a:pt x="6619605" y="308740"/>
+                  </a:lnTo>
+                  <a:lnTo>
+                    <a:pt x="6696849" y="280133"/>
+                  </a:lnTo>
+                  <a:lnTo>
+                    <a:pt x="6774092" y="251044"/>
+                  </a:lnTo>
+                  <a:lnTo>
+                    <a:pt x="6851336" y="221466"/>
+                  </a:lnTo>
+                  <a:lnTo>
+                    <a:pt x="6928579" y="191390"/>
+                  </a:lnTo>
+                  <a:lnTo>
+                    <a:pt x="7005823" y="160808"/>
+                  </a:lnTo>
+                  <a:lnTo>
+                    <a:pt x="7083066" y="129711"/>
+                  </a:lnTo>
+                  <a:lnTo>
+                    <a:pt x="7160310" y="98090"/>
+                  </a:lnTo>
+                  <a:lnTo>
+                    <a:pt x="7237554" y="65938"/>
+                  </a:lnTo>
+                  <a:lnTo>
+                    <a:pt x="7314797" y="33244"/>
                   </a:lnTo>
                   <a:lnTo>
                     <a:pt x="7392041" y="0"/>
@@ -3931,303 +3931,303 @@
           </p:nvSpPr>
           <p:spPr>
             <a:xfrm>
-              <a:off x="817517" y="4679874"/>
-              <a:ext cx="7392041" cy="543818"/>
+              <a:off x="817517" y="4728115"/>
+              <a:ext cx="7392041" cy="518672"/>
             </a:xfrm>
             <a:custGeom>
               <a:avLst/>
               <a:pathLst>
-                <a:path w="7392041" h="543818">
+                <a:path w="7392041" h="518672">
                   <a:moveTo>
-                    <a:pt x="7392041" y="543818"/>
+                    <a:pt x="7392041" y="518672"/>
                   </a:moveTo>
                   <a:lnTo>
-                    <a:pt x="7314797" y="537724"/>
-                  </a:lnTo>
-                  <a:lnTo>
-                    <a:pt x="7237554" y="531515"/>
-                  </a:lnTo>
-                  <a:lnTo>
-                    <a:pt x="7160310" y="525190"/>
-                  </a:lnTo>
-                  <a:lnTo>
-                    <a:pt x="7083066" y="518746"/>
-                  </a:lnTo>
-                  <a:lnTo>
-                    <a:pt x="7005823" y="512182"/>
-                  </a:lnTo>
-                  <a:lnTo>
-                    <a:pt x="6928579" y="505495"/>
-                  </a:lnTo>
-                  <a:lnTo>
-                    <a:pt x="6851336" y="498683"/>
-                  </a:lnTo>
-                  <a:lnTo>
-                    <a:pt x="6774092" y="491743"/>
-                  </a:lnTo>
-                  <a:lnTo>
-                    <a:pt x="6696849" y="484674"/>
-                  </a:lnTo>
-                  <a:lnTo>
-                    <a:pt x="6619605" y="477472"/>
-                  </a:lnTo>
-                  <a:lnTo>
-                    <a:pt x="6542361" y="470135"/>
-                  </a:lnTo>
-                  <a:lnTo>
-                    <a:pt x="6465118" y="462660"/>
-                  </a:lnTo>
-                  <a:lnTo>
-                    <a:pt x="6387874" y="455046"/>
-                  </a:lnTo>
-                  <a:lnTo>
-                    <a:pt x="6310631" y="447289"/>
-                  </a:lnTo>
-                  <a:lnTo>
-                    <a:pt x="6233387" y="439387"/>
-                  </a:lnTo>
-                  <a:lnTo>
-                    <a:pt x="6156144" y="431337"/>
-                  </a:lnTo>
-                  <a:lnTo>
-                    <a:pt x="6078900" y="423137"/>
-                  </a:lnTo>
-                  <a:lnTo>
-                    <a:pt x="6001656" y="414782"/>
-                  </a:lnTo>
-                  <a:lnTo>
-                    <a:pt x="5924413" y="406272"/>
-                  </a:lnTo>
-                  <a:lnTo>
-                    <a:pt x="5847169" y="397602"/>
-                  </a:lnTo>
-                  <a:lnTo>
-                    <a:pt x="5769926" y="388769"/>
-                  </a:lnTo>
-                  <a:lnTo>
-                    <a:pt x="5692682" y="379772"/>
-                  </a:lnTo>
-                  <a:lnTo>
-                    <a:pt x="5615439" y="370606"/>
-                  </a:lnTo>
-                  <a:lnTo>
-                    <a:pt x="5538195" y="361268"/>
-                  </a:lnTo>
-                  <a:lnTo>
-                    <a:pt x="5460951" y="351755"/>
-                  </a:lnTo>
-                  <a:lnTo>
-                    <a:pt x="5383708" y="342064"/>
-                  </a:lnTo>
-                  <a:lnTo>
-                    <a:pt x="5306464" y="332192"/>
-                  </a:lnTo>
-                  <a:lnTo>
-                    <a:pt x="5229221" y="322135"/>
-                  </a:lnTo>
-                  <a:lnTo>
-                    <a:pt x="5151977" y="311890"/>
-                  </a:lnTo>
-                  <a:lnTo>
-                    <a:pt x="5074734" y="301453"/>
-                  </a:lnTo>
-                  <a:lnTo>
-                    <a:pt x="4997490" y="290820"/>
-                  </a:lnTo>
-                  <a:lnTo>
-                    <a:pt x="4920246" y="279988"/>
-                  </a:lnTo>
-                  <a:lnTo>
-                    <a:pt x="4843003" y="268954"/>
-                  </a:lnTo>
-                  <a:lnTo>
-                    <a:pt x="4765759" y="257713"/>
-                  </a:lnTo>
-                  <a:lnTo>
-                    <a:pt x="4688516" y="246261"/>
-                  </a:lnTo>
-                  <a:lnTo>
-                    <a:pt x="4611272" y="234596"/>
-                  </a:lnTo>
-                  <a:lnTo>
-                    <a:pt x="4534029" y="222711"/>
-                  </a:lnTo>
-                  <a:lnTo>
-                    <a:pt x="4456785" y="210604"/>
-                  </a:lnTo>
-                  <a:lnTo>
-                    <a:pt x="4379541" y="198271"/>
-                  </a:lnTo>
-                  <a:lnTo>
-                    <a:pt x="4302298" y="185706"/>
-                  </a:lnTo>
-                  <a:lnTo>
-                    <a:pt x="4225054" y="172907"/>
-                  </a:lnTo>
-                  <a:lnTo>
-                    <a:pt x="4147811" y="159867"/>
-                  </a:lnTo>
-                  <a:lnTo>
-                    <a:pt x="4070567" y="146584"/>
-                  </a:lnTo>
-                  <a:lnTo>
-                    <a:pt x="3993324" y="133051"/>
-                  </a:lnTo>
-                  <a:lnTo>
-                    <a:pt x="3916080" y="119266"/>
-                  </a:lnTo>
-                  <a:lnTo>
-                    <a:pt x="3838836" y="105222"/>
-                  </a:lnTo>
-                  <a:lnTo>
-                    <a:pt x="3761593" y="90915"/>
-                  </a:lnTo>
-                  <a:lnTo>
-                    <a:pt x="3684349" y="76341"/>
-                  </a:lnTo>
-                  <a:lnTo>
-                    <a:pt x="3607106" y="61494"/>
-                  </a:lnTo>
-                  <a:lnTo>
-                    <a:pt x="3529862" y="46368"/>
-                  </a:lnTo>
-                  <a:lnTo>
-                    <a:pt x="3452619" y="30960"/>
-                  </a:lnTo>
-                  <a:lnTo>
-                    <a:pt x="3375375" y="15262"/>
+                    <a:pt x="7314797" y="512860"/>
+                  </a:lnTo>
+                  <a:lnTo>
+                    <a:pt x="7237554" y="506938"/>
+                  </a:lnTo>
+                  <a:lnTo>
+                    <a:pt x="7160310" y="500905"/>
+                  </a:lnTo>
+                  <a:lnTo>
+                    <a:pt x="7083066" y="494760"/>
+                  </a:lnTo>
+                  <a:lnTo>
+                    <a:pt x="7005823" y="488499"/>
+                  </a:lnTo>
+                  <a:lnTo>
+                    <a:pt x="6928579" y="482121"/>
+                  </a:lnTo>
+                  <a:lnTo>
+                    <a:pt x="6851336" y="475624"/>
+                  </a:lnTo>
+                  <a:lnTo>
+                    <a:pt x="6774092" y="469005"/>
+                  </a:lnTo>
+                  <a:lnTo>
+                    <a:pt x="6696849" y="462262"/>
+                  </a:lnTo>
+                  <a:lnTo>
+                    <a:pt x="6619605" y="455393"/>
+                  </a:lnTo>
+                  <a:lnTo>
+                    <a:pt x="6542361" y="448396"/>
+                  </a:lnTo>
+                  <a:lnTo>
+                    <a:pt x="6465118" y="441267"/>
+                  </a:lnTo>
+                  <a:lnTo>
+                    <a:pt x="6387874" y="434005"/>
+                  </a:lnTo>
+                  <a:lnTo>
+                    <a:pt x="6310631" y="426607"/>
+                  </a:lnTo>
+                  <a:lnTo>
+                    <a:pt x="6233387" y="419070"/>
+                  </a:lnTo>
+                  <a:lnTo>
+                    <a:pt x="6156144" y="411392"/>
+                  </a:lnTo>
+                  <a:lnTo>
+                    <a:pt x="6078900" y="403571"/>
+                  </a:lnTo>
+                  <a:lnTo>
+                    <a:pt x="6001656" y="395603"/>
+                  </a:lnTo>
+                  <a:lnTo>
+                    <a:pt x="5924413" y="387486"/>
+                  </a:lnTo>
+                  <a:lnTo>
+                    <a:pt x="5847169" y="379217"/>
+                  </a:lnTo>
+                  <a:lnTo>
+                    <a:pt x="5769926" y="370793"/>
+                  </a:lnTo>
+                  <a:lnTo>
+                    <a:pt x="5692682" y="362211"/>
+                  </a:lnTo>
+                  <a:lnTo>
+                    <a:pt x="5615439" y="353469"/>
+                  </a:lnTo>
+                  <a:lnTo>
+                    <a:pt x="5538195" y="344563"/>
+                  </a:lnTo>
+                  <a:lnTo>
+                    <a:pt x="5460951" y="335490"/>
+                  </a:lnTo>
+                  <a:lnTo>
+                    <a:pt x="5383708" y="326247"/>
+                  </a:lnTo>
+                  <a:lnTo>
+                    <a:pt x="5306464" y="316832"/>
+                  </a:lnTo>
+                  <a:lnTo>
+                    <a:pt x="5229221" y="307240"/>
+                  </a:lnTo>
+                  <a:lnTo>
+                    <a:pt x="5151977" y="297468"/>
+                  </a:lnTo>
+                  <a:lnTo>
+                    <a:pt x="5074734" y="287514"/>
+                  </a:lnTo>
+                  <a:lnTo>
+                    <a:pt x="4997490" y="277373"/>
+                  </a:lnTo>
+                  <a:lnTo>
+                    <a:pt x="4920246" y="267042"/>
+                  </a:lnTo>
+                  <a:lnTo>
+                    <a:pt x="4843003" y="256518"/>
+                  </a:lnTo>
+                  <a:lnTo>
+                    <a:pt x="4765759" y="245796"/>
+                  </a:lnTo>
+                  <a:lnTo>
+                    <a:pt x="4688516" y="234874"/>
+                  </a:lnTo>
+                  <a:lnTo>
+                    <a:pt x="4611272" y="223748"/>
+                  </a:lnTo>
+                  <a:lnTo>
+                    <a:pt x="4534029" y="212413"/>
+                  </a:lnTo>
+                  <a:lnTo>
+                    <a:pt x="4456785" y="200866"/>
+                  </a:lnTo>
+                  <a:lnTo>
+                    <a:pt x="4379541" y="189103"/>
+                  </a:lnTo>
+                  <a:lnTo>
+                    <a:pt x="4302298" y="177119"/>
+                  </a:lnTo>
+                  <a:lnTo>
+                    <a:pt x="4225054" y="164911"/>
+                  </a:lnTo>
+                  <a:lnTo>
+                    <a:pt x="4147811" y="152475"/>
+                  </a:lnTo>
+                  <a:lnTo>
+                    <a:pt x="4070567" y="139806"/>
+                  </a:lnTo>
+                  <a:lnTo>
+                    <a:pt x="3993324" y="126899"/>
+                  </a:lnTo>
+                  <a:lnTo>
+                    <a:pt x="3916080" y="113751"/>
+                  </a:lnTo>
+                  <a:lnTo>
+                    <a:pt x="3838836" y="100357"/>
+                  </a:lnTo>
+                  <a:lnTo>
+                    <a:pt x="3761593" y="86712"/>
+                  </a:lnTo>
+                  <a:lnTo>
+                    <a:pt x="3684349" y="72811"/>
+                  </a:lnTo>
+                  <a:lnTo>
+                    <a:pt x="3607106" y="58650"/>
+                  </a:lnTo>
+                  <a:lnTo>
+                    <a:pt x="3529862" y="44224"/>
+                  </a:lnTo>
+                  <a:lnTo>
+                    <a:pt x="3452619" y="29528"/>
+                  </a:lnTo>
+                  <a:lnTo>
+                    <a:pt x="3375375" y="14557"/>
                   </a:lnTo>
                   <a:lnTo>
                     <a:pt x="3298131" y="0"/>
                   </a:lnTo>
                   <a:lnTo>
-                    <a:pt x="3220888" y="14390"/>
-                  </a:lnTo>
-                  <a:lnTo>
-                    <a:pt x="3143644" y="28542"/>
-                  </a:lnTo>
-                  <a:lnTo>
-                    <a:pt x="3066401" y="42460"/>
-                  </a:lnTo>
-                  <a:lnTo>
-                    <a:pt x="2989157" y="56147"/>
-                  </a:lnTo>
-                  <a:lnTo>
-                    <a:pt x="2911914" y="69608"/>
-                  </a:lnTo>
-                  <a:lnTo>
-                    <a:pt x="2834670" y="82846"/>
-                  </a:lnTo>
-                  <a:lnTo>
-                    <a:pt x="2757426" y="95865"/>
-                  </a:lnTo>
-                  <a:lnTo>
-                    <a:pt x="2680183" y="108669"/>
-                  </a:lnTo>
-                  <a:lnTo>
-                    <a:pt x="2602939" y="121260"/>
-                  </a:lnTo>
-                  <a:lnTo>
-                    <a:pt x="2525696" y="133643"/>
-                  </a:lnTo>
-                  <a:lnTo>
-                    <a:pt x="2448452" y="145821"/>
-                  </a:lnTo>
-                  <a:lnTo>
-                    <a:pt x="2371209" y="157798"/>
-                  </a:lnTo>
-                  <a:lnTo>
-                    <a:pt x="2293965" y="169576"/>
-                  </a:lnTo>
-                  <a:lnTo>
-                    <a:pt x="2216721" y="181159"/>
-                  </a:lnTo>
-                  <a:lnTo>
-                    <a:pt x="2139478" y="192551"/>
-                  </a:lnTo>
-                  <a:lnTo>
-                    <a:pt x="2062234" y="203754"/>
-                  </a:lnTo>
-                  <a:lnTo>
-                    <a:pt x="1984991" y="214771"/>
-                  </a:lnTo>
-                  <a:lnTo>
-                    <a:pt x="1907747" y="225606"/>
-                  </a:lnTo>
-                  <a:lnTo>
-                    <a:pt x="1830504" y="236262"/>
-                  </a:lnTo>
-                  <a:lnTo>
-                    <a:pt x="1753260" y="246741"/>
-                  </a:lnTo>
-                  <a:lnTo>
-                    <a:pt x="1676016" y="257047"/>
-                  </a:lnTo>
-                  <a:lnTo>
-                    <a:pt x="1598773" y="267183"/>
-                  </a:lnTo>
-                  <a:lnTo>
-                    <a:pt x="1521529" y="277150"/>
-                  </a:lnTo>
-                  <a:lnTo>
-                    <a:pt x="1444286" y="286953"/>
-                  </a:lnTo>
-                  <a:lnTo>
-                    <a:pt x="1367042" y="296593"/>
-                  </a:lnTo>
-                  <a:lnTo>
-                    <a:pt x="1289799" y="306074"/>
-                  </a:lnTo>
-                  <a:lnTo>
-                    <a:pt x="1212555" y="315398"/>
-                  </a:lnTo>
-                  <a:lnTo>
-                    <a:pt x="1135311" y="324567"/>
-                  </a:lnTo>
-                  <a:lnTo>
-                    <a:pt x="1058068" y="333585"/>
-                  </a:lnTo>
-                  <a:lnTo>
-                    <a:pt x="980824" y="342453"/>
-                  </a:lnTo>
-                  <a:lnTo>
-                    <a:pt x="903581" y="351175"/>
-                  </a:lnTo>
-                  <a:lnTo>
-                    <a:pt x="826337" y="359752"/>
-                  </a:lnTo>
-                  <a:lnTo>
-                    <a:pt x="749094" y="368187"/>
-                  </a:lnTo>
-                  <a:lnTo>
-                    <a:pt x="671850" y="376483"/>
-                  </a:lnTo>
-                  <a:lnTo>
-                    <a:pt x="594606" y="384641"/>
-                  </a:lnTo>
-                  <a:lnTo>
-                    <a:pt x="517363" y="392664"/>
-                  </a:lnTo>
-                  <a:lnTo>
-                    <a:pt x="440119" y="400555"/>
-                  </a:lnTo>
-                  <a:lnTo>
-                    <a:pt x="362876" y="408314"/>
-                  </a:lnTo>
-                  <a:lnTo>
-                    <a:pt x="285632" y="415946"/>
-                  </a:lnTo>
-                  <a:lnTo>
-                    <a:pt x="208389" y="423451"/>
-                  </a:lnTo>
-                  <a:lnTo>
-                    <a:pt x="131145" y="430832"/>
-                  </a:lnTo>
-                  <a:lnTo>
-                    <a:pt x="53901" y="438090"/>
-                  </a:lnTo>
-                  <a:lnTo>
-                    <a:pt x="0" y="443072"/>
+                    <a:pt x="3220888" y="13724"/>
+                  </a:lnTo>
+                  <a:lnTo>
+                    <a:pt x="3143644" y="27222"/>
+                  </a:lnTo>
+                  <a:lnTo>
+                    <a:pt x="3066401" y="40496"/>
+                  </a:lnTo>
+                  <a:lnTo>
+                    <a:pt x="2989157" y="53551"/>
+                  </a:lnTo>
+                  <a:lnTo>
+                    <a:pt x="2911914" y="66389"/>
+                  </a:lnTo>
+                  <a:lnTo>
+                    <a:pt x="2834670" y="79015"/>
+                  </a:lnTo>
+                  <a:lnTo>
+                    <a:pt x="2757426" y="91432"/>
+                  </a:lnTo>
+                  <a:lnTo>
+                    <a:pt x="2680183" y="103644"/>
+                  </a:lnTo>
+                  <a:lnTo>
+                    <a:pt x="2602939" y="115653"/>
+                  </a:lnTo>
+                  <a:lnTo>
+                    <a:pt x="2525696" y="127463"/>
+                  </a:lnTo>
+                  <a:lnTo>
+                    <a:pt x="2448452" y="139078"/>
+                  </a:lnTo>
+                  <a:lnTo>
+                    <a:pt x="2371209" y="150501"/>
+                  </a:lnTo>
+                  <a:lnTo>
+                    <a:pt x="2293965" y="161735"/>
+                  </a:lnTo>
+                  <a:lnTo>
+                    <a:pt x="2216721" y="172782"/>
+                  </a:lnTo>
+                  <a:lnTo>
+                    <a:pt x="2139478" y="183647"/>
+                  </a:lnTo>
+                  <a:lnTo>
+                    <a:pt x="2062234" y="194332"/>
+                  </a:lnTo>
+                  <a:lnTo>
+                    <a:pt x="1984991" y="204840"/>
+                  </a:lnTo>
+                  <a:lnTo>
+                    <a:pt x="1907747" y="215174"/>
+                  </a:lnTo>
+                  <a:lnTo>
+                    <a:pt x="1830504" y="225337"/>
+                  </a:lnTo>
+                  <a:lnTo>
+                    <a:pt x="1753260" y="235332"/>
+                  </a:lnTo>
+                  <a:lnTo>
+                    <a:pt x="1676016" y="245162"/>
+                  </a:lnTo>
+                  <a:lnTo>
+                    <a:pt x="1598773" y="254828"/>
+                  </a:lnTo>
+                  <a:lnTo>
+                    <a:pt x="1521529" y="264335"/>
+                  </a:lnTo>
+                  <a:lnTo>
+                    <a:pt x="1444286" y="273684"/>
+                  </a:lnTo>
+                  <a:lnTo>
+                    <a:pt x="1367042" y="282879"/>
+                  </a:lnTo>
+                  <a:lnTo>
+                    <a:pt x="1289799" y="291921"/>
+                  </a:lnTo>
+                  <a:lnTo>
+                    <a:pt x="1212555" y="300814"/>
+                  </a:lnTo>
+                  <a:lnTo>
+                    <a:pt x="1135311" y="309559"/>
+                  </a:lnTo>
+                  <a:lnTo>
+                    <a:pt x="1058068" y="318160"/>
+                  </a:lnTo>
+                  <a:lnTo>
+                    <a:pt x="980824" y="326618"/>
+                  </a:lnTo>
+                  <a:lnTo>
+                    <a:pt x="903581" y="334936"/>
+                  </a:lnTo>
+                  <a:lnTo>
+                    <a:pt x="826337" y="343117"/>
+                  </a:lnTo>
+                  <a:lnTo>
+                    <a:pt x="749094" y="351162"/>
+                  </a:lnTo>
+                  <a:lnTo>
+                    <a:pt x="671850" y="359074"/>
+                  </a:lnTo>
+                  <a:lnTo>
+                    <a:pt x="594606" y="366855"/>
+                  </a:lnTo>
+                  <a:lnTo>
+                    <a:pt x="517363" y="374507"/>
+                  </a:lnTo>
+                  <a:lnTo>
+                    <a:pt x="440119" y="382033"/>
+                  </a:lnTo>
+                  <a:lnTo>
+                    <a:pt x="362876" y="389434"/>
+                  </a:lnTo>
+                  <a:lnTo>
+                    <a:pt x="285632" y="396713"/>
+                  </a:lnTo>
+                  <a:lnTo>
+                    <a:pt x="208389" y="403871"/>
+                  </a:lnTo>
+                  <a:lnTo>
+                    <a:pt x="131145" y="410910"/>
+                  </a:lnTo>
+                  <a:lnTo>
+                    <a:pt x="53901" y="417833"/>
+                  </a:lnTo>
+                  <a:lnTo>
+                    <a:pt x="0" y="422584"/>
                   </a:lnTo>
                 </a:path>
               </a:pathLst>
@@ -4247,303 +4247,303 @@
           </p:nvSpPr>
           <p:spPr>
             <a:xfrm>
-              <a:off x="817517" y="4644313"/>
-              <a:ext cx="7392041" cy="76989"/>
+              <a:off x="817517" y="4694198"/>
+              <a:ext cx="7392041" cy="73429"/>
             </a:xfrm>
             <a:custGeom>
               <a:avLst/>
               <a:pathLst>
-                <a:path w="7392041" h="76989">
+                <a:path w="7392041" h="73429">
                   <a:moveTo>
                     <a:pt x="0" y="0"/>
                   </a:moveTo>
                   <a:lnTo>
-                    <a:pt x="53901" y="586"/>
-                  </a:lnTo>
-                  <a:lnTo>
-                    <a:pt x="131145" y="1426"/>
-                  </a:lnTo>
-                  <a:lnTo>
-                    <a:pt x="208389" y="2265"/>
-                  </a:lnTo>
-                  <a:lnTo>
-                    <a:pt x="285632" y="3103"/>
-                  </a:lnTo>
-                  <a:lnTo>
-                    <a:pt x="362876" y="3941"/>
-                  </a:lnTo>
-                  <a:lnTo>
-                    <a:pt x="440119" y="4778"/>
-                  </a:lnTo>
-                  <a:lnTo>
-                    <a:pt x="517363" y="5614"/>
-                  </a:lnTo>
-                  <a:lnTo>
-                    <a:pt x="594606" y="6449"/>
-                  </a:lnTo>
-                  <a:lnTo>
-                    <a:pt x="671850" y="7283"/>
-                  </a:lnTo>
-                  <a:lnTo>
-                    <a:pt x="749094" y="8117"/>
-                  </a:lnTo>
-                  <a:lnTo>
-                    <a:pt x="826337" y="8950"/>
-                  </a:lnTo>
-                  <a:lnTo>
-                    <a:pt x="903581" y="9782"/>
-                  </a:lnTo>
-                  <a:lnTo>
-                    <a:pt x="980824" y="10613"/>
-                  </a:lnTo>
-                  <a:lnTo>
-                    <a:pt x="1058068" y="11444"/>
-                  </a:lnTo>
-                  <a:lnTo>
-                    <a:pt x="1135311" y="12273"/>
-                  </a:lnTo>
-                  <a:lnTo>
-                    <a:pt x="1212555" y="13103"/>
-                  </a:lnTo>
-                  <a:lnTo>
-                    <a:pt x="1289799" y="13931"/>
-                  </a:lnTo>
-                  <a:lnTo>
-                    <a:pt x="1367042" y="14758"/>
-                  </a:lnTo>
-                  <a:lnTo>
-                    <a:pt x="1444286" y="15585"/>
-                  </a:lnTo>
-                  <a:lnTo>
-                    <a:pt x="1521529" y="16411"/>
-                  </a:lnTo>
-                  <a:lnTo>
-                    <a:pt x="1598773" y="17236"/>
-                  </a:lnTo>
-                  <a:lnTo>
-                    <a:pt x="1676016" y="18060"/>
-                  </a:lnTo>
-                  <a:lnTo>
-                    <a:pt x="1753260" y="18884"/>
-                  </a:lnTo>
-                  <a:lnTo>
-                    <a:pt x="1830504" y="19707"/>
-                  </a:lnTo>
-                  <a:lnTo>
-                    <a:pt x="1907747" y="20529"/>
-                  </a:lnTo>
-                  <a:lnTo>
-                    <a:pt x="1984991" y="21350"/>
-                  </a:lnTo>
-                  <a:lnTo>
-                    <a:pt x="2062234" y="22171"/>
-                  </a:lnTo>
-                  <a:lnTo>
-                    <a:pt x="2139478" y="22991"/>
-                  </a:lnTo>
-                  <a:lnTo>
-                    <a:pt x="2216721" y="23810"/>
-                  </a:lnTo>
-                  <a:lnTo>
-                    <a:pt x="2293965" y="24628"/>
-                  </a:lnTo>
-                  <a:lnTo>
-                    <a:pt x="2371209" y="25446"/>
-                  </a:lnTo>
-                  <a:lnTo>
-                    <a:pt x="2448452" y="26262"/>
-                  </a:lnTo>
-                  <a:lnTo>
-                    <a:pt x="2525696" y="27078"/>
-                  </a:lnTo>
-                  <a:lnTo>
-                    <a:pt x="2602939" y="27894"/>
-                  </a:lnTo>
-                  <a:lnTo>
-                    <a:pt x="2680183" y="28708"/>
-                  </a:lnTo>
-                  <a:lnTo>
-                    <a:pt x="2757426" y="29522"/>
-                  </a:lnTo>
-                  <a:lnTo>
-                    <a:pt x="2834670" y="30335"/>
-                  </a:lnTo>
-                  <a:lnTo>
-                    <a:pt x="2911914" y="31147"/>
-                  </a:lnTo>
-                  <a:lnTo>
-                    <a:pt x="2989157" y="31959"/>
-                  </a:lnTo>
-                  <a:lnTo>
-                    <a:pt x="3066401" y="32769"/>
-                  </a:lnTo>
-                  <a:lnTo>
-                    <a:pt x="3143644" y="33579"/>
-                  </a:lnTo>
-                  <a:lnTo>
-                    <a:pt x="3220888" y="34389"/>
-                  </a:lnTo>
-                  <a:lnTo>
-                    <a:pt x="3298131" y="35197"/>
-                  </a:lnTo>
-                  <a:lnTo>
-                    <a:pt x="3375375" y="36005"/>
-                  </a:lnTo>
-                  <a:lnTo>
-                    <a:pt x="3452619" y="36812"/>
-                  </a:lnTo>
-                  <a:lnTo>
-                    <a:pt x="3529862" y="37618"/>
-                  </a:lnTo>
-                  <a:lnTo>
-                    <a:pt x="3607106" y="38423"/>
-                  </a:lnTo>
-                  <a:lnTo>
-                    <a:pt x="3684349" y="39228"/>
-                  </a:lnTo>
-                  <a:lnTo>
-                    <a:pt x="3761593" y="40032"/>
-                  </a:lnTo>
-                  <a:lnTo>
-                    <a:pt x="3838836" y="40835"/>
-                  </a:lnTo>
-                  <a:lnTo>
-                    <a:pt x="3916080" y="41638"/>
-                  </a:lnTo>
-                  <a:lnTo>
-                    <a:pt x="3993324" y="42440"/>
-                  </a:lnTo>
-                  <a:lnTo>
-                    <a:pt x="4070567" y="43241"/>
-                  </a:lnTo>
-                  <a:lnTo>
-                    <a:pt x="4147811" y="44041"/>
-                  </a:lnTo>
-                  <a:lnTo>
-                    <a:pt x="4225054" y="44840"/>
-                  </a:lnTo>
-                  <a:lnTo>
-                    <a:pt x="4302298" y="45639"/>
-                  </a:lnTo>
-                  <a:lnTo>
-                    <a:pt x="4379541" y="46437"/>
-                  </a:lnTo>
-                  <a:lnTo>
-                    <a:pt x="4456785" y="47234"/>
-                  </a:lnTo>
-                  <a:lnTo>
-                    <a:pt x="4534029" y="48031"/>
-                  </a:lnTo>
-                  <a:lnTo>
-                    <a:pt x="4611272" y="48827"/>
-                  </a:lnTo>
-                  <a:lnTo>
-                    <a:pt x="4688516" y="49622"/>
-                  </a:lnTo>
-                  <a:lnTo>
-                    <a:pt x="4765759" y="50416"/>
-                  </a:lnTo>
-                  <a:lnTo>
-                    <a:pt x="4843003" y="51210"/>
-                  </a:lnTo>
-                  <a:lnTo>
-                    <a:pt x="4920246" y="52003"/>
-                  </a:lnTo>
-                  <a:lnTo>
-                    <a:pt x="4997490" y="52795"/>
-                  </a:lnTo>
-                  <a:lnTo>
-                    <a:pt x="5074734" y="53586"/>
-                  </a:lnTo>
-                  <a:lnTo>
-                    <a:pt x="5151977" y="54377"/>
-                  </a:lnTo>
-                  <a:lnTo>
-                    <a:pt x="5229221" y="55167"/>
-                  </a:lnTo>
-                  <a:lnTo>
-                    <a:pt x="5306464" y="55956"/>
-                  </a:lnTo>
-                  <a:lnTo>
-                    <a:pt x="5383708" y="56744"/>
-                  </a:lnTo>
-                  <a:lnTo>
-                    <a:pt x="5460951" y="57532"/>
-                  </a:lnTo>
-                  <a:lnTo>
-                    <a:pt x="5538195" y="58319"/>
-                  </a:lnTo>
-                  <a:lnTo>
-                    <a:pt x="5615439" y="59105"/>
-                  </a:lnTo>
-                  <a:lnTo>
-                    <a:pt x="5692682" y="59891"/>
-                  </a:lnTo>
-                  <a:lnTo>
-                    <a:pt x="5769926" y="60675"/>
-                  </a:lnTo>
-                  <a:lnTo>
-                    <a:pt x="5847169" y="61459"/>
-                  </a:lnTo>
-                  <a:lnTo>
-                    <a:pt x="5924413" y="62243"/>
-                  </a:lnTo>
-                  <a:lnTo>
-                    <a:pt x="6001656" y="63025"/>
-                  </a:lnTo>
-                  <a:lnTo>
-                    <a:pt x="6078900" y="63807"/>
-                  </a:lnTo>
-                  <a:lnTo>
-                    <a:pt x="6156144" y="64588"/>
-                  </a:lnTo>
-                  <a:lnTo>
-                    <a:pt x="6233387" y="65369"/>
-                  </a:lnTo>
-                  <a:lnTo>
-                    <a:pt x="6310631" y="66149"/>
-                  </a:lnTo>
-                  <a:lnTo>
-                    <a:pt x="6387874" y="66928"/>
-                  </a:lnTo>
-                  <a:lnTo>
-                    <a:pt x="6465118" y="67706"/>
-                  </a:lnTo>
-                  <a:lnTo>
-                    <a:pt x="6542361" y="68483"/>
-                  </a:lnTo>
-                  <a:lnTo>
-                    <a:pt x="6619605" y="69260"/>
-                  </a:lnTo>
-                  <a:lnTo>
-                    <a:pt x="6696849" y="70036"/>
-                  </a:lnTo>
-                  <a:lnTo>
-                    <a:pt x="6774092" y="70812"/>
-                  </a:lnTo>
-                  <a:lnTo>
-                    <a:pt x="6851336" y="71586"/>
-                  </a:lnTo>
-                  <a:lnTo>
-                    <a:pt x="6928579" y="72360"/>
-                  </a:lnTo>
-                  <a:lnTo>
-                    <a:pt x="7005823" y="73133"/>
-                  </a:lnTo>
-                  <a:lnTo>
-                    <a:pt x="7083066" y="73906"/>
-                  </a:lnTo>
-                  <a:lnTo>
-                    <a:pt x="7160310" y="74678"/>
-                  </a:lnTo>
-                  <a:lnTo>
-                    <a:pt x="7237554" y="75449"/>
-                  </a:lnTo>
-                  <a:lnTo>
-                    <a:pt x="7314797" y="76219"/>
-                  </a:lnTo>
-                  <a:lnTo>
-                    <a:pt x="7392041" y="76989"/>
+                    <a:pt x="53901" y="559"/>
+                  </a:lnTo>
+                  <a:lnTo>
+                    <a:pt x="131145" y="1360"/>
+                  </a:lnTo>
+                  <a:lnTo>
+                    <a:pt x="208389" y="2160"/>
+                  </a:lnTo>
+                  <a:lnTo>
+                    <a:pt x="285632" y="2960"/>
+                  </a:lnTo>
+                  <a:lnTo>
+                    <a:pt x="362876" y="3759"/>
+                  </a:lnTo>
+                  <a:lnTo>
+                    <a:pt x="440119" y="4557"/>
+                  </a:lnTo>
+                  <a:lnTo>
+                    <a:pt x="517363" y="5354"/>
+                  </a:lnTo>
+                  <a:lnTo>
+                    <a:pt x="594606" y="6151"/>
+                  </a:lnTo>
+                  <a:lnTo>
+                    <a:pt x="671850" y="6946"/>
+                  </a:lnTo>
+                  <a:lnTo>
+                    <a:pt x="749094" y="7742"/>
+                  </a:lnTo>
+                  <a:lnTo>
+                    <a:pt x="826337" y="8536"/>
+                  </a:lnTo>
+                  <a:lnTo>
+                    <a:pt x="903581" y="9330"/>
+                  </a:lnTo>
+                  <a:lnTo>
+                    <a:pt x="980824" y="10122"/>
+                  </a:lnTo>
+                  <a:lnTo>
+                    <a:pt x="1058068" y="10915"/>
+                  </a:lnTo>
+                  <a:lnTo>
+                    <a:pt x="1135311" y="11706"/>
+                  </a:lnTo>
+                  <a:lnTo>
+                    <a:pt x="1212555" y="12497"/>
+                  </a:lnTo>
+                  <a:lnTo>
+                    <a:pt x="1289799" y="13287"/>
+                  </a:lnTo>
+                  <a:lnTo>
+                    <a:pt x="1367042" y="14076"/>
+                  </a:lnTo>
+                  <a:lnTo>
+                    <a:pt x="1444286" y="14864"/>
+                  </a:lnTo>
+                  <a:lnTo>
+                    <a:pt x="1521529" y="15652"/>
+                  </a:lnTo>
+                  <a:lnTo>
+                    <a:pt x="1598773" y="16439"/>
+                  </a:lnTo>
+                  <a:lnTo>
+                    <a:pt x="1676016" y="17225"/>
+                  </a:lnTo>
+                  <a:lnTo>
+                    <a:pt x="1753260" y="18011"/>
+                  </a:lnTo>
+                  <a:lnTo>
+                    <a:pt x="1830504" y="18796"/>
+                  </a:lnTo>
+                  <a:lnTo>
+                    <a:pt x="1907747" y="19580"/>
+                  </a:lnTo>
+                  <a:lnTo>
+                    <a:pt x="1984991" y="20363"/>
+                  </a:lnTo>
+                  <a:lnTo>
+                    <a:pt x="2062234" y="21146"/>
+                  </a:lnTo>
+                  <a:lnTo>
+                    <a:pt x="2139478" y="21928"/>
+                  </a:lnTo>
+                  <a:lnTo>
+                    <a:pt x="2216721" y="22709"/>
+                  </a:lnTo>
+                  <a:lnTo>
+                    <a:pt x="2293965" y="23489"/>
+                  </a:lnTo>
+                  <a:lnTo>
+                    <a:pt x="2371209" y="24269"/>
+                  </a:lnTo>
+                  <a:lnTo>
+                    <a:pt x="2448452" y="25048"/>
+                  </a:lnTo>
+                  <a:lnTo>
+                    <a:pt x="2525696" y="25826"/>
+                  </a:lnTo>
+                  <a:lnTo>
+                    <a:pt x="2602939" y="26604"/>
+                  </a:lnTo>
+                  <a:lnTo>
+                    <a:pt x="2680183" y="27381"/>
+                  </a:lnTo>
+                  <a:lnTo>
+                    <a:pt x="2757426" y="28157"/>
+                  </a:lnTo>
+                  <a:lnTo>
+                    <a:pt x="2834670" y="28932"/>
+                  </a:lnTo>
+                  <a:lnTo>
+                    <a:pt x="2911914" y="29707"/>
+                  </a:lnTo>
+                  <a:lnTo>
+                    <a:pt x="2989157" y="30481"/>
+                  </a:lnTo>
+                  <a:lnTo>
+                    <a:pt x="3066401" y="31254"/>
+                  </a:lnTo>
+                  <a:lnTo>
+                    <a:pt x="3143644" y="32027"/>
+                  </a:lnTo>
+                  <a:lnTo>
+                    <a:pt x="3220888" y="32798"/>
+                  </a:lnTo>
+                  <a:lnTo>
+                    <a:pt x="3298131" y="33570"/>
+                  </a:lnTo>
+                  <a:lnTo>
+                    <a:pt x="3375375" y="34340"/>
+                  </a:lnTo>
+                  <a:lnTo>
+                    <a:pt x="3452619" y="35110"/>
+                  </a:lnTo>
+                  <a:lnTo>
+                    <a:pt x="3529862" y="35879"/>
+                  </a:lnTo>
+                  <a:lnTo>
+                    <a:pt x="3607106" y="36647"/>
+                  </a:lnTo>
+                  <a:lnTo>
+                    <a:pt x="3684349" y="37414"/>
+                  </a:lnTo>
+                  <a:lnTo>
+                    <a:pt x="3761593" y="38181"/>
+                  </a:lnTo>
+                  <a:lnTo>
+                    <a:pt x="3838836" y="38947"/>
+                  </a:lnTo>
+                  <a:lnTo>
+                    <a:pt x="3916080" y="39713"/>
+                  </a:lnTo>
+                  <a:lnTo>
+                    <a:pt x="3993324" y="40477"/>
+                  </a:lnTo>
+                  <a:lnTo>
+                    <a:pt x="4070567" y="41241"/>
+                  </a:lnTo>
+                  <a:lnTo>
+                    <a:pt x="4147811" y="42004"/>
+                  </a:lnTo>
+                  <a:lnTo>
+                    <a:pt x="4225054" y="42767"/>
+                  </a:lnTo>
+                  <a:lnTo>
+                    <a:pt x="4302298" y="43529"/>
+                  </a:lnTo>
+                  <a:lnTo>
+                    <a:pt x="4379541" y="44290"/>
+                  </a:lnTo>
+                  <a:lnTo>
+                    <a:pt x="4456785" y="45050"/>
+                  </a:lnTo>
+                  <a:lnTo>
+                    <a:pt x="4534029" y="45810"/>
+                  </a:lnTo>
+                  <a:lnTo>
+                    <a:pt x="4611272" y="46569"/>
+                  </a:lnTo>
+                  <a:lnTo>
+                    <a:pt x="4688516" y="47327"/>
+                  </a:lnTo>
+                  <a:lnTo>
+                    <a:pt x="4765759" y="48085"/>
+                  </a:lnTo>
+                  <a:lnTo>
+                    <a:pt x="4843003" y="48842"/>
+                  </a:lnTo>
+                  <a:lnTo>
+                    <a:pt x="4920246" y="49598"/>
+                  </a:lnTo>
+                  <a:lnTo>
+                    <a:pt x="4997490" y="50353"/>
+                  </a:lnTo>
+                  <a:lnTo>
+                    <a:pt x="5074734" y="51108"/>
+                  </a:lnTo>
+                  <a:lnTo>
+                    <a:pt x="5151977" y="51862"/>
+                  </a:lnTo>
+                  <a:lnTo>
+                    <a:pt x="5229221" y="52616"/>
+                  </a:lnTo>
+                  <a:lnTo>
+                    <a:pt x="5306464" y="53368"/>
+                  </a:lnTo>
+                  <a:lnTo>
+                    <a:pt x="5383708" y="54120"/>
+                  </a:lnTo>
+                  <a:lnTo>
+                    <a:pt x="5460951" y="54872"/>
+                  </a:lnTo>
+                  <a:lnTo>
+                    <a:pt x="5538195" y="55622"/>
+                  </a:lnTo>
+                  <a:lnTo>
+                    <a:pt x="5615439" y="56372"/>
+                  </a:lnTo>
+                  <a:lnTo>
+                    <a:pt x="5692682" y="57121"/>
+                  </a:lnTo>
+                  <a:lnTo>
+                    <a:pt x="5769926" y="57870"/>
+                  </a:lnTo>
+                  <a:lnTo>
+                    <a:pt x="5847169" y="58618"/>
+                  </a:lnTo>
+                  <a:lnTo>
+                    <a:pt x="5924413" y="59365"/>
+                  </a:lnTo>
+                  <a:lnTo>
+                    <a:pt x="6001656" y="60111"/>
+                  </a:lnTo>
+                  <a:lnTo>
+                    <a:pt x="6078900" y="60857"/>
+                  </a:lnTo>
+                  <a:lnTo>
+                    <a:pt x="6156144" y="61602"/>
+                  </a:lnTo>
+                  <a:lnTo>
+                    <a:pt x="6233387" y="62346"/>
+                  </a:lnTo>
+                  <a:lnTo>
+                    <a:pt x="6310631" y="63090"/>
+                  </a:lnTo>
+                  <a:lnTo>
+                    <a:pt x="6387874" y="63833"/>
+                  </a:lnTo>
+                  <a:lnTo>
+                    <a:pt x="6465118" y="64575"/>
+                  </a:lnTo>
+                  <a:lnTo>
+                    <a:pt x="6542361" y="65317"/>
+                  </a:lnTo>
+                  <a:lnTo>
+                    <a:pt x="6619605" y="66058"/>
+                  </a:lnTo>
+                  <a:lnTo>
+                    <a:pt x="6696849" y="66798"/>
+                  </a:lnTo>
+                  <a:lnTo>
+                    <a:pt x="6774092" y="67537"/>
+                  </a:lnTo>
+                  <a:lnTo>
+                    <a:pt x="6851336" y="68276"/>
+                  </a:lnTo>
+                  <a:lnTo>
+                    <a:pt x="6928579" y="69014"/>
+                  </a:lnTo>
+                  <a:lnTo>
+                    <a:pt x="7005823" y="69752"/>
+                  </a:lnTo>
+                  <a:lnTo>
+                    <a:pt x="7083066" y="70488"/>
+                  </a:lnTo>
+                  <a:lnTo>
+                    <a:pt x="7160310" y="71225"/>
+                  </a:lnTo>
+                  <a:lnTo>
+                    <a:pt x="7237554" y="71960"/>
+                  </a:lnTo>
+                  <a:lnTo>
+                    <a:pt x="7314797" y="72695"/>
+                  </a:lnTo>
+                  <a:lnTo>
+                    <a:pt x="7392041" y="73429"/>
                   </a:lnTo>
                 </a:path>
               </a:pathLst>
@@ -4572,7 +4572,7 @@
           </p:nvSpPr>
           <p:spPr>
             <a:xfrm>
-              <a:off x="817517" y="4679530"/>
+              <a:off x="817517" y="4727786"/>
               <a:ext cx="7799693" cy="0"/>
             </a:xfrm>
             <a:custGeom>
@@ -4615,15 +4615,15 @@
           </p:nvSpPr>
           <p:spPr>
             <a:xfrm>
-              <a:off x="4117484" y="1896563"/>
-              <a:ext cx="0" cy="3826579"/>
+              <a:off x="4117484" y="2073503"/>
+              <a:ext cx="0" cy="3649639"/>
             </a:xfrm>
             <a:custGeom>
               <a:avLst/>
               <a:pathLst>
-                <a:path w="0" h="3826579">
+                <a:path w="0" h="3649639">
                   <a:moveTo>
-                    <a:pt x="0" y="3826579"/>
+                    <a:pt x="0" y="3649639"/>
                   </a:moveTo>
                   <a:lnTo>
                     <a:pt x="0" y="0"/>
@@ -4658,7 +4658,7 @@
           </p:nvSpPr>
           <p:spPr>
             <a:xfrm>
-              <a:off x="692708" y="5509156"/>
+              <a:off x="692708" y="5517199"/>
               <a:ext cx="62179" cy="80101"/>
             </a:xfrm>
             <a:prstGeom prst="rect">
@@ -4704,7 +4704,7 @@
           </p:nvSpPr>
           <p:spPr>
             <a:xfrm>
-              <a:off x="692708" y="4639479"/>
+              <a:off x="692708" y="4687735"/>
               <a:ext cx="62179" cy="80101"/>
             </a:xfrm>
             <a:prstGeom prst="rect">
@@ -4750,7 +4750,7 @@
           </p:nvSpPr>
           <p:spPr>
             <a:xfrm>
-              <a:off x="692708" y="3769802"/>
+              <a:off x="692708" y="3858272"/>
               <a:ext cx="62179" cy="80101"/>
             </a:xfrm>
             <a:prstGeom prst="rect">
@@ -4796,7 +4796,7 @@
           </p:nvSpPr>
           <p:spPr>
             <a:xfrm>
-              <a:off x="692708" y="2900125"/>
+              <a:off x="692708" y="3028808"/>
               <a:ext cx="62179" cy="80101"/>
             </a:xfrm>
             <a:prstGeom prst="rect">
@@ -4842,7 +4842,7 @@
           </p:nvSpPr>
           <p:spPr>
             <a:xfrm>
-              <a:off x="692708" y="2030448"/>
+              <a:off x="692708" y="2199345"/>
               <a:ext cx="62179" cy="80101"/>
             </a:xfrm>
             <a:prstGeom prst="rect">
@@ -5118,7 +5118,7 @@
           </p:nvSpPr>
           <p:spPr>
             <a:xfrm rot="-5400000">
-              <a:off x="68446" y="3759743"/>
+              <a:off x="68446" y="3848213"/>
               <a:ext cx="1016904" cy="100218"/>
             </a:xfrm>
             <a:prstGeom prst="rect">
@@ -5159,6 +5159,52 @@
         <p:sp>
           <p:nvSpPr>
             <p:cNvPr id="38" name="tx38"/>
+            <p:cNvSpPr/>
+            <p:nvPr/>
+          </p:nvSpPr>
+          <p:spPr>
+            <a:xfrm>
+              <a:off x="817517" y="1896563"/>
+              <a:ext cx="5626211" cy="82021"/>
+            </a:xfrm>
+            <a:prstGeom prst="rect">
+              <a:avLst/>
+            </a:prstGeom>
+            <a:noFill/>
+          </p:spPr>
+          <p:txBody>
+            <a:bodyPr lIns="0" rIns="0" tIns="0" bIns="0" anchorCtr="1" anchor="ctr" wrap="none"/>
+            <a:lstStyle/>
+            <a:p>
+              <a:pPr algn="l" marL="0" marR="0" indent="0">
+                <a:lnSpc>
+                  <a:spcPts val="900"/>
+                </a:lnSpc>
+                <a:spcBef>
+                  <a:spcPts val="0"/>
+                </a:spcBef>
+                <a:spcAft>
+                  <a:spcPts val="0"/>
+                </a:spcAft>
+              </a:pPr>
+              <a:r>
+                <a:rPr sz="900">
+                  <a:solidFill>
+                    <a:srgbClr val="404040">
+                      <a:alpha val="100000"/>
+                    </a:srgbClr>
+                  </a:solidFill>
+                  <a:latin typeface="Helvetica"/>
+                  <a:cs typeface="Helvetica"/>
+                </a:rPr>
+                <a:t>subHR per 0.1 ratio decline: 1.01 (0.83-1.24)  |  per IQR decline (Δ = 0.30): 1.03 (0.57-1.88)  |  IQR: [0.84, 1.14]</a:t>
+              </a:r>
+            </a:p>
+          </p:txBody>
+        </p:sp>
+        <p:sp>
+          <p:nvSpPr>
+            <p:cNvPr id="39" name="tx39"/>
             <p:cNvSpPr/>
             <p:nvPr/>
           </p:nvSpPr>

--- a/docs/pptx/auc3/jx-auc3-linsubhr-ratio-hosp10.pptx
+++ b/docs/pptx/auc3/jx-auc3-linsubhr-ratio-hosp10.pptx
@@ -5165,7 +5165,7 @@
           <p:spPr>
             <a:xfrm>
               <a:off x="817517" y="1896563"/>
-              <a:ext cx="5626211" cy="82021"/>
+              <a:ext cx="6169365" cy="82021"/>
             </a:xfrm>
             <a:prstGeom prst="rect">
               <a:avLst/>
@@ -5197,7 +5197,7 @@
                   <a:latin typeface="Helvetica"/>
                   <a:cs typeface="Helvetica"/>
                 </a:rPr>
-                <a:t>subHR per 0.1 ratio decline: 1.01 (0.83-1.24)  |  per IQR decline (Δ = 0.30): 1.03 (0.57-1.88)  |  IQR: [0.84, 1.14]</a:t>
+                <a:t>subHR per 0.1 ratio decline: 1.01 (0.83-1.24), p = 0.918  |  per IQR decline (Δ = 0.30): 1.03 (0.57-1.88)  |  IQR: [0.84, 1.14]</a:t>
               </a:r>
             </a:p>
           </p:txBody>

--- a/docs/pptx/auc3/jx-auc3-linsubhr-ratio-hosp10.pptx
+++ b/docs/pptx/auc3/jx-auc3-linsubhr-ratio-hosp10.pptx
@@ -2443,7 +2443,7 @@
           </p:nvSpPr>
           <p:spPr>
             <a:xfrm>
-              <a:off x="1615213" y="2073503"/>
+              <a:off x="1531834" y="2073503"/>
               <a:ext cx="0" cy="3649639"/>
             </a:xfrm>
             <a:custGeom>
@@ -2486,7 +2486,7 @@
           </p:nvSpPr>
           <p:spPr>
             <a:xfrm>
-              <a:off x="3387871" y="2073503"/>
+              <a:off x="3586410" y="2073503"/>
               <a:ext cx="0" cy="3649639"/>
             </a:xfrm>
             <a:custGeom>
@@ -2529,7 +2529,7 @@
           </p:nvSpPr>
           <p:spPr>
             <a:xfrm>
-              <a:off x="5160528" y="2073503"/>
+              <a:off x="5640985" y="2073503"/>
               <a:ext cx="0" cy="3649639"/>
             </a:xfrm>
             <a:custGeom>
@@ -2572,7 +2572,7 @@
           </p:nvSpPr>
           <p:spPr>
             <a:xfrm>
-              <a:off x="6933186" y="2073503"/>
+              <a:off x="7695561" y="2073503"/>
               <a:ext cx="0" cy="3649639"/>
             </a:xfrm>
             <a:custGeom>
@@ -2830,7 +2830,7 @@
           </p:nvSpPr>
           <p:spPr>
             <a:xfrm>
-              <a:off x="2501542" y="2073503"/>
+              <a:off x="2559122" y="2073503"/>
               <a:ext cx="0" cy="3649639"/>
             </a:xfrm>
             <a:custGeom>
@@ -2873,7 +2873,7 @@
           </p:nvSpPr>
           <p:spPr>
             <a:xfrm>
-              <a:off x="4274200" y="2073503"/>
+              <a:off x="4613698" y="2073503"/>
               <a:ext cx="0" cy="3649639"/>
             </a:xfrm>
             <a:custGeom>
@@ -2916,7 +2916,7 @@
           </p:nvSpPr>
           <p:spPr>
             <a:xfrm>
-              <a:off x="6046857" y="2073503"/>
+              <a:off x="6668273" y="2073503"/>
               <a:ext cx="0" cy="3649639"/>
             </a:xfrm>
             <a:custGeom>
@@ -2953,643 +2953,618 @@
         </p:sp>
         <p:sp>
           <p:nvSpPr>
-            <p:cNvPr id="20" name="pl20"/>
+            <p:cNvPr id="20" name="pg20"/>
             <p:cNvSpPr/>
             <p:nvPr/>
           </p:nvSpPr>
           <p:spPr>
             <a:xfrm>
-              <a:off x="7819515" y="2073503"/>
-              <a:ext cx="0" cy="3649639"/>
+              <a:off x="1172049" y="3548938"/>
+              <a:ext cx="7090630" cy="1697849"/>
             </a:xfrm>
             <a:custGeom>
               <a:avLst/>
               <a:pathLst>
-                <a:path w="0" h="3649639">
+                <a:path w="7090630" h="1697849">
                   <a:moveTo>
-                    <a:pt x="0" y="3649639"/>
+                    <a:pt x="0" y="60372"/>
                   </a:moveTo>
                   <a:lnTo>
-                    <a:pt x="0" y="0"/>
-                  </a:lnTo>
-                  <a:lnTo>
-                    <a:pt x="0" y="0"/>
-                  </a:lnTo>
-                </a:path>
-              </a:pathLst>
-            </a:custGeom>
-            <a:ln w="13550" cap="flat">
-              <a:solidFill>
-                <a:srgbClr val="EBEBEB">
-                  <a:alpha val="100000"/>
-                </a:srgbClr>
-              </a:solidFill>
-              <a:prstDash val="solid"/>
-              <a:round/>
-            </a:ln>
-          </p:spPr>
-          <p:txBody>
-            <a:bodyPr/>
-            <a:lstStyle/>
-            <a:p/>
-          </p:txBody>
-        </p:sp>
-        <p:sp>
-          <p:nvSpPr>
-            <p:cNvPr id="21" name="pg21"/>
-            <p:cNvSpPr/>
-            <p:nvPr/>
-          </p:nvSpPr>
-          <p:spPr>
-            <a:xfrm>
-              <a:off x="817517" y="3548938"/>
-              <a:ext cx="7392041" cy="1697849"/>
-            </a:xfrm>
-            <a:custGeom>
-              <a:avLst/>
-              <a:pathLst>
-                <a:path w="7392041" h="1697849">
-                  <a:moveTo>
-                    <a:pt x="0" y="176047"/>
-                  </a:moveTo>
-                  <a:lnTo>
-                    <a:pt x="53901" y="199678"/>
-                  </a:lnTo>
-                  <a:lnTo>
-                    <a:pt x="131145" y="232919"/>
-                  </a:lnTo>
-                  <a:lnTo>
-                    <a:pt x="208389" y="265549"/>
-                  </a:lnTo>
-                  <a:lnTo>
-                    <a:pt x="285632" y="297580"/>
-                  </a:lnTo>
-                  <a:lnTo>
-                    <a:pt x="362876" y="329022"/>
-                  </a:lnTo>
-                  <a:lnTo>
-                    <a:pt x="440119" y="359885"/>
-                  </a:lnTo>
-                  <a:lnTo>
-                    <a:pt x="517363" y="390182"/>
-                  </a:lnTo>
-                  <a:lnTo>
-                    <a:pt x="594606" y="419922"/>
-                  </a:lnTo>
-                  <a:lnTo>
-                    <a:pt x="671850" y="449115"/>
-                  </a:lnTo>
-                  <a:lnTo>
-                    <a:pt x="749094" y="477772"/>
-                  </a:lnTo>
-                  <a:lnTo>
-                    <a:pt x="826337" y="505902"/>
-                  </a:lnTo>
-                  <a:lnTo>
-                    <a:pt x="903581" y="533515"/>
-                  </a:lnTo>
-                  <a:lnTo>
-                    <a:pt x="980824" y="560621"/>
-                  </a:lnTo>
-                  <a:lnTo>
-                    <a:pt x="1058068" y="587228"/>
-                  </a:lnTo>
-                  <a:lnTo>
-                    <a:pt x="1135311" y="613346"/>
-                  </a:lnTo>
-                  <a:lnTo>
-                    <a:pt x="1212555" y="638985"/>
-                  </a:lnTo>
-                  <a:lnTo>
-                    <a:pt x="1289799" y="664152"/>
-                  </a:lnTo>
-                  <a:lnTo>
-                    <a:pt x="1367042" y="688856"/>
-                  </a:lnTo>
-                  <a:lnTo>
-                    <a:pt x="1444286" y="713107"/>
-                  </a:lnTo>
-                  <a:lnTo>
-                    <a:pt x="1521529" y="736912"/>
-                  </a:lnTo>
-                  <a:lnTo>
-                    <a:pt x="1598773" y="760279"/>
-                  </a:lnTo>
-                  <a:lnTo>
-                    <a:pt x="1676016" y="783217"/>
-                  </a:lnTo>
-                  <a:lnTo>
-                    <a:pt x="1753260" y="805733"/>
-                  </a:lnTo>
-                  <a:lnTo>
-                    <a:pt x="1830504" y="827835"/>
-                  </a:lnTo>
-                  <a:lnTo>
-                    <a:pt x="1907747" y="849531"/>
-                  </a:lnTo>
-                  <a:lnTo>
-                    <a:pt x="1984991" y="870829"/>
-                  </a:lnTo>
-                  <a:lnTo>
-                    <a:pt x="2062234" y="891735"/>
-                  </a:lnTo>
-                  <a:lnTo>
-                    <a:pt x="2139478" y="912257"/>
-                  </a:lnTo>
-                  <a:lnTo>
-                    <a:pt x="2216721" y="932401"/>
-                  </a:lnTo>
-                  <a:lnTo>
-                    <a:pt x="2293965" y="952176"/>
-                  </a:lnTo>
-                  <a:lnTo>
-                    <a:pt x="2371209" y="971586"/>
-                  </a:lnTo>
-                  <a:lnTo>
-                    <a:pt x="2448452" y="990641"/>
-                  </a:lnTo>
-                  <a:lnTo>
-                    <a:pt x="2525696" y="1009345"/>
-                  </a:lnTo>
-                  <a:lnTo>
-                    <a:pt x="2602939" y="1027705"/>
-                  </a:lnTo>
-                  <a:lnTo>
-                    <a:pt x="2680183" y="1045727"/>
-                  </a:lnTo>
-                  <a:lnTo>
-                    <a:pt x="2757426" y="1063419"/>
-                  </a:lnTo>
-                  <a:lnTo>
-                    <a:pt x="2834670" y="1080785"/>
-                  </a:lnTo>
-                  <a:lnTo>
-                    <a:pt x="2911914" y="1097832"/>
-                  </a:lnTo>
-                  <a:lnTo>
-                    <a:pt x="2989157" y="1114566"/>
-                  </a:lnTo>
-                  <a:lnTo>
-                    <a:pt x="3066401" y="1130993"/>
-                  </a:lnTo>
-                  <a:lnTo>
-                    <a:pt x="3143644" y="1147117"/>
-                  </a:lnTo>
-                  <a:lnTo>
-                    <a:pt x="3220888" y="1162945"/>
-                  </a:lnTo>
-                  <a:lnTo>
-                    <a:pt x="3298131" y="1178482"/>
-                  </a:lnTo>
-                  <a:lnTo>
-                    <a:pt x="3375375" y="1165221"/>
-                  </a:lnTo>
-                  <a:lnTo>
-                    <a:pt x="3452619" y="1151030"/>
-                  </a:lnTo>
-                  <a:lnTo>
-                    <a:pt x="3529862" y="1136600"/>
-                  </a:lnTo>
-                  <a:lnTo>
-                    <a:pt x="3607106" y="1121927"/>
-                  </a:lnTo>
-                  <a:lnTo>
-                    <a:pt x="3684349" y="1107008"/>
-                  </a:lnTo>
-                  <a:lnTo>
-                    <a:pt x="3761593" y="1091837"/>
-                  </a:lnTo>
-                  <a:lnTo>
-                    <a:pt x="3838836" y="1076411"/>
-                  </a:lnTo>
-                  <a:lnTo>
-                    <a:pt x="3916080" y="1060726"/>
-                  </a:lnTo>
-                  <a:lnTo>
-                    <a:pt x="3993324" y="1044776"/>
-                  </a:lnTo>
-                  <a:lnTo>
-                    <a:pt x="4070567" y="1028558"/>
-                  </a:lnTo>
-                  <a:lnTo>
-                    <a:pt x="4147811" y="1012067"/>
-                  </a:lnTo>
-                  <a:lnTo>
-                    <a:pt x="4225054" y="995298"/>
-                  </a:lnTo>
-                  <a:lnTo>
-                    <a:pt x="4302298" y="978247"/>
-                  </a:lnTo>
-                  <a:lnTo>
-                    <a:pt x="4379541" y="960909"/>
-                  </a:lnTo>
-                  <a:lnTo>
-                    <a:pt x="4456785" y="943279"/>
-                  </a:lnTo>
-                  <a:lnTo>
-                    <a:pt x="4534029" y="925353"/>
-                  </a:lnTo>
-                  <a:lnTo>
-                    <a:pt x="4611272" y="907124"/>
-                  </a:lnTo>
-                  <a:lnTo>
-                    <a:pt x="4688516" y="888589"/>
-                  </a:lnTo>
-                  <a:lnTo>
-                    <a:pt x="4765759" y="869742"/>
-                  </a:lnTo>
-                  <a:lnTo>
-                    <a:pt x="4843003" y="850578"/>
-                  </a:lnTo>
-                  <a:lnTo>
-                    <a:pt x="4920246" y="831091"/>
-                  </a:lnTo>
-                  <a:lnTo>
-                    <a:pt x="4997490" y="811276"/>
-                  </a:lnTo>
-                  <a:lnTo>
-                    <a:pt x="5074734" y="791128"/>
-                  </a:lnTo>
-                  <a:lnTo>
-                    <a:pt x="5151977" y="770640"/>
-                  </a:lnTo>
-                  <a:lnTo>
-                    <a:pt x="5229221" y="749808"/>
-                  </a:lnTo>
-                  <a:lnTo>
-                    <a:pt x="5306464" y="728625"/>
-                  </a:lnTo>
-                  <a:lnTo>
-                    <a:pt x="5383708" y="707085"/>
-                  </a:lnTo>
-                  <a:lnTo>
-                    <a:pt x="5460951" y="685183"/>
-                  </a:lnTo>
-                  <a:lnTo>
-                    <a:pt x="5538195" y="662912"/>
-                  </a:lnTo>
-                  <a:lnTo>
-                    <a:pt x="5615439" y="640267"/>
-                  </a:lnTo>
-                  <a:lnTo>
-                    <a:pt x="5692682" y="617240"/>
-                  </a:lnTo>
-                  <a:lnTo>
-                    <a:pt x="5769926" y="593826"/>
-                  </a:lnTo>
-                  <a:lnTo>
-                    <a:pt x="5847169" y="570017"/>
-                  </a:lnTo>
-                  <a:lnTo>
-                    <a:pt x="5924413" y="545808"/>
-                  </a:lnTo>
-                  <a:lnTo>
-                    <a:pt x="6001656" y="521191"/>
-                  </a:lnTo>
-                  <a:lnTo>
-                    <a:pt x="6078900" y="496160"/>
-                  </a:lnTo>
-                  <a:lnTo>
-                    <a:pt x="6156144" y="470708"/>
-                  </a:lnTo>
-                  <a:lnTo>
-                    <a:pt x="6233387" y="444827"/>
-                  </a:lnTo>
-                  <a:lnTo>
-                    <a:pt x="6310631" y="418510"/>
-                  </a:lnTo>
-                  <a:lnTo>
-                    <a:pt x="6387874" y="391751"/>
-                  </a:lnTo>
-                  <a:lnTo>
-                    <a:pt x="6465118" y="364541"/>
-                  </a:lnTo>
-                  <a:lnTo>
-                    <a:pt x="6542361" y="336873"/>
-                  </a:lnTo>
-                  <a:lnTo>
-                    <a:pt x="6619605" y="308740"/>
-                  </a:lnTo>
-                  <a:lnTo>
-                    <a:pt x="6696849" y="280133"/>
-                  </a:lnTo>
-                  <a:lnTo>
-                    <a:pt x="6774092" y="251044"/>
-                  </a:lnTo>
-                  <a:lnTo>
-                    <a:pt x="6851336" y="221466"/>
-                  </a:lnTo>
-                  <a:lnTo>
-                    <a:pt x="6928579" y="191390"/>
-                  </a:lnTo>
-                  <a:lnTo>
-                    <a:pt x="7005823" y="160808"/>
-                  </a:lnTo>
-                  <a:lnTo>
-                    <a:pt x="7083066" y="129711"/>
-                  </a:lnTo>
-                  <a:lnTo>
-                    <a:pt x="7160310" y="98090"/>
-                  </a:lnTo>
-                  <a:lnTo>
-                    <a:pt x="7237554" y="65938"/>
-                  </a:lnTo>
-                  <a:lnTo>
-                    <a:pt x="7314797" y="33244"/>
-                  </a:lnTo>
-                  <a:lnTo>
-                    <a:pt x="7392041" y="0"/>
-                  </a:lnTo>
-                  <a:lnTo>
-                    <a:pt x="7392041" y="1697849"/>
-                  </a:lnTo>
-                  <a:lnTo>
-                    <a:pt x="7314797" y="1692037"/>
-                  </a:lnTo>
-                  <a:lnTo>
-                    <a:pt x="7237554" y="1686115"/>
-                  </a:lnTo>
-                  <a:lnTo>
-                    <a:pt x="7160310" y="1680082"/>
-                  </a:lnTo>
-                  <a:lnTo>
-                    <a:pt x="7083066" y="1673937"/>
-                  </a:lnTo>
-                  <a:lnTo>
-                    <a:pt x="7005823" y="1667676"/>
-                  </a:lnTo>
-                  <a:lnTo>
-                    <a:pt x="6928579" y="1661298"/>
-                  </a:lnTo>
-                  <a:lnTo>
-                    <a:pt x="6851336" y="1654801"/>
-                  </a:lnTo>
-                  <a:lnTo>
-                    <a:pt x="6774092" y="1648182"/>
-                  </a:lnTo>
-                  <a:lnTo>
-                    <a:pt x="6696849" y="1641439"/>
-                  </a:lnTo>
-                  <a:lnTo>
-                    <a:pt x="6619605" y="1634570"/>
-                  </a:lnTo>
-                  <a:lnTo>
-                    <a:pt x="6542361" y="1627573"/>
-                  </a:lnTo>
-                  <a:lnTo>
-                    <a:pt x="6465118" y="1620444"/>
-                  </a:lnTo>
-                  <a:lnTo>
-                    <a:pt x="6387874" y="1613182"/>
-                  </a:lnTo>
-                  <a:lnTo>
-                    <a:pt x="6310631" y="1605784"/>
-                  </a:lnTo>
-                  <a:lnTo>
-                    <a:pt x="6233387" y="1598247"/>
-                  </a:lnTo>
-                  <a:lnTo>
-                    <a:pt x="6156144" y="1590569"/>
-                  </a:lnTo>
-                  <a:lnTo>
-                    <a:pt x="6078900" y="1582748"/>
-                  </a:lnTo>
-                  <a:lnTo>
-                    <a:pt x="6001656" y="1574780"/>
-                  </a:lnTo>
-                  <a:lnTo>
-                    <a:pt x="5924413" y="1566663"/>
-                  </a:lnTo>
-                  <a:lnTo>
-                    <a:pt x="5847169" y="1558394"/>
-                  </a:lnTo>
-                  <a:lnTo>
-                    <a:pt x="5769926" y="1549970"/>
-                  </a:lnTo>
-                  <a:lnTo>
-                    <a:pt x="5692682" y="1541388"/>
-                  </a:lnTo>
-                  <a:lnTo>
-                    <a:pt x="5615439" y="1532646"/>
-                  </a:lnTo>
-                  <a:lnTo>
-                    <a:pt x="5538195" y="1523740"/>
-                  </a:lnTo>
-                  <a:lnTo>
-                    <a:pt x="5460951" y="1514667"/>
-                  </a:lnTo>
-                  <a:lnTo>
-                    <a:pt x="5383708" y="1505424"/>
-                  </a:lnTo>
-                  <a:lnTo>
-                    <a:pt x="5306464" y="1496009"/>
-                  </a:lnTo>
-                  <a:lnTo>
-                    <a:pt x="5229221" y="1486417"/>
-                  </a:lnTo>
-                  <a:lnTo>
-                    <a:pt x="5151977" y="1476645"/>
-                  </a:lnTo>
-                  <a:lnTo>
-                    <a:pt x="5074734" y="1466691"/>
-                  </a:lnTo>
-                  <a:lnTo>
-                    <a:pt x="4997490" y="1456550"/>
-                  </a:lnTo>
-                  <a:lnTo>
-                    <a:pt x="4920246" y="1446219"/>
-                  </a:lnTo>
-                  <a:lnTo>
-                    <a:pt x="4843003" y="1435695"/>
-                  </a:lnTo>
-                  <a:lnTo>
-                    <a:pt x="4765759" y="1424973"/>
-                  </a:lnTo>
-                  <a:lnTo>
-                    <a:pt x="4688516" y="1414051"/>
-                  </a:lnTo>
-                  <a:lnTo>
-                    <a:pt x="4611272" y="1402925"/>
-                  </a:lnTo>
-                  <a:lnTo>
-                    <a:pt x="4534029" y="1391590"/>
-                  </a:lnTo>
-                  <a:lnTo>
-                    <a:pt x="4456785" y="1380043"/>
-                  </a:lnTo>
-                  <a:lnTo>
-                    <a:pt x="4379541" y="1368280"/>
-                  </a:lnTo>
-                  <a:lnTo>
-                    <a:pt x="4302298" y="1356296"/>
-                  </a:lnTo>
-                  <a:lnTo>
-                    <a:pt x="4225054" y="1344088"/>
-                  </a:lnTo>
-                  <a:lnTo>
-                    <a:pt x="4147811" y="1331652"/>
-                  </a:lnTo>
-                  <a:lnTo>
-                    <a:pt x="4070567" y="1318983"/>
-                  </a:lnTo>
-                  <a:lnTo>
-                    <a:pt x="3993324" y="1306076"/>
-                  </a:lnTo>
-                  <a:lnTo>
-                    <a:pt x="3916080" y="1292928"/>
-                  </a:lnTo>
-                  <a:lnTo>
-                    <a:pt x="3838836" y="1279534"/>
-                  </a:lnTo>
-                  <a:lnTo>
-                    <a:pt x="3761593" y="1265889"/>
-                  </a:lnTo>
-                  <a:lnTo>
-                    <a:pt x="3684349" y="1251988"/>
-                  </a:lnTo>
-                  <a:lnTo>
-                    <a:pt x="3607106" y="1237827"/>
-                  </a:lnTo>
-                  <a:lnTo>
-                    <a:pt x="3529862" y="1223401"/>
-                  </a:lnTo>
-                  <a:lnTo>
-                    <a:pt x="3452619" y="1208705"/>
-                  </a:lnTo>
-                  <a:lnTo>
-                    <a:pt x="3375375" y="1193734"/>
-                  </a:lnTo>
-                  <a:lnTo>
-                    <a:pt x="3298131" y="1179176"/>
-                  </a:lnTo>
-                  <a:lnTo>
-                    <a:pt x="3220888" y="1192901"/>
-                  </a:lnTo>
-                  <a:lnTo>
-                    <a:pt x="3143644" y="1206399"/>
-                  </a:lnTo>
-                  <a:lnTo>
-                    <a:pt x="3066401" y="1219673"/>
-                  </a:lnTo>
-                  <a:lnTo>
-                    <a:pt x="2989157" y="1232728"/>
-                  </a:lnTo>
-                  <a:lnTo>
-                    <a:pt x="2911914" y="1245566"/>
-                  </a:lnTo>
-                  <a:lnTo>
-                    <a:pt x="2834670" y="1258192"/>
-                  </a:lnTo>
-                  <a:lnTo>
-                    <a:pt x="2757426" y="1270609"/>
-                  </a:lnTo>
-                  <a:lnTo>
-                    <a:pt x="2680183" y="1282821"/>
-                  </a:lnTo>
-                  <a:lnTo>
-                    <a:pt x="2602939" y="1294830"/>
-                  </a:lnTo>
-                  <a:lnTo>
-                    <a:pt x="2525696" y="1306640"/>
-                  </a:lnTo>
-                  <a:lnTo>
-                    <a:pt x="2448452" y="1318255"/>
-                  </a:lnTo>
-                  <a:lnTo>
-                    <a:pt x="2371209" y="1329678"/>
-                  </a:lnTo>
-                  <a:lnTo>
-                    <a:pt x="2293965" y="1340912"/>
-                  </a:lnTo>
-                  <a:lnTo>
-                    <a:pt x="2216721" y="1351959"/>
-                  </a:lnTo>
-                  <a:lnTo>
-                    <a:pt x="2139478" y="1362824"/>
-                  </a:lnTo>
-                  <a:lnTo>
-                    <a:pt x="2062234" y="1373509"/>
-                  </a:lnTo>
-                  <a:lnTo>
-                    <a:pt x="1984991" y="1384017"/>
-                  </a:lnTo>
-                  <a:lnTo>
-                    <a:pt x="1907747" y="1394351"/>
-                  </a:lnTo>
-                  <a:lnTo>
-                    <a:pt x="1830504" y="1404514"/>
-                  </a:lnTo>
-                  <a:lnTo>
-                    <a:pt x="1753260" y="1414509"/>
-                  </a:lnTo>
-                  <a:lnTo>
-                    <a:pt x="1676016" y="1424339"/>
-                  </a:lnTo>
-                  <a:lnTo>
-                    <a:pt x="1598773" y="1434005"/>
-                  </a:lnTo>
-                  <a:lnTo>
-                    <a:pt x="1521529" y="1443512"/>
-                  </a:lnTo>
-                  <a:lnTo>
-                    <a:pt x="1444286" y="1452861"/>
-                  </a:lnTo>
-                  <a:lnTo>
-                    <a:pt x="1367042" y="1462056"/>
-                  </a:lnTo>
-                  <a:lnTo>
-                    <a:pt x="1289799" y="1471098"/>
-                  </a:lnTo>
-                  <a:lnTo>
-                    <a:pt x="1212555" y="1479991"/>
-                  </a:lnTo>
-                  <a:lnTo>
-                    <a:pt x="1135311" y="1488736"/>
-                  </a:lnTo>
-                  <a:lnTo>
-                    <a:pt x="1058068" y="1497337"/>
-                  </a:lnTo>
-                  <a:lnTo>
-                    <a:pt x="980824" y="1505795"/>
-                  </a:lnTo>
-                  <a:lnTo>
-                    <a:pt x="903581" y="1514113"/>
-                  </a:lnTo>
-                  <a:lnTo>
-                    <a:pt x="826337" y="1522294"/>
-                  </a:lnTo>
-                  <a:lnTo>
-                    <a:pt x="749094" y="1530339"/>
-                  </a:lnTo>
-                  <a:lnTo>
-                    <a:pt x="671850" y="1538251"/>
-                  </a:lnTo>
-                  <a:lnTo>
-                    <a:pt x="594606" y="1546032"/>
-                  </a:lnTo>
-                  <a:lnTo>
-                    <a:pt x="517363" y="1553684"/>
-                  </a:lnTo>
-                  <a:lnTo>
-                    <a:pt x="440119" y="1561210"/>
-                  </a:lnTo>
-                  <a:lnTo>
-                    <a:pt x="362876" y="1568611"/>
-                  </a:lnTo>
-                  <a:lnTo>
-                    <a:pt x="285632" y="1575890"/>
-                  </a:lnTo>
-                  <a:lnTo>
-                    <a:pt x="208389" y="1583048"/>
-                  </a:lnTo>
-                  <a:lnTo>
-                    <a:pt x="131145" y="1590087"/>
-                  </a:lnTo>
-                  <a:lnTo>
-                    <a:pt x="53901" y="1597010"/>
-                  </a:lnTo>
-                  <a:lnTo>
-                    <a:pt x="0" y="1601761"/>
+                    <a:pt x="71622" y="96173"/>
+                  </a:lnTo>
+                  <a:lnTo>
+                    <a:pt x="143245" y="131317"/>
+                  </a:lnTo>
+                  <a:lnTo>
+                    <a:pt x="214867" y="165814"/>
+                  </a:lnTo>
+                  <a:lnTo>
+                    <a:pt x="286490" y="199678"/>
+                  </a:lnTo>
+                  <a:lnTo>
+                    <a:pt x="358112" y="232919"/>
+                  </a:lnTo>
+                  <a:lnTo>
+                    <a:pt x="429735" y="265549"/>
+                  </a:lnTo>
+                  <a:lnTo>
+                    <a:pt x="501357" y="297580"/>
+                  </a:lnTo>
+                  <a:lnTo>
+                    <a:pt x="572980" y="329022"/>
+                  </a:lnTo>
+                  <a:lnTo>
+                    <a:pt x="644602" y="359885"/>
+                  </a:lnTo>
+                  <a:lnTo>
+                    <a:pt x="716225" y="390182"/>
+                  </a:lnTo>
+                  <a:lnTo>
+                    <a:pt x="787847" y="419922"/>
+                  </a:lnTo>
+                  <a:lnTo>
+                    <a:pt x="859470" y="449115"/>
+                  </a:lnTo>
+                  <a:lnTo>
+                    <a:pt x="931092" y="477772"/>
+                  </a:lnTo>
+                  <a:lnTo>
+                    <a:pt x="1002715" y="505902"/>
+                  </a:lnTo>
+                  <a:lnTo>
+                    <a:pt x="1074337" y="533515"/>
+                  </a:lnTo>
+                  <a:lnTo>
+                    <a:pt x="1145960" y="560621"/>
+                  </a:lnTo>
+                  <a:lnTo>
+                    <a:pt x="1217582" y="587228"/>
+                  </a:lnTo>
+                  <a:lnTo>
+                    <a:pt x="1289205" y="613346"/>
+                  </a:lnTo>
+                  <a:lnTo>
+                    <a:pt x="1360827" y="638985"/>
+                  </a:lnTo>
+                  <a:lnTo>
+                    <a:pt x="1432450" y="664152"/>
+                  </a:lnTo>
+                  <a:lnTo>
+                    <a:pt x="1504073" y="688856"/>
+                  </a:lnTo>
+                  <a:lnTo>
+                    <a:pt x="1575695" y="713107"/>
+                  </a:lnTo>
+                  <a:lnTo>
+                    <a:pt x="1647318" y="736912"/>
+                  </a:lnTo>
+                  <a:lnTo>
+                    <a:pt x="1718940" y="760279"/>
+                  </a:lnTo>
+                  <a:lnTo>
+                    <a:pt x="1790563" y="783217"/>
+                  </a:lnTo>
+                  <a:lnTo>
+                    <a:pt x="1862185" y="805733"/>
+                  </a:lnTo>
+                  <a:lnTo>
+                    <a:pt x="1933808" y="827835"/>
+                  </a:lnTo>
+                  <a:lnTo>
+                    <a:pt x="2005430" y="849531"/>
+                  </a:lnTo>
+                  <a:lnTo>
+                    <a:pt x="2077053" y="870829"/>
+                  </a:lnTo>
+                  <a:lnTo>
+                    <a:pt x="2148675" y="891735"/>
+                  </a:lnTo>
+                  <a:lnTo>
+                    <a:pt x="2220298" y="912257"/>
+                  </a:lnTo>
+                  <a:lnTo>
+                    <a:pt x="2291920" y="932401"/>
+                  </a:lnTo>
+                  <a:lnTo>
+                    <a:pt x="2363543" y="952176"/>
+                  </a:lnTo>
+                  <a:lnTo>
+                    <a:pt x="2435165" y="971586"/>
+                  </a:lnTo>
+                  <a:lnTo>
+                    <a:pt x="2506788" y="990641"/>
+                  </a:lnTo>
+                  <a:lnTo>
+                    <a:pt x="2578410" y="1009345"/>
+                  </a:lnTo>
+                  <a:lnTo>
+                    <a:pt x="2650033" y="1027705"/>
+                  </a:lnTo>
+                  <a:lnTo>
+                    <a:pt x="2721655" y="1045727"/>
+                  </a:lnTo>
+                  <a:lnTo>
+                    <a:pt x="2793278" y="1063419"/>
+                  </a:lnTo>
+                  <a:lnTo>
+                    <a:pt x="2864901" y="1080785"/>
+                  </a:lnTo>
+                  <a:lnTo>
+                    <a:pt x="2936523" y="1097832"/>
+                  </a:lnTo>
+                  <a:lnTo>
+                    <a:pt x="3008146" y="1114566"/>
+                  </a:lnTo>
+                  <a:lnTo>
+                    <a:pt x="3079768" y="1130993"/>
+                  </a:lnTo>
+                  <a:lnTo>
+                    <a:pt x="3151391" y="1147117"/>
+                  </a:lnTo>
+                  <a:lnTo>
+                    <a:pt x="3223013" y="1162945"/>
+                  </a:lnTo>
+                  <a:lnTo>
+                    <a:pt x="3294636" y="1178482"/>
+                  </a:lnTo>
+                  <a:lnTo>
+                    <a:pt x="3366258" y="1165221"/>
+                  </a:lnTo>
+                  <a:lnTo>
+                    <a:pt x="3437881" y="1151030"/>
+                  </a:lnTo>
+                  <a:lnTo>
+                    <a:pt x="3509503" y="1136600"/>
+                  </a:lnTo>
+                  <a:lnTo>
+                    <a:pt x="3581126" y="1121927"/>
+                  </a:lnTo>
+                  <a:lnTo>
+                    <a:pt x="3652748" y="1107008"/>
+                  </a:lnTo>
+                  <a:lnTo>
+                    <a:pt x="3724371" y="1091837"/>
+                  </a:lnTo>
+                  <a:lnTo>
+                    <a:pt x="3795993" y="1076411"/>
+                  </a:lnTo>
+                  <a:lnTo>
+                    <a:pt x="3867616" y="1060726"/>
+                  </a:lnTo>
+                  <a:lnTo>
+                    <a:pt x="3939238" y="1044776"/>
+                  </a:lnTo>
+                  <a:lnTo>
+                    <a:pt x="4010861" y="1028558"/>
+                  </a:lnTo>
+                  <a:lnTo>
+                    <a:pt x="4082483" y="1012067"/>
+                  </a:lnTo>
+                  <a:lnTo>
+                    <a:pt x="4154106" y="995298"/>
+                  </a:lnTo>
+                  <a:lnTo>
+                    <a:pt x="4225729" y="978247"/>
+                  </a:lnTo>
+                  <a:lnTo>
+                    <a:pt x="4297351" y="960909"/>
+                  </a:lnTo>
+                  <a:lnTo>
+                    <a:pt x="4368974" y="943279"/>
+                  </a:lnTo>
+                  <a:lnTo>
+                    <a:pt x="4440596" y="925353"/>
+                  </a:lnTo>
+                  <a:lnTo>
+                    <a:pt x="4512219" y="907124"/>
+                  </a:lnTo>
+                  <a:lnTo>
+                    <a:pt x="4583841" y="888589"/>
+                  </a:lnTo>
+                  <a:lnTo>
+                    <a:pt x="4655464" y="869742"/>
+                  </a:lnTo>
+                  <a:lnTo>
+                    <a:pt x="4727086" y="850578"/>
+                  </a:lnTo>
+                  <a:lnTo>
+                    <a:pt x="4798709" y="831091"/>
+                  </a:lnTo>
+                  <a:lnTo>
+                    <a:pt x="4870331" y="811276"/>
+                  </a:lnTo>
+                  <a:lnTo>
+                    <a:pt x="4941954" y="791128"/>
+                  </a:lnTo>
+                  <a:lnTo>
+                    <a:pt x="5013576" y="770640"/>
+                  </a:lnTo>
+                  <a:lnTo>
+                    <a:pt x="5085199" y="749808"/>
+                  </a:lnTo>
+                  <a:lnTo>
+                    <a:pt x="5156821" y="728625"/>
+                  </a:lnTo>
+                  <a:lnTo>
+                    <a:pt x="5228444" y="707085"/>
+                  </a:lnTo>
+                  <a:lnTo>
+                    <a:pt x="5300066" y="685183"/>
+                  </a:lnTo>
+                  <a:lnTo>
+                    <a:pt x="5371689" y="662912"/>
+                  </a:lnTo>
+                  <a:lnTo>
+                    <a:pt x="5443311" y="640267"/>
+                  </a:lnTo>
+                  <a:lnTo>
+                    <a:pt x="5514934" y="617240"/>
+                  </a:lnTo>
+                  <a:lnTo>
+                    <a:pt x="5586557" y="593826"/>
+                  </a:lnTo>
+                  <a:lnTo>
+                    <a:pt x="5658179" y="570017"/>
+                  </a:lnTo>
+                  <a:lnTo>
+                    <a:pt x="5729802" y="545808"/>
+                  </a:lnTo>
+                  <a:lnTo>
+                    <a:pt x="5801424" y="521191"/>
+                  </a:lnTo>
+                  <a:lnTo>
+                    <a:pt x="5873047" y="496160"/>
+                  </a:lnTo>
+                  <a:lnTo>
+                    <a:pt x="5944669" y="470708"/>
+                  </a:lnTo>
+                  <a:lnTo>
+                    <a:pt x="6016292" y="444827"/>
+                  </a:lnTo>
+                  <a:lnTo>
+                    <a:pt x="6087914" y="418510"/>
+                  </a:lnTo>
+                  <a:lnTo>
+                    <a:pt x="6159537" y="391751"/>
+                  </a:lnTo>
+                  <a:lnTo>
+                    <a:pt x="6231159" y="364541"/>
+                  </a:lnTo>
+                  <a:lnTo>
+                    <a:pt x="6302782" y="336873"/>
+                  </a:lnTo>
+                  <a:lnTo>
+                    <a:pt x="6374404" y="308740"/>
+                  </a:lnTo>
+                  <a:lnTo>
+                    <a:pt x="6446027" y="280133"/>
+                  </a:lnTo>
+                  <a:lnTo>
+                    <a:pt x="6517649" y="251044"/>
+                  </a:lnTo>
+                  <a:lnTo>
+                    <a:pt x="6589272" y="221466"/>
+                  </a:lnTo>
+                  <a:lnTo>
+                    <a:pt x="6660894" y="191390"/>
+                  </a:lnTo>
+                  <a:lnTo>
+                    <a:pt x="6732517" y="160808"/>
+                  </a:lnTo>
+                  <a:lnTo>
+                    <a:pt x="6804139" y="129711"/>
+                  </a:lnTo>
+                  <a:lnTo>
+                    <a:pt x="6875762" y="98090"/>
+                  </a:lnTo>
+                  <a:lnTo>
+                    <a:pt x="6947385" y="65938"/>
+                  </a:lnTo>
+                  <a:lnTo>
+                    <a:pt x="7019007" y="33244"/>
+                  </a:lnTo>
+                  <a:lnTo>
+                    <a:pt x="7090630" y="0"/>
+                  </a:lnTo>
+                  <a:lnTo>
+                    <a:pt x="7090630" y="1697849"/>
+                  </a:lnTo>
+                  <a:lnTo>
+                    <a:pt x="7019007" y="1692037"/>
+                  </a:lnTo>
+                  <a:lnTo>
+                    <a:pt x="6947385" y="1686115"/>
+                  </a:lnTo>
+                  <a:lnTo>
+                    <a:pt x="6875762" y="1680082"/>
+                  </a:lnTo>
+                  <a:lnTo>
+                    <a:pt x="6804139" y="1673937"/>
+                  </a:lnTo>
+                  <a:lnTo>
+                    <a:pt x="6732517" y="1667676"/>
+                  </a:lnTo>
+                  <a:lnTo>
+                    <a:pt x="6660894" y="1661298"/>
+                  </a:lnTo>
+                  <a:lnTo>
+                    <a:pt x="6589272" y="1654801"/>
+                  </a:lnTo>
+                  <a:lnTo>
+                    <a:pt x="6517649" y="1648182"/>
+                  </a:lnTo>
+                  <a:lnTo>
+                    <a:pt x="6446027" y="1641439"/>
+                  </a:lnTo>
+                  <a:lnTo>
+                    <a:pt x="6374404" y="1634570"/>
+                  </a:lnTo>
+                  <a:lnTo>
+                    <a:pt x="6302782" y="1627573"/>
+                  </a:lnTo>
+                  <a:lnTo>
+                    <a:pt x="6231159" y="1620444"/>
+                  </a:lnTo>
+                  <a:lnTo>
+                    <a:pt x="6159537" y="1613182"/>
+                  </a:lnTo>
+                  <a:lnTo>
+                    <a:pt x="6087914" y="1605784"/>
+                  </a:lnTo>
+                  <a:lnTo>
+                    <a:pt x="6016292" y="1598247"/>
+                  </a:lnTo>
+                  <a:lnTo>
+                    <a:pt x="5944669" y="1590569"/>
+                  </a:lnTo>
+                  <a:lnTo>
+                    <a:pt x="5873047" y="1582748"/>
+                  </a:lnTo>
+                  <a:lnTo>
+                    <a:pt x="5801424" y="1574780"/>
+                  </a:lnTo>
+                  <a:lnTo>
+                    <a:pt x="5729802" y="1566663"/>
+                  </a:lnTo>
+                  <a:lnTo>
+                    <a:pt x="5658179" y="1558394"/>
+                  </a:lnTo>
+                  <a:lnTo>
+                    <a:pt x="5586557" y="1549970"/>
+                  </a:lnTo>
+                  <a:lnTo>
+                    <a:pt x="5514934" y="1541388"/>
+                  </a:lnTo>
+                  <a:lnTo>
+                    <a:pt x="5443311" y="1532646"/>
+                  </a:lnTo>
+                  <a:lnTo>
+                    <a:pt x="5371689" y="1523740"/>
+                  </a:lnTo>
+                  <a:lnTo>
+                    <a:pt x="5300066" y="1514667"/>
+                  </a:lnTo>
+                  <a:lnTo>
+                    <a:pt x="5228444" y="1505424"/>
+                  </a:lnTo>
+                  <a:lnTo>
+                    <a:pt x="5156821" y="1496009"/>
+                  </a:lnTo>
+                  <a:lnTo>
+                    <a:pt x="5085199" y="1486417"/>
+                  </a:lnTo>
+                  <a:lnTo>
+                    <a:pt x="5013576" y="1476645"/>
+                  </a:lnTo>
+                  <a:lnTo>
+                    <a:pt x="4941954" y="1466691"/>
+                  </a:lnTo>
+                  <a:lnTo>
+                    <a:pt x="4870331" y="1456550"/>
+                  </a:lnTo>
+                  <a:lnTo>
+                    <a:pt x="4798709" y="1446219"/>
+                  </a:lnTo>
+                  <a:lnTo>
+                    <a:pt x="4727086" y="1435695"/>
+                  </a:lnTo>
+                  <a:lnTo>
+                    <a:pt x="4655464" y="1424973"/>
+                  </a:lnTo>
+                  <a:lnTo>
+                    <a:pt x="4583841" y="1414051"/>
+                  </a:lnTo>
+                  <a:lnTo>
+                    <a:pt x="4512219" y="1402925"/>
+                  </a:lnTo>
+                  <a:lnTo>
+                    <a:pt x="4440596" y="1391590"/>
+                  </a:lnTo>
+                  <a:lnTo>
+                    <a:pt x="4368974" y="1380043"/>
+                  </a:lnTo>
+                  <a:lnTo>
+                    <a:pt x="4297351" y="1368280"/>
+                  </a:lnTo>
+                  <a:lnTo>
+                    <a:pt x="4225729" y="1356296"/>
+                  </a:lnTo>
+                  <a:lnTo>
+                    <a:pt x="4154106" y="1344088"/>
+                  </a:lnTo>
+                  <a:lnTo>
+                    <a:pt x="4082483" y="1331652"/>
+                  </a:lnTo>
+                  <a:lnTo>
+                    <a:pt x="4010861" y="1318983"/>
+                  </a:lnTo>
+                  <a:lnTo>
+                    <a:pt x="3939238" y="1306076"/>
+                  </a:lnTo>
+                  <a:lnTo>
+                    <a:pt x="3867616" y="1292928"/>
+                  </a:lnTo>
+                  <a:lnTo>
+                    <a:pt x="3795993" y="1279534"/>
+                  </a:lnTo>
+                  <a:lnTo>
+                    <a:pt x="3724371" y="1265889"/>
+                  </a:lnTo>
+                  <a:lnTo>
+                    <a:pt x="3652748" y="1251988"/>
+                  </a:lnTo>
+                  <a:lnTo>
+                    <a:pt x="3581126" y="1237827"/>
+                  </a:lnTo>
+                  <a:lnTo>
+                    <a:pt x="3509503" y="1223401"/>
+                  </a:lnTo>
+                  <a:lnTo>
+                    <a:pt x="3437881" y="1208705"/>
+                  </a:lnTo>
+                  <a:lnTo>
+                    <a:pt x="3366258" y="1193734"/>
+                  </a:lnTo>
+                  <a:lnTo>
+                    <a:pt x="3294636" y="1179176"/>
+                  </a:lnTo>
+                  <a:lnTo>
+                    <a:pt x="3223013" y="1192901"/>
+                  </a:lnTo>
+                  <a:lnTo>
+                    <a:pt x="3151391" y="1206399"/>
+                  </a:lnTo>
+                  <a:lnTo>
+                    <a:pt x="3079768" y="1219673"/>
+                  </a:lnTo>
+                  <a:lnTo>
+                    <a:pt x="3008146" y="1232728"/>
+                  </a:lnTo>
+                  <a:lnTo>
+                    <a:pt x="2936523" y="1245566"/>
+                  </a:lnTo>
+                  <a:lnTo>
+                    <a:pt x="2864901" y="1258192"/>
+                  </a:lnTo>
+                  <a:lnTo>
+                    <a:pt x="2793278" y="1270609"/>
+                  </a:lnTo>
+                  <a:lnTo>
+                    <a:pt x="2721655" y="1282821"/>
+                  </a:lnTo>
+                  <a:lnTo>
+                    <a:pt x="2650033" y="1294830"/>
+                  </a:lnTo>
+                  <a:lnTo>
+                    <a:pt x="2578410" y="1306640"/>
+                  </a:lnTo>
+                  <a:lnTo>
+                    <a:pt x="2506788" y="1318255"/>
+                  </a:lnTo>
+                  <a:lnTo>
+                    <a:pt x="2435165" y="1329678"/>
+                  </a:lnTo>
+                  <a:lnTo>
+                    <a:pt x="2363543" y="1340912"/>
+                  </a:lnTo>
+                  <a:lnTo>
+                    <a:pt x="2291920" y="1351959"/>
+                  </a:lnTo>
+                  <a:lnTo>
+                    <a:pt x="2220298" y="1362824"/>
+                  </a:lnTo>
+                  <a:lnTo>
+                    <a:pt x="2148675" y="1373509"/>
+                  </a:lnTo>
+                  <a:lnTo>
+                    <a:pt x="2077053" y="1384017"/>
+                  </a:lnTo>
+                  <a:lnTo>
+                    <a:pt x="2005430" y="1394351"/>
+                  </a:lnTo>
+                  <a:lnTo>
+                    <a:pt x="1933808" y="1404514"/>
+                  </a:lnTo>
+                  <a:lnTo>
+                    <a:pt x="1862185" y="1414509"/>
+                  </a:lnTo>
+                  <a:lnTo>
+                    <a:pt x="1790563" y="1424339"/>
+                  </a:lnTo>
+                  <a:lnTo>
+                    <a:pt x="1718940" y="1434005"/>
+                  </a:lnTo>
+                  <a:lnTo>
+                    <a:pt x="1647318" y="1443512"/>
+                  </a:lnTo>
+                  <a:lnTo>
+                    <a:pt x="1575695" y="1452861"/>
+                  </a:lnTo>
+                  <a:lnTo>
+                    <a:pt x="1504073" y="1462056"/>
+                  </a:lnTo>
+                  <a:lnTo>
+                    <a:pt x="1432450" y="1471098"/>
+                  </a:lnTo>
+                  <a:lnTo>
+                    <a:pt x="1360827" y="1479991"/>
+                  </a:lnTo>
+                  <a:lnTo>
+                    <a:pt x="1289205" y="1488736"/>
+                  </a:lnTo>
+                  <a:lnTo>
+                    <a:pt x="1217582" y="1497337"/>
+                  </a:lnTo>
+                  <a:lnTo>
+                    <a:pt x="1145960" y="1505795"/>
+                  </a:lnTo>
+                  <a:lnTo>
+                    <a:pt x="1074337" y="1514113"/>
+                  </a:lnTo>
+                  <a:lnTo>
+                    <a:pt x="1002715" y="1522294"/>
+                  </a:lnTo>
+                  <a:lnTo>
+                    <a:pt x="931092" y="1530339"/>
+                  </a:lnTo>
+                  <a:lnTo>
+                    <a:pt x="859470" y="1538251"/>
+                  </a:lnTo>
+                  <a:lnTo>
+                    <a:pt x="787847" y="1546032"/>
+                  </a:lnTo>
+                  <a:lnTo>
+                    <a:pt x="716225" y="1553684"/>
+                  </a:lnTo>
+                  <a:lnTo>
+                    <a:pt x="644602" y="1561210"/>
+                  </a:lnTo>
+                  <a:lnTo>
+                    <a:pt x="572980" y="1568611"/>
+                  </a:lnTo>
+                  <a:lnTo>
+                    <a:pt x="501357" y="1575890"/>
+                  </a:lnTo>
+                  <a:lnTo>
+                    <a:pt x="429735" y="1583048"/>
+                  </a:lnTo>
+                  <a:lnTo>
+                    <a:pt x="358112" y="1590087"/>
+                  </a:lnTo>
+                  <a:lnTo>
+                    <a:pt x="286490" y="1597010"/>
+                  </a:lnTo>
+                  <a:lnTo>
+                    <a:pt x="214867" y="1603818"/>
+                  </a:lnTo>
+                  <a:lnTo>
+                    <a:pt x="143245" y="1610514"/>
+                  </a:lnTo>
+                  <a:lnTo>
+                    <a:pt x="71622" y="1617099"/>
+                  </a:lnTo>
+                  <a:lnTo>
+                    <a:pt x="0" y="1623575"/>
                   </a:lnTo>
                   <a:close/>
                 </a:path>
@@ -3609,309 +3584,643 @@
         </p:sp>
         <p:sp>
           <p:nvSpPr>
+            <p:cNvPr id="21" name="pl21"/>
+            <p:cNvSpPr/>
+            <p:nvPr/>
+          </p:nvSpPr>
+          <p:spPr>
+            <a:xfrm>
+              <a:off x="1172049" y="3548938"/>
+              <a:ext cx="7090630" cy="1178482"/>
+            </a:xfrm>
+            <a:custGeom>
+              <a:avLst/>
+              <a:pathLst>
+                <a:path w="7090630" h="1178482">
+                  <a:moveTo>
+                    <a:pt x="0" y="60372"/>
+                  </a:moveTo>
+                  <a:lnTo>
+                    <a:pt x="71622" y="96173"/>
+                  </a:lnTo>
+                  <a:lnTo>
+                    <a:pt x="143245" y="131317"/>
+                  </a:lnTo>
+                  <a:lnTo>
+                    <a:pt x="214867" y="165814"/>
+                  </a:lnTo>
+                  <a:lnTo>
+                    <a:pt x="286490" y="199678"/>
+                  </a:lnTo>
+                  <a:lnTo>
+                    <a:pt x="358112" y="232919"/>
+                  </a:lnTo>
+                  <a:lnTo>
+                    <a:pt x="429735" y="265549"/>
+                  </a:lnTo>
+                  <a:lnTo>
+                    <a:pt x="501357" y="297580"/>
+                  </a:lnTo>
+                  <a:lnTo>
+                    <a:pt x="572980" y="329022"/>
+                  </a:lnTo>
+                  <a:lnTo>
+                    <a:pt x="644602" y="359885"/>
+                  </a:lnTo>
+                  <a:lnTo>
+                    <a:pt x="716225" y="390182"/>
+                  </a:lnTo>
+                  <a:lnTo>
+                    <a:pt x="787847" y="419922"/>
+                  </a:lnTo>
+                  <a:lnTo>
+                    <a:pt x="859470" y="449115"/>
+                  </a:lnTo>
+                  <a:lnTo>
+                    <a:pt x="931092" y="477772"/>
+                  </a:lnTo>
+                  <a:lnTo>
+                    <a:pt x="1002715" y="505902"/>
+                  </a:lnTo>
+                  <a:lnTo>
+                    <a:pt x="1074337" y="533515"/>
+                  </a:lnTo>
+                  <a:lnTo>
+                    <a:pt x="1145960" y="560621"/>
+                  </a:lnTo>
+                  <a:lnTo>
+                    <a:pt x="1217582" y="587228"/>
+                  </a:lnTo>
+                  <a:lnTo>
+                    <a:pt x="1289205" y="613346"/>
+                  </a:lnTo>
+                  <a:lnTo>
+                    <a:pt x="1360827" y="638985"/>
+                  </a:lnTo>
+                  <a:lnTo>
+                    <a:pt x="1432450" y="664152"/>
+                  </a:lnTo>
+                  <a:lnTo>
+                    <a:pt x="1504073" y="688856"/>
+                  </a:lnTo>
+                  <a:lnTo>
+                    <a:pt x="1575695" y="713107"/>
+                  </a:lnTo>
+                  <a:lnTo>
+                    <a:pt x="1647318" y="736912"/>
+                  </a:lnTo>
+                  <a:lnTo>
+                    <a:pt x="1718940" y="760279"/>
+                  </a:lnTo>
+                  <a:lnTo>
+                    <a:pt x="1790563" y="783217"/>
+                  </a:lnTo>
+                  <a:lnTo>
+                    <a:pt x="1862185" y="805733"/>
+                  </a:lnTo>
+                  <a:lnTo>
+                    <a:pt x="1933808" y="827835"/>
+                  </a:lnTo>
+                  <a:lnTo>
+                    <a:pt x="2005430" y="849531"/>
+                  </a:lnTo>
+                  <a:lnTo>
+                    <a:pt x="2077053" y="870829"/>
+                  </a:lnTo>
+                  <a:lnTo>
+                    <a:pt x="2148675" y="891735"/>
+                  </a:lnTo>
+                  <a:lnTo>
+                    <a:pt x="2220298" y="912257"/>
+                  </a:lnTo>
+                  <a:lnTo>
+                    <a:pt x="2291920" y="932401"/>
+                  </a:lnTo>
+                  <a:lnTo>
+                    <a:pt x="2363543" y="952176"/>
+                  </a:lnTo>
+                  <a:lnTo>
+                    <a:pt x="2435165" y="971586"/>
+                  </a:lnTo>
+                  <a:lnTo>
+                    <a:pt x="2506788" y="990641"/>
+                  </a:lnTo>
+                  <a:lnTo>
+                    <a:pt x="2578410" y="1009345"/>
+                  </a:lnTo>
+                  <a:lnTo>
+                    <a:pt x="2650033" y="1027705"/>
+                  </a:lnTo>
+                  <a:lnTo>
+                    <a:pt x="2721655" y="1045727"/>
+                  </a:lnTo>
+                  <a:lnTo>
+                    <a:pt x="2793278" y="1063419"/>
+                  </a:lnTo>
+                  <a:lnTo>
+                    <a:pt x="2864901" y="1080785"/>
+                  </a:lnTo>
+                  <a:lnTo>
+                    <a:pt x="2936523" y="1097832"/>
+                  </a:lnTo>
+                  <a:lnTo>
+                    <a:pt x="3008146" y="1114566"/>
+                  </a:lnTo>
+                  <a:lnTo>
+                    <a:pt x="3079768" y="1130993"/>
+                  </a:lnTo>
+                  <a:lnTo>
+                    <a:pt x="3151391" y="1147117"/>
+                  </a:lnTo>
+                  <a:lnTo>
+                    <a:pt x="3223013" y="1162945"/>
+                  </a:lnTo>
+                  <a:lnTo>
+                    <a:pt x="3294636" y="1178482"/>
+                  </a:lnTo>
+                  <a:lnTo>
+                    <a:pt x="3366258" y="1165221"/>
+                  </a:lnTo>
+                  <a:lnTo>
+                    <a:pt x="3437881" y="1151030"/>
+                  </a:lnTo>
+                  <a:lnTo>
+                    <a:pt x="3509503" y="1136600"/>
+                  </a:lnTo>
+                  <a:lnTo>
+                    <a:pt x="3581126" y="1121927"/>
+                  </a:lnTo>
+                  <a:lnTo>
+                    <a:pt x="3652748" y="1107008"/>
+                  </a:lnTo>
+                  <a:lnTo>
+                    <a:pt x="3724371" y="1091837"/>
+                  </a:lnTo>
+                  <a:lnTo>
+                    <a:pt x="3795993" y="1076411"/>
+                  </a:lnTo>
+                  <a:lnTo>
+                    <a:pt x="3867616" y="1060726"/>
+                  </a:lnTo>
+                  <a:lnTo>
+                    <a:pt x="3939238" y="1044776"/>
+                  </a:lnTo>
+                  <a:lnTo>
+                    <a:pt x="4010861" y="1028558"/>
+                  </a:lnTo>
+                  <a:lnTo>
+                    <a:pt x="4082483" y="1012067"/>
+                  </a:lnTo>
+                  <a:lnTo>
+                    <a:pt x="4154106" y="995298"/>
+                  </a:lnTo>
+                  <a:lnTo>
+                    <a:pt x="4225729" y="978247"/>
+                  </a:lnTo>
+                  <a:lnTo>
+                    <a:pt x="4297351" y="960909"/>
+                  </a:lnTo>
+                  <a:lnTo>
+                    <a:pt x="4368974" y="943279"/>
+                  </a:lnTo>
+                  <a:lnTo>
+                    <a:pt x="4440596" y="925353"/>
+                  </a:lnTo>
+                  <a:lnTo>
+                    <a:pt x="4512219" y="907124"/>
+                  </a:lnTo>
+                  <a:lnTo>
+                    <a:pt x="4583841" y="888589"/>
+                  </a:lnTo>
+                  <a:lnTo>
+                    <a:pt x="4655464" y="869742"/>
+                  </a:lnTo>
+                  <a:lnTo>
+                    <a:pt x="4727086" y="850578"/>
+                  </a:lnTo>
+                  <a:lnTo>
+                    <a:pt x="4798709" y="831091"/>
+                  </a:lnTo>
+                  <a:lnTo>
+                    <a:pt x="4870331" y="811276"/>
+                  </a:lnTo>
+                  <a:lnTo>
+                    <a:pt x="4941954" y="791128"/>
+                  </a:lnTo>
+                  <a:lnTo>
+                    <a:pt x="5013576" y="770640"/>
+                  </a:lnTo>
+                  <a:lnTo>
+                    <a:pt x="5085199" y="749808"/>
+                  </a:lnTo>
+                  <a:lnTo>
+                    <a:pt x="5156821" y="728625"/>
+                  </a:lnTo>
+                  <a:lnTo>
+                    <a:pt x="5228444" y="707085"/>
+                  </a:lnTo>
+                  <a:lnTo>
+                    <a:pt x="5300066" y="685183"/>
+                  </a:lnTo>
+                  <a:lnTo>
+                    <a:pt x="5371689" y="662912"/>
+                  </a:lnTo>
+                  <a:lnTo>
+                    <a:pt x="5443311" y="640267"/>
+                  </a:lnTo>
+                  <a:lnTo>
+                    <a:pt x="5514934" y="617240"/>
+                  </a:lnTo>
+                  <a:lnTo>
+                    <a:pt x="5586557" y="593826"/>
+                  </a:lnTo>
+                  <a:lnTo>
+                    <a:pt x="5658179" y="570017"/>
+                  </a:lnTo>
+                  <a:lnTo>
+                    <a:pt x="5729802" y="545808"/>
+                  </a:lnTo>
+                  <a:lnTo>
+                    <a:pt x="5801424" y="521191"/>
+                  </a:lnTo>
+                  <a:lnTo>
+                    <a:pt x="5873047" y="496160"/>
+                  </a:lnTo>
+                  <a:lnTo>
+                    <a:pt x="5944669" y="470708"/>
+                  </a:lnTo>
+                  <a:lnTo>
+                    <a:pt x="6016292" y="444827"/>
+                  </a:lnTo>
+                  <a:lnTo>
+                    <a:pt x="6087914" y="418510"/>
+                  </a:lnTo>
+                  <a:lnTo>
+                    <a:pt x="6159537" y="391751"/>
+                  </a:lnTo>
+                  <a:lnTo>
+                    <a:pt x="6231159" y="364541"/>
+                  </a:lnTo>
+                  <a:lnTo>
+                    <a:pt x="6302782" y="336873"/>
+                  </a:lnTo>
+                  <a:lnTo>
+                    <a:pt x="6374404" y="308740"/>
+                  </a:lnTo>
+                  <a:lnTo>
+                    <a:pt x="6446027" y="280133"/>
+                  </a:lnTo>
+                  <a:lnTo>
+                    <a:pt x="6517649" y="251044"/>
+                  </a:lnTo>
+                  <a:lnTo>
+                    <a:pt x="6589272" y="221466"/>
+                  </a:lnTo>
+                  <a:lnTo>
+                    <a:pt x="6660894" y="191390"/>
+                  </a:lnTo>
+                  <a:lnTo>
+                    <a:pt x="6732517" y="160808"/>
+                  </a:lnTo>
+                  <a:lnTo>
+                    <a:pt x="6804139" y="129711"/>
+                  </a:lnTo>
+                  <a:lnTo>
+                    <a:pt x="6875762" y="98090"/>
+                  </a:lnTo>
+                  <a:lnTo>
+                    <a:pt x="6947385" y="65938"/>
+                  </a:lnTo>
+                  <a:lnTo>
+                    <a:pt x="7019007" y="33244"/>
+                  </a:lnTo>
+                  <a:lnTo>
+                    <a:pt x="7090630" y="0"/>
+                  </a:lnTo>
+                </a:path>
+              </a:pathLst>
+            </a:custGeom>
+          </p:spPr>
+          <p:txBody>
+            <a:bodyPr/>
+            <a:lstStyle/>
+            <a:p/>
+          </p:txBody>
+        </p:sp>
+        <p:sp>
+          <p:nvSpPr>
             <p:cNvPr id="22" name="pl22"/>
             <p:cNvSpPr/>
             <p:nvPr/>
           </p:nvSpPr>
           <p:spPr>
             <a:xfrm>
-              <a:off x="817517" y="3548938"/>
-              <a:ext cx="7392041" cy="1178482"/>
+              <a:off x="1172049" y="4728115"/>
+              <a:ext cx="7090630" cy="518672"/>
             </a:xfrm>
             <a:custGeom>
               <a:avLst/>
               <a:pathLst>
-                <a:path w="7392041" h="1178482">
+                <a:path w="7090630" h="518672">
                   <a:moveTo>
-                    <a:pt x="0" y="176047"/>
+                    <a:pt x="7090630" y="518672"/>
                   </a:moveTo>
                   <a:lnTo>
-                    <a:pt x="53901" y="199678"/>
-                  </a:lnTo>
-                  <a:lnTo>
-                    <a:pt x="131145" y="232919"/>
-                  </a:lnTo>
-                  <a:lnTo>
-                    <a:pt x="208389" y="265549"/>
-                  </a:lnTo>
-                  <a:lnTo>
-                    <a:pt x="285632" y="297580"/>
-                  </a:lnTo>
-                  <a:lnTo>
-                    <a:pt x="362876" y="329022"/>
-                  </a:lnTo>
-                  <a:lnTo>
-                    <a:pt x="440119" y="359885"/>
-                  </a:lnTo>
-                  <a:lnTo>
-                    <a:pt x="517363" y="390182"/>
-                  </a:lnTo>
-                  <a:lnTo>
-                    <a:pt x="594606" y="419922"/>
-                  </a:lnTo>
-                  <a:lnTo>
-                    <a:pt x="671850" y="449115"/>
-                  </a:lnTo>
-                  <a:lnTo>
-                    <a:pt x="749094" y="477772"/>
-                  </a:lnTo>
-                  <a:lnTo>
-                    <a:pt x="826337" y="505902"/>
-                  </a:lnTo>
-                  <a:lnTo>
-                    <a:pt x="903581" y="533515"/>
-                  </a:lnTo>
-                  <a:lnTo>
-                    <a:pt x="980824" y="560621"/>
-                  </a:lnTo>
-                  <a:lnTo>
-                    <a:pt x="1058068" y="587228"/>
-                  </a:lnTo>
-                  <a:lnTo>
-                    <a:pt x="1135311" y="613346"/>
-                  </a:lnTo>
-                  <a:lnTo>
-                    <a:pt x="1212555" y="638985"/>
-                  </a:lnTo>
-                  <a:lnTo>
-                    <a:pt x="1289799" y="664152"/>
-                  </a:lnTo>
-                  <a:lnTo>
-                    <a:pt x="1367042" y="688856"/>
-                  </a:lnTo>
-                  <a:lnTo>
-                    <a:pt x="1444286" y="713107"/>
-                  </a:lnTo>
-                  <a:lnTo>
-                    <a:pt x="1521529" y="736912"/>
-                  </a:lnTo>
-                  <a:lnTo>
-                    <a:pt x="1598773" y="760279"/>
-                  </a:lnTo>
-                  <a:lnTo>
-                    <a:pt x="1676016" y="783217"/>
-                  </a:lnTo>
-                  <a:lnTo>
-                    <a:pt x="1753260" y="805733"/>
-                  </a:lnTo>
-                  <a:lnTo>
-                    <a:pt x="1830504" y="827835"/>
-                  </a:lnTo>
-                  <a:lnTo>
-                    <a:pt x="1907747" y="849531"/>
-                  </a:lnTo>
-                  <a:lnTo>
-                    <a:pt x="1984991" y="870829"/>
-                  </a:lnTo>
-                  <a:lnTo>
-                    <a:pt x="2062234" y="891735"/>
-                  </a:lnTo>
-                  <a:lnTo>
-                    <a:pt x="2139478" y="912257"/>
-                  </a:lnTo>
-                  <a:lnTo>
-                    <a:pt x="2216721" y="932401"/>
-                  </a:lnTo>
-                  <a:lnTo>
-                    <a:pt x="2293965" y="952176"/>
-                  </a:lnTo>
-                  <a:lnTo>
-                    <a:pt x="2371209" y="971586"/>
-                  </a:lnTo>
-                  <a:lnTo>
-                    <a:pt x="2448452" y="990641"/>
-                  </a:lnTo>
-                  <a:lnTo>
-                    <a:pt x="2525696" y="1009345"/>
-                  </a:lnTo>
-                  <a:lnTo>
-                    <a:pt x="2602939" y="1027705"/>
-                  </a:lnTo>
-                  <a:lnTo>
-                    <a:pt x="2680183" y="1045727"/>
-                  </a:lnTo>
-                  <a:lnTo>
-                    <a:pt x="2757426" y="1063419"/>
-                  </a:lnTo>
-                  <a:lnTo>
-                    <a:pt x="2834670" y="1080785"/>
-                  </a:lnTo>
-                  <a:lnTo>
-                    <a:pt x="2911914" y="1097832"/>
-                  </a:lnTo>
-                  <a:lnTo>
-                    <a:pt x="2989157" y="1114566"/>
-                  </a:lnTo>
-                  <a:lnTo>
-                    <a:pt x="3066401" y="1130993"/>
-                  </a:lnTo>
-                  <a:lnTo>
-                    <a:pt x="3143644" y="1147117"/>
-                  </a:lnTo>
-                  <a:lnTo>
-                    <a:pt x="3220888" y="1162945"/>
-                  </a:lnTo>
-                  <a:lnTo>
-                    <a:pt x="3298131" y="1178482"/>
-                  </a:lnTo>
-                  <a:lnTo>
-                    <a:pt x="3375375" y="1165221"/>
-                  </a:lnTo>
-                  <a:lnTo>
-                    <a:pt x="3452619" y="1151030"/>
-                  </a:lnTo>
-                  <a:lnTo>
-                    <a:pt x="3529862" y="1136600"/>
-                  </a:lnTo>
-                  <a:lnTo>
-                    <a:pt x="3607106" y="1121927"/>
-                  </a:lnTo>
-                  <a:lnTo>
-                    <a:pt x="3684349" y="1107008"/>
-                  </a:lnTo>
-                  <a:lnTo>
-                    <a:pt x="3761593" y="1091837"/>
-                  </a:lnTo>
-                  <a:lnTo>
-                    <a:pt x="3838836" y="1076411"/>
-                  </a:lnTo>
-                  <a:lnTo>
-                    <a:pt x="3916080" y="1060726"/>
-                  </a:lnTo>
-                  <a:lnTo>
-                    <a:pt x="3993324" y="1044776"/>
-                  </a:lnTo>
-                  <a:lnTo>
-                    <a:pt x="4070567" y="1028558"/>
-                  </a:lnTo>
-                  <a:lnTo>
-                    <a:pt x="4147811" y="1012067"/>
-                  </a:lnTo>
-                  <a:lnTo>
-                    <a:pt x="4225054" y="995298"/>
-                  </a:lnTo>
-                  <a:lnTo>
-                    <a:pt x="4302298" y="978247"/>
-                  </a:lnTo>
-                  <a:lnTo>
-                    <a:pt x="4379541" y="960909"/>
-                  </a:lnTo>
-                  <a:lnTo>
-                    <a:pt x="4456785" y="943279"/>
-                  </a:lnTo>
-                  <a:lnTo>
-                    <a:pt x="4534029" y="925353"/>
-                  </a:lnTo>
-                  <a:lnTo>
-                    <a:pt x="4611272" y="907124"/>
-                  </a:lnTo>
-                  <a:lnTo>
-                    <a:pt x="4688516" y="888589"/>
-                  </a:lnTo>
-                  <a:lnTo>
-                    <a:pt x="4765759" y="869742"/>
-                  </a:lnTo>
-                  <a:lnTo>
-                    <a:pt x="4843003" y="850578"/>
-                  </a:lnTo>
-                  <a:lnTo>
-                    <a:pt x="4920246" y="831091"/>
-                  </a:lnTo>
-                  <a:lnTo>
-                    <a:pt x="4997490" y="811276"/>
-                  </a:lnTo>
-                  <a:lnTo>
-                    <a:pt x="5074734" y="791128"/>
-                  </a:lnTo>
-                  <a:lnTo>
-                    <a:pt x="5151977" y="770640"/>
-                  </a:lnTo>
-                  <a:lnTo>
-                    <a:pt x="5229221" y="749808"/>
-                  </a:lnTo>
-                  <a:lnTo>
-                    <a:pt x="5306464" y="728625"/>
-                  </a:lnTo>
-                  <a:lnTo>
-                    <a:pt x="5383708" y="707085"/>
-                  </a:lnTo>
-                  <a:lnTo>
-                    <a:pt x="5460951" y="685183"/>
-                  </a:lnTo>
-                  <a:lnTo>
-                    <a:pt x="5538195" y="662912"/>
-                  </a:lnTo>
-                  <a:lnTo>
-                    <a:pt x="5615439" y="640267"/>
-                  </a:lnTo>
-                  <a:lnTo>
-                    <a:pt x="5692682" y="617240"/>
-                  </a:lnTo>
-                  <a:lnTo>
-                    <a:pt x="5769926" y="593826"/>
-                  </a:lnTo>
-                  <a:lnTo>
-                    <a:pt x="5847169" y="570017"/>
-                  </a:lnTo>
-                  <a:lnTo>
-                    <a:pt x="5924413" y="545808"/>
-                  </a:lnTo>
-                  <a:lnTo>
-                    <a:pt x="6001656" y="521191"/>
-                  </a:lnTo>
-                  <a:lnTo>
-                    <a:pt x="6078900" y="496160"/>
-                  </a:lnTo>
-                  <a:lnTo>
-                    <a:pt x="6156144" y="470708"/>
-                  </a:lnTo>
-                  <a:lnTo>
-                    <a:pt x="6233387" y="444827"/>
-                  </a:lnTo>
-                  <a:lnTo>
-                    <a:pt x="6310631" y="418510"/>
-                  </a:lnTo>
-                  <a:lnTo>
-                    <a:pt x="6387874" y="391751"/>
-                  </a:lnTo>
-                  <a:lnTo>
-                    <a:pt x="6465118" y="364541"/>
-                  </a:lnTo>
-                  <a:lnTo>
-                    <a:pt x="6542361" y="336873"/>
-                  </a:lnTo>
-                  <a:lnTo>
-                    <a:pt x="6619605" y="308740"/>
-                  </a:lnTo>
-                  <a:lnTo>
-                    <a:pt x="6696849" y="280133"/>
-                  </a:lnTo>
-                  <a:lnTo>
-                    <a:pt x="6774092" y="251044"/>
-                  </a:lnTo>
-                  <a:lnTo>
-                    <a:pt x="6851336" y="221466"/>
-                  </a:lnTo>
-                  <a:lnTo>
-                    <a:pt x="6928579" y="191390"/>
-                  </a:lnTo>
-                  <a:lnTo>
-                    <a:pt x="7005823" y="160808"/>
-                  </a:lnTo>
-                  <a:lnTo>
-                    <a:pt x="7083066" y="129711"/>
-                  </a:lnTo>
-                  <a:lnTo>
-                    <a:pt x="7160310" y="98090"/>
-                  </a:lnTo>
-                  <a:lnTo>
-                    <a:pt x="7237554" y="65938"/>
-                  </a:lnTo>
-                  <a:lnTo>
-                    <a:pt x="7314797" y="33244"/>
-                  </a:lnTo>
-                  <a:lnTo>
-                    <a:pt x="7392041" y="0"/>
+                    <a:pt x="7019007" y="512860"/>
+                  </a:lnTo>
+                  <a:lnTo>
+                    <a:pt x="6947385" y="506938"/>
+                  </a:lnTo>
+                  <a:lnTo>
+                    <a:pt x="6875762" y="500905"/>
+                  </a:lnTo>
+                  <a:lnTo>
+                    <a:pt x="6804139" y="494760"/>
+                  </a:lnTo>
+                  <a:lnTo>
+                    <a:pt x="6732517" y="488499"/>
+                  </a:lnTo>
+                  <a:lnTo>
+                    <a:pt x="6660894" y="482121"/>
+                  </a:lnTo>
+                  <a:lnTo>
+                    <a:pt x="6589272" y="475624"/>
+                  </a:lnTo>
+                  <a:lnTo>
+                    <a:pt x="6517649" y="469005"/>
+                  </a:lnTo>
+                  <a:lnTo>
+                    <a:pt x="6446027" y="462262"/>
+                  </a:lnTo>
+                  <a:lnTo>
+                    <a:pt x="6374404" y="455393"/>
+                  </a:lnTo>
+                  <a:lnTo>
+                    <a:pt x="6302782" y="448396"/>
+                  </a:lnTo>
+                  <a:lnTo>
+                    <a:pt x="6231159" y="441267"/>
+                  </a:lnTo>
+                  <a:lnTo>
+                    <a:pt x="6159537" y="434005"/>
+                  </a:lnTo>
+                  <a:lnTo>
+                    <a:pt x="6087914" y="426607"/>
+                  </a:lnTo>
+                  <a:lnTo>
+                    <a:pt x="6016292" y="419070"/>
+                  </a:lnTo>
+                  <a:lnTo>
+                    <a:pt x="5944669" y="411392"/>
+                  </a:lnTo>
+                  <a:lnTo>
+                    <a:pt x="5873047" y="403571"/>
+                  </a:lnTo>
+                  <a:lnTo>
+                    <a:pt x="5801424" y="395603"/>
+                  </a:lnTo>
+                  <a:lnTo>
+                    <a:pt x="5729802" y="387486"/>
+                  </a:lnTo>
+                  <a:lnTo>
+                    <a:pt x="5658179" y="379217"/>
+                  </a:lnTo>
+                  <a:lnTo>
+                    <a:pt x="5586557" y="370793"/>
+                  </a:lnTo>
+                  <a:lnTo>
+                    <a:pt x="5514934" y="362211"/>
+                  </a:lnTo>
+                  <a:lnTo>
+                    <a:pt x="5443311" y="353469"/>
+                  </a:lnTo>
+                  <a:lnTo>
+                    <a:pt x="5371689" y="344563"/>
+                  </a:lnTo>
+                  <a:lnTo>
+                    <a:pt x="5300066" y="335490"/>
+                  </a:lnTo>
+                  <a:lnTo>
+                    <a:pt x="5228444" y="326247"/>
+                  </a:lnTo>
+                  <a:lnTo>
+                    <a:pt x="5156821" y="316832"/>
+                  </a:lnTo>
+                  <a:lnTo>
+                    <a:pt x="5085199" y="307240"/>
+                  </a:lnTo>
+                  <a:lnTo>
+                    <a:pt x="5013576" y="297468"/>
+                  </a:lnTo>
+                  <a:lnTo>
+                    <a:pt x="4941954" y="287514"/>
+                  </a:lnTo>
+                  <a:lnTo>
+                    <a:pt x="4870331" y="277373"/>
+                  </a:lnTo>
+                  <a:lnTo>
+                    <a:pt x="4798709" y="267042"/>
+                  </a:lnTo>
+                  <a:lnTo>
+                    <a:pt x="4727086" y="256518"/>
+                  </a:lnTo>
+                  <a:lnTo>
+                    <a:pt x="4655464" y="245796"/>
+                  </a:lnTo>
+                  <a:lnTo>
+                    <a:pt x="4583841" y="234874"/>
+                  </a:lnTo>
+                  <a:lnTo>
+                    <a:pt x="4512219" y="223748"/>
+                  </a:lnTo>
+                  <a:lnTo>
+                    <a:pt x="4440596" y="212413"/>
+                  </a:lnTo>
+                  <a:lnTo>
+                    <a:pt x="4368974" y="200866"/>
+                  </a:lnTo>
+                  <a:lnTo>
+                    <a:pt x="4297351" y="189103"/>
+                  </a:lnTo>
+                  <a:lnTo>
+                    <a:pt x="4225729" y="177119"/>
+                  </a:lnTo>
+                  <a:lnTo>
+                    <a:pt x="4154106" y="164911"/>
+                  </a:lnTo>
+                  <a:lnTo>
+                    <a:pt x="4082483" y="152475"/>
+                  </a:lnTo>
+                  <a:lnTo>
+                    <a:pt x="4010861" y="139806"/>
+                  </a:lnTo>
+                  <a:lnTo>
+                    <a:pt x="3939238" y="126899"/>
+                  </a:lnTo>
+                  <a:lnTo>
+                    <a:pt x="3867616" y="113751"/>
+                  </a:lnTo>
+                  <a:lnTo>
+                    <a:pt x="3795993" y="100357"/>
+                  </a:lnTo>
+                  <a:lnTo>
+                    <a:pt x="3724371" y="86712"/>
+                  </a:lnTo>
+                  <a:lnTo>
+                    <a:pt x="3652748" y="72811"/>
+                  </a:lnTo>
+                  <a:lnTo>
+                    <a:pt x="3581126" y="58650"/>
+                  </a:lnTo>
+                  <a:lnTo>
+                    <a:pt x="3509503" y="44224"/>
+                  </a:lnTo>
+                  <a:lnTo>
+                    <a:pt x="3437881" y="29528"/>
+                  </a:lnTo>
+                  <a:lnTo>
+                    <a:pt x="3366258" y="14557"/>
+                  </a:lnTo>
+                  <a:lnTo>
+                    <a:pt x="3294636" y="0"/>
+                  </a:lnTo>
+                  <a:lnTo>
+                    <a:pt x="3223013" y="13724"/>
+                  </a:lnTo>
+                  <a:lnTo>
+                    <a:pt x="3151391" y="27222"/>
+                  </a:lnTo>
+                  <a:lnTo>
+                    <a:pt x="3079768" y="40496"/>
+                  </a:lnTo>
+                  <a:lnTo>
+                    <a:pt x="3008146" y="53551"/>
+                  </a:lnTo>
+                  <a:lnTo>
+                    <a:pt x="2936523" y="66389"/>
+                  </a:lnTo>
+                  <a:lnTo>
+                    <a:pt x="2864901" y="79015"/>
+                  </a:lnTo>
+                  <a:lnTo>
+                    <a:pt x="2793278" y="91432"/>
+                  </a:lnTo>
+                  <a:lnTo>
+                    <a:pt x="2721655" y="103644"/>
+                  </a:lnTo>
+                  <a:lnTo>
+                    <a:pt x="2650033" y="115653"/>
+                  </a:lnTo>
+                  <a:lnTo>
+                    <a:pt x="2578410" y="127463"/>
+                  </a:lnTo>
+                  <a:lnTo>
+                    <a:pt x="2506788" y="139078"/>
+                  </a:lnTo>
+                  <a:lnTo>
+                    <a:pt x="2435165" y="150501"/>
+                  </a:lnTo>
+                  <a:lnTo>
+                    <a:pt x="2363543" y="161735"/>
+                  </a:lnTo>
+                  <a:lnTo>
+                    <a:pt x="2291920" y="172782"/>
+                  </a:lnTo>
+                  <a:lnTo>
+                    <a:pt x="2220298" y="183647"/>
+                  </a:lnTo>
+                  <a:lnTo>
+                    <a:pt x="2148675" y="194332"/>
+                  </a:lnTo>
+                  <a:lnTo>
+                    <a:pt x="2077053" y="204840"/>
+                  </a:lnTo>
+                  <a:lnTo>
+                    <a:pt x="2005430" y="215174"/>
+                  </a:lnTo>
+                  <a:lnTo>
+                    <a:pt x="1933808" y="225337"/>
+                  </a:lnTo>
+                  <a:lnTo>
+                    <a:pt x="1862185" y="235332"/>
+                  </a:lnTo>
+                  <a:lnTo>
+                    <a:pt x="1790563" y="245162"/>
+                  </a:lnTo>
+                  <a:lnTo>
+                    <a:pt x="1718940" y="254828"/>
+                  </a:lnTo>
+                  <a:lnTo>
+                    <a:pt x="1647318" y="264335"/>
+                  </a:lnTo>
+                  <a:lnTo>
+                    <a:pt x="1575695" y="273684"/>
+                  </a:lnTo>
+                  <a:lnTo>
+                    <a:pt x="1504073" y="282879"/>
+                  </a:lnTo>
+                  <a:lnTo>
+                    <a:pt x="1432450" y="291921"/>
+                  </a:lnTo>
+                  <a:lnTo>
+                    <a:pt x="1360827" y="300814"/>
+                  </a:lnTo>
+                  <a:lnTo>
+                    <a:pt x="1289205" y="309559"/>
+                  </a:lnTo>
+                  <a:lnTo>
+                    <a:pt x="1217582" y="318160"/>
+                  </a:lnTo>
+                  <a:lnTo>
+                    <a:pt x="1145960" y="326618"/>
+                  </a:lnTo>
+                  <a:lnTo>
+                    <a:pt x="1074337" y="334936"/>
+                  </a:lnTo>
+                  <a:lnTo>
+                    <a:pt x="1002715" y="343117"/>
+                  </a:lnTo>
+                  <a:lnTo>
+                    <a:pt x="931092" y="351162"/>
+                  </a:lnTo>
+                  <a:lnTo>
+                    <a:pt x="859470" y="359074"/>
+                  </a:lnTo>
+                  <a:lnTo>
+                    <a:pt x="787847" y="366855"/>
+                  </a:lnTo>
+                  <a:lnTo>
+                    <a:pt x="716225" y="374507"/>
+                  </a:lnTo>
+                  <a:lnTo>
+                    <a:pt x="644602" y="382033"/>
+                  </a:lnTo>
+                  <a:lnTo>
+                    <a:pt x="572980" y="389434"/>
+                  </a:lnTo>
+                  <a:lnTo>
+                    <a:pt x="501357" y="396713"/>
+                  </a:lnTo>
+                  <a:lnTo>
+                    <a:pt x="429735" y="403871"/>
+                  </a:lnTo>
+                  <a:lnTo>
+                    <a:pt x="358112" y="410910"/>
+                  </a:lnTo>
+                  <a:lnTo>
+                    <a:pt x="286490" y="417833"/>
+                  </a:lnTo>
+                  <a:lnTo>
+                    <a:pt x="214867" y="424641"/>
+                  </a:lnTo>
+                  <a:lnTo>
+                    <a:pt x="143245" y="431337"/>
+                  </a:lnTo>
+                  <a:lnTo>
+                    <a:pt x="71622" y="437922"/>
+                  </a:lnTo>
+                  <a:lnTo>
+                    <a:pt x="0" y="444398"/>
                   </a:lnTo>
                 </a:path>
               </a:pathLst>
@@ -3931,619 +4240,312 @@
           </p:nvSpPr>
           <p:spPr>
             <a:xfrm>
-              <a:off x="817517" y="4728115"/>
-              <a:ext cx="7392041" cy="518672"/>
+              <a:off x="1172049" y="4691545"/>
+              <a:ext cx="7090630" cy="76081"/>
             </a:xfrm>
             <a:custGeom>
               <a:avLst/>
               <a:pathLst>
-                <a:path w="7392041" h="518672">
-                  <a:moveTo>
-                    <a:pt x="7392041" y="518672"/>
-                  </a:moveTo>
-                  <a:lnTo>
-                    <a:pt x="7314797" y="512860"/>
-                  </a:lnTo>
-                  <a:lnTo>
-                    <a:pt x="7237554" y="506938"/>
-                  </a:lnTo>
-                  <a:lnTo>
-                    <a:pt x="7160310" y="500905"/>
-                  </a:lnTo>
-                  <a:lnTo>
-                    <a:pt x="7083066" y="494760"/>
-                  </a:lnTo>
-                  <a:lnTo>
-                    <a:pt x="7005823" y="488499"/>
-                  </a:lnTo>
-                  <a:lnTo>
-                    <a:pt x="6928579" y="482121"/>
-                  </a:lnTo>
-                  <a:lnTo>
-                    <a:pt x="6851336" y="475624"/>
-                  </a:lnTo>
-                  <a:lnTo>
-                    <a:pt x="6774092" y="469005"/>
-                  </a:lnTo>
-                  <a:lnTo>
-                    <a:pt x="6696849" y="462262"/>
-                  </a:lnTo>
-                  <a:lnTo>
-                    <a:pt x="6619605" y="455393"/>
-                  </a:lnTo>
-                  <a:lnTo>
-                    <a:pt x="6542361" y="448396"/>
-                  </a:lnTo>
-                  <a:lnTo>
-                    <a:pt x="6465118" y="441267"/>
-                  </a:lnTo>
-                  <a:lnTo>
-                    <a:pt x="6387874" y="434005"/>
-                  </a:lnTo>
-                  <a:lnTo>
-                    <a:pt x="6310631" y="426607"/>
-                  </a:lnTo>
-                  <a:lnTo>
-                    <a:pt x="6233387" y="419070"/>
-                  </a:lnTo>
-                  <a:lnTo>
-                    <a:pt x="6156144" y="411392"/>
-                  </a:lnTo>
-                  <a:lnTo>
-                    <a:pt x="6078900" y="403571"/>
-                  </a:lnTo>
-                  <a:lnTo>
-                    <a:pt x="6001656" y="395603"/>
-                  </a:lnTo>
-                  <a:lnTo>
-                    <a:pt x="5924413" y="387486"/>
-                  </a:lnTo>
-                  <a:lnTo>
-                    <a:pt x="5847169" y="379217"/>
-                  </a:lnTo>
-                  <a:lnTo>
-                    <a:pt x="5769926" y="370793"/>
-                  </a:lnTo>
-                  <a:lnTo>
-                    <a:pt x="5692682" y="362211"/>
-                  </a:lnTo>
-                  <a:lnTo>
-                    <a:pt x="5615439" y="353469"/>
-                  </a:lnTo>
-                  <a:lnTo>
-                    <a:pt x="5538195" y="344563"/>
-                  </a:lnTo>
-                  <a:lnTo>
-                    <a:pt x="5460951" y="335490"/>
-                  </a:lnTo>
-                  <a:lnTo>
-                    <a:pt x="5383708" y="326247"/>
-                  </a:lnTo>
-                  <a:lnTo>
-                    <a:pt x="5306464" y="316832"/>
-                  </a:lnTo>
-                  <a:lnTo>
-                    <a:pt x="5229221" y="307240"/>
-                  </a:lnTo>
-                  <a:lnTo>
-                    <a:pt x="5151977" y="297468"/>
-                  </a:lnTo>
-                  <a:lnTo>
-                    <a:pt x="5074734" y="287514"/>
-                  </a:lnTo>
-                  <a:lnTo>
-                    <a:pt x="4997490" y="277373"/>
-                  </a:lnTo>
-                  <a:lnTo>
-                    <a:pt x="4920246" y="267042"/>
-                  </a:lnTo>
-                  <a:lnTo>
-                    <a:pt x="4843003" y="256518"/>
-                  </a:lnTo>
-                  <a:lnTo>
-                    <a:pt x="4765759" y="245796"/>
-                  </a:lnTo>
-                  <a:lnTo>
-                    <a:pt x="4688516" y="234874"/>
-                  </a:lnTo>
-                  <a:lnTo>
-                    <a:pt x="4611272" y="223748"/>
-                  </a:lnTo>
-                  <a:lnTo>
-                    <a:pt x="4534029" y="212413"/>
-                  </a:lnTo>
-                  <a:lnTo>
-                    <a:pt x="4456785" y="200866"/>
-                  </a:lnTo>
-                  <a:lnTo>
-                    <a:pt x="4379541" y="189103"/>
-                  </a:lnTo>
-                  <a:lnTo>
-                    <a:pt x="4302298" y="177119"/>
-                  </a:lnTo>
-                  <a:lnTo>
-                    <a:pt x="4225054" y="164911"/>
-                  </a:lnTo>
-                  <a:lnTo>
-                    <a:pt x="4147811" y="152475"/>
-                  </a:lnTo>
-                  <a:lnTo>
-                    <a:pt x="4070567" y="139806"/>
-                  </a:lnTo>
-                  <a:lnTo>
-                    <a:pt x="3993324" y="126899"/>
-                  </a:lnTo>
-                  <a:lnTo>
-                    <a:pt x="3916080" y="113751"/>
-                  </a:lnTo>
-                  <a:lnTo>
-                    <a:pt x="3838836" y="100357"/>
-                  </a:lnTo>
-                  <a:lnTo>
-                    <a:pt x="3761593" y="86712"/>
-                  </a:lnTo>
-                  <a:lnTo>
-                    <a:pt x="3684349" y="72811"/>
-                  </a:lnTo>
-                  <a:lnTo>
-                    <a:pt x="3607106" y="58650"/>
-                  </a:lnTo>
-                  <a:lnTo>
-                    <a:pt x="3529862" y="44224"/>
-                  </a:lnTo>
-                  <a:lnTo>
-                    <a:pt x="3452619" y="29528"/>
-                  </a:lnTo>
-                  <a:lnTo>
-                    <a:pt x="3375375" y="14557"/>
-                  </a:lnTo>
-                  <a:lnTo>
-                    <a:pt x="3298131" y="0"/>
-                  </a:lnTo>
-                  <a:lnTo>
-                    <a:pt x="3220888" y="13724"/>
-                  </a:lnTo>
-                  <a:lnTo>
-                    <a:pt x="3143644" y="27222"/>
-                  </a:lnTo>
-                  <a:lnTo>
-                    <a:pt x="3066401" y="40496"/>
-                  </a:lnTo>
-                  <a:lnTo>
-                    <a:pt x="2989157" y="53551"/>
-                  </a:lnTo>
-                  <a:lnTo>
-                    <a:pt x="2911914" y="66389"/>
-                  </a:lnTo>
-                  <a:lnTo>
-                    <a:pt x="2834670" y="79015"/>
-                  </a:lnTo>
-                  <a:lnTo>
-                    <a:pt x="2757426" y="91432"/>
-                  </a:lnTo>
-                  <a:lnTo>
-                    <a:pt x="2680183" y="103644"/>
-                  </a:lnTo>
-                  <a:lnTo>
-                    <a:pt x="2602939" y="115653"/>
-                  </a:lnTo>
-                  <a:lnTo>
-                    <a:pt x="2525696" y="127463"/>
-                  </a:lnTo>
-                  <a:lnTo>
-                    <a:pt x="2448452" y="139078"/>
-                  </a:lnTo>
-                  <a:lnTo>
-                    <a:pt x="2371209" y="150501"/>
-                  </a:lnTo>
-                  <a:lnTo>
-                    <a:pt x="2293965" y="161735"/>
-                  </a:lnTo>
-                  <a:lnTo>
-                    <a:pt x="2216721" y="172782"/>
-                  </a:lnTo>
-                  <a:lnTo>
-                    <a:pt x="2139478" y="183647"/>
-                  </a:lnTo>
-                  <a:lnTo>
-                    <a:pt x="2062234" y="194332"/>
-                  </a:lnTo>
-                  <a:lnTo>
-                    <a:pt x="1984991" y="204840"/>
-                  </a:lnTo>
-                  <a:lnTo>
-                    <a:pt x="1907747" y="215174"/>
-                  </a:lnTo>
-                  <a:lnTo>
-                    <a:pt x="1830504" y="225337"/>
-                  </a:lnTo>
-                  <a:lnTo>
-                    <a:pt x="1753260" y="235332"/>
-                  </a:lnTo>
-                  <a:lnTo>
-                    <a:pt x="1676016" y="245162"/>
-                  </a:lnTo>
-                  <a:lnTo>
-                    <a:pt x="1598773" y="254828"/>
-                  </a:lnTo>
-                  <a:lnTo>
-                    <a:pt x="1521529" y="264335"/>
-                  </a:lnTo>
-                  <a:lnTo>
-                    <a:pt x="1444286" y="273684"/>
-                  </a:lnTo>
-                  <a:lnTo>
-                    <a:pt x="1367042" y="282879"/>
-                  </a:lnTo>
-                  <a:lnTo>
-                    <a:pt x="1289799" y="291921"/>
-                  </a:lnTo>
-                  <a:lnTo>
-                    <a:pt x="1212555" y="300814"/>
-                  </a:lnTo>
-                  <a:lnTo>
-                    <a:pt x="1135311" y="309559"/>
-                  </a:lnTo>
-                  <a:lnTo>
-                    <a:pt x="1058068" y="318160"/>
-                  </a:lnTo>
-                  <a:lnTo>
-                    <a:pt x="980824" y="326618"/>
-                  </a:lnTo>
-                  <a:lnTo>
-                    <a:pt x="903581" y="334936"/>
-                  </a:lnTo>
-                  <a:lnTo>
-                    <a:pt x="826337" y="343117"/>
-                  </a:lnTo>
-                  <a:lnTo>
-                    <a:pt x="749094" y="351162"/>
-                  </a:lnTo>
-                  <a:lnTo>
-                    <a:pt x="671850" y="359074"/>
-                  </a:lnTo>
-                  <a:lnTo>
-                    <a:pt x="594606" y="366855"/>
-                  </a:lnTo>
-                  <a:lnTo>
-                    <a:pt x="517363" y="374507"/>
-                  </a:lnTo>
-                  <a:lnTo>
-                    <a:pt x="440119" y="382033"/>
-                  </a:lnTo>
-                  <a:lnTo>
-                    <a:pt x="362876" y="389434"/>
-                  </a:lnTo>
-                  <a:lnTo>
-                    <a:pt x="285632" y="396713"/>
-                  </a:lnTo>
-                  <a:lnTo>
-                    <a:pt x="208389" y="403871"/>
-                  </a:lnTo>
-                  <a:lnTo>
-                    <a:pt x="131145" y="410910"/>
-                  </a:lnTo>
-                  <a:lnTo>
-                    <a:pt x="53901" y="417833"/>
-                  </a:lnTo>
-                  <a:lnTo>
-                    <a:pt x="0" y="422584"/>
-                  </a:lnTo>
-                </a:path>
-              </a:pathLst>
-            </a:custGeom>
-          </p:spPr>
-          <p:txBody>
-            <a:bodyPr/>
-            <a:lstStyle/>
-            <a:p/>
-          </p:txBody>
-        </p:sp>
-        <p:sp>
-          <p:nvSpPr>
-            <p:cNvPr id="24" name="pl24"/>
-            <p:cNvSpPr/>
-            <p:nvPr/>
-          </p:nvSpPr>
-          <p:spPr>
-            <a:xfrm>
-              <a:off x="817517" y="4694198"/>
-              <a:ext cx="7392041" cy="73429"/>
-            </a:xfrm>
-            <a:custGeom>
-              <a:avLst/>
-              <a:pathLst>
-                <a:path w="7392041" h="73429">
+                <a:path w="7090630" h="76081">
                   <a:moveTo>
                     <a:pt x="0" y="0"/>
                   </a:moveTo>
                   <a:lnTo>
-                    <a:pt x="53901" y="559"/>
-                  </a:lnTo>
-                  <a:lnTo>
-                    <a:pt x="131145" y="1360"/>
-                  </a:lnTo>
-                  <a:lnTo>
-                    <a:pt x="208389" y="2160"/>
-                  </a:lnTo>
-                  <a:lnTo>
-                    <a:pt x="285632" y="2960"/>
-                  </a:lnTo>
-                  <a:lnTo>
-                    <a:pt x="362876" y="3759"/>
-                  </a:lnTo>
-                  <a:lnTo>
-                    <a:pt x="440119" y="4557"/>
-                  </a:lnTo>
-                  <a:lnTo>
-                    <a:pt x="517363" y="5354"/>
-                  </a:lnTo>
-                  <a:lnTo>
-                    <a:pt x="594606" y="6151"/>
-                  </a:lnTo>
-                  <a:lnTo>
-                    <a:pt x="671850" y="6946"/>
-                  </a:lnTo>
-                  <a:lnTo>
-                    <a:pt x="749094" y="7742"/>
-                  </a:lnTo>
-                  <a:lnTo>
-                    <a:pt x="826337" y="8536"/>
-                  </a:lnTo>
-                  <a:lnTo>
-                    <a:pt x="903581" y="9330"/>
-                  </a:lnTo>
-                  <a:lnTo>
-                    <a:pt x="980824" y="10122"/>
-                  </a:lnTo>
-                  <a:lnTo>
-                    <a:pt x="1058068" y="10915"/>
-                  </a:lnTo>
-                  <a:lnTo>
-                    <a:pt x="1135311" y="11706"/>
-                  </a:lnTo>
-                  <a:lnTo>
-                    <a:pt x="1212555" y="12497"/>
-                  </a:lnTo>
-                  <a:lnTo>
-                    <a:pt x="1289799" y="13287"/>
-                  </a:lnTo>
-                  <a:lnTo>
-                    <a:pt x="1367042" y="14076"/>
-                  </a:lnTo>
-                  <a:lnTo>
-                    <a:pt x="1444286" y="14864"/>
-                  </a:lnTo>
-                  <a:lnTo>
-                    <a:pt x="1521529" y="15652"/>
-                  </a:lnTo>
-                  <a:lnTo>
-                    <a:pt x="1598773" y="16439"/>
-                  </a:lnTo>
-                  <a:lnTo>
-                    <a:pt x="1676016" y="17225"/>
-                  </a:lnTo>
-                  <a:lnTo>
-                    <a:pt x="1753260" y="18011"/>
-                  </a:lnTo>
-                  <a:lnTo>
-                    <a:pt x="1830504" y="18796"/>
-                  </a:lnTo>
-                  <a:lnTo>
-                    <a:pt x="1907747" y="19580"/>
-                  </a:lnTo>
-                  <a:lnTo>
-                    <a:pt x="1984991" y="20363"/>
-                  </a:lnTo>
-                  <a:lnTo>
-                    <a:pt x="2062234" y="21146"/>
-                  </a:lnTo>
-                  <a:lnTo>
-                    <a:pt x="2139478" y="21928"/>
-                  </a:lnTo>
-                  <a:lnTo>
-                    <a:pt x="2216721" y="22709"/>
-                  </a:lnTo>
-                  <a:lnTo>
-                    <a:pt x="2293965" y="23489"/>
-                  </a:lnTo>
-                  <a:lnTo>
-                    <a:pt x="2371209" y="24269"/>
-                  </a:lnTo>
-                  <a:lnTo>
-                    <a:pt x="2448452" y="25048"/>
-                  </a:lnTo>
-                  <a:lnTo>
-                    <a:pt x="2525696" y="25826"/>
-                  </a:lnTo>
-                  <a:lnTo>
-                    <a:pt x="2602939" y="26604"/>
-                  </a:lnTo>
-                  <a:lnTo>
-                    <a:pt x="2680183" y="27381"/>
-                  </a:lnTo>
-                  <a:lnTo>
-                    <a:pt x="2757426" y="28157"/>
-                  </a:lnTo>
-                  <a:lnTo>
-                    <a:pt x="2834670" y="28932"/>
-                  </a:lnTo>
-                  <a:lnTo>
-                    <a:pt x="2911914" y="29707"/>
-                  </a:lnTo>
-                  <a:lnTo>
-                    <a:pt x="2989157" y="30481"/>
-                  </a:lnTo>
-                  <a:lnTo>
-                    <a:pt x="3066401" y="31254"/>
-                  </a:lnTo>
-                  <a:lnTo>
-                    <a:pt x="3143644" y="32027"/>
-                  </a:lnTo>
-                  <a:lnTo>
-                    <a:pt x="3220888" y="32798"/>
-                  </a:lnTo>
-                  <a:lnTo>
-                    <a:pt x="3298131" y="33570"/>
-                  </a:lnTo>
-                  <a:lnTo>
-                    <a:pt x="3375375" y="34340"/>
-                  </a:lnTo>
-                  <a:lnTo>
-                    <a:pt x="3452619" y="35110"/>
-                  </a:lnTo>
-                  <a:lnTo>
-                    <a:pt x="3529862" y="35879"/>
-                  </a:lnTo>
-                  <a:lnTo>
-                    <a:pt x="3607106" y="36647"/>
-                  </a:lnTo>
-                  <a:lnTo>
-                    <a:pt x="3684349" y="37414"/>
-                  </a:lnTo>
-                  <a:lnTo>
-                    <a:pt x="3761593" y="38181"/>
-                  </a:lnTo>
-                  <a:lnTo>
-                    <a:pt x="3838836" y="38947"/>
-                  </a:lnTo>
-                  <a:lnTo>
-                    <a:pt x="3916080" y="39713"/>
-                  </a:lnTo>
-                  <a:lnTo>
-                    <a:pt x="3993324" y="40477"/>
-                  </a:lnTo>
-                  <a:lnTo>
-                    <a:pt x="4070567" y="41241"/>
-                  </a:lnTo>
-                  <a:lnTo>
-                    <a:pt x="4147811" y="42004"/>
-                  </a:lnTo>
-                  <a:lnTo>
-                    <a:pt x="4225054" y="42767"/>
-                  </a:lnTo>
-                  <a:lnTo>
-                    <a:pt x="4302298" y="43529"/>
-                  </a:lnTo>
-                  <a:lnTo>
-                    <a:pt x="4379541" y="44290"/>
-                  </a:lnTo>
-                  <a:lnTo>
-                    <a:pt x="4456785" y="45050"/>
-                  </a:lnTo>
-                  <a:lnTo>
-                    <a:pt x="4534029" y="45810"/>
-                  </a:lnTo>
-                  <a:lnTo>
-                    <a:pt x="4611272" y="46569"/>
-                  </a:lnTo>
-                  <a:lnTo>
-                    <a:pt x="4688516" y="47327"/>
-                  </a:lnTo>
-                  <a:lnTo>
-                    <a:pt x="4765759" y="48085"/>
-                  </a:lnTo>
-                  <a:lnTo>
-                    <a:pt x="4843003" y="48842"/>
-                  </a:lnTo>
-                  <a:lnTo>
-                    <a:pt x="4920246" y="49598"/>
-                  </a:lnTo>
-                  <a:lnTo>
-                    <a:pt x="4997490" y="50353"/>
-                  </a:lnTo>
-                  <a:lnTo>
-                    <a:pt x="5074734" y="51108"/>
-                  </a:lnTo>
-                  <a:lnTo>
-                    <a:pt x="5151977" y="51862"/>
-                  </a:lnTo>
-                  <a:lnTo>
-                    <a:pt x="5229221" y="52616"/>
-                  </a:lnTo>
-                  <a:lnTo>
-                    <a:pt x="5306464" y="53368"/>
-                  </a:lnTo>
-                  <a:lnTo>
-                    <a:pt x="5383708" y="54120"/>
-                  </a:lnTo>
-                  <a:lnTo>
-                    <a:pt x="5460951" y="54872"/>
-                  </a:lnTo>
-                  <a:lnTo>
-                    <a:pt x="5538195" y="55622"/>
-                  </a:lnTo>
-                  <a:lnTo>
-                    <a:pt x="5615439" y="56372"/>
-                  </a:lnTo>
-                  <a:lnTo>
-                    <a:pt x="5692682" y="57121"/>
-                  </a:lnTo>
-                  <a:lnTo>
-                    <a:pt x="5769926" y="57870"/>
-                  </a:lnTo>
-                  <a:lnTo>
-                    <a:pt x="5847169" y="58618"/>
-                  </a:lnTo>
-                  <a:lnTo>
-                    <a:pt x="5924413" y="59365"/>
-                  </a:lnTo>
-                  <a:lnTo>
-                    <a:pt x="6001656" y="60111"/>
-                  </a:lnTo>
-                  <a:lnTo>
-                    <a:pt x="6078900" y="60857"/>
-                  </a:lnTo>
-                  <a:lnTo>
-                    <a:pt x="6156144" y="61602"/>
-                  </a:lnTo>
-                  <a:lnTo>
-                    <a:pt x="6233387" y="62346"/>
-                  </a:lnTo>
-                  <a:lnTo>
-                    <a:pt x="6310631" y="63090"/>
-                  </a:lnTo>
-                  <a:lnTo>
-                    <a:pt x="6387874" y="63833"/>
-                  </a:lnTo>
-                  <a:lnTo>
-                    <a:pt x="6465118" y="64575"/>
-                  </a:lnTo>
-                  <a:lnTo>
-                    <a:pt x="6542361" y="65317"/>
-                  </a:lnTo>
-                  <a:lnTo>
-                    <a:pt x="6619605" y="66058"/>
-                  </a:lnTo>
-                  <a:lnTo>
-                    <a:pt x="6696849" y="66798"/>
-                  </a:lnTo>
-                  <a:lnTo>
-                    <a:pt x="6774092" y="67537"/>
-                  </a:lnTo>
-                  <a:lnTo>
-                    <a:pt x="6851336" y="68276"/>
-                  </a:lnTo>
-                  <a:lnTo>
-                    <a:pt x="6928579" y="69014"/>
-                  </a:lnTo>
-                  <a:lnTo>
-                    <a:pt x="7005823" y="69752"/>
-                  </a:lnTo>
-                  <a:lnTo>
-                    <a:pt x="7083066" y="70488"/>
-                  </a:lnTo>
-                  <a:lnTo>
-                    <a:pt x="7160310" y="71225"/>
-                  </a:lnTo>
-                  <a:lnTo>
-                    <a:pt x="7237554" y="71960"/>
-                  </a:lnTo>
-                  <a:lnTo>
-                    <a:pt x="7314797" y="72695"/>
-                  </a:lnTo>
-                  <a:lnTo>
-                    <a:pt x="7392041" y="73429"/>
+                    <a:pt x="71622" y="804"/>
+                  </a:lnTo>
+                  <a:lnTo>
+                    <a:pt x="143245" y="1607"/>
+                  </a:lnTo>
+                  <a:lnTo>
+                    <a:pt x="214867" y="2409"/>
+                  </a:lnTo>
+                  <a:lnTo>
+                    <a:pt x="286490" y="3211"/>
+                  </a:lnTo>
+                  <a:lnTo>
+                    <a:pt x="358112" y="4012"/>
+                  </a:lnTo>
+                  <a:lnTo>
+                    <a:pt x="429735" y="4812"/>
+                  </a:lnTo>
+                  <a:lnTo>
+                    <a:pt x="501357" y="5612"/>
+                  </a:lnTo>
+                  <a:lnTo>
+                    <a:pt x="572980" y="6411"/>
+                  </a:lnTo>
+                  <a:lnTo>
+                    <a:pt x="644602" y="7209"/>
+                  </a:lnTo>
+                  <a:lnTo>
+                    <a:pt x="716225" y="8006"/>
+                  </a:lnTo>
+                  <a:lnTo>
+                    <a:pt x="787847" y="8803"/>
+                  </a:lnTo>
+                  <a:lnTo>
+                    <a:pt x="859470" y="9599"/>
+                  </a:lnTo>
+                  <a:lnTo>
+                    <a:pt x="931092" y="10394"/>
+                  </a:lnTo>
+                  <a:lnTo>
+                    <a:pt x="1002715" y="11188"/>
+                  </a:lnTo>
+                  <a:lnTo>
+                    <a:pt x="1074337" y="11982"/>
+                  </a:lnTo>
+                  <a:lnTo>
+                    <a:pt x="1145960" y="12774"/>
+                  </a:lnTo>
+                  <a:lnTo>
+                    <a:pt x="1217582" y="13567"/>
+                  </a:lnTo>
+                  <a:lnTo>
+                    <a:pt x="1289205" y="14358"/>
+                  </a:lnTo>
+                  <a:lnTo>
+                    <a:pt x="1360827" y="15149"/>
+                  </a:lnTo>
+                  <a:lnTo>
+                    <a:pt x="1432450" y="15939"/>
+                  </a:lnTo>
+                  <a:lnTo>
+                    <a:pt x="1504073" y="16728"/>
+                  </a:lnTo>
+                  <a:lnTo>
+                    <a:pt x="1575695" y="17516"/>
+                  </a:lnTo>
+                  <a:lnTo>
+                    <a:pt x="1647318" y="18304"/>
+                  </a:lnTo>
+                  <a:lnTo>
+                    <a:pt x="1718940" y="19091"/>
+                  </a:lnTo>
+                  <a:lnTo>
+                    <a:pt x="1790563" y="19877"/>
+                  </a:lnTo>
+                  <a:lnTo>
+                    <a:pt x="1862185" y="20663"/>
+                  </a:lnTo>
+                  <a:lnTo>
+                    <a:pt x="1933808" y="21448"/>
+                  </a:lnTo>
+                  <a:lnTo>
+                    <a:pt x="2005430" y="22232"/>
+                  </a:lnTo>
+                  <a:lnTo>
+                    <a:pt x="2077053" y="23015"/>
+                  </a:lnTo>
+                  <a:lnTo>
+                    <a:pt x="2148675" y="23798"/>
+                  </a:lnTo>
+                  <a:lnTo>
+                    <a:pt x="2220298" y="24580"/>
+                  </a:lnTo>
+                  <a:lnTo>
+                    <a:pt x="2291920" y="25361"/>
+                  </a:lnTo>
+                  <a:lnTo>
+                    <a:pt x="2363543" y="26141"/>
+                  </a:lnTo>
+                  <a:lnTo>
+                    <a:pt x="2435165" y="26921"/>
+                  </a:lnTo>
+                  <a:lnTo>
+                    <a:pt x="2506788" y="27700"/>
+                  </a:lnTo>
+                  <a:lnTo>
+                    <a:pt x="2578410" y="28478"/>
+                  </a:lnTo>
+                  <a:lnTo>
+                    <a:pt x="2650033" y="29256"/>
+                  </a:lnTo>
+                  <a:lnTo>
+                    <a:pt x="2721655" y="30033"/>
+                  </a:lnTo>
+                  <a:lnTo>
+                    <a:pt x="2793278" y="30809"/>
+                  </a:lnTo>
+                  <a:lnTo>
+                    <a:pt x="2864901" y="31584"/>
+                  </a:lnTo>
+                  <a:lnTo>
+                    <a:pt x="2936523" y="32359"/>
+                  </a:lnTo>
+                  <a:lnTo>
+                    <a:pt x="3008146" y="33133"/>
+                  </a:lnTo>
+                  <a:lnTo>
+                    <a:pt x="3079768" y="33906"/>
+                  </a:lnTo>
+                  <a:lnTo>
+                    <a:pt x="3151391" y="34679"/>
+                  </a:lnTo>
+                  <a:lnTo>
+                    <a:pt x="3223013" y="35451"/>
+                  </a:lnTo>
+                  <a:lnTo>
+                    <a:pt x="3294636" y="36222"/>
+                  </a:lnTo>
+                  <a:lnTo>
+                    <a:pt x="3366258" y="36992"/>
+                  </a:lnTo>
+                  <a:lnTo>
+                    <a:pt x="3437881" y="37762"/>
+                  </a:lnTo>
+                  <a:lnTo>
+                    <a:pt x="3509503" y="38531"/>
+                  </a:lnTo>
+                  <a:lnTo>
+                    <a:pt x="3581126" y="39299"/>
+                  </a:lnTo>
+                  <a:lnTo>
+                    <a:pt x="3652748" y="40066"/>
+                  </a:lnTo>
+                  <a:lnTo>
+                    <a:pt x="3724371" y="40833"/>
+                  </a:lnTo>
+                  <a:lnTo>
+                    <a:pt x="3795993" y="41599"/>
+                  </a:lnTo>
+                  <a:lnTo>
+                    <a:pt x="3867616" y="42365"/>
+                  </a:lnTo>
+                  <a:lnTo>
+                    <a:pt x="3939238" y="43129"/>
+                  </a:lnTo>
+                  <a:lnTo>
+                    <a:pt x="4010861" y="43893"/>
+                  </a:lnTo>
+                  <a:lnTo>
+                    <a:pt x="4082483" y="44656"/>
+                  </a:lnTo>
+                  <a:lnTo>
+                    <a:pt x="4154106" y="45419"/>
+                  </a:lnTo>
+                  <a:lnTo>
+                    <a:pt x="4225729" y="46181"/>
+                  </a:lnTo>
+                  <a:lnTo>
+                    <a:pt x="4297351" y="46942"/>
+                  </a:lnTo>
+                  <a:lnTo>
+                    <a:pt x="4368974" y="47702"/>
+                  </a:lnTo>
+                  <a:lnTo>
+                    <a:pt x="4440596" y="48462"/>
+                  </a:lnTo>
+                  <a:lnTo>
+                    <a:pt x="4512219" y="49221"/>
+                  </a:lnTo>
+                  <a:lnTo>
+                    <a:pt x="4583841" y="49979"/>
+                  </a:lnTo>
+                  <a:lnTo>
+                    <a:pt x="4655464" y="50737"/>
+                  </a:lnTo>
+                  <a:lnTo>
+                    <a:pt x="4727086" y="51494"/>
+                  </a:lnTo>
+                  <a:lnTo>
+                    <a:pt x="4798709" y="52250"/>
+                  </a:lnTo>
+                  <a:lnTo>
+                    <a:pt x="4870331" y="53006"/>
+                  </a:lnTo>
+                  <a:lnTo>
+                    <a:pt x="4941954" y="53760"/>
+                  </a:lnTo>
+                  <a:lnTo>
+                    <a:pt x="5013576" y="54514"/>
+                  </a:lnTo>
+                  <a:lnTo>
+                    <a:pt x="5085199" y="55268"/>
+                  </a:lnTo>
+                  <a:lnTo>
+                    <a:pt x="5156821" y="56020"/>
+                  </a:lnTo>
+                  <a:lnTo>
+                    <a:pt x="5228444" y="56772"/>
+                  </a:lnTo>
+                  <a:lnTo>
+                    <a:pt x="5300066" y="57524"/>
+                  </a:lnTo>
+                  <a:lnTo>
+                    <a:pt x="5371689" y="58274"/>
+                  </a:lnTo>
+                  <a:lnTo>
+                    <a:pt x="5443311" y="59024"/>
+                  </a:lnTo>
+                  <a:lnTo>
+                    <a:pt x="5514934" y="59773"/>
+                  </a:lnTo>
+                  <a:lnTo>
+                    <a:pt x="5586557" y="60522"/>
+                  </a:lnTo>
+                  <a:lnTo>
+                    <a:pt x="5658179" y="61270"/>
+                  </a:lnTo>
+                  <a:lnTo>
+                    <a:pt x="5729802" y="62017"/>
+                  </a:lnTo>
+                  <a:lnTo>
+                    <a:pt x="5801424" y="62763"/>
+                  </a:lnTo>
+                  <a:lnTo>
+                    <a:pt x="5873047" y="63509"/>
+                  </a:lnTo>
+                  <a:lnTo>
+                    <a:pt x="5944669" y="64254"/>
+                  </a:lnTo>
+                  <a:lnTo>
+                    <a:pt x="6016292" y="64998"/>
+                  </a:lnTo>
+                  <a:lnTo>
+                    <a:pt x="6087914" y="65742"/>
+                  </a:lnTo>
+                  <a:lnTo>
+                    <a:pt x="6159537" y="66485"/>
+                  </a:lnTo>
+                  <a:lnTo>
+                    <a:pt x="6231159" y="67227"/>
+                  </a:lnTo>
+                  <a:lnTo>
+                    <a:pt x="6302782" y="67969"/>
+                  </a:lnTo>
+                  <a:lnTo>
+                    <a:pt x="6374404" y="68710"/>
+                  </a:lnTo>
+                  <a:lnTo>
+                    <a:pt x="6446027" y="69450"/>
+                  </a:lnTo>
+                  <a:lnTo>
+                    <a:pt x="6517649" y="70189"/>
+                  </a:lnTo>
+                  <a:lnTo>
+                    <a:pt x="6589272" y="70928"/>
+                  </a:lnTo>
+                  <a:lnTo>
+                    <a:pt x="6660894" y="71666"/>
+                  </a:lnTo>
+                  <a:lnTo>
+                    <a:pt x="6732517" y="72404"/>
+                  </a:lnTo>
+                  <a:lnTo>
+                    <a:pt x="6804139" y="73141"/>
+                  </a:lnTo>
+                  <a:lnTo>
+                    <a:pt x="6875762" y="73877"/>
+                  </a:lnTo>
+                  <a:lnTo>
+                    <a:pt x="6947385" y="74612"/>
+                  </a:lnTo>
+                  <a:lnTo>
+                    <a:pt x="7019007" y="75347"/>
+                  </a:lnTo>
+                  <a:lnTo>
+                    <a:pt x="7090630" y="76081"/>
                   </a:lnTo>
                 </a:path>
               </a:pathLst>
@@ -4566,7 +4568,7 @@
         </p:sp>
         <p:sp>
           <p:nvSpPr>
-            <p:cNvPr id="25" name="pl25"/>
+            <p:cNvPr id="24" name="pl24"/>
             <p:cNvSpPr/>
             <p:nvPr/>
           </p:nvSpPr>
@@ -4609,13 +4611,13 @@
         </p:sp>
         <p:sp>
           <p:nvSpPr>
-            <p:cNvPr id="26" name="pl26"/>
+            <p:cNvPr id="25" name="pl25"/>
             <p:cNvSpPr/>
             <p:nvPr/>
           </p:nvSpPr>
           <p:spPr>
             <a:xfrm>
-              <a:off x="4117484" y="2073503"/>
+              <a:off x="4468386" y="2073503"/>
               <a:ext cx="0" cy="3649639"/>
             </a:xfrm>
             <a:custGeom>
@@ -4652,7 +4654,7 @@
         </p:sp>
         <p:sp>
           <p:nvSpPr>
-            <p:cNvPr id="27" name="tx27"/>
+            <p:cNvPr id="26" name="tx26"/>
             <p:cNvSpPr/>
             <p:nvPr/>
           </p:nvSpPr>
@@ -4698,7 +4700,7 @@
         </p:sp>
         <p:sp>
           <p:nvSpPr>
-            <p:cNvPr id="28" name="tx28"/>
+            <p:cNvPr id="27" name="tx27"/>
             <p:cNvSpPr/>
             <p:nvPr/>
           </p:nvSpPr>
@@ -4744,7 +4746,7 @@
         </p:sp>
         <p:sp>
           <p:nvSpPr>
-            <p:cNvPr id="29" name="tx29"/>
+            <p:cNvPr id="28" name="tx28"/>
             <p:cNvSpPr/>
             <p:nvPr/>
           </p:nvSpPr>
@@ -4790,7 +4792,7 @@
         </p:sp>
         <p:sp>
           <p:nvSpPr>
-            <p:cNvPr id="30" name="tx30"/>
+            <p:cNvPr id="29" name="tx29"/>
             <p:cNvSpPr/>
             <p:nvPr/>
           </p:nvSpPr>
@@ -4836,7 +4838,7 @@
         </p:sp>
         <p:sp>
           <p:nvSpPr>
-            <p:cNvPr id="31" name="tx31"/>
+            <p:cNvPr id="30" name="tx30"/>
             <p:cNvSpPr/>
             <p:nvPr/>
           </p:nvSpPr>
@@ -4882,14 +4884,14 @@
         </p:sp>
         <p:sp>
           <p:nvSpPr>
-            <p:cNvPr id="32" name="tx32"/>
+            <p:cNvPr id="31" name="tx31"/>
             <p:cNvSpPr/>
             <p:nvPr/>
           </p:nvSpPr>
           <p:spPr>
             <a:xfrm>
-              <a:off x="2423864" y="5785772"/>
-              <a:ext cx="155356" cy="80101"/>
+              <a:off x="2478335" y="5785772"/>
+              <a:ext cx="161574" cy="80101"/>
             </a:xfrm>
             <a:prstGeom prst="rect">
               <a:avLst/>
@@ -4921,21 +4923,21 @@
                   <a:latin typeface="Helvetica"/>
                   <a:cs typeface="Helvetica"/>
                 </a:rPr>
-                <a:t>0.8</a:t>
+                <a:t>-25</a:t>
               </a:r>
             </a:p>
           </p:txBody>
         </p:sp>
         <p:sp>
           <p:nvSpPr>
-            <p:cNvPr id="33" name="tx33"/>
+            <p:cNvPr id="32" name="tx32"/>
             <p:cNvSpPr/>
             <p:nvPr/>
           </p:nvSpPr>
           <p:spPr>
             <a:xfrm>
-              <a:off x="4196521" y="5785772"/>
-              <a:ext cx="155356" cy="80101"/>
+              <a:off x="4582608" y="5785772"/>
+              <a:ext cx="62179" cy="80101"/>
             </a:xfrm>
             <a:prstGeom prst="rect">
               <a:avLst/>
@@ -4967,21 +4969,21 @@
                   <a:latin typeface="Helvetica"/>
                   <a:cs typeface="Helvetica"/>
                 </a:rPr>
-                <a:t>1.0</a:t>
+                <a:t>0</a:t>
               </a:r>
             </a:p>
           </p:txBody>
         </p:sp>
         <p:sp>
           <p:nvSpPr>
-            <p:cNvPr id="34" name="tx34"/>
+            <p:cNvPr id="33" name="tx33"/>
             <p:cNvSpPr/>
             <p:nvPr/>
           </p:nvSpPr>
           <p:spPr>
             <a:xfrm>
-              <a:off x="5969179" y="5785772"/>
-              <a:ext cx="155356" cy="80101"/>
+              <a:off x="6606094" y="5785772"/>
+              <a:ext cx="124358" cy="80101"/>
             </a:xfrm>
             <a:prstGeom prst="rect">
               <a:avLst/>
@@ -5013,67 +5015,21 @@
                   <a:latin typeface="Helvetica"/>
                   <a:cs typeface="Helvetica"/>
                 </a:rPr>
-                <a:t>1.2</a:t>
+                <a:t>25</a:t>
               </a:r>
             </a:p>
           </p:txBody>
         </p:sp>
         <p:sp>
           <p:nvSpPr>
-            <p:cNvPr id="35" name="tx35"/>
+            <p:cNvPr id="34" name="tx34"/>
             <p:cNvSpPr/>
             <p:nvPr/>
           </p:nvSpPr>
           <p:spPr>
             <a:xfrm>
-              <a:off x="7741836" y="5785772"/>
-              <a:ext cx="155356" cy="80101"/>
-            </a:xfrm>
-            <a:prstGeom prst="rect">
-              <a:avLst/>
-            </a:prstGeom>
-            <a:noFill/>
-          </p:spPr>
-          <p:txBody>
-            <a:bodyPr lIns="0" rIns="0" tIns="0" bIns="0" anchorCtr="1" anchor="ctr" wrap="none"/>
-            <a:lstStyle/>
-            <a:p>
-              <a:pPr algn="l" marL="0" marR="0" indent="0">
-                <a:lnSpc>
-                  <a:spcPts val="880"/>
-                </a:lnSpc>
-                <a:spcBef>
-                  <a:spcPts val="0"/>
-                </a:spcBef>
-                <a:spcAft>
-                  <a:spcPts val="0"/>
-                </a:spcAft>
-              </a:pPr>
-              <a:r>
-                <a:rPr sz="880">
-                  <a:solidFill>
-                    <a:srgbClr val="4D4D4D">
-                      <a:alpha val="100000"/>
-                    </a:srgbClr>
-                  </a:solidFill>
-                  <a:latin typeface="Helvetica"/>
-                  <a:cs typeface="Helvetica"/>
-                </a:rPr>
-                <a:t>1.4</a:t>
-              </a:r>
-            </a:p>
-          </p:txBody>
-        </p:sp>
-        <p:sp>
-          <p:nvSpPr>
-            <p:cNvPr id="36" name="tx36"/>
-            <p:cNvSpPr/>
-            <p:nvPr/>
-          </p:nvSpPr>
-          <p:spPr>
-            <a:xfrm>
-              <a:off x="3879271" y="5925448"/>
-              <a:ext cx="1676186" cy="100218"/>
+              <a:off x="2928340" y="5925448"/>
+              <a:ext cx="3578047" cy="100218"/>
             </a:xfrm>
             <a:prstGeom prst="rect">
               <a:avLst/>
@@ -5105,14 +5061,14 @@
                   <a:latin typeface="Helvetica"/>
                   <a:cs typeface="Helvetica"/>
                 </a:rPr>
-                <a:t>CKD-EPI Cr-Cys / CG ratio</a:t>
+                <a:t>eGFR difference (%): 100 × (CKD-EPI Cr-Cys − CG) / CG</a:t>
               </a:r>
             </a:p>
           </p:txBody>
         </p:sp>
         <p:sp>
           <p:nvSpPr>
-            <p:cNvPr id="37" name="tx37"/>
+            <p:cNvPr id="35" name="tx35"/>
             <p:cNvSpPr/>
             <p:nvPr/>
           </p:nvSpPr>
@@ -5158,14 +5114,14 @@
         </p:sp>
         <p:sp>
           <p:nvSpPr>
-            <p:cNvPr id="38" name="tx38"/>
+            <p:cNvPr id="36" name="tx36"/>
             <p:cNvSpPr/>
             <p:nvPr/>
           </p:nvSpPr>
           <p:spPr>
             <a:xfrm>
               <a:off x="817517" y="1896563"/>
-              <a:ext cx="6169365" cy="82021"/>
+              <a:ext cx="6321612" cy="82021"/>
             </a:xfrm>
             <a:prstGeom prst="rect">
               <a:avLst/>
@@ -5197,14 +5153,14 @@
                   <a:latin typeface="Helvetica"/>
                   <a:cs typeface="Helvetica"/>
                 </a:rPr>
-                <a:t>subHR per 0.1 ratio decline: 1.01 (0.83-1.24), p = 0.918  |  per IQR decline (Δ = 0.30): 1.03 (0.57-1.88)  |  IQR: [0.84, 1.14]</a:t>
+                <a:t>subHR per 10 % decline: 1.01 (0.83-1.24), p = 0.918  |  per IQR decline (Δ = 29.5 %): 1.03 (0.57-1.88)  |  IQR: [-15.6, 13.9] %</a:t>
               </a:r>
             </a:p>
           </p:txBody>
         </p:sp>
         <p:sp>
           <p:nvSpPr>
-            <p:cNvPr id="39" name="tx39"/>
+            <p:cNvPr id="37" name="tx37"/>
             <p:cNvSpPr/>
             <p:nvPr/>
           </p:nvSpPr>

--- a/docs/pptx/auc3/jx-auc3-linsubhr-ratio-hosp10.pptx
+++ b/docs/pptx/auc3/jx-auc3-linsubhr-ratio-hosp10.pptx
@@ -2265,34 +2265,26 @@
         </p:sp>
         <p:sp>
           <p:nvSpPr>
-            <p:cNvPr id="4" name="pl4"/>
+            <p:cNvPr id="4" name="rc4"/>
             <p:cNvSpPr/>
             <p:nvPr/>
           </p:nvSpPr>
           <p:spPr>
             <a:xfrm>
-              <a:off x="817517" y="5142518"/>
-              <a:ext cx="7799693" cy="0"/>
+              <a:off x="457200" y="1600200"/>
+              <a:ext cx="8229600" cy="4525962"/>
             </a:xfrm>
-            <a:custGeom>
+            <a:prstGeom prst="rect">
               <a:avLst/>
-              <a:pathLst>
-                <a:path w="7799693" h="0">
-                  <a:moveTo>
-                    <a:pt x="0" y="0"/>
-                  </a:moveTo>
-                  <a:lnTo>
-                    <a:pt x="7799693" y="0"/>
-                  </a:lnTo>
-                  <a:lnTo>
-                    <a:pt x="7799693" y="0"/>
-                  </a:lnTo>
-                </a:path>
-              </a:pathLst>
-            </a:custGeom>
-            <a:ln w="6775" cap="flat">
+            </a:prstGeom>
+            <a:solidFill>
+              <a:srgbClr val="FFFFFF">
+                <a:alpha val="100000"/>
+              </a:srgbClr>
+            </a:solidFill>
+            <a:ln w="13550" cap="rnd">
               <a:solidFill>
-                <a:srgbClr val="EBEBEB">
+                <a:srgbClr val="FFFFFF">
                   <a:alpha val="100000"/>
                 </a:srgbClr>
               </a:solidFill>
@@ -2314,21 +2306,21 @@
           </p:nvSpPr>
           <p:spPr>
             <a:xfrm>
-              <a:off x="817517" y="4313054"/>
-              <a:ext cx="7799693" cy="0"/>
+              <a:off x="887106" y="3250627"/>
+              <a:ext cx="7660515" cy="0"/>
             </a:xfrm>
             <a:custGeom>
               <a:avLst/>
               <a:pathLst>
-                <a:path w="7799693" h="0">
+                <a:path w="7660515" h="0">
                   <a:moveTo>
                     <a:pt x="0" y="0"/>
                   </a:moveTo>
                   <a:lnTo>
-                    <a:pt x="7799693" y="0"/>
-                  </a:lnTo>
-                  <a:lnTo>
-                    <a:pt x="7799693" y="0"/>
+                    <a:pt x="7660515" y="0"/>
+                  </a:lnTo>
+                  <a:lnTo>
+                    <a:pt x="7660515" y="0"/>
                   </a:lnTo>
                 </a:path>
               </a:pathLst>
@@ -2357,21 +2349,21 @@
           </p:nvSpPr>
           <p:spPr>
             <a:xfrm>
-              <a:off x="817517" y="3483591"/>
-              <a:ext cx="7799693" cy="0"/>
+              <a:off x="887106" y="2951293"/>
+              <a:ext cx="7660515" cy="0"/>
             </a:xfrm>
             <a:custGeom>
               <a:avLst/>
               <a:pathLst>
-                <a:path w="7799693" h="0">
+                <a:path w="7660515" h="0">
                   <a:moveTo>
                     <a:pt x="0" y="0"/>
                   </a:moveTo>
                   <a:lnTo>
-                    <a:pt x="7799693" y="0"/>
-                  </a:lnTo>
-                  <a:lnTo>
-                    <a:pt x="7799693" y="0"/>
+                    <a:pt x="7660515" y="0"/>
+                  </a:lnTo>
+                  <a:lnTo>
+                    <a:pt x="7660515" y="0"/>
                   </a:lnTo>
                 </a:path>
               </a:pathLst>
@@ -2400,21 +2392,21 @@
           </p:nvSpPr>
           <p:spPr>
             <a:xfrm>
-              <a:off x="817517" y="2654127"/>
-              <a:ext cx="7799693" cy="0"/>
+              <a:off x="887106" y="2651959"/>
+              <a:ext cx="7660515" cy="0"/>
             </a:xfrm>
             <a:custGeom>
               <a:avLst/>
               <a:pathLst>
-                <a:path w="7799693" h="0">
+                <a:path w="7660515" h="0">
                   <a:moveTo>
                     <a:pt x="0" y="0"/>
                   </a:moveTo>
                   <a:lnTo>
-                    <a:pt x="7799693" y="0"/>
-                  </a:lnTo>
-                  <a:lnTo>
-                    <a:pt x="7799693" y="0"/>
+                    <a:pt x="7660515" y="0"/>
+                  </a:lnTo>
+                  <a:lnTo>
+                    <a:pt x="7660515" y="0"/>
                   </a:lnTo>
                 </a:path>
               </a:pathLst>
@@ -2443,21 +2435,21 @@
           </p:nvSpPr>
           <p:spPr>
             <a:xfrm>
-              <a:off x="1531834" y="2073503"/>
-              <a:ext cx="0" cy="3649639"/>
+              <a:off x="887106" y="2352625"/>
+              <a:ext cx="7660515" cy="0"/>
             </a:xfrm>
             <a:custGeom>
               <a:avLst/>
               <a:pathLst>
-                <a:path w="0" h="3649639">
+                <a:path w="7660515" h="0">
                   <a:moveTo>
-                    <a:pt x="0" y="3649639"/>
+                    <a:pt x="0" y="0"/>
                   </a:moveTo>
                   <a:lnTo>
-                    <a:pt x="0" y="0"/>
-                  </a:lnTo>
-                  <a:lnTo>
-                    <a:pt x="0" y="0"/>
+                    <a:pt x="7660515" y="0"/>
+                  </a:lnTo>
+                  <a:lnTo>
+                    <a:pt x="7660515" y="0"/>
                   </a:lnTo>
                 </a:path>
               </a:pathLst>
@@ -2486,15 +2478,15 @@
           </p:nvSpPr>
           <p:spPr>
             <a:xfrm>
-              <a:off x="3586410" y="2073503"/>
-              <a:ext cx="0" cy="3649639"/>
+              <a:off x="1588677" y="2143092"/>
+              <a:ext cx="0" cy="1317069"/>
             </a:xfrm>
             <a:custGeom>
               <a:avLst/>
               <a:pathLst>
-                <a:path w="0" h="3649639">
+                <a:path w="0" h="1317069">
                   <a:moveTo>
-                    <a:pt x="0" y="3649639"/>
+                    <a:pt x="0" y="1317069"/>
                   </a:moveTo>
                   <a:lnTo>
                     <a:pt x="0" y="0"/>
@@ -2529,15 +2521,15 @@
           </p:nvSpPr>
           <p:spPr>
             <a:xfrm>
-              <a:off x="5640985" y="2073503"/>
-              <a:ext cx="0" cy="3649639"/>
+              <a:off x="3606590" y="2143092"/>
+              <a:ext cx="0" cy="1317069"/>
             </a:xfrm>
             <a:custGeom>
               <a:avLst/>
               <a:pathLst>
-                <a:path w="0" h="3649639">
+                <a:path w="0" h="1317069">
                   <a:moveTo>
-                    <a:pt x="0" y="3649639"/>
+                    <a:pt x="0" y="1317069"/>
                   </a:moveTo>
                   <a:lnTo>
                     <a:pt x="0" y="0"/>
@@ -2572,15 +2564,15 @@
           </p:nvSpPr>
           <p:spPr>
             <a:xfrm>
-              <a:off x="7695561" y="2073503"/>
-              <a:ext cx="0" cy="3649639"/>
+              <a:off x="5624504" y="2143092"/>
+              <a:ext cx="0" cy="1317069"/>
             </a:xfrm>
             <a:custGeom>
               <a:avLst/>
               <a:pathLst>
-                <a:path w="0" h="3649639">
+                <a:path w="0" h="1317069">
                   <a:moveTo>
-                    <a:pt x="0" y="3649639"/>
+                    <a:pt x="0" y="1317069"/>
                   </a:moveTo>
                   <a:lnTo>
                     <a:pt x="0" y="0"/>
@@ -2615,26 +2607,26 @@
           </p:nvSpPr>
           <p:spPr>
             <a:xfrm>
-              <a:off x="817517" y="5557249"/>
-              <a:ext cx="7799693" cy="0"/>
+              <a:off x="7642418" y="2143092"/>
+              <a:ext cx="0" cy="1317069"/>
             </a:xfrm>
             <a:custGeom>
               <a:avLst/>
               <a:pathLst>
-                <a:path w="7799693" h="0">
+                <a:path w="0" h="1317069">
                   <a:moveTo>
+                    <a:pt x="0" y="1317069"/>
+                  </a:moveTo>
+                  <a:lnTo>
                     <a:pt x="0" y="0"/>
-                  </a:moveTo>
-                  <a:lnTo>
-                    <a:pt x="7799693" y="0"/>
-                  </a:lnTo>
-                  <a:lnTo>
-                    <a:pt x="7799693" y="0"/>
+                  </a:lnTo>
+                  <a:lnTo>
+                    <a:pt x="0" y="0"/>
                   </a:lnTo>
                 </a:path>
               </a:pathLst>
             </a:custGeom>
-            <a:ln w="13550" cap="flat">
+            <a:ln w="6775" cap="flat">
               <a:solidFill>
                 <a:srgbClr val="EBEBEB">
                   <a:alpha val="100000"/>
@@ -2658,21 +2650,21 @@
           </p:nvSpPr>
           <p:spPr>
             <a:xfrm>
-              <a:off x="817517" y="4727786"/>
-              <a:ext cx="7799693" cy="0"/>
+              <a:off x="887106" y="3400294"/>
+              <a:ext cx="7660515" cy="0"/>
             </a:xfrm>
             <a:custGeom>
               <a:avLst/>
               <a:pathLst>
-                <a:path w="7799693" h="0">
+                <a:path w="7660515" h="0">
                   <a:moveTo>
                     <a:pt x="0" y="0"/>
                   </a:moveTo>
                   <a:lnTo>
-                    <a:pt x="7799693" y="0"/>
-                  </a:lnTo>
-                  <a:lnTo>
-                    <a:pt x="7799693" y="0"/>
+                    <a:pt x="7660515" y="0"/>
+                  </a:lnTo>
+                  <a:lnTo>
+                    <a:pt x="7660515" y="0"/>
                   </a:lnTo>
                 </a:path>
               </a:pathLst>
@@ -2701,21 +2693,21 @@
           </p:nvSpPr>
           <p:spPr>
             <a:xfrm>
-              <a:off x="817517" y="3898322"/>
-              <a:ext cx="7799693" cy="0"/>
+              <a:off x="887106" y="3100960"/>
+              <a:ext cx="7660515" cy="0"/>
             </a:xfrm>
             <a:custGeom>
               <a:avLst/>
               <a:pathLst>
-                <a:path w="7799693" h="0">
+                <a:path w="7660515" h="0">
                   <a:moveTo>
                     <a:pt x="0" y="0"/>
                   </a:moveTo>
                   <a:lnTo>
-                    <a:pt x="7799693" y="0"/>
-                  </a:lnTo>
-                  <a:lnTo>
-                    <a:pt x="7799693" y="0"/>
+                    <a:pt x="7660515" y="0"/>
+                  </a:lnTo>
+                  <a:lnTo>
+                    <a:pt x="7660515" y="0"/>
                   </a:lnTo>
                 </a:path>
               </a:pathLst>
@@ -2744,21 +2736,21 @@
           </p:nvSpPr>
           <p:spPr>
             <a:xfrm>
-              <a:off x="817517" y="3068859"/>
-              <a:ext cx="7799693" cy="0"/>
+              <a:off x="887106" y="2801626"/>
+              <a:ext cx="7660515" cy="0"/>
             </a:xfrm>
             <a:custGeom>
               <a:avLst/>
               <a:pathLst>
-                <a:path w="7799693" h="0">
+                <a:path w="7660515" h="0">
                   <a:moveTo>
                     <a:pt x="0" y="0"/>
                   </a:moveTo>
                   <a:lnTo>
-                    <a:pt x="7799693" y="0"/>
-                  </a:lnTo>
-                  <a:lnTo>
-                    <a:pt x="7799693" y="0"/>
+                    <a:pt x="7660515" y="0"/>
+                  </a:lnTo>
+                  <a:lnTo>
+                    <a:pt x="7660515" y="0"/>
                   </a:lnTo>
                 </a:path>
               </a:pathLst>
@@ -2787,21 +2779,21 @@
           </p:nvSpPr>
           <p:spPr>
             <a:xfrm>
-              <a:off x="817517" y="2239395"/>
-              <a:ext cx="7799693" cy="0"/>
+              <a:off x="887106" y="2502292"/>
+              <a:ext cx="7660515" cy="0"/>
             </a:xfrm>
             <a:custGeom>
               <a:avLst/>
               <a:pathLst>
-                <a:path w="7799693" h="0">
+                <a:path w="7660515" h="0">
                   <a:moveTo>
                     <a:pt x="0" y="0"/>
                   </a:moveTo>
                   <a:lnTo>
-                    <a:pt x="7799693" y="0"/>
-                  </a:lnTo>
-                  <a:lnTo>
-                    <a:pt x="7799693" y="0"/>
+                    <a:pt x="7660515" y="0"/>
+                  </a:lnTo>
+                  <a:lnTo>
+                    <a:pt x="7660515" y="0"/>
                   </a:lnTo>
                 </a:path>
               </a:pathLst>
@@ -2830,21 +2822,21 @@
           </p:nvSpPr>
           <p:spPr>
             <a:xfrm>
-              <a:off x="2559122" y="2073503"/>
-              <a:ext cx="0" cy="3649639"/>
+              <a:off x="887106" y="2202958"/>
+              <a:ext cx="7660515" cy="0"/>
             </a:xfrm>
             <a:custGeom>
               <a:avLst/>
               <a:pathLst>
-                <a:path w="0" h="3649639">
+                <a:path w="7660515" h="0">
                   <a:moveTo>
-                    <a:pt x="0" y="3649639"/>
+                    <a:pt x="0" y="0"/>
                   </a:moveTo>
                   <a:lnTo>
-                    <a:pt x="0" y="0"/>
-                  </a:lnTo>
-                  <a:lnTo>
-                    <a:pt x="0" y="0"/>
+                    <a:pt x="7660515" y="0"/>
+                  </a:lnTo>
+                  <a:lnTo>
+                    <a:pt x="7660515" y="0"/>
                   </a:lnTo>
                 </a:path>
               </a:pathLst>
@@ -2873,15 +2865,15 @@
           </p:nvSpPr>
           <p:spPr>
             <a:xfrm>
-              <a:off x="4613698" y="2073503"/>
-              <a:ext cx="0" cy="3649639"/>
+              <a:off x="2597634" y="2143092"/>
+              <a:ext cx="0" cy="1317069"/>
             </a:xfrm>
             <a:custGeom>
               <a:avLst/>
               <a:pathLst>
-                <a:path w="0" h="3649639">
+                <a:path w="0" h="1317069">
                   <a:moveTo>
-                    <a:pt x="0" y="3649639"/>
+                    <a:pt x="0" y="1317069"/>
                   </a:moveTo>
                   <a:lnTo>
                     <a:pt x="0" y="0"/>
@@ -2916,15 +2908,15 @@
           </p:nvSpPr>
           <p:spPr>
             <a:xfrm>
-              <a:off x="6668273" y="2073503"/>
-              <a:ext cx="0" cy="3649639"/>
+              <a:off x="4615547" y="2143092"/>
+              <a:ext cx="0" cy="1317069"/>
             </a:xfrm>
             <a:custGeom>
               <a:avLst/>
               <a:pathLst>
-                <a:path w="0" h="3649639">
+                <a:path w="0" h="1317069">
                   <a:moveTo>
-                    <a:pt x="0" y="3649639"/>
+                    <a:pt x="0" y="1317069"/>
                   </a:moveTo>
                   <a:lnTo>
                     <a:pt x="0" y="0"/>
@@ -2953,618 +2945,661 @@
         </p:sp>
         <p:sp>
           <p:nvSpPr>
-            <p:cNvPr id="20" name="pg20"/>
+            <p:cNvPr id="20" name="pl20"/>
             <p:cNvSpPr/>
             <p:nvPr/>
           </p:nvSpPr>
           <p:spPr>
             <a:xfrm>
-              <a:off x="1172049" y="3548938"/>
-              <a:ext cx="7090630" cy="1697849"/>
+              <a:off x="6633461" y="2143092"/>
+              <a:ext cx="0" cy="1317069"/>
             </a:xfrm>
             <a:custGeom>
               <a:avLst/>
               <a:pathLst>
-                <a:path w="7090630" h="1697849">
+                <a:path w="0" h="1317069">
                   <a:moveTo>
-                    <a:pt x="0" y="60372"/>
+                    <a:pt x="0" y="1317069"/>
                   </a:moveTo>
                   <a:lnTo>
-                    <a:pt x="71622" y="96173"/>
-                  </a:lnTo>
-                  <a:lnTo>
-                    <a:pt x="143245" y="131317"/>
-                  </a:lnTo>
-                  <a:lnTo>
-                    <a:pt x="214867" y="165814"/>
-                  </a:lnTo>
-                  <a:lnTo>
-                    <a:pt x="286490" y="199678"/>
-                  </a:lnTo>
-                  <a:lnTo>
-                    <a:pt x="358112" y="232919"/>
-                  </a:lnTo>
-                  <a:lnTo>
-                    <a:pt x="429735" y="265549"/>
-                  </a:lnTo>
-                  <a:lnTo>
-                    <a:pt x="501357" y="297580"/>
-                  </a:lnTo>
-                  <a:lnTo>
-                    <a:pt x="572980" y="329022"/>
-                  </a:lnTo>
-                  <a:lnTo>
-                    <a:pt x="644602" y="359885"/>
-                  </a:lnTo>
-                  <a:lnTo>
-                    <a:pt x="716225" y="390182"/>
-                  </a:lnTo>
-                  <a:lnTo>
-                    <a:pt x="787847" y="419922"/>
-                  </a:lnTo>
-                  <a:lnTo>
-                    <a:pt x="859470" y="449115"/>
-                  </a:lnTo>
-                  <a:lnTo>
-                    <a:pt x="931092" y="477772"/>
-                  </a:lnTo>
-                  <a:lnTo>
-                    <a:pt x="1002715" y="505902"/>
-                  </a:lnTo>
-                  <a:lnTo>
-                    <a:pt x="1074337" y="533515"/>
-                  </a:lnTo>
-                  <a:lnTo>
-                    <a:pt x="1145960" y="560621"/>
-                  </a:lnTo>
-                  <a:lnTo>
-                    <a:pt x="1217582" y="587228"/>
-                  </a:lnTo>
-                  <a:lnTo>
-                    <a:pt x="1289205" y="613346"/>
-                  </a:lnTo>
-                  <a:lnTo>
-                    <a:pt x="1360827" y="638985"/>
-                  </a:lnTo>
-                  <a:lnTo>
-                    <a:pt x="1432450" y="664152"/>
-                  </a:lnTo>
-                  <a:lnTo>
-                    <a:pt x="1504073" y="688856"/>
-                  </a:lnTo>
-                  <a:lnTo>
-                    <a:pt x="1575695" y="713107"/>
-                  </a:lnTo>
-                  <a:lnTo>
-                    <a:pt x="1647318" y="736912"/>
-                  </a:lnTo>
-                  <a:lnTo>
-                    <a:pt x="1718940" y="760279"/>
-                  </a:lnTo>
-                  <a:lnTo>
-                    <a:pt x="1790563" y="783217"/>
-                  </a:lnTo>
-                  <a:lnTo>
-                    <a:pt x="1862185" y="805733"/>
-                  </a:lnTo>
-                  <a:lnTo>
-                    <a:pt x="1933808" y="827835"/>
-                  </a:lnTo>
-                  <a:lnTo>
-                    <a:pt x="2005430" y="849531"/>
-                  </a:lnTo>
-                  <a:lnTo>
-                    <a:pt x="2077053" y="870829"/>
-                  </a:lnTo>
-                  <a:lnTo>
-                    <a:pt x="2148675" y="891735"/>
-                  </a:lnTo>
-                  <a:lnTo>
-                    <a:pt x="2220298" y="912257"/>
-                  </a:lnTo>
-                  <a:lnTo>
-                    <a:pt x="2291920" y="932401"/>
-                  </a:lnTo>
-                  <a:lnTo>
-                    <a:pt x="2363543" y="952176"/>
-                  </a:lnTo>
-                  <a:lnTo>
-                    <a:pt x="2435165" y="971586"/>
-                  </a:lnTo>
-                  <a:lnTo>
-                    <a:pt x="2506788" y="990641"/>
-                  </a:lnTo>
-                  <a:lnTo>
-                    <a:pt x="2578410" y="1009345"/>
-                  </a:lnTo>
-                  <a:lnTo>
-                    <a:pt x="2650033" y="1027705"/>
-                  </a:lnTo>
-                  <a:lnTo>
-                    <a:pt x="2721655" y="1045727"/>
-                  </a:lnTo>
-                  <a:lnTo>
-                    <a:pt x="2793278" y="1063419"/>
-                  </a:lnTo>
-                  <a:lnTo>
-                    <a:pt x="2864901" y="1080785"/>
-                  </a:lnTo>
-                  <a:lnTo>
-                    <a:pt x="2936523" y="1097832"/>
-                  </a:lnTo>
-                  <a:lnTo>
-                    <a:pt x="3008146" y="1114566"/>
-                  </a:lnTo>
-                  <a:lnTo>
-                    <a:pt x="3079768" y="1130993"/>
-                  </a:lnTo>
-                  <a:lnTo>
-                    <a:pt x="3151391" y="1147117"/>
-                  </a:lnTo>
-                  <a:lnTo>
-                    <a:pt x="3223013" y="1162945"/>
-                  </a:lnTo>
-                  <a:lnTo>
-                    <a:pt x="3294636" y="1178482"/>
-                  </a:lnTo>
-                  <a:lnTo>
-                    <a:pt x="3366258" y="1165221"/>
-                  </a:lnTo>
-                  <a:lnTo>
-                    <a:pt x="3437881" y="1151030"/>
-                  </a:lnTo>
-                  <a:lnTo>
-                    <a:pt x="3509503" y="1136600"/>
-                  </a:lnTo>
-                  <a:lnTo>
-                    <a:pt x="3581126" y="1121927"/>
-                  </a:lnTo>
-                  <a:lnTo>
-                    <a:pt x="3652748" y="1107008"/>
-                  </a:lnTo>
-                  <a:lnTo>
-                    <a:pt x="3724371" y="1091837"/>
-                  </a:lnTo>
-                  <a:lnTo>
-                    <a:pt x="3795993" y="1076411"/>
-                  </a:lnTo>
-                  <a:lnTo>
-                    <a:pt x="3867616" y="1060726"/>
-                  </a:lnTo>
-                  <a:lnTo>
-                    <a:pt x="3939238" y="1044776"/>
-                  </a:lnTo>
-                  <a:lnTo>
-                    <a:pt x="4010861" y="1028558"/>
-                  </a:lnTo>
-                  <a:lnTo>
-                    <a:pt x="4082483" y="1012067"/>
-                  </a:lnTo>
-                  <a:lnTo>
-                    <a:pt x="4154106" y="995298"/>
-                  </a:lnTo>
-                  <a:lnTo>
-                    <a:pt x="4225729" y="978247"/>
-                  </a:lnTo>
-                  <a:lnTo>
-                    <a:pt x="4297351" y="960909"/>
-                  </a:lnTo>
-                  <a:lnTo>
-                    <a:pt x="4368974" y="943279"/>
-                  </a:lnTo>
-                  <a:lnTo>
-                    <a:pt x="4440596" y="925353"/>
-                  </a:lnTo>
-                  <a:lnTo>
-                    <a:pt x="4512219" y="907124"/>
-                  </a:lnTo>
-                  <a:lnTo>
-                    <a:pt x="4583841" y="888589"/>
-                  </a:lnTo>
-                  <a:lnTo>
-                    <a:pt x="4655464" y="869742"/>
-                  </a:lnTo>
-                  <a:lnTo>
-                    <a:pt x="4727086" y="850578"/>
-                  </a:lnTo>
-                  <a:lnTo>
-                    <a:pt x="4798709" y="831091"/>
-                  </a:lnTo>
-                  <a:lnTo>
-                    <a:pt x="4870331" y="811276"/>
-                  </a:lnTo>
-                  <a:lnTo>
-                    <a:pt x="4941954" y="791128"/>
-                  </a:lnTo>
-                  <a:lnTo>
-                    <a:pt x="5013576" y="770640"/>
-                  </a:lnTo>
-                  <a:lnTo>
-                    <a:pt x="5085199" y="749808"/>
-                  </a:lnTo>
-                  <a:lnTo>
-                    <a:pt x="5156821" y="728625"/>
-                  </a:lnTo>
-                  <a:lnTo>
-                    <a:pt x="5228444" y="707085"/>
-                  </a:lnTo>
-                  <a:lnTo>
-                    <a:pt x="5300066" y="685183"/>
-                  </a:lnTo>
-                  <a:lnTo>
-                    <a:pt x="5371689" y="662912"/>
-                  </a:lnTo>
-                  <a:lnTo>
-                    <a:pt x="5443311" y="640267"/>
-                  </a:lnTo>
-                  <a:lnTo>
-                    <a:pt x="5514934" y="617240"/>
-                  </a:lnTo>
-                  <a:lnTo>
-                    <a:pt x="5586557" y="593826"/>
-                  </a:lnTo>
-                  <a:lnTo>
-                    <a:pt x="5658179" y="570017"/>
-                  </a:lnTo>
-                  <a:lnTo>
-                    <a:pt x="5729802" y="545808"/>
-                  </a:lnTo>
-                  <a:lnTo>
-                    <a:pt x="5801424" y="521191"/>
-                  </a:lnTo>
-                  <a:lnTo>
-                    <a:pt x="5873047" y="496160"/>
-                  </a:lnTo>
-                  <a:lnTo>
-                    <a:pt x="5944669" y="470708"/>
-                  </a:lnTo>
-                  <a:lnTo>
-                    <a:pt x="6016292" y="444827"/>
-                  </a:lnTo>
-                  <a:lnTo>
-                    <a:pt x="6087914" y="418510"/>
-                  </a:lnTo>
-                  <a:lnTo>
-                    <a:pt x="6159537" y="391751"/>
-                  </a:lnTo>
-                  <a:lnTo>
-                    <a:pt x="6231159" y="364541"/>
-                  </a:lnTo>
-                  <a:lnTo>
-                    <a:pt x="6302782" y="336873"/>
-                  </a:lnTo>
-                  <a:lnTo>
-                    <a:pt x="6374404" y="308740"/>
-                  </a:lnTo>
-                  <a:lnTo>
-                    <a:pt x="6446027" y="280133"/>
-                  </a:lnTo>
-                  <a:lnTo>
-                    <a:pt x="6517649" y="251044"/>
-                  </a:lnTo>
-                  <a:lnTo>
-                    <a:pt x="6589272" y="221466"/>
-                  </a:lnTo>
-                  <a:lnTo>
-                    <a:pt x="6660894" y="191390"/>
-                  </a:lnTo>
-                  <a:lnTo>
-                    <a:pt x="6732517" y="160808"/>
-                  </a:lnTo>
-                  <a:lnTo>
-                    <a:pt x="6804139" y="129711"/>
-                  </a:lnTo>
-                  <a:lnTo>
-                    <a:pt x="6875762" y="98090"/>
-                  </a:lnTo>
-                  <a:lnTo>
-                    <a:pt x="6947385" y="65938"/>
-                  </a:lnTo>
-                  <a:lnTo>
-                    <a:pt x="7019007" y="33244"/>
-                  </a:lnTo>
-                  <a:lnTo>
-                    <a:pt x="7090630" y="0"/>
-                  </a:lnTo>
-                  <a:lnTo>
-                    <a:pt x="7090630" y="1697849"/>
-                  </a:lnTo>
-                  <a:lnTo>
-                    <a:pt x="7019007" y="1692037"/>
-                  </a:lnTo>
-                  <a:lnTo>
-                    <a:pt x="6947385" y="1686115"/>
-                  </a:lnTo>
-                  <a:lnTo>
-                    <a:pt x="6875762" y="1680082"/>
-                  </a:lnTo>
-                  <a:lnTo>
-                    <a:pt x="6804139" y="1673937"/>
-                  </a:lnTo>
-                  <a:lnTo>
-                    <a:pt x="6732517" y="1667676"/>
-                  </a:lnTo>
-                  <a:lnTo>
-                    <a:pt x="6660894" y="1661298"/>
-                  </a:lnTo>
-                  <a:lnTo>
-                    <a:pt x="6589272" y="1654801"/>
-                  </a:lnTo>
-                  <a:lnTo>
-                    <a:pt x="6517649" y="1648182"/>
-                  </a:lnTo>
-                  <a:lnTo>
-                    <a:pt x="6446027" y="1641439"/>
-                  </a:lnTo>
-                  <a:lnTo>
-                    <a:pt x="6374404" y="1634570"/>
-                  </a:lnTo>
-                  <a:lnTo>
-                    <a:pt x="6302782" y="1627573"/>
-                  </a:lnTo>
-                  <a:lnTo>
-                    <a:pt x="6231159" y="1620444"/>
-                  </a:lnTo>
-                  <a:lnTo>
-                    <a:pt x="6159537" y="1613182"/>
-                  </a:lnTo>
-                  <a:lnTo>
-                    <a:pt x="6087914" y="1605784"/>
-                  </a:lnTo>
-                  <a:lnTo>
-                    <a:pt x="6016292" y="1598247"/>
-                  </a:lnTo>
-                  <a:lnTo>
-                    <a:pt x="5944669" y="1590569"/>
-                  </a:lnTo>
-                  <a:lnTo>
-                    <a:pt x="5873047" y="1582748"/>
-                  </a:lnTo>
-                  <a:lnTo>
-                    <a:pt x="5801424" y="1574780"/>
-                  </a:lnTo>
-                  <a:lnTo>
-                    <a:pt x="5729802" y="1566663"/>
-                  </a:lnTo>
-                  <a:lnTo>
-                    <a:pt x="5658179" y="1558394"/>
-                  </a:lnTo>
-                  <a:lnTo>
-                    <a:pt x="5586557" y="1549970"/>
-                  </a:lnTo>
-                  <a:lnTo>
-                    <a:pt x="5514934" y="1541388"/>
-                  </a:lnTo>
-                  <a:lnTo>
-                    <a:pt x="5443311" y="1532646"/>
-                  </a:lnTo>
-                  <a:lnTo>
-                    <a:pt x="5371689" y="1523740"/>
-                  </a:lnTo>
-                  <a:lnTo>
-                    <a:pt x="5300066" y="1514667"/>
-                  </a:lnTo>
-                  <a:lnTo>
-                    <a:pt x="5228444" y="1505424"/>
-                  </a:lnTo>
-                  <a:lnTo>
-                    <a:pt x="5156821" y="1496009"/>
-                  </a:lnTo>
-                  <a:lnTo>
-                    <a:pt x="5085199" y="1486417"/>
-                  </a:lnTo>
-                  <a:lnTo>
-                    <a:pt x="5013576" y="1476645"/>
-                  </a:lnTo>
-                  <a:lnTo>
-                    <a:pt x="4941954" y="1466691"/>
-                  </a:lnTo>
-                  <a:lnTo>
-                    <a:pt x="4870331" y="1456550"/>
-                  </a:lnTo>
-                  <a:lnTo>
-                    <a:pt x="4798709" y="1446219"/>
-                  </a:lnTo>
-                  <a:lnTo>
-                    <a:pt x="4727086" y="1435695"/>
-                  </a:lnTo>
-                  <a:lnTo>
-                    <a:pt x="4655464" y="1424973"/>
-                  </a:lnTo>
-                  <a:lnTo>
-                    <a:pt x="4583841" y="1414051"/>
-                  </a:lnTo>
-                  <a:lnTo>
-                    <a:pt x="4512219" y="1402925"/>
-                  </a:lnTo>
-                  <a:lnTo>
-                    <a:pt x="4440596" y="1391590"/>
-                  </a:lnTo>
-                  <a:lnTo>
-                    <a:pt x="4368974" y="1380043"/>
-                  </a:lnTo>
-                  <a:lnTo>
-                    <a:pt x="4297351" y="1368280"/>
-                  </a:lnTo>
-                  <a:lnTo>
-                    <a:pt x="4225729" y="1356296"/>
-                  </a:lnTo>
-                  <a:lnTo>
-                    <a:pt x="4154106" y="1344088"/>
-                  </a:lnTo>
-                  <a:lnTo>
-                    <a:pt x="4082483" y="1331652"/>
-                  </a:lnTo>
-                  <a:lnTo>
-                    <a:pt x="4010861" y="1318983"/>
-                  </a:lnTo>
-                  <a:lnTo>
-                    <a:pt x="3939238" y="1306076"/>
-                  </a:lnTo>
-                  <a:lnTo>
-                    <a:pt x="3867616" y="1292928"/>
-                  </a:lnTo>
-                  <a:lnTo>
-                    <a:pt x="3795993" y="1279534"/>
-                  </a:lnTo>
-                  <a:lnTo>
-                    <a:pt x="3724371" y="1265889"/>
-                  </a:lnTo>
-                  <a:lnTo>
-                    <a:pt x="3652748" y="1251988"/>
-                  </a:lnTo>
-                  <a:lnTo>
-                    <a:pt x="3581126" y="1237827"/>
-                  </a:lnTo>
-                  <a:lnTo>
-                    <a:pt x="3509503" y="1223401"/>
-                  </a:lnTo>
-                  <a:lnTo>
-                    <a:pt x="3437881" y="1208705"/>
-                  </a:lnTo>
-                  <a:lnTo>
-                    <a:pt x="3366258" y="1193734"/>
-                  </a:lnTo>
-                  <a:lnTo>
-                    <a:pt x="3294636" y="1179176"/>
-                  </a:lnTo>
-                  <a:lnTo>
-                    <a:pt x="3223013" y="1192901"/>
-                  </a:lnTo>
-                  <a:lnTo>
-                    <a:pt x="3151391" y="1206399"/>
-                  </a:lnTo>
-                  <a:lnTo>
-                    <a:pt x="3079768" y="1219673"/>
-                  </a:lnTo>
-                  <a:lnTo>
-                    <a:pt x="3008146" y="1232728"/>
-                  </a:lnTo>
-                  <a:lnTo>
-                    <a:pt x="2936523" y="1245566"/>
-                  </a:lnTo>
-                  <a:lnTo>
-                    <a:pt x="2864901" y="1258192"/>
-                  </a:lnTo>
-                  <a:lnTo>
-                    <a:pt x="2793278" y="1270609"/>
-                  </a:lnTo>
-                  <a:lnTo>
-                    <a:pt x="2721655" y="1282821"/>
-                  </a:lnTo>
-                  <a:lnTo>
-                    <a:pt x="2650033" y="1294830"/>
-                  </a:lnTo>
-                  <a:lnTo>
-                    <a:pt x="2578410" y="1306640"/>
-                  </a:lnTo>
-                  <a:lnTo>
-                    <a:pt x="2506788" y="1318255"/>
-                  </a:lnTo>
-                  <a:lnTo>
-                    <a:pt x="2435165" y="1329678"/>
-                  </a:lnTo>
-                  <a:lnTo>
-                    <a:pt x="2363543" y="1340912"/>
-                  </a:lnTo>
-                  <a:lnTo>
-                    <a:pt x="2291920" y="1351959"/>
-                  </a:lnTo>
-                  <a:lnTo>
-                    <a:pt x="2220298" y="1362824"/>
-                  </a:lnTo>
-                  <a:lnTo>
-                    <a:pt x="2148675" y="1373509"/>
-                  </a:lnTo>
-                  <a:lnTo>
-                    <a:pt x="2077053" y="1384017"/>
-                  </a:lnTo>
-                  <a:lnTo>
-                    <a:pt x="2005430" y="1394351"/>
-                  </a:lnTo>
-                  <a:lnTo>
-                    <a:pt x="1933808" y="1404514"/>
-                  </a:lnTo>
-                  <a:lnTo>
-                    <a:pt x="1862185" y="1414509"/>
-                  </a:lnTo>
-                  <a:lnTo>
-                    <a:pt x="1790563" y="1424339"/>
-                  </a:lnTo>
-                  <a:lnTo>
-                    <a:pt x="1718940" y="1434005"/>
-                  </a:lnTo>
-                  <a:lnTo>
-                    <a:pt x="1647318" y="1443512"/>
-                  </a:lnTo>
-                  <a:lnTo>
-                    <a:pt x="1575695" y="1452861"/>
-                  </a:lnTo>
-                  <a:lnTo>
-                    <a:pt x="1504073" y="1462056"/>
-                  </a:lnTo>
-                  <a:lnTo>
-                    <a:pt x="1432450" y="1471098"/>
-                  </a:lnTo>
-                  <a:lnTo>
-                    <a:pt x="1360827" y="1479991"/>
-                  </a:lnTo>
-                  <a:lnTo>
-                    <a:pt x="1289205" y="1488736"/>
-                  </a:lnTo>
-                  <a:lnTo>
-                    <a:pt x="1217582" y="1497337"/>
-                  </a:lnTo>
-                  <a:lnTo>
-                    <a:pt x="1145960" y="1505795"/>
-                  </a:lnTo>
-                  <a:lnTo>
-                    <a:pt x="1074337" y="1514113"/>
-                  </a:lnTo>
-                  <a:lnTo>
-                    <a:pt x="1002715" y="1522294"/>
-                  </a:lnTo>
-                  <a:lnTo>
-                    <a:pt x="931092" y="1530339"/>
-                  </a:lnTo>
-                  <a:lnTo>
-                    <a:pt x="859470" y="1538251"/>
-                  </a:lnTo>
-                  <a:lnTo>
-                    <a:pt x="787847" y="1546032"/>
-                  </a:lnTo>
-                  <a:lnTo>
-                    <a:pt x="716225" y="1553684"/>
-                  </a:lnTo>
-                  <a:lnTo>
-                    <a:pt x="644602" y="1561210"/>
-                  </a:lnTo>
-                  <a:lnTo>
-                    <a:pt x="572980" y="1568611"/>
-                  </a:lnTo>
-                  <a:lnTo>
-                    <a:pt x="501357" y="1575890"/>
-                  </a:lnTo>
-                  <a:lnTo>
-                    <a:pt x="429735" y="1583048"/>
-                  </a:lnTo>
-                  <a:lnTo>
-                    <a:pt x="358112" y="1590087"/>
-                  </a:lnTo>
-                  <a:lnTo>
-                    <a:pt x="286490" y="1597010"/>
-                  </a:lnTo>
-                  <a:lnTo>
-                    <a:pt x="214867" y="1603818"/>
-                  </a:lnTo>
-                  <a:lnTo>
-                    <a:pt x="143245" y="1610514"/>
-                  </a:lnTo>
-                  <a:lnTo>
-                    <a:pt x="71622" y="1617099"/>
-                  </a:lnTo>
-                  <a:lnTo>
-                    <a:pt x="0" y="1623575"/>
+                    <a:pt x="0" y="0"/>
+                  </a:lnTo>
+                  <a:lnTo>
+                    <a:pt x="0" y="0"/>
+                  </a:lnTo>
+                </a:path>
+              </a:pathLst>
+            </a:custGeom>
+            <a:ln w="13550" cap="flat">
+              <a:solidFill>
+                <a:srgbClr val="EBEBEB">
+                  <a:alpha val="100000"/>
+                </a:srgbClr>
+              </a:solidFill>
+              <a:prstDash val="solid"/>
+              <a:round/>
+            </a:ln>
+          </p:spPr>
+          <p:txBody>
+            <a:bodyPr/>
+            <a:lstStyle/>
+            <a:p/>
+          </p:txBody>
+        </p:sp>
+        <p:sp>
+          <p:nvSpPr>
+            <p:cNvPr id="21" name="pg21"/>
+            <p:cNvSpPr/>
+            <p:nvPr/>
+          </p:nvSpPr>
+          <p:spPr>
+            <a:xfrm>
+              <a:off x="1235312" y="2675541"/>
+              <a:ext cx="6964104" cy="612714"/>
+            </a:xfrm>
+            <a:custGeom>
+              <a:avLst/>
+              <a:pathLst>
+                <a:path w="6964104" h="612714">
+                  <a:moveTo>
+                    <a:pt x="0" y="21786"/>
+                  </a:moveTo>
+                  <a:lnTo>
+                    <a:pt x="70344" y="34706"/>
+                  </a:lnTo>
+                  <a:lnTo>
+                    <a:pt x="140688" y="47389"/>
+                  </a:lnTo>
+                  <a:lnTo>
+                    <a:pt x="211033" y="59838"/>
+                  </a:lnTo>
+                  <a:lnTo>
+                    <a:pt x="281377" y="72059"/>
+                  </a:lnTo>
+                  <a:lnTo>
+                    <a:pt x="351722" y="84055"/>
+                  </a:lnTo>
+                  <a:lnTo>
+                    <a:pt x="422066" y="95830"/>
+                  </a:lnTo>
+                  <a:lnTo>
+                    <a:pt x="492411" y="107389"/>
+                  </a:lnTo>
+                  <a:lnTo>
+                    <a:pt x="562755" y="118736"/>
+                  </a:lnTo>
+                  <a:lnTo>
+                    <a:pt x="633100" y="129874"/>
+                  </a:lnTo>
+                  <a:lnTo>
+                    <a:pt x="703444" y="140807"/>
+                  </a:lnTo>
+                  <a:lnTo>
+                    <a:pt x="773789" y="151540"/>
+                  </a:lnTo>
+                  <a:lnTo>
+                    <a:pt x="844133" y="162075"/>
+                  </a:lnTo>
+                  <a:lnTo>
+                    <a:pt x="914478" y="172416"/>
+                  </a:lnTo>
+                  <a:lnTo>
+                    <a:pt x="984822" y="182568"/>
+                  </a:lnTo>
+                  <a:lnTo>
+                    <a:pt x="1055167" y="192533"/>
+                  </a:lnTo>
+                  <a:lnTo>
+                    <a:pt x="1125511" y="202315"/>
+                  </a:lnTo>
+                  <a:lnTo>
+                    <a:pt x="1195856" y="211916"/>
+                  </a:lnTo>
+                  <a:lnTo>
+                    <a:pt x="1266200" y="221342"/>
+                  </a:lnTo>
+                  <a:lnTo>
+                    <a:pt x="1336545" y="230594"/>
+                  </a:lnTo>
+                  <a:lnTo>
+                    <a:pt x="1406889" y="239676"/>
+                  </a:lnTo>
+                  <a:lnTo>
+                    <a:pt x="1477234" y="248592"/>
+                  </a:lnTo>
+                  <a:lnTo>
+                    <a:pt x="1547578" y="257343"/>
+                  </a:lnTo>
+                  <a:lnTo>
+                    <a:pt x="1617923" y="265934"/>
+                  </a:lnTo>
+                  <a:lnTo>
+                    <a:pt x="1688267" y="274366"/>
+                  </a:lnTo>
+                  <a:lnTo>
+                    <a:pt x="1758612" y="282644"/>
+                  </a:lnTo>
+                  <a:lnTo>
+                    <a:pt x="1828956" y="290770"/>
+                  </a:lnTo>
+                  <a:lnTo>
+                    <a:pt x="1899301" y="298746"/>
+                  </a:lnTo>
+                  <a:lnTo>
+                    <a:pt x="1969645" y="306576"/>
+                  </a:lnTo>
+                  <a:lnTo>
+                    <a:pt x="2039990" y="314261"/>
+                  </a:lnTo>
+                  <a:lnTo>
+                    <a:pt x="2110334" y="321806"/>
+                  </a:lnTo>
+                  <a:lnTo>
+                    <a:pt x="2180679" y="329212"/>
+                  </a:lnTo>
+                  <a:lnTo>
+                    <a:pt x="2251023" y="336481"/>
+                  </a:lnTo>
+                  <a:lnTo>
+                    <a:pt x="2321368" y="343617"/>
+                  </a:lnTo>
+                  <a:lnTo>
+                    <a:pt x="2391712" y="350622"/>
+                  </a:lnTo>
+                  <a:lnTo>
+                    <a:pt x="2462057" y="357499"/>
+                  </a:lnTo>
+                  <a:lnTo>
+                    <a:pt x="2532401" y="364248"/>
+                  </a:lnTo>
+                  <a:lnTo>
+                    <a:pt x="2602746" y="370874"/>
+                  </a:lnTo>
+                  <a:lnTo>
+                    <a:pt x="2673090" y="377378"/>
+                  </a:lnTo>
+                  <a:lnTo>
+                    <a:pt x="2743435" y="383763"/>
+                  </a:lnTo>
+                  <a:lnTo>
+                    <a:pt x="2813779" y="390030"/>
+                  </a:lnTo>
+                  <a:lnTo>
+                    <a:pt x="2884124" y="396182"/>
+                  </a:lnTo>
+                  <a:lnTo>
+                    <a:pt x="2954468" y="402220"/>
+                  </a:lnTo>
+                  <a:lnTo>
+                    <a:pt x="3024813" y="408148"/>
+                  </a:lnTo>
+                  <a:lnTo>
+                    <a:pt x="3095157" y="413967"/>
+                  </a:lnTo>
+                  <a:lnTo>
+                    <a:pt x="3165502" y="419679"/>
+                  </a:lnTo>
+                  <a:lnTo>
+                    <a:pt x="3235846" y="425286"/>
+                  </a:lnTo>
+                  <a:lnTo>
+                    <a:pt x="3306191" y="420500"/>
+                  </a:lnTo>
+                  <a:lnTo>
+                    <a:pt x="3376535" y="415379"/>
+                  </a:lnTo>
+                  <a:lnTo>
+                    <a:pt x="3446880" y="410172"/>
+                  </a:lnTo>
+                  <a:lnTo>
+                    <a:pt x="3517224" y="404877"/>
+                  </a:lnTo>
+                  <a:lnTo>
+                    <a:pt x="3587569" y="399493"/>
+                  </a:lnTo>
+                  <a:lnTo>
+                    <a:pt x="3657913" y="394018"/>
+                  </a:lnTo>
+                  <a:lnTo>
+                    <a:pt x="3728257" y="388451"/>
+                  </a:lnTo>
+                  <a:lnTo>
+                    <a:pt x="3798602" y="382791"/>
+                  </a:lnTo>
+                  <a:lnTo>
+                    <a:pt x="3868946" y="377035"/>
+                  </a:lnTo>
+                  <a:lnTo>
+                    <a:pt x="3939291" y="371182"/>
+                  </a:lnTo>
+                  <a:lnTo>
+                    <a:pt x="4009635" y="365231"/>
+                  </a:lnTo>
+                  <a:lnTo>
+                    <a:pt x="4079980" y="359179"/>
+                  </a:lnTo>
+                  <a:lnTo>
+                    <a:pt x="4150324" y="353026"/>
+                  </a:lnTo>
+                  <a:lnTo>
+                    <a:pt x="4220669" y="346769"/>
+                  </a:lnTo>
+                  <a:lnTo>
+                    <a:pt x="4291013" y="340407"/>
+                  </a:lnTo>
+                  <a:lnTo>
+                    <a:pt x="4361358" y="333938"/>
+                  </a:lnTo>
+                  <a:lnTo>
+                    <a:pt x="4431702" y="327360"/>
+                  </a:lnTo>
+                  <a:lnTo>
+                    <a:pt x="4502047" y="320671"/>
+                  </a:lnTo>
+                  <a:lnTo>
+                    <a:pt x="4572391" y="313869"/>
+                  </a:lnTo>
+                  <a:lnTo>
+                    <a:pt x="4642736" y="306953"/>
+                  </a:lnTo>
+                  <a:lnTo>
+                    <a:pt x="4713080" y="299921"/>
+                  </a:lnTo>
+                  <a:lnTo>
+                    <a:pt x="4783425" y="292770"/>
+                  </a:lnTo>
+                  <a:lnTo>
+                    <a:pt x="4853769" y="285499"/>
+                  </a:lnTo>
+                  <a:lnTo>
+                    <a:pt x="4924114" y="278106"/>
+                  </a:lnTo>
+                  <a:lnTo>
+                    <a:pt x="4994458" y="270588"/>
+                  </a:lnTo>
+                  <a:lnTo>
+                    <a:pt x="5064803" y="262943"/>
+                  </a:lnTo>
+                  <a:lnTo>
+                    <a:pt x="5135147" y="255170"/>
+                  </a:lnTo>
+                  <a:lnTo>
+                    <a:pt x="5205492" y="247266"/>
+                  </a:lnTo>
+                  <a:lnTo>
+                    <a:pt x="5275836" y="239229"/>
+                  </a:lnTo>
+                  <a:lnTo>
+                    <a:pt x="5346181" y="231057"/>
+                  </a:lnTo>
+                  <a:lnTo>
+                    <a:pt x="5416525" y="222747"/>
+                  </a:lnTo>
+                  <a:lnTo>
+                    <a:pt x="5486870" y="214297"/>
+                  </a:lnTo>
+                  <a:lnTo>
+                    <a:pt x="5557214" y="205705"/>
+                  </a:lnTo>
+                  <a:lnTo>
+                    <a:pt x="5627559" y="196969"/>
+                  </a:lnTo>
+                  <a:lnTo>
+                    <a:pt x="5697903" y="188085"/>
+                  </a:lnTo>
+                  <a:lnTo>
+                    <a:pt x="5768248" y="179052"/>
+                  </a:lnTo>
+                  <a:lnTo>
+                    <a:pt x="5838592" y="169867"/>
+                  </a:lnTo>
+                  <a:lnTo>
+                    <a:pt x="5908937" y="160527"/>
+                  </a:lnTo>
+                  <a:lnTo>
+                    <a:pt x="5979281" y="151030"/>
+                  </a:lnTo>
+                  <a:lnTo>
+                    <a:pt x="6049626" y="141373"/>
+                  </a:lnTo>
+                  <a:lnTo>
+                    <a:pt x="6119970" y="131554"/>
+                  </a:lnTo>
+                  <a:lnTo>
+                    <a:pt x="6190315" y="121569"/>
+                  </a:lnTo>
+                  <a:lnTo>
+                    <a:pt x="6260659" y="111417"/>
+                  </a:lnTo>
+                  <a:lnTo>
+                    <a:pt x="6331004" y="101093"/>
+                  </a:lnTo>
+                  <a:lnTo>
+                    <a:pt x="6401348" y="90596"/>
+                  </a:lnTo>
+                  <a:lnTo>
+                    <a:pt x="6471693" y="79922"/>
+                  </a:lnTo>
+                  <a:lnTo>
+                    <a:pt x="6542037" y="69068"/>
+                  </a:lnTo>
+                  <a:lnTo>
+                    <a:pt x="6612382" y="58031"/>
+                  </a:lnTo>
+                  <a:lnTo>
+                    <a:pt x="6682726" y="46809"/>
+                  </a:lnTo>
+                  <a:lnTo>
+                    <a:pt x="6753071" y="35398"/>
+                  </a:lnTo>
+                  <a:lnTo>
+                    <a:pt x="6823415" y="23795"/>
+                  </a:lnTo>
+                  <a:lnTo>
+                    <a:pt x="6893760" y="11997"/>
+                  </a:lnTo>
+                  <a:lnTo>
+                    <a:pt x="6964104" y="0"/>
+                  </a:lnTo>
+                  <a:lnTo>
+                    <a:pt x="6964104" y="612714"/>
+                  </a:lnTo>
+                  <a:lnTo>
+                    <a:pt x="6893760" y="610616"/>
+                  </a:lnTo>
+                  <a:lnTo>
+                    <a:pt x="6823415" y="608479"/>
+                  </a:lnTo>
+                  <a:lnTo>
+                    <a:pt x="6753071" y="606302"/>
+                  </a:lnTo>
+                  <a:lnTo>
+                    <a:pt x="6682726" y="604084"/>
+                  </a:lnTo>
+                  <a:lnTo>
+                    <a:pt x="6612382" y="601825"/>
+                  </a:lnTo>
+                  <a:lnTo>
+                    <a:pt x="6542037" y="599523"/>
+                  </a:lnTo>
+                  <a:lnTo>
+                    <a:pt x="6471693" y="597178"/>
+                  </a:lnTo>
+                  <a:lnTo>
+                    <a:pt x="6401348" y="594790"/>
+                  </a:lnTo>
+                  <a:lnTo>
+                    <a:pt x="6331004" y="592357"/>
+                  </a:lnTo>
+                  <a:lnTo>
+                    <a:pt x="6260659" y="589878"/>
+                  </a:lnTo>
+                  <a:lnTo>
+                    <a:pt x="6190315" y="587352"/>
+                  </a:lnTo>
+                  <a:lnTo>
+                    <a:pt x="6119970" y="584780"/>
+                  </a:lnTo>
+                  <a:lnTo>
+                    <a:pt x="6049626" y="582159"/>
+                  </a:lnTo>
+                  <a:lnTo>
+                    <a:pt x="5979281" y="579489"/>
+                  </a:lnTo>
+                  <a:lnTo>
+                    <a:pt x="5908937" y="576769"/>
+                  </a:lnTo>
+                  <a:lnTo>
+                    <a:pt x="5838592" y="573999"/>
+                  </a:lnTo>
+                  <a:lnTo>
+                    <a:pt x="5768248" y="571176"/>
+                  </a:lnTo>
+                  <a:lnTo>
+                    <a:pt x="5697903" y="568301"/>
+                  </a:lnTo>
+                  <a:lnTo>
+                    <a:pt x="5627559" y="565371"/>
+                  </a:lnTo>
+                  <a:lnTo>
+                    <a:pt x="5557214" y="562387"/>
+                  </a:lnTo>
+                  <a:lnTo>
+                    <a:pt x="5486870" y="559347"/>
+                  </a:lnTo>
+                  <a:lnTo>
+                    <a:pt x="5416525" y="556250"/>
+                  </a:lnTo>
+                  <a:lnTo>
+                    <a:pt x="5346181" y="553095"/>
+                  </a:lnTo>
+                  <a:lnTo>
+                    <a:pt x="5275836" y="549882"/>
+                  </a:lnTo>
+                  <a:lnTo>
+                    <a:pt x="5205492" y="546607"/>
+                  </a:lnTo>
+                  <a:lnTo>
+                    <a:pt x="5135147" y="543272"/>
+                  </a:lnTo>
+                  <a:lnTo>
+                    <a:pt x="5064803" y="539874"/>
+                  </a:lnTo>
+                  <a:lnTo>
+                    <a:pt x="4994458" y="536412"/>
+                  </a:lnTo>
+                  <a:lnTo>
+                    <a:pt x="4924114" y="532886"/>
+                  </a:lnTo>
+                  <a:lnTo>
+                    <a:pt x="4853769" y="529294"/>
+                  </a:lnTo>
+                  <a:lnTo>
+                    <a:pt x="4783425" y="525634"/>
+                  </a:lnTo>
+                  <a:lnTo>
+                    <a:pt x="4713080" y="521906"/>
+                  </a:lnTo>
+                  <a:lnTo>
+                    <a:pt x="4642736" y="518108"/>
+                  </a:lnTo>
+                  <a:lnTo>
+                    <a:pt x="4572391" y="514239"/>
+                  </a:lnTo>
+                  <a:lnTo>
+                    <a:pt x="4502047" y="510298"/>
+                  </a:lnTo>
+                  <a:lnTo>
+                    <a:pt x="4431702" y="506282"/>
+                  </a:lnTo>
+                  <a:lnTo>
+                    <a:pt x="4361358" y="502192"/>
+                  </a:lnTo>
+                  <a:lnTo>
+                    <a:pt x="4291013" y="498025"/>
+                  </a:lnTo>
+                  <a:lnTo>
+                    <a:pt x="4220669" y="493780"/>
+                  </a:lnTo>
+                  <a:lnTo>
+                    <a:pt x="4150324" y="489455"/>
+                  </a:lnTo>
+                  <a:lnTo>
+                    <a:pt x="4079980" y="485050"/>
+                  </a:lnTo>
+                  <a:lnTo>
+                    <a:pt x="4009635" y="480562"/>
+                  </a:lnTo>
+                  <a:lnTo>
+                    <a:pt x="3939291" y="475989"/>
+                  </a:lnTo>
+                  <a:lnTo>
+                    <a:pt x="3868946" y="471332"/>
+                  </a:lnTo>
+                  <a:lnTo>
+                    <a:pt x="3798602" y="466587"/>
+                  </a:lnTo>
+                  <a:lnTo>
+                    <a:pt x="3728257" y="461753"/>
+                  </a:lnTo>
+                  <a:lnTo>
+                    <a:pt x="3657913" y="456829"/>
+                  </a:lnTo>
+                  <a:lnTo>
+                    <a:pt x="3587569" y="451813"/>
+                  </a:lnTo>
+                  <a:lnTo>
+                    <a:pt x="3517224" y="446702"/>
+                  </a:lnTo>
+                  <a:lnTo>
+                    <a:pt x="3446880" y="441496"/>
+                  </a:lnTo>
+                  <a:lnTo>
+                    <a:pt x="3376535" y="436193"/>
+                  </a:lnTo>
+                  <a:lnTo>
+                    <a:pt x="3306191" y="430790"/>
+                  </a:lnTo>
+                  <a:lnTo>
+                    <a:pt x="3235846" y="425537"/>
+                  </a:lnTo>
+                  <a:lnTo>
+                    <a:pt x="3165502" y="430490"/>
+                  </a:lnTo>
+                  <a:lnTo>
+                    <a:pt x="3095157" y="435361"/>
+                  </a:lnTo>
+                  <a:lnTo>
+                    <a:pt x="3024813" y="440151"/>
+                  </a:lnTo>
+                  <a:lnTo>
+                    <a:pt x="2954468" y="444862"/>
+                  </a:lnTo>
+                  <a:lnTo>
+                    <a:pt x="2884124" y="449495"/>
+                  </a:lnTo>
+                  <a:lnTo>
+                    <a:pt x="2813779" y="454052"/>
+                  </a:lnTo>
+                  <a:lnTo>
+                    <a:pt x="2743435" y="458533"/>
+                  </a:lnTo>
+                  <a:lnTo>
+                    <a:pt x="2673090" y="462939"/>
+                  </a:lnTo>
+                  <a:lnTo>
+                    <a:pt x="2602746" y="467273"/>
+                  </a:lnTo>
+                  <a:lnTo>
+                    <a:pt x="2532401" y="471535"/>
+                  </a:lnTo>
+                  <a:lnTo>
+                    <a:pt x="2462057" y="475727"/>
+                  </a:lnTo>
+                  <a:lnTo>
+                    <a:pt x="2391712" y="479849"/>
+                  </a:lnTo>
+                  <a:lnTo>
+                    <a:pt x="2321368" y="483903"/>
+                  </a:lnTo>
+                  <a:lnTo>
+                    <a:pt x="2251023" y="487890"/>
+                  </a:lnTo>
+                  <a:lnTo>
+                    <a:pt x="2180679" y="491811"/>
+                  </a:lnTo>
+                  <a:lnTo>
+                    <a:pt x="2110334" y="495667"/>
+                  </a:lnTo>
+                  <a:lnTo>
+                    <a:pt x="2039990" y="499459"/>
+                  </a:lnTo>
+                  <a:lnTo>
+                    <a:pt x="1969645" y="503188"/>
+                  </a:lnTo>
+                  <a:lnTo>
+                    <a:pt x="1899301" y="506856"/>
+                  </a:lnTo>
+                  <a:lnTo>
+                    <a:pt x="1828956" y="510463"/>
+                  </a:lnTo>
+                  <a:lnTo>
+                    <a:pt x="1758612" y="514010"/>
+                  </a:lnTo>
+                  <a:lnTo>
+                    <a:pt x="1688267" y="517498"/>
+                  </a:lnTo>
+                  <a:lnTo>
+                    <a:pt x="1617923" y="520929"/>
+                  </a:lnTo>
+                  <a:lnTo>
+                    <a:pt x="1547578" y="524303"/>
+                  </a:lnTo>
+                  <a:lnTo>
+                    <a:pt x="1477234" y="527621"/>
+                  </a:lnTo>
+                  <a:lnTo>
+                    <a:pt x="1406889" y="530884"/>
+                  </a:lnTo>
+                  <a:lnTo>
+                    <a:pt x="1336545" y="534093"/>
+                  </a:lnTo>
+                  <a:lnTo>
+                    <a:pt x="1266200" y="537250"/>
+                  </a:lnTo>
+                  <a:lnTo>
+                    <a:pt x="1195856" y="540353"/>
+                  </a:lnTo>
+                  <a:lnTo>
+                    <a:pt x="1125511" y="543406"/>
+                  </a:lnTo>
+                  <a:lnTo>
+                    <a:pt x="1055167" y="546408"/>
+                  </a:lnTo>
+                  <a:lnTo>
+                    <a:pt x="984822" y="549360"/>
+                  </a:lnTo>
+                  <a:lnTo>
+                    <a:pt x="914478" y="552263"/>
+                  </a:lnTo>
+                  <a:lnTo>
+                    <a:pt x="844133" y="555118"/>
+                  </a:lnTo>
+                  <a:lnTo>
+                    <a:pt x="773789" y="557926"/>
+                  </a:lnTo>
+                  <a:lnTo>
+                    <a:pt x="703444" y="560688"/>
+                  </a:lnTo>
+                  <a:lnTo>
+                    <a:pt x="633100" y="563404"/>
+                  </a:lnTo>
+                  <a:lnTo>
+                    <a:pt x="562755" y="566074"/>
+                  </a:lnTo>
+                  <a:lnTo>
+                    <a:pt x="492411" y="568701"/>
+                  </a:lnTo>
+                  <a:lnTo>
+                    <a:pt x="422066" y="571284"/>
+                  </a:lnTo>
+                  <a:lnTo>
+                    <a:pt x="351722" y="573825"/>
+                  </a:lnTo>
+                  <a:lnTo>
+                    <a:pt x="281377" y="576323"/>
+                  </a:lnTo>
+                  <a:lnTo>
+                    <a:pt x="211033" y="578780"/>
+                  </a:lnTo>
+                  <a:lnTo>
+                    <a:pt x="140688" y="581196"/>
+                  </a:lnTo>
+                  <a:lnTo>
+                    <a:pt x="70344" y="583573"/>
+                  </a:lnTo>
+                  <a:lnTo>
+                    <a:pt x="0" y="585910"/>
                   </a:lnTo>
                   <a:close/>
                 </a:path>
@@ -3584,643 +3619,318 @@
         </p:sp>
         <p:sp>
           <p:nvSpPr>
-            <p:cNvPr id="21" name="pl21"/>
-            <p:cNvSpPr/>
-            <p:nvPr/>
-          </p:nvSpPr>
-          <p:spPr>
-            <a:xfrm>
-              <a:off x="1172049" y="3548938"/>
-              <a:ext cx="7090630" cy="1178482"/>
-            </a:xfrm>
-            <a:custGeom>
-              <a:avLst/>
-              <a:pathLst>
-                <a:path w="7090630" h="1178482">
-                  <a:moveTo>
-                    <a:pt x="0" y="60372"/>
-                  </a:moveTo>
-                  <a:lnTo>
-                    <a:pt x="71622" y="96173"/>
-                  </a:lnTo>
-                  <a:lnTo>
-                    <a:pt x="143245" y="131317"/>
-                  </a:lnTo>
-                  <a:lnTo>
-                    <a:pt x="214867" y="165814"/>
-                  </a:lnTo>
-                  <a:lnTo>
-                    <a:pt x="286490" y="199678"/>
-                  </a:lnTo>
-                  <a:lnTo>
-                    <a:pt x="358112" y="232919"/>
-                  </a:lnTo>
-                  <a:lnTo>
-                    <a:pt x="429735" y="265549"/>
-                  </a:lnTo>
-                  <a:lnTo>
-                    <a:pt x="501357" y="297580"/>
-                  </a:lnTo>
-                  <a:lnTo>
-                    <a:pt x="572980" y="329022"/>
-                  </a:lnTo>
-                  <a:lnTo>
-                    <a:pt x="644602" y="359885"/>
-                  </a:lnTo>
-                  <a:lnTo>
-                    <a:pt x="716225" y="390182"/>
-                  </a:lnTo>
-                  <a:lnTo>
-                    <a:pt x="787847" y="419922"/>
-                  </a:lnTo>
-                  <a:lnTo>
-                    <a:pt x="859470" y="449115"/>
-                  </a:lnTo>
-                  <a:lnTo>
-                    <a:pt x="931092" y="477772"/>
-                  </a:lnTo>
-                  <a:lnTo>
-                    <a:pt x="1002715" y="505902"/>
-                  </a:lnTo>
-                  <a:lnTo>
-                    <a:pt x="1074337" y="533515"/>
-                  </a:lnTo>
-                  <a:lnTo>
-                    <a:pt x="1145960" y="560621"/>
-                  </a:lnTo>
-                  <a:lnTo>
-                    <a:pt x="1217582" y="587228"/>
-                  </a:lnTo>
-                  <a:lnTo>
-                    <a:pt x="1289205" y="613346"/>
-                  </a:lnTo>
-                  <a:lnTo>
-                    <a:pt x="1360827" y="638985"/>
-                  </a:lnTo>
-                  <a:lnTo>
-                    <a:pt x="1432450" y="664152"/>
-                  </a:lnTo>
-                  <a:lnTo>
-                    <a:pt x="1504073" y="688856"/>
-                  </a:lnTo>
-                  <a:lnTo>
-                    <a:pt x="1575695" y="713107"/>
-                  </a:lnTo>
-                  <a:lnTo>
-                    <a:pt x="1647318" y="736912"/>
-                  </a:lnTo>
-                  <a:lnTo>
-                    <a:pt x="1718940" y="760279"/>
-                  </a:lnTo>
-                  <a:lnTo>
-                    <a:pt x="1790563" y="783217"/>
-                  </a:lnTo>
-                  <a:lnTo>
-                    <a:pt x="1862185" y="805733"/>
-                  </a:lnTo>
-                  <a:lnTo>
-                    <a:pt x="1933808" y="827835"/>
-                  </a:lnTo>
-                  <a:lnTo>
-                    <a:pt x="2005430" y="849531"/>
-                  </a:lnTo>
-                  <a:lnTo>
-                    <a:pt x="2077053" y="870829"/>
-                  </a:lnTo>
-                  <a:lnTo>
-                    <a:pt x="2148675" y="891735"/>
-                  </a:lnTo>
-                  <a:lnTo>
-                    <a:pt x="2220298" y="912257"/>
-                  </a:lnTo>
-                  <a:lnTo>
-                    <a:pt x="2291920" y="932401"/>
-                  </a:lnTo>
-                  <a:lnTo>
-                    <a:pt x="2363543" y="952176"/>
-                  </a:lnTo>
-                  <a:lnTo>
-                    <a:pt x="2435165" y="971586"/>
-                  </a:lnTo>
-                  <a:lnTo>
-                    <a:pt x="2506788" y="990641"/>
-                  </a:lnTo>
-                  <a:lnTo>
-                    <a:pt x="2578410" y="1009345"/>
-                  </a:lnTo>
-                  <a:lnTo>
-                    <a:pt x="2650033" y="1027705"/>
-                  </a:lnTo>
-                  <a:lnTo>
-                    <a:pt x="2721655" y="1045727"/>
-                  </a:lnTo>
-                  <a:lnTo>
-                    <a:pt x="2793278" y="1063419"/>
-                  </a:lnTo>
-                  <a:lnTo>
-                    <a:pt x="2864901" y="1080785"/>
-                  </a:lnTo>
-                  <a:lnTo>
-                    <a:pt x="2936523" y="1097832"/>
-                  </a:lnTo>
-                  <a:lnTo>
-                    <a:pt x="3008146" y="1114566"/>
-                  </a:lnTo>
-                  <a:lnTo>
-                    <a:pt x="3079768" y="1130993"/>
-                  </a:lnTo>
-                  <a:lnTo>
-                    <a:pt x="3151391" y="1147117"/>
-                  </a:lnTo>
-                  <a:lnTo>
-                    <a:pt x="3223013" y="1162945"/>
-                  </a:lnTo>
-                  <a:lnTo>
-                    <a:pt x="3294636" y="1178482"/>
-                  </a:lnTo>
-                  <a:lnTo>
-                    <a:pt x="3366258" y="1165221"/>
-                  </a:lnTo>
-                  <a:lnTo>
-                    <a:pt x="3437881" y="1151030"/>
-                  </a:lnTo>
-                  <a:lnTo>
-                    <a:pt x="3509503" y="1136600"/>
-                  </a:lnTo>
-                  <a:lnTo>
-                    <a:pt x="3581126" y="1121927"/>
-                  </a:lnTo>
-                  <a:lnTo>
-                    <a:pt x="3652748" y="1107008"/>
-                  </a:lnTo>
-                  <a:lnTo>
-                    <a:pt x="3724371" y="1091837"/>
-                  </a:lnTo>
-                  <a:lnTo>
-                    <a:pt x="3795993" y="1076411"/>
-                  </a:lnTo>
-                  <a:lnTo>
-                    <a:pt x="3867616" y="1060726"/>
-                  </a:lnTo>
-                  <a:lnTo>
-                    <a:pt x="3939238" y="1044776"/>
-                  </a:lnTo>
-                  <a:lnTo>
-                    <a:pt x="4010861" y="1028558"/>
-                  </a:lnTo>
-                  <a:lnTo>
-                    <a:pt x="4082483" y="1012067"/>
-                  </a:lnTo>
-                  <a:lnTo>
-                    <a:pt x="4154106" y="995298"/>
-                  </a:lnTo>
-                  <a:lnTo>
-                    <a:pt x="4225729" y="978247"/>
-                  </a:lnTo>
-                  <a:lnTo>
-                    <a:pt x="4297351" y="960909"/>
-                  </a:lnTo>
-                  <a:lnTo>
-                    <a:pt x="4368974" y="943279"/>
-                  </a:lnTo>
-                  <a:lnTo>
-                    <a:pt x="4440596" y="925353"/>
-                  </a:lnTo>
-                  <a:lnTo>
-                    <a:pt x="4512219" y="907124"/>
-                  </a:lnTo>
-                  <a:lnTo>
-                    <a:pt x="4583841" y="888589"/>
-                  </a:lnTo>
-                  <a:lnTo>
-                    <a:pt x="4655464" y="869742"/>
-                  </a:lnTo>
-                  <a:lnTo>
-                    <a:pt x="4727086" y="850578"/>
-                  </a:lnTo>
-                  <a:lnTo>
-                    <a:pt x="4798709" y="831091"/>
-                  </a:lnTo>
-                  <a:lnTo>
-                    <a:pt x="4870331" y="811276"/>
-                  </a:lnTo>
-                  <a:lnTo>
-                    <a:pt x="4941954" y="791128"/>
-                  </a:lnTo>
-                  <a:lnTo>
-                    <a:pt x="5013576" y="770640"/>
-                  </a:lnTo>
-                  <a:lnTo>
-                    <a:pt x="5085199" y="749808"/>
-                  </a:lnTo>
-                  <a:lnTo>
-                    <a:pt x="5156821" y="728625"/>
-                  </a:lnTo>
-                  <a:lnTo>
-                    <a:pt x="5228444" y="707085"/>
-                  </a:lnTo>
-                  <a:lnTo>
-                    <a:pt x="5300066" y="685183"/>
-                  </a:lnTo>
-                  <a:lnTo>
-                    <a:pt x="5371689" y="662912"/>
-                  </a:lnTo>
-                  <a:lnTo>
-                    <a:pt x="5443311" y="640267"/>
-                  </a:lnTo>
-                  <a:lnTo>
-                    <a:pt x="5514934" y="617240"/>
-                  </a:lnTo>
-                  <a:lnTo>
-                    <a:pt x="5586557" y="593826"/>
-                  </a:lnTo>
-                  <a:lnTo>
-                    <a:pt x="5658179" y="570017"/>
-                  </a:lnTo>
-                  <a:lnTo>
-                    <a:pt x="5729802" y="545808"/>
-                  </a:lnTo>
-                  <a:lnTo>
-                    <a:pt x="5801424" y="521191"/>
-                  </a:lnTo>
-                  <a:lnTo>
-                    <a:pt x="5873047" y="496160"/>
-                  </a:lnTo>
-                  <a:lnTo>
-                    <a:pt x="5944669" y="470708"/>
-                  </a:lnTo>
-                  <a:lnTo>
-                    <a:pt x="6016292" y="444827"/>
-                  </a:lnTo>
-                  <a:lnTo>
-                    <a:pt x="6087914" y="418510"/>
-                  </a:lnTo>
-                  <a:lnTo>
-                    <a:pt x="6159537" y="391751"/>
-                  </a:lnTo>
-                  <a:lnTo>
-                    <a:pt x="6231159" y="364541"/>
-                  </a:lnTo>
-                  <a:lnTo>
-                    <a:pt x="6302782" y="336873"/>
-                  </a:lnTo>
-                  <a:lnTo>
-                    <a:pt x="6374404" y="308740"/>
-                  </a:lnTo>
-                  <a:lnTo>
-                    <a:pt x="6446027" y="280133"/>
-                  </a:lnTo>
-                  <a:lnTo>
-                    <a:pt x="6517649" y="251044"/>
-                  </a:lnTo>
-                  <a:lnTo>
-                    <a:pt x="6589272" y="221466"/>
-                  </a:lnTo>
-                  <a:lnTo>
-                    <a:pt x="6660894" y="191390"/>
-                  </a:lnTo>
-                  <a:lnTo>
-                    <a:pt x="6732517" y="160808"/>
-                  </a:lnTo>
-                  <a:lnTo>
-                    <a:pt x="6804139" y="129711"/>
-                  </a:lnTo>
-                  <a:lnTo>
-                    <a:pt x="6875762" y="98090"/>
-                  </a:lnTo>
-                  <a:lnTo>
-                    <a:pt x="6947385" y="65938"/>
-                  </a:lnTo>
-                  <a:lnTo>
-                    <a:pt x="7019007" y="33244"/>
-                  </a:lnTo>
-                  <a:lnTo>
-                    <a:pt x="7090630" y="0"/>
-                  </a:lnTo>
-                </a:path>
-              </a:pathLst>
-            </a:custGeom>
-          </p:spPr>
-          <p:txBody>
-            <a:bodyPr/>
-            <a:lstStyle/>
-            <a:p/>
-          </p:txBody>
-        </p:sp>
-        <p:sp>
-          <p:nvSpPr>
             <p:cNvPr id="22" name="pl22"/>
             <p:cNvSpPr/>
             <p:nvPr/>
           </p:nvSpPr>
           <p:spPr>
             <a:xfrm>
-              <a:off x="1172049" y="4728115"/>
-              <a:ext cx="7090630" cy="518672"/>
+              <a:off x="1235312" y="2675541"/>
+              <a:ext cx="6964104" cy="425286"/>
             </a:xfrm>
             <a:custGeom>
               <a:avLst/>
               <a:pathLst>
-                <a:path w="7090630" h="518672">
+                <a:path w="6964104" h="425286">
                   <a:moveTo>
-                    <a:pt x="7090630" y="518672"/>
+                    <a:pt x="0" y="21786"/>
                   </a:moveTo>
                   <a:lnTo>
-                    <a:pt x="7019007" y="512860"/>
-                  </a:lnTo>
-                  <a:lnTo>
-                    <a:pt x="6947385" y="506938"/>
-                  </a:lnTo>
-                  <a:lnTo>
-                    <a:pt x="6875762" y="500905"/>
-                  </a:lnTo>
-                  <a:lnTo>
-                    <a:pt x="6804139" y="494760"/>
-                  </a:lnTo>
-                  <a:lnTo>
-                    <a:pt x="6732517" y="488499"/>
-                  </a:lnTo>
-                  <a:lnTo>
-                    <a:pt x="6660894" y="482121"/>
-                  </a:lnTo>
-                  <a:lnTo>
-                    <a:pt x="6589272" y="475624"/>
-                  </a:lnTo>
-                  <a:lnTo>
-                    <a:pt x="6517649" y="469005"/>
-                  </a:lnTo>
-                  <a:lnTo>
-                    <a:pt x="6446027" y="462262"/>
-                  </a:lnTo>
-                  <a:lnTo>
-                    <a:pt x="6374404" y="455393"/>
-                  </a:lnTo>
-                  <a:lnTo>
-                    <a:pt x="6302782" y="448396"/>
-                  </a:lnTo>
-                  <a:lnTo>
-                    <a:pt x="6231159" y="441267"/>
-                  </a:lnTo>
-                  <a:lnTo>
-                    <a:pt x="6159537" y="434005"/>
-                  </a:lnTo>
-                  <a:lnTo>
-                    <a:pt x="6087914" y="426607"/>
-                  </a:lnTo>
-                  <a:lnTo>
-                    <a:pt x="6016292" y="419070"/>
-                  </a:lnTo>
-                  <a:lnTo>
-                    <a:pt x="5944669" y="411392"/>
-                  </a:lnTo>
-                  <a:lnTo>
-                    <a:pt x="5873047" y="403571"/>
-                  </a:lnTo>
-                  <a:lnTo>
-                    <a:pt x="5801424" y="395603"/>
-                  </a:lnTo>
-                  <a:lnTo>
-                    <a:pt x="5729802" y="387486"/>
-                  </a:lnTo>
-                  <a:lnTo>
-                    <a:pt x="5658179" y="379217"/>
-                  </a:lnTo>
-                  <a:lnTo>
-                    <a:pt x="5586557" y="370793"/>
-                  </a:lnTo>
-                  <a:lnTo>
-                    <a:pt x="5514934" y="362211"/>
-                  </a:lnTo>
-                  <a:lnTo>
-                    <a:pt x="5443311" y="353469"/>
-                  </a:lnTo>
-                  <a:lnTo>
-                    <a:pt x="5371689" y="344563"/>
-                  </a:lnTo>
-                  <a:lnTo>
-                    <a:pt x="5300066" y="335490"/>
-                  </a:lnTo>
-                  <a:lnTo>
-                    <a:pt x="5228444" y="326247"/>
-                  </a:lnTo>
-                  <a:lnTo>
-                    <a:pt x="5156821" y="316832"/>
-                  </a:lnTo>
-                  <a:lnTo>
-                    <a:pt x="5085199" y="307240"/>
-                  </a:lnTo>
-                  <a:lnTo>
-                    <a:pt x="5013576" y="297468"/>
-                  </a:lnTo>
-                  <a:lnTo>
-                    <a:pt x="4941954" y="287514"/>
-                  </a:lnTo>
-                  <a:lnTo>
-                    <a:pt x="4870331" y="277373"/>
-                  </a:lnTo>
-                  <a:lnTo>
-                    <a:pt x="4798709" y="267042"/>
-                  </a:lnTo>
-                  <a:lnTo>
-                    <a:pt x="4727086" y="256518"/>
-                  </a:lnTo>
-                  <a:lnTo>
-                    <a:pt x="4655464" y="245796"/>
-                  </a:lnTo>
-                  <a:lnTo>
-                    <a:pt x="4583841" y="234874"/>
-                  </a:lnTo>
-                  <a:lnTo>
-                    <a:pt x="4512219" y="223748"/>
-                  </a:lnTo>
-                  <a:lnTo>
-                    <a:pt x="4440596" y="212413"/>
-                  </a:lnTo>
-                  <a:lnTo>
-                    <a:pt x="4368974" y="200866"/>
-                  </a:lnTo>
-                  <a:lnTo>
-                    <a:pt x="4297351" y="189103"/>
-                  </a:lnTo>
-                  <a:lnTo>
-                    <a:pt x="4225729" y="177119"/>
-                  </a:lnTo>
-                  <a:lnTo>
-                    <a:pt x="4154106" y="164911"/>
-                  </a:lnTo>
-                  <a:lnTo>
-                    <a:pt x="4082483" y="152475"/>
-                  </a:lnTo>
-                  <a:lnTo>
-                    <a:pt x="4010861" y="139806"/>
-                  </a:lnTo>
-                  <a:lnTo>
-                    <a:pt x="3939238" y="126899"/>
-                  </a:lnTo>
-                  <a:lnTo>
-                    <a:pt x="3867616" y="113751"/>
-                  </a:lnTo>
-                  <a:lnTo>
-                    <a:pt x="3795993" y="100357"/>
-                  </a:lnTo>
-                  <a:lnTo>
-                    <a:pt x="3724371" y="86712"/>
-                  </a:lnTo>
-                  <a:lnTo>
-                    <a:pt x="3652748" y="72811"/>
-                  </a:lnTo>
-                  <a:lnTo>
-                    <a:pt x="3581126" y="58650"/>
-                  </a:lnTo>
-                  <a:lnTo>
-                    <a:pt x="3509503" y="44224"/>
-                  </a:lnTo>
-                  <a:lnTo>
-                    <a:pt x="3437881" y="29528"/>
-                  </a:lnTo>
-                  <a:lnTo>
-                    <a:pt x="3366258" y="14557"/>
-                  </a:lnTo>
-                  <a:lnTo>
-                    <a:pt x="3294636" y="0"/>
-                  </a:lnTo>
-                  <a:lnTo>
-                    <a:pt x="3223013" y="13724"/>
-                  </a:lnTo>
-                  <a:lnTo>
-                    <a:pt x="3151391" y="27222"/>
-                  </a:lnTo>
-                  <a:lnTo>
-                    <a:pt x="3079768" y="40496"/>
-                  </a:lnTo>
-                  <a:lnTo>
-                    <a:pt x="3008146" y="53551"/>
-                  </a:lnTo>
-                  <a:lnTo>
-                    <a:pt x="2936523" y="66389"/>
-                  </a:lnTo>
-                  <a:lnTo>
-                    <a:pt x="2864901" y="79015"/>
-                  </a:lnTo>
-                  <a:lnTo>
-                    <a:pt x="2793278" y="91432"/>
-                  </a:lnTo>
-                  <a:lnTo>
-                    <a:pt x="2721655" y="103644"/>
-                  </a:lnTo>
-                  <a:lnTo>
-                    <a:pt x="2650033" y="115653"/>
-                  </a:lnTo>
-                  <a:lnTo>
-                    <a:pt x="2578410" y="127463"/>
-                  </a:lnTo>
-                  <a:lnTo>
-                    <a:pt x="2506788" y="139078"/>
-                  </a:lnTo>
-                  <a:lnTo>
-                    <a:pt x="2435165" y="150501"/>
-                  </a:lnTo>
-                  <a:lnTo>
-                    <a:pt x="2363543" y="161735"/>
-                  </a:lnTo>
-                  <a:lnTo>
-                    <a:pt x="2291920" y="172782"/>
-                  </a:lnTo>
-                  <a:lnTo>
-                    <a:pt x="2220298" y="183647"/>
-                  </a:lnTo>
-                  <a:lnTo>
-                    <a:pt x="2148675" y="194332"/>
-                  </a:lnTo>
-                  <a:lnTo>
-                    <a:pt x="2077053" y="204840"/>
-                  </a:lnTo>
-                  <a:lnTo>
-                    <a:pt x="2005430" y="215174"/>
-                  </a:lnTo>
-                  <a:lnTo>
-                    <a:pt x="1933808" y="225337"/>
-                  </a:lnTo>
-                  <a:lnTo>
-                    <a:pt x="1862185" y="235332"/>
-                  </a:lnTo>
-                  <a:lnTo>
-                    <a:pt x="1790563" y="245162"/>
-                  </a:lnTo>
-                  <a:lnTo>
-                    <a:pt x="1718940" y="254828"/>
-                  </a:lnTo>
-                  <a:lnTo>
-                    <a:pt x="1647318" y="264335"/>
-                  </a:lnTo>
-                  <a:lnTo>
-                    <a:pt x="1575695" y="273684"/>
-                  </a:lnTo>
-                  <a:lnTo>
-                    <a:pt x="1504073" y="282879"/>
-                  </a:lnTo>
-                  <a:lnTo>
-                    <a:pt x="1432450" y="291921"/>
-                  </a:lnTo>
-                  <a:lnTo>
-                    <a:pt x="1360827" y="300814"/>
-                  </a:lnTo>
-                  <a:lnTo>
-                    <a:pt x="1289205" y="309559"/>
-                  </a:lnTo>
-                  <a:lnTo>
-                    <a:pt x="1217582" y="318160"/>
-                  </a:lnTo>
-                  <a:lnTo>
-                    <a:pt x="1145960" y="326618"/>
-                  </a:lnTo>
-                  <a:lnTo>
-                    <a:pt x="1074337" y="334936"/>
-                  </a:lnTo>
-                  <a:lnTo>
-                    <a:pt x="1002715" y="343117"/>
-                  </a:lnTo>
-                  <a:lnTo>
-                    <a:pt x="931092" y="351162"/>
-                  </a:lnTo>
-                  <a:lnTo>
-                    <a:pt x="859470" y="359074"/>
-                  </a:lnTo>
-                  <a:lnTo>
-                    <a:pt x="787847" y="366855"/>
-                  </a:lnTo>
-                  <a:lnTo>
-                    <a:pt x="716225" y="374507"/>
-                  </a:lnTo>
-                  <a:lnTo>
-                    <a:pt x="644602" y="382033"/>
-                  </a:lnTo>
-                  <a:lnTo>
-                    <a:pt x="572980" y="389434"/>
-                  </a:lnTo>
-                  <a:lnTo>
-                    <a:pt x="501357" y="396713"/>
-                  </a:lnTo>
-                  <a:lnTo>
-                    <a:pt x="429735" y="403871"/>
-                  </a:lnTo>
-                  <a:lnTo>
-                    <a:pt x="358112" y="410910"/>
-                  </a:lnTo>
-                  <a:lnTo>
-                    <a:pt x="286490" y="417833"/>
-                  </a:lnTo>
-                  <a:lnTo>
-                    <a:pt x="214867" y="424641"/>
-                  </a:lnTo>
-                  <a:lnTo>
-                    <a:pt x="143245" y="431337"/>
-                  </a:lnTo>
-                  <a:lnTo>
-                    <a:pt x="71622" y="437922"/>
-                  </a:lnTo>
-                  <a:lnTo>
-                    <a:pt x="0" y="444398"/>
+                    <a:pt x="70344" y="34706"/>
+                  </a:lnTo>
+                  <a:lnTo>
+                    <a:pt x="140688" y="47389"/>
+                  </a:lnTo>
+                  <a:lnTo>
+                    <a:pt x="211033" y="59838"/>
+                  </a:lnTo>
+                  <a:lnTo>
+                    <a:pt x="281377" y="72059"/>
+                  </a:lnTo>
+                  <a:lnTo>
+                    <a:pt x="351722" y="84055"/>
+                  </a:lnTo>
+                  <a:lnTo>
+                    <a:pt x="422066" y="95830"/>
+                  </a:lnTo>
+                  <a:lnTo>
+                    <a:pt x="492411" y="107389"/>
+                  </a:lnTo>
+                  <a:lnTo>
+                    <a:pt x="562755" y="118736"/>
+                  </a:lnTo>
+                  <a:lnTo>
+                    <a:pt x="633100" y="129874"/>
+                  </a:lnTo>
+                  <a:lnTo>
+                    <a:pt x="703444" y="140807"/>
+                  </a:lnTo>
+                  <a:lnTo>
+                    <a:pt x="773789" y="151540"/>
+                  </a:lnTo>
+                  <a:lnTo>
+                    <a:pt x="844133" y="162075"/>
+                  </a:lnTo>
+                  <a:lnTo>
+                    <a:pt x="914478" y="172416"/>
+                  </a:lnTo>
+                  <a:lnTo>
+                    <a:pt x="984822" y="182568"/>
+                  </a:lnTo>
+                  <a:lnTo>
+                    <a:pt x="1055167" y="192533"/>
+                  </a:lnTo>
+                  <a:lnTo>
+                    <a:pt x="1125511" y="202315"/>
+                  </a:lnTo>
+                  <a:lnTo>
+                    <a:pt x="1195856" y="211916"/>
+                  </a:lnTo>
+                  <a:lnTo>
+                    <a:pt x="1266200" y="221342"/>
+                  </a:lnTo>
+                  <a:lnTo>
+                    <a:pt x="1336545" y="230594"/>
+                  </a:lnTo>
+                  <a:lnTo>
+                    <a:pt x="1406889" y="239676"/>
+                  </a:lnTo>
+                  <a:lnTo>
+                    <a:pt x="1477234" y="248592"/>
+                  </a:lnTo>
+                  <a:lnTo>
+                    <a:pt x="1547578" y="257343"/>
+                  </a:lnTo>
+                  <a:lnTo>
+                    <a:pt x="1617923" y="265934"/>
+                  </a:lnTo>
+                  <a:lnTo>
+                    <a:pt x="1688267" y="274366"/>
+                  </a:lnTo>
+                  <a:lnTo>
+                    <a:pt x="1758612" y="282644"/>
+                  </a:lnTo>
+                  <a:lnTo>
+                    <a:pt x="1828956" y="290770"/>
+                  </a:lnTo>
+                  <a:lnTo>
+                    <a:pt x="1899301" y="298746"/>
+                  </a:lnTo>
+                  <a:lnTo>
+                    <a:pt x="1969645" y="306576"/>
+                  </a:lnTo>
+                  <a:lnTo>
+                    <a:pt x="2039990" y="314261"/>
+                  </a:lnTo>
+                  <a:lnTo>
+                    <a:pt x="2110334" y="321806"/>
+                  </a:lnTo>
+                  <a:lnTo>
+                    <a:pt x="2180679" y="329212"/>
+                  </a:lnTo>
+                  <a:lnTo>
+                    <a:pt x="2251023" y="336481"/>
+                  </a:lnTo>
+                  <a:lnTo>
+                    <a:pt x="2321368" y="343617"/>
+                  </a:lnTo>
+                  <a:lnTo>
+                    <a:pt x="2391712" y="350622"/>
+                  </a:lnTo>
+                  <a:lnTo>
+                    <a:pt x="2462057" y="357499"/>
+                  </a:lnTo>
+                  <a:lnTo>
+                    <a:pt x="2532401" y="364248"/>
+                  </a:lnTo>
+                  <a:lnTo>
+                    <a:pt x="2602746" y="370874"/>
+                  </a:lnTo>
+                  <a:lnTo>
+                    <a:pt x="2673090" y="377378"/>
+                  </a:lnTo>
+                  <a:lnTo>
+                    <a:pt x="2743435" y="383763"/>
+                  </a:lnTo>
+                  <a:lnTo>
+                    <a:pt x="2813779" y="390030"/>
+                  </a:lnTo>
+                  <a:lnTo>
+                    <a:pt x="2884124" y="396182"/>
+                  </a:lnTo>
+                  <a:lnTo>
+                    <a:pt x="2954468" y="402220"/>
+                  </a:lnTo>
+                  <a:lnTo>
+                    <a:pt x="3024813" y="408148"/>
+                  </a:lnTo>
+                  <a:lnTo>
+                    <a:pt x="3095157" y="413967"/>
+                  </a:lnTo>
+                  <a:lnTo>
+                    <a:pt x="3165502" y="419679"/>
+                  </a:lnTo>
+                  <a:lnTo>
+                    <a:pt x="3235846" y="425286"/>
+                  </a:lnTo>
+                  <a:lnTo>
+                    <a:pt x="3306191" y="420500"/>
+                  </a:lnTo>
+                  <a:lnTo>
+                    <a:pt x="3376535" y="415379"/>
+                  </a:lnTo>
+                  <a:lnTo>
+                    <a:pt x="3446880" y="410172"/>
+                  </a:lnTo>
+                  <a:lnTo>
+                    <a:pt x="3517224" y="404877"/>
+                  </a:lnTo>
+                  <a:lnTo>
+                    <a:pt x="3587569" y="399493"/>
+                  </a:lnTo>
+                  <a:lnTo>
+                    <a:pt x="3657913" y="394018"/>
+                  </a:lnTo>
+                  <a:lnTo>
+                    <a:pt x="3728257" y="388451"/>
+                  </a:lnTo>
+                  <a:lnTo>
+                    <a:pt x="3798602" y="382791"/>
+                  </a:lnTo>
+                  <a:lnTo>
+                    <a:pt x="3868946" y="377035"/>
+                  </a:lnTo>
+                  <a:lnTo>
+                    <a:pt x="3939291" y="371182"/>
+                  </a:lnTo>
+                  <a:lnTo>
+                    <a:pt x="4009635" y="365231"/>
+                  </a:lnTo>
+                  <a:lnTo>
+                    <a:pt x="4079980" y="359179"/>
+                  </a:lnTo>
+                  <a:lnTo>
+                    <a:pt x="4150324" y="353026"/>
+                  </a:lnTo>
+                  <a:lnTo>
+                    <a:pt x="4220669" y="346769"/>
+                  </a:lnTo>
+                  <a:lnTo>
+                    <a:pt x="4291013" y="340407"/>
+                  </a:lnTo>
+                  <a:lnTo>
+                    <a:pt x="4361358" y="333938"/>
+                  </a:lnTo>
+                  <a:lnTo>
+                    <a:pt x="4431702" y="327360"/>
+                  </a:lnTo>
+                  <a:lnTo>
+                    <a:pt x="4502047" y="320671"/>
+                  </a:lnTo>
+                  <a:lnTo>
+                    <a:pt x="4572391" y="313869"/>
+                  </a:lnTo>
+                  <a:lnTo>
+                    <a:pt x="4642736" y="306953"/>
+                  </a:lnTo>
+                  <a:lnTo>
+                    <a:pt x="4713080" y="299921"/>
+                  </a:lnTo>
+                  <a:lnTo>
+                    <a:pt x="4783425" y="292770"/>
+                  </a:lnTo>
+                  <a:lnTo>
+                    <a:pt x="4853769" y="285499"/>
+                  </a:lnTo>
+                  <a:lnTo>
+                    <a:pt x="4924114" y="278106"/>
+                  </a:lnTo>
+                  <a:lnTo>
+                    <a:pt x="4994458" y="270588"/>
+                  </a:lnTo>
+                  <a:lnTo>
+                    <a:pt x="5064803" y="262943"/>
+                  </a:lnTo>
+                  <a:lnTo>
+                    <a:pt x="5135147" y="255170"/>
+                  </a:lnTo>
+                  <a:lnTo>
+                    <a:pt x="5205492" y="247266"/>
+                  </a:lnTo>
+                  <a:lnTo>
+                    <a:pt x="5275836" y="239229"/>
+                  </a:lnTo>
+                  <a:lnTo>
+                    <a:pt x="5346181" y="231057"/>
+                  </a:lnTo>
+                  <a:lnTo>
+                    <a:pt x="5416525" y="222747"/>
+                  </a:lnTo>
+                  <a:lnTo>
+                    <a:pt x="5486870" y="214297"/>
+                  </a:lnTo>
+                  <a:lnTo>
+                    <a:pt x="5557214" y="205705"/>
+                  </a:lnTo>
+                  <a:lnTo>
+                    <a:pt x="5627559" y="196969"/>
+                  </a:lnTo>
+                  <a:lnTo>
+                    <a:pt x="5697903" y="188085"/>
+                  </a:lnTo>
+                  <a:lnTo>
+                    <a:pt x="5768248" y="179052"/>
+                  </a:lnTo>
+                  <a:lnTo>
+                    <a:pt x="5838592" y="169867"/>
+                  </a:lnTo>
+                  <a:lnTo>
+                    <a:pt x="5908937" y="160527"/>
+                  </a:lnTo>
+                  <a:lnTo>
+                    <a:pt x="5979281" y="151030"/>
+                  </a:lnTo>
+                  <a:lnTo>
+                    <a:pt x="6049626" y="141373"/>
+                  </a:lnTo>
+                  <a:lnTo>
+                    <a:pt x="6119970" y="131554"/>
+                  </a:lnTo>
+                  <a:lnTo>
+                    <a:pt x="6190315" y="121569"/>
+                  </a:lnTo>
+                  <a:lnTo>
+                    <a:pt x="6260659" y="111417"/>
+                  </a:lnTo>
+                  <a:lnTo>
+                    <a:pt x="6331004" y="101093"/>
+                  </a:lnTo>
+                  <a:lnTo>
+                    <a:pt x="6401348" y="90596"/>
+                  </a:lnTo>
+                  <a:lnTo>
+                    <a:pt x="6471693" y="79922"/>
+                  </a:lnTo>
+                  <a:lnTo>
+                    <a:pt x="6542037" y="69068"/>
+                  </a:lnTo>
+                  <a:lnTo>
+                    <a:pt x="6612382" y="58031"/>
+                  </a:lnTo>
+                  <a:lnTo>
+                    <a:pt x="6682726" y="46809"/>
+                  </a:lnTo>
+                  <a:lnTo>
+                    <a:pt x="6753071" y="35398"/>
+                  </a:lnTo>
+                  <a:lnTo>
+                    <a:pt x="6823415" y="23795"/>
+                  </a:lnTo>
+                  <a:lnTo>
+                    <a:pt x="6893760" y="11997"/>
+                  </a:lnTo>
+                  <a:lnTo>
+                    <a:pt x="6964104" y="0"/>
                   </a:lnTo>
                 </a:path>
               </a:pathLst>
@@ -4240,312 +3950,637 @@
           </p:nvSpPr>
           <p:spPr>
             <a:xfrm>
-              <a:off x="1172049" y="4691545"/>
-              <a:ext cx="7090630" cy="76081"/>
+              <a:off x="1235312" y="3101079"/>
+              <a:ext cx="6964104" cy="187176"/>
             </a:xfrm>
             <a:custGeom>
               <a:avLst/>
               <a:pathLst>
-                <a:path w="7090630" h="76081">
+                <a:path w="6964104" h="187176">
+                  <a:moveTo>
+                    <a:pt x="6964104" y="187176"/>
+                  </a:moveTo>
+                  <a:lnTo>
+                    <a:pt x="6893760" y="185079"/>
+                  </a:lnTo>
+                  <a:lnTo>
+                    <a:pt x="6823415" y="182942"/>
+                  </a:lnTo>
+                  <a:lnTo>
+                    <a:pt x="6753071" y="180765"/>
+                  </a:lnTo>
+                  <a:lnTo>
+                    <a:pt x="6682726" y="178547"/>
+                  </a:lnTo>
+                  <a:lnTo>
+                    <a:pt x="6612382" y="176288"/>
+                  </a:lnTo>
+                  <a:lnTo>
+                    <a:pt x="6542037" y="173986"/>
+                  </a:lnTo>
+                  <a:lnTo>
+                    <a:pt x="6471693" y="171641"/>
+                  </a:lnTo>
+                  <a:lnTo>
+                    <a:pt x="6401348" y="169253"/>
+                  </a:lnTo>
+                  <a:lnTo>
+                    <a:pt x="6331004" y="166819"/>
+                  </a:lnTo>
+                  <a:lnTo>
+                    <a:pt x="6260659" y="164340"/>
+                  </a:lnTo>
+                  <a:lnTo>
+                    <a:pt x="6190315" y="161815"/>
+                  </a:lnTo>
+                  <a:lnTo>
+                    <a:pt x="6119970" y="159243"/>
+                  </a:lnTo>
+                  <a:lnTo>
+                    <a:pt x="6049626" y="156622"/>
+                  </a:lnTo>
+                  <a:lnTo>
+                    <a:pt x="5979281" y="153952"/>
+                  </a:lnTo>
+                  <a:lnTo>
+                    <a:pt x="5908937" y="151232"/>
+                  </a:lnTo>
+                  <a:lnTo>
+                    <a:pt x="5838592" y="148462"/>
+                  </a:lnTo>
+                  <a:lnTo>
+                    <a:pt x="5768248" y="145639"/>
+                  </a:lnTo>
+                  <a:lnTo>
+                    <a:pt x="5697903" y="142764"/>
+                  </a:lnTo>
+                  <a:lnTo>
+                    <a:pt x="5627559" y="139834"/>
+                  </a:lnTo>
+                  <a:lnTo>
+                    <a:pt x="5557214" y="136850"/>
+                  </a:lnTo>
+                  <a:lnTo>
+                    <a:pt x="5486870" y="133810"/>
+                  </a:lnTo>
+                  <a:lnTo>
+                    <a:pt x="5416525" y="130713"/>
+                  </a:lnTo>
+                  <a:lnTo>
+                    <a:pt x="5346181" y="127558"/>
+                  </a:lnTo>
+                  <a:lnTo>
+                    <a:pt x="5275836" y="124344"/>
+                  </a:lnTo>
+                  <a:lnTo>
+                    <a:pt x="5205492" y="121070"/>
+                  </a:lnTo>
+                  <a:lnTo>
+                    <a:pt x="5135147" y="117735"/>
+                  </a:lnTo>
+                  <a:lnTo>
+                    <a:pt x="5064803" y="114337"/>
+                  </a:lnTo>
+                  <a:lnTo>
+                    <a:pt x="4994458" y="110875"/>
+                  </a:lnTo>
+                  <a:lnTo>
+                    <a:pt x="4924114" y="107349"/>
+                  </a:lnTo>
+                  <a:lnTo>
+                    <a:pt x="4853769" y="103757"/>
+                  </a:lnTo>
+                  <a:lnTo>
+                    <a:pt x="4783425" y="100097"/>
+                  </a:lnTo>
+                  <a:lnTo>
+                    <a:pt x="4713080" y="96369"/>
+                  </a:lnTo>
+                  <a:lnTo>
+                    <a:pt x="4642736" y="92571"/>
+                  </a:lnTo>
+                  <a:lnTo>
+                    <a:pt x="4572391" y="88702"/>
+                  </a:lnTo>
+                  <a:lnTo>
+                    <a:pt x="4502047" y="84760"/>
+                  </a:lnTo>
+                  <a:lnTo>
+                    <a:pt x="4431702" y="80745"/>
+                  </a:lnTo>
+                  <a:lnTo>
+                    <a:pt x="4361358" y="76655"/>
+                  </a:lnTo>
+                  <a:lnTo>
+                    <a:pt x="4291013" y="72487"/>
+                  </a:lnTo>
+                  <a:lnTo>
+                    <a:pt x="4220669" y="68242"/>
+                  </a:lnTo>
+                  <a:lnTo>
+                    <a:pt x="4150324" y="63918"/>
+                  </a:lnTo>
+                  <a:lnTo>
+                    <a:pt x="4079980" y="59512"/>
+                  </a:lnTo>
+                  <a:lnTo>
+                    <a:pt x="4009635" y="55024"/>
+                  </a:lnTo>
+                  <a:lnTo>
+                    <a:pt x="3939291" y="50452"/>
+                  </a:lnTo>
+                  <a:lnTo>
+                    <a:pt x="3868946" y="45795"/>
+                  </a:lnTo>
+                  <a:lnTo>
+                    <a:pt x="3798602" y="41050"/>
+                  </a:lnTo>
+                  <a:lnTo>
+                    <a:pt x="3728257" y="36216"/>
+                  </a:lnTo>
+                  <a:lnTo>
+                    <a:pt x="3657913" y="31292"/>
+                  </a:lnTo>
+                  <a:lnTo>
+                    <a:pt x="3587569" y="26275"/>
+                  </a:lnTo>
+                  <a:lnTo>
+                    <a:pt x="3517224" y="21165"/>
+                  </a:lnTo>
+                  <a:lnTo>
+                    <a:pt x="3446880" y="15959"/>
+                  </a:lnTo>
+                  <a:lnTo>
+                    <a:pt x="3376535" y="10656"/>
+                  </a:lnTo>
+                  <a:lnTo>
+                    <a:pt x="3306191" y="5253"/>
+                  </a:lnTo>
+                  <a:lnTo>
+                    <a:pt x="3235846" y="0"/>
+                  </a:lnTo>
+                  <a:lnTo>
+                    <a:pt x="3165502" y="4952"/>
+                  </a:lnTo>
+                  <a:lnTo>
+                    <a:pt x="3095157" y="9824"/>
+                  </a:lnTo>
+                  <a:lnTo>
+                    <a:pt x="3024813" y="14614"/>
+                  </a:lnTo>
+                  <a:lnTo>
+                    <a:pt x="2954468" y="19325"/>
+                  </a:lnTo>
+                  <a:lnTo>
+                    <a:pt x="2884124" y="23958"/>
+                  </a:lnTo>
+                  <a:lnTo>
+                    <a:pt x="2813779" y="28514"/>
+                  </a:lnTo>
+                  <a:lnTo>
+                    <a:pt x="2743435" y="32995"/>
+                  </a:lnTo>
+                  <a:lnTo>
+                    <a:pt x="2673090" y="37402"/>
+                  </a:lnTo>
+                  <a:lnTo>
+                    <a:pt x="2602746" y="41736"/>
+                  </a:lnTo>
+                  <a:lnTo>
+                    <a:pt x="2532401" y="45998"/>
+                  </a:lnTo>
+                  <a:lnTo>
+                    <a:pt x="2462057" y="50190"/>
+                  </a:lnTo>
+                  <a:lnTo>
+                    <a:pt x="2391712" y="54312"/>
+                  </a:lnTo>
+                  <a:lnTo>
+                    <a:pt x="2321368" y="58366"/>
+                  </a:lnTo>
+                  <a:lnTo>
+                    <a:pt x="2251023" y="62353"/>
+                  </a:lnTo>
+                  <a:lnTo>
+                    <a:pt x="2180679" y="66274"/>
+                  </a:lnTo>
+                  <a:lnTo>
+                    <a:pt x="2110334" y="70130"/>
+                  </a:lnTo>
+                  <a:lnTo>
+                    <a:pt x="2039990" y="73922"/>
+                  </a:lnTo>
+                  <a:lnTo>
+                    <a:pt x="1969645" y="77651"/>
+                  </a:lnTo>
+                  <a:lnTo>
+                    <a:pt x="1899301" y="81319"/>
+                  </a:lnTo>
+                  <a:lnTo>
+                    <a:pt x="1828956" y="84926"/>
+                  </a:lnTo>
+                  <a:lnTo>
+                    <a:pt x="1758612" y="88473"/>
+                  </a:lnTo>
+                  <a:lnTo>
+                    <a:pt x="1688267" y="91961"/>
+                  </a:lnTo>
+                  <a:lnTo>
+                    <a:pt x="1617923" y="95392"/>
+                  </a:lnTo>
+                  <a:lnTo>
+                    <a:pt x="1547578" y="98766"/>
+                  </a:lnTo>
+                  <a:lnTo>
+                    <a:pt x="1477234" y="102084"/>
+                  </a:lnTo>
+                  <a:lnTo>
+                    <a:pt x="1406889" y="105347"/>
+                  </a:lnTo>
+                  <a:lnTo>
+                    <a:pt x="1336545" y="108556"/>
+                  </a:lnTo>
+                  <a:lnTo>
+                    <a:pt x="1266200" y="111712"/>
+                  </a:lnTo>
+                  <a:lnTo>
+                    <a:pt x="1195856" y="114816"/>
+                  </a:lnTo>
+                  <a:lnTo>
+                    <a:pt x="1125511" y="117868"/>
+                  </a:lnTo>
+                  <a:lnTo>
+                    <a:pt x="1055167" y="120870"/>
+                  </a:lnTo>
+                  <a:lnTo>
+                    <a:pt x="984822" y="123823"/>
+                  </a:lnTo>
+                  <a:lnTo>
+                    <a:pt x="914478" y="126726"/>
+                  </a:lnTo>
+                  <a:lnTo>
+                    <a:pt x="844133" y="129581"/>
+                  </a:lnTo>
+                  <a:lnTo>
+                    <a:pt x="773789" y="132389"/>
+                  </a:lnTo>
+                  <a:lnTo>
+                    <a:pt x="703444" y="135151"/>
+                  </a:lnTo>
+                  <a:lnTo>
+                    <a:pt x="633100" y="137866"/>
+                  </a:lnTo>
+                  <a:lnTo>
+                    <a:pt x="562755" y="140537"/>
+                  </a:lnTo>
+                  <a:lnTo>
+                    <a:pt x="492411" y="143164"/>
+                  </a:lnTo>
+                  <a:lnTo>
+                    <a:pt x="422066" y="145747"/>
+                  </a:lnTo>
+                  <a:lnTo>
+                    <a:pt x="351722" y="148287"/>
+                  </a:lnTo>
+                  <a:lnTo>
+                    <a:pt x="281377" y="150786"/>
+                  </a:lnTo>
+                  <a:lnTo>
+                    <a:pt x="211033" y="153243"/>
+                  </a:lnTo>
+                  <a:lnTo>
+                    <a:pt x="140688" y="155659"/>
+                  </a:lnTo>
+                  <a:lnTo>
+                    <a:pt x="70344" y="158035"/>
+                  </a:lnTo>
+                  <a:lnTo>
+                    <a:pt x="0" y="160372"/>
+                  </a:lnTo>
+                </a:path>
+              </a:pathLst>
+            </a:custGeom>
+          </p:spPr>
+          <p:txBody>
+            <a:bodyPr/>
+            <a:lstStyle/>
+            <a:p/>
+          </p:txBody>
+        </p:sp>
+        <p:sp>
+          <p:nvSpPr>
+            <p:cNvPr id="24" name="pl24"/>
+            <p:cNvSpPr/>
+            <p:nvPr/>
+          </p:nvSpPr>
+          <p:spPr>
+            <a:xfrm>
+              <a:off x="1235312" y="3087882"/>
+              <a:ext cx="6964104" cy="27455"/>
+            </a:xfrm>
+            <a:custGeom>
+              <a:avLst/>
+              <a:pathLst>
+                <a:path w="6964104" h="27455">
                   <a:moveTo>
                     <a:pt x="0" y="0"/>
                   </a:moveTo>
                   <a:lnTo>
-                    <a:pt x="71622" y="804"/>
-                  </a:lnTo>
-                  <a:lnTo>
-                    <a:pt x="143245" y="1607"/>
-                  </a:lnTo>
-                  <a:lnTo>
-                    <a:pt x="214867" y="2409"/>
-                  </a:lnTo>
-                  <a:lnTo>
-                    <a:pt x="286490" y="3211"/>
-                  </a:lnTo>
-                  <a:lnTo>
-                    <a:pt x="358112" y="4012"/>
-                  </a:lnTo>
-                  <a:lnTo>
-                    <a:pt x="429735" y="4812"/>
-                  </a:lnTo>
-                  <a:lnTo>
-                    <a:pt x="501357" y="5612"/>
-                  </a:lnTo>
-                  <a:lnTo>
-                    <a:pt x="572980" y="6411"/>
-                  </a:lnTo>
-                  <a:lnTo>
-                    <a:pt x="644602" y="7209"/>
-                  </a:lnTo>
-                  <a:lnTo>
-                    <a:pt x="716225" y="8006"/>
-                  </a:lnTo>
-                  <a:lnTo>
-                    <a:pt x="787847" y="8803"/>
-                  </a:lnTo>
-                  <a:lnTo>
-                    <a:pt x="859470" y="9599"/>
-                  </a:lnTo>
-                  <a:lnTo>
-                    <a:pt x="931092" y="10394"/>
-                  </a:lnTo>
-                  <a:lnTo>
-                    <a:pt x="1002715" y="11188"/>
-                  </a:lnTo>
-                  <a:lnTo>
-                    <a:pt x="1074337" y="11982"/>
-                  </a:lnTo>
-                  <a:lnTo>
-                    <a:pt x="1145960" y="12774"/>
-                  </a:lnTo>
-                  <a:lnTo>
-                    <a:pt x="1217582" y="13567"/>
-                  </a:lnTo>
-                  <a:lnTo>
-                    <a:pt x="1289205" y="14358"/>
-                  </a:lnTo>
-                  <a:lnTo>
-                    <a:pt x="1360827" y="15149"/>
-                  </a:lnTo>
-                  <a:lnTo>
-                    <a:pt x="1432450" y="15939"/>
-                  </a:lnTo>
-                  <a:lnTo>
-                    <a:pt x="1504073" y="16728"/>
-                  </a:lnTo>
-                  <a:lnTo>
-                    <a:pt x="1575695" y="17516"/>
-                  </a:lnTo>
-                  <a:lnTo>
-                    <a:pt x="1647318" y="18304"/>
-                  </a:lnTo>
-                  <a:lnTo>
-                    <a:pt x="1718940" y="19091"/>
-                  </a:lnTo>
-                  <a:lnTo>
-                    <a:pt x="1790563" y="19877"/>
-                  </a:lnTo>
-                  <a:lnTo>
-                    <a:pt x="1862185" y="20663"/>
-                  </a:lnTo>
-                  <a:lnTo>
-                    <a:pt x="1933808" y="21448"/>
-                  </a:lnTo>
-                  <a:lnTo>
-                    <a:pt x="2005430" y="22232"/>
-                  </a:lnTo>
-                  <a:lnTo>
-                    <a:pt x="2077053" y="23015"/>
-                  </a:lnTo>
-                  <a:lnTo>
-                    <a:pt x="2148675" y="23798"/>
-                  </a:lnTo>
-                  <a:lnTo>
-                    <a:pt x="2220298" y="24580"/>
-                  </a:lnTo>
-                  <a:lnTo>
-                    <a:pt x="2291920" y="25361"/>
-                  </a:lnTo>
-                  <a:lnTo>
-                    <a:pt x="2363543" y="26141"/>
-                  </a:lnTo>
-                  <a:lnTo>
-                    <a:pt x="2435165" y="26921"/>
-                  </a:lnTo>
-                  <a:lnTo>
-                    <a:pt x="2506788" y="27700"/>
-                  </a:lnTo>
-                  <a:lnTo>
-                    <a:pt x="2578410" y="28478"/>
-                  </a:lnTo>
-                  <a:lnTo>
-                    <a:pt x="2650033" y="29256"/>
-                  </a:lnTo>
-                  <a:lnTo>
-                    <a:pt x="2721655" y="30033"/>
-                  </a:lnTo>
-                  <a:lnTo>
-                    <a:pt x="2793278" y="30809"/>
-                  </a:lnTo>
-                  <a:lnTo>
-                    <a:pt x="2864901" y="31584"/>
-                  </a:lnTo>
-                  <a:lnTo>
-                    <a:pt x="2936523" y="32359"/>
-                  </a:lnTo>
-                  <a:lnTo>
-                    <a:pt x="3008146" y="33133"/>
-                  </a:lnTo>
-                  <a:lnTo>
-                    <a:pt x="3079768" y="33906"/>
-                  </a:lnTo>
-                  <a:lnTo>
-                    <a:pt x="3151391" y="34679"/>
-                  </a:lnTo>
-                  <a:lnTo>
-                    <a:pt x="3223013" y="35451"/>
-                  </a:lnTo>
-                  <a:lnTo>
-                    <a:pt x="3294636" y="36222"/>
-                  </a:lnTo>
-                  <a:lnTo>
-                    <a:pt x="3366258" y="36992"/>
-                  </a:lnTo>
-                  <a:lnTo>
-                    <a:pt x="3437881" y="37762"/>
-                  </a:lnTo>
-                  <a:lnTo>
-                    <a:pt x="3509503" y="38531"/>
-                  </a:lnTo>
-                  <a:lnTo>
-                    <a:pt x="3581126" y="39299"/>
-                  </a:lnTo>
-                  <a:lnTo>
-                    <a:pt x="3652748" y="40066"/>
-                  </a:lnTo>
-                  <a:lnTo>
-                    <a:pt x="3724371" y="40833"/>
-                  </a:lnTo>
-                  <a:lnTo>
-                    <a:pt x="3795993" y="41599"/>
-                  </a:lnTo>
-                  <a:lnTo>
-                    <a:pt x="3867616" y="42365"/>
-                  </a:lnTo>
-                  <a:lnTo>
-                    <a:pt x="3939238" y="43129"/>
-                  </a:lnTo>
-                  <a:lnTo>
-                    <a:pt x="4010861" y="43893"/>
-                  </a:lnTo>
-                  <a:lnTo>
-                    <a:pt x="4082483" y="44656"/>
-                  </a:lnTo>
-                  <a:lnTo>
-                    <a:pt x="4154106" y="45419"/>
-                  </a:lnTo>
-                  <a:lnTo>
-                    <a:pt x="4225729" y="46181"/>
-                  </a:lnTo>
-                  <a:lnTo>
-                    <a:pt x="4297351" y="46942"/>
-                  </a:lnTo>
-                  <a:lnTo>
-                    <a:pt x="4368974" y="47702"/>
-                  </a:lnTo>
-                  <a:lnTo>
-                    <a:pt x="4440596" y="48462"/>
-                  </a:lnTo>
-                  <a:lnTo>
-                    <a:pt x="4512219" y="49221"/>
-                  </a:lnTo>
-                  <a:lnTo>
-                    <a:pt x="4583841" y="49979"/>
-                  </a:lnTo>
-                  <a:lnTo>
-                    <a:pt x="4655464" y="50737"/>
-                  </a:lnTo>
-                  <a:lnTo>
-                    <a:pt x="4727086" y="51494"/>
-                  </a:lnTo>
-                  <a:lnTo>
-                    <a:pt x="4798709" y="52250"/>
-                  </a:lnTo>
-                  <a:lnTo>
-                    <a:pt x="4870331" y="53006"/>
-                  </a:lnTo>
-                  <a:lnTo>
-                    <a:pt x="4941954" y="53760"/>
-                  </a:lnTo>
-                  <a:lnTo>
-                    <a:pt x="5013576" y="54514"/>
-                  </a:lnTo>
-                  <a:lnTo>
-                    <a:pt x="5085199" y="55268"/>
-                  </a:lnTo>
-                  <a:lnTo>
-                    <a:pt x="5156821" y="56020"/>
-                  </a:lnTo>
-                  <a:lnTo>
-                    <a:pt x="5228444" y="56772"/>
-                  </a:lnTo>
-                  <a:lnTo>
-                    <a:pt x="5300066" y="57524"/>
-                  </a:lnTo>
-                  <a:lnTo>
-                    <a:pt x="5371689" y="58274"/>
-                  </a:lnTo>
-                  <a:lnTo>
-                    <a:pt x="5443311" y="59024"/>
-                  </a:lnTo>
-                  <a:lnTo>
-                    <a:pt x="5514934" y="59773"/>
-                  </a:lnTo>
-                  <a:lnTo>
-                    <a:pt x="5586557" y="60522"/>
-                  </a:lnTo>
-                  <a:lnTo>
-                    <a:pt x="5658179" y="61270"/>
-                  </a:lnTo>
-                  <a:lnTo>
-                    <a:pt x="5729802" y="62017"/>
-                  </a:lnTo>
-                  <a:lnTo>
-                    <a:pt x="5801424" y="62763"/>
-                  </a:lnTo>
-                  <a:lnTo>
-                    <a:pt x="5873047" y="63509"/>
-                  </a:lnTo>
-                  <a:lnTo>
-                    <a:pt x="5944669" y="64254"/>
-                  </a:lnTo>
-                  <a:lnTo>
-                    <a:pt x="6016292" y="64998"/>
-                  </a:lnTo>
-                  <a:lnTo>
-                    <a:pt x="6087914" y="65742"/>
-                  </a:lnTo>
-                  <a:lnTo>
-                    <a:pt x="6159537" y="66485"/>
-                  </a:lnTo>
-                  <a:lnTo>
-                    <a:pt x="6231159" y="67227"/>
-                  </a:lnTo>
-                  <a:lnTo>
-                    <a:pt x="6302782" y="67969"/>
-                  </a:lnTo>
-                  <a:lnTo>
-                    <a:pt x="6374404" y="68710"/>
-                  </a:lnTo>
-                  <a:lnTo>
-                    <a:pt x="6446027" y="69450"/>
-                  </a:lnTo>
-                  <a:lnTo>
-                    <a:pt x="6517649" y="70189"/>
-                  </a:lnTo>
-                  <a:lnTo>
-                    <a:pt x="6589272" y="70928"/>
-                  </a:lnTo>
-                  <a:lnTo>
-                    <a:pt x="6660894" y="71666"/>
-                  </a:lnTo>
-                  <a:lnTo>
-                    <a:pt x="6732517" y="72404"/>
-                  </a:lnTo>
-                  <a:lnTo>
-                    <a:pt x="6804139" y="73141"/>
-                  </a:lnTo>
-                  <a:lnTo>
-                    <a:pt x="6875762" y="73877"/>
-                  </a:lnTo>
-                  <a:lnTo>
-                    <a:pt x="6947385" y="74612"/>
-                  </a:lnTo>
-                  <a:lnTo>
-                    <a:pt x="7019007" y="75347"/>
-                  </a:lnTo>
-                  <a:lnTo>
-                    <a:pt x="7090630" y="76081"/>
+                    <a:pt x="70344" y="290"/>
+                  </a:lnTo>
+                  <a:lnTo>
+                    <a:pt x="140688" y="580"/>
+                  </a:lnTo>
+                  <a:lnTo>
+                    <a:pt x="211033" y="869"/>
+                  </a:lnTo>
+                  <a:lnTo>
+                    <a:pt x="281377" y="1158"/>
+                  </a:lnTo>
+                  <a:lnTo>
+                    <a:pt x="351722" y="1448"/>
+                  </a:lnTo>
+                  <a:lnTo>
+                    <a:pt x="422066" y="1736"/>
+                  </a:lnTo>
+                  <a:lnTo>
+                    <a:pt x="492411" y="2025"/>
+                  </a:lnTo>
+                  <a:lnTo>
+                    <a:pt x="562755" y="2313"/>
+                  </a:lnTo>
+                  <a:lnTo>
+                    <a:pt x="633100" y="2601"/>
+                  </a:lnTo>
+                  <a:lnTo>
+                    <a:pt x="703444" y="2889"/>
+                  </a:lnTo>
+                  <a:lnTo>
+                    <a:pt x="773789" y="3176"/>
+                  </a:lnTo>
+                  <a:lnTo>
+                    <a:pt x="844133" y="3464"/>
+                  </a:lnTo>
+                  <a:lnTo>
+                    <a:pt x="914478" y="3750"/>
+                  </a:lnTo>
+                  <a:lnTo>
+                    <a:pt x="984822" y="4037"/>
+                  </a:lnTo>
+                  <a:lnTo>
+                    <a:pt x="1055167" y="4324"/>
+                  </a:lnTo>
+                  <a:lnTo>
+                    <a:pt x="1125511" y="4610"/>
+                  </a:lnTo>
+                  <a:lnTo>
+                    <a:pt x="1195856" y="4896"/>
+                  </a:lnTo>
+                  <a:lnTo>
+                    <a:pt x="1266200" y="5181"/>
+                  </a:lnTo>
+                  <a:lnTo>
+                    <a:pt x="1336545" y="5466"/>
+                  </a:lnTo>
+                  <a:lnTo>
+                    <a:pt x="1406889" y="5752"/>
+                  </a:lnTo>
+                  <a:lnTo>
+                    <a:pt x="1477234" y="6036"/>
+                  </a:lnTo>
+                  <a:lnTo>
+                    <a:pt x="1547578" y="6321"/>
+                  </a:lnTo>
+                  <a:lnTo>
+                    <a:pt x="1617923" y="6605"/>
+                  </a:lnTo>
+                  <a:lnTo>
+                    <a:pt x="1688267" y="6889"/>
+                  </a:lnTo>
+                  <a:lnTo>
+                    <a:pt x="1758612" y="7173"/>
+                  </a:lnTo>
+                  <a:lnTo>
+                    <a:pt x="1828956" y="7456"/>
+                  </a:lnTo>
+                  <a:lnTo>
+                    <a:pt x="1899301" y="7740"/>
+                  </a:lnTo>
+                  <a:lnTo>
+                    <a:pt x="1969645" y="8023"/>
+                  </a:lnTo>
+                  <a:lnTo>
+                    <a:pt x="2039990" y="8305"/>
+                  </a:lnTo>
+                  <a:lnTo>
+                    <a:pt x="2110334" y="8588"/>
+                  </a:lnTo>
+                  <a:lnTo>
+                    <a:pt x="2180679" y="8870"/>
+                  </a:lnTo>
+                  <a:lnTo>
+                    <a:pt x="2251023" y="9152"/>
+                  </a:lnTo>
+                  <a:lnTo>
+                    <a:pt x="2321368" y="9433"/>
+                  </a:lnTo>
+                  <a:lnTo>
+                    <a:pt x="2391712" y="9715"/>
+                  </a:lnTo>
+                  <a:lnTo>
+                    <a:pt x="2462057" y="9996"/>
+                  </a:lnTo>
+                  <a:lnTo>
+                    <a:pt x="2532401" y="10277"/>
+                  </a:lnTo>
+                  <a:lnTo>
+                    <a:pt x="2602746" y="10557"/>
+                  </a:lnTo>
+                  <a:lnTo>
+                    <a:pt x="2673090" y="10838"/>
+                  </a:lnTo>
+                  <a:lnTo>
+                    <a:pt x="2743435" y="11118"/>
+                  </a:lnTo>
+                  <a:lnTo>
+                    <a:pt x="2813779" y="11398"/>
+                  </a:lnTo>
+                  <a:lnTo>
+                    <a:pt x="2884124" y="11677"/>
+                  </a:lnTo>
+                  <a:lnTo>
+                    <a:pt x="2954468" y="11957"/>
+                  </a:lnTo>
+                  <a:lnTo>
+                    <a:pt x="3024813" y="12236"/>
+                  </a:lnTo>
+                  <a:lnTo>
+                    <a:pt x="3095157" y="12514"/>
+                  </a:lnTo>
+                  <a:lnTo>
+                    <a:pt x="3165502" y="12793"/>
+                  </a:lnTo>
+                  <a:lnTo>
+                    <a:pt x="3235846" y="13071"/>
+                  </a:lnTo>
+                  <a:lnTo>
+                    <a:pt x="3306191" y="13349"/>
+                  </a:lnTo>
+                  <a:lnTo>
+                    <a:pt x="3376535" y="13627"/>
+                  </a:lnTo>
+                  <a:lnTo>
+                    <a:pt x="3446880" y="13904"/>
+                  </a:lnTo>
+                  <a:lnTo>
+                    <a:pt x="3517224" y="14182"/>
+                  </a:lnTo>
+                  <a:lnTo>
+                    <a:pt x="3587569" y="14459"/>
+                  </a:lnTo>
+                  <a:lnTo>
+                    <a:pt x="3657913" y="14735"/>
+                  </a:lnTo>
+                  <a:lnTo>
+                    <a:pt x="3728257" y="15012"/>
+                  </a:lnTo>
+                  <a:lnTo>
+                    <a:pt x="3798602" y="15288"/>
+                  </a:lnTo>
+                  <a:lnTo>
+                    <a:pt x="3868946" y="15564"/>
+                  </a:lnTo>
+                  <a:lnTo>
+                    <a:pt x="3939291" y="15840"/>
+                  </a:lnTo>
+                  <a:lnTo>
+                    <a:pt x="4009635" y="16115"/>
+                  </a:lnTo>
+                  <a:lnTo>
+                    <a:pt x="4079980" y="16390"/>
+                  </a:lnTo>
+                  <a:lnTo>
+                    <a:pt x="4150324" y="16665"/>
+                  </a:lnTo>
+                  <a:lnTo>
+                    <a:pt x="4220669" y="16940"/>
+                  </a:lnTo>
+                  <a:lnTo>
+                    <a:pt x="4291013" y="17214"/>
+                  </a:lnTo>
+                  <a:lnTo>
+                    <a:pt x="4361358" y="17488"/>
+                  </a:lnTo>
+                  <a:lnTo>
+                    <a:pt x="4431702" y="17762"/>
+                  </a:lnTo>
+                  <a:lnTo>
+                    <a:pt x="4502047" y="18036"/>
+                  </a:lnTo>
+                  <a:lnTo>
+                    <a:pt x="4572391" y="18309"/>
+                  </a:lnTo>
+                  <a:lnTo>
+                    <a:pt x="4642736" y="18583"/>
+                  </a:lnTo>
+                  <a:lnTo>
+                    <a:pt x="4713080" y="18855"/>
+                  </a:lnTo>
+                  <a:lnTo>
+                    <a:pt x="4783425" y="19128"/>
+                  </a:lnTo>
+                  <a:lnTo>
+                    <a:pt x="4853769" y="19401"/>
+                  </a:lnTo>
+                  <a:lnTo>
+                    <a:pt x="4924114" y="19673"/>
+                  </a:lnTo>
+                  <a:lnTo>
+                    <a:pt x="4994458" y="19945"/>
+                  </a:lnTo>
+                  <a:lnTo>
+                    <a:pt x="5064803" y="20216"/>
+                  </a:lnTo>
+                  <a:lnTo>
+                    <a:pt x="5135147" y="20488"/>
+                  </a:lnTo>
+                  <a:lnTo>
+                    <a:pt x="5205492" y="20759"/>
+                  </a:lnTo>
+                  <a:lnTo>
+                    <a:pt x="5275836" y="21030"/>
+                  </a:lnTo>
+                  <a:lnTo>
+                    <a:pt x="5346181" y="21300"/>
+                  </a:lnTo>
+                  <a:lnTo>
+                    <a:pt x="5416525" y="21570"/>
+                  </a:lnTo>
+                  <a:lnTo>
+                    <a:pt x="5486870" y="21841"/>
+                  </a:lnTo>
+                  <a:lnTo>
+                    <a:pt x="5557214" y="22110"/>
+                  </a:lnTo>
+                  <a:lnTo>
+                    <a:pt x="5627559" y="22380"/>
+                  </a:lnTo>
+                  <a:lnTo>
+                    <a:pt x="5697903" y="22649"/>
+                  </a:lnTo>
+                  <a:lnTo>
+                    <a:pt x="5768248" y="22919"/>
+                  </a:lnTo>
+                  <a:lnTo>
+                    <a:pt x="5838592" y="23187"/>
+                  </a:lnTo>
+                  <a:lnTo>
+                    <a:pt x="5908937" y="23456"/>
+                  </a:lnTo>
+                  <a:lnTo>
+                    <a:pt x="5979281" y="23724"/>
+                  </a:lnTo>
+                  <a:lnTo>
+                    <a:pt x="6049626" y="23993"/>
+                  </a:lnTo>
+                  <a:lnTo>
+                    <a:pt x="6119970" y="24260"/>
+                  </a:lnTo>
+                  <a:lnTo>
+                    <a:pt x="6190315" y="24528"/>
+                  </a:lnTo>
+                  <a:lnTo>
+                    <a:pt x="6260659" y="24795"/>
+                  </a:lnTo>
+                  <a:lnTo>
+                    <a:pt x="6331004" y="25062"/>
+                  </a:lnTo>
+                  <a:lnTo>
+                    <a:pt x="6401348" y="25329"/>
+                  </a:lnTo>
+                  <a:lnTo>
+                    <a:pt x="6471693" y="25596"/>
+                  </a:lnTo>
+                  <a:lnTo>
+                    <a:pt x="6542037" y="25862"/>
+                  </a:lnTo>
+                  <a:lnTo>
+                    <a:pt x="6612382" y="26128"/>
+                  </a:lnTo>
+                  <a:lnTo>
+                    <a:pt x="6682726" y="26394"/>
+                  </a:lnTo>
+                  <a:lnTo>
+                    <a:pt x="6753071" y="26660"/>
+                  </a:lnTo>
+                  <a:lnTo>
+                    <a:pt x="6823415" y="26925"/>
+                  </a:lnTo>
+                  <a:lnTo>
+                    <a:pt x="6893760" y="27191"/>
+                  </a:lnTo>
+                  <a:lnTo>
+                    <a:pt x="6964104" y="27455"/>
                   </a:lnTo>
                 </a:path>
               </a:pathLst>
@@ -4568,27 +4603,27 @@
         </p:sp>
         <p:sp>
           <p:nvSpPr>
-            <p:cNvPr id="24" name="pl24"/>
+            <p:cNvPr id="25" name="pl25"/>
             <p:cNvSpPr/>
             <p:nvPr/>
           </p:nvSpPr>
           <p:spPr>
             <a:xfrm>
-              <a:off x="817517" y="4727786"/>
-              <a:ext cx="7799693" cy="0"/>
+              <a:off x="887106" y="3100960"/>
+              <a:ext cx="7660515" cy="0"/>
             </a:xfrm>
             <a:custGeom>
               <a:avLst/>
               <a:pathLst>
-                <a:path w="7799693" h="0">
+                <a:path w="7660515" h="0">
                   <a:moveTo>
                     <a:pt x="0" y="0"/>
                   </a:moveTo>
                   <a:lnTo>
-                    <a:pt x="7799693" y="0"/>
-                  </a:lnTo>
-                  <a:lnTo>
-                    <a:pt x="7799693" y="0"/>
+                    <a:pt x="7660515" y="0"/>
+                  </a:lnTo>
+                  <a:lnTo>
+                    <a:pt x="7660515" y="0"/>
                   </a:lnTo>
                 </a:path>
               </a:pathLst>
@@ -4611,21 +4646,21 @@
         </p:sp>
         <p:sp>
           <p:nvSpPr>
-            <p:cNvPr id="25" name="pl25"/>
+            <p:cNvPr id="26" name="pl26"/>
             <p:cNvSpPr/>
             <p:nvPr/>
           </p:nvSpPr>
           <p:spPr>
             <a:xfrm>
-              <a:off x="4468386" y="2073503"/>
-              <a:ext cx="0" cy="3649639"/>
+              <a:off x="4472829" y="2143092"/>
+              <a:ext cx="0" cy="1317069"/>
             </a:xfrm>
             <a:custGeom>
               <a:avLst/>
               <a:pathLst>
-                <a:path w="0" h="3649639">
+                <a:path w="0" h="1317069">
                   <a:moveTo>
-                    <a:pt x="0" y="3649639"/>
+                    <a:pt x="0" y="1317069"/>
                   </a:moveTo>
                   <a:lnTo>
                     <a:pt x="0" y="0"/>
@@ -4654,13 +4689,13 @@
         </p:sp>
         <p:sp>
           <p:nvSpPr>
-            <p:cNvPr id="26" name="tx26"/>
+            <p:cNvPr id="27" name="tx27"/>
             <p:cNvSpPr/>
             <p:nvPr/>
           </p:nvSpPr>
           <p:spPr>
             <a:xfrm>
-              <a:off x="692708" y="5517199"/>
+              <a:off x="762297" y="3360243"/>
               <a:ext cx="62179" cy="80101"/>
             </a:xfrm>
             <a:prstGeom prst="rect">
@@ -4700,13 +4735,13 @@
         </p:sp>
         <p:sp>
           <p:nvSpPr>
-            <p:cNvPr id="27" name="tx27"/>
+            <p:cNvPr id="28" name="tx28"/>
             <p:cNvSpPr/>
             <p:nvPr/>
           </p:nvSpPr>
           <p:spPr>
             <a:xfrm>
-              <a:off x="692708" y="4687735"/>
+              <a:off x="762297" y="3060909"/>
               <a:ext cx="62179" cy="80101"/>
             </a:xfrm>
             <a:prstGeom prst="rect">
@@ -4746,13 +4781,13 @@
         </p:sp>
         <p:sp>
           <p:nvSpPr>
-            <p:cNvPr id="28" name="tx28"/>
+            <p:cNvPr id="29" name="tx29"/>
             <p:cNvSpPr/>
             <p:nvPr/>
           </p:nvSpPr>
           <p:spPr>
             <a:xfrm>
-              <a:off x="692708" y="3858272"/>
+              <a:off x="762297" y="2761575"/>
               <a:ext cx="62179" cy="80101"/>
             </a:xfrm>
             <a:prstGeom prst="rect">
@@ -4792,13 +4827,13 @@
         </p:sp>
         <p:sp>
           <p:nvSpPr>
-            <p:cNvPr id="29" name="tx29"/>
+            <p:cNvPr id="30" name="tx30"/>
             <p:cNvSpPr/>
             <p:nvPr/>
           </p:nvSpPr>
           <p:spPr>
             <a:xfrm>
-              <a:off x="692708" y="3028808"/>
+              <a:off x="762297" y="2462242"/>
               <a:ext cx="62179" cy="80101"/>
             </a:xfrm>
             <a:prstGeom prst="rect">
@@ -4838,13 +4873,13 @@
         </p:sp>
         <p:sp>
           <p:nvSpPr>
-            <p:cNvPr id="30" name="tx30"/>
+            <p:cNvPr id="31" name="tx31"/>
             <p:cNvSpPr/>
             <p:nvPr/>
           </p:nvSpPr>
           <p:spPr>
             <a:xfrm>
-              <a:off x="692708" y="2199345"/>
+              <a:off x="762297" y="2162908"/>
               <a:ext cx="62179" cy="80101"/>
             </a:xfrm>
             <a:prstGeom prst="rect">
@@ -4884,13 +4919,13 @@
         </p:sp>
         <p:sp>
           <p:nvSpPr>
-            <p:cNvPr id="31" name="tx31"/>
+            <p:cNvPr id="32" name="tx32"/>
             <p:cNvSpPr/>
             <p:nvPr/>
           </p:nvSpPr>
           <p:spPr>
             <a:xfrm>
-              <a:off x="2478335" y="5785772"/>
+              <a:off x="2516846" y="3522791"/>
               <a:ext cx="161574" cy="80101"/>
             </a:xfrm>
             <a:prstGeom prst="rect">
@@ -4930,13 +4965,13 @@
         </p:sp>
         <p:sp>
           <p:nvSpPr>
-            <p:cNvPr id="32" name="tx32"/>
+            <p:cNvPr id="33" name="tx33"/>
             <p:cNvSpPr/>
             <p:nvPr/>
           </p:nvSpPr>
           <p:spPr>
             <a:xfrm>
-              <a:off x="4582608" y="5785772"/>
+              <a:off x="4584458" y="3522791"/>
               <a:ext cx="62179" cy="80101"/>
             </a:xfrm>
             <a:prstGeom prst="rect">
@@ -4976,13 +5011,13 @@
         </p:sp>
         <p:sp>
           <p:nvSpPr>
-            <p:cNvPr id="33" name="tx33"/>
+            <p:cNvPr id="34" name="tx34"/>
             <p:cNvSpPr/>
             <p:nvPr/>
           </p:nvSpPr>
           <p:spPr>
             <a:xfrm>
-              <a:off x="6606094" y="5785772"/>
+              <a:off x="6571282" y="3522791"/>
               <a:ext cx="124358" cy="80101"/>
             </a:xfrm>
             <a:prstGeom prst="rect">
@@ -5022,13 +5057,13 @@
         </p:sp>
         <p:sp>
           <p:nvSpPr>
-            <p:cNvPr id="34" name="tx34"/>
+            <p:cNvPr id="35" name="tx35"/>
             <p:cNvSpPr/>
             <p:nvPr/>
           </p:nvSpPr>
           <p:spPr>
             <a:xfrm>
-              <a:off x="2928340" y="5925448"/>
+              <a:off x="2928340" y="3662467"/>
               <a:ext cx="3578047" cy="100218"/>
             </a:xfrm>
             <a:prstGeom prst="rect">
@@ -5068,13 +5103,13 @@
         </p:sp>
         <p:sp>
           <p:nvSpPr>
-            <p:cNvPr id="35" name="tx35"/>
+            <p:cNvPr id="36" name="tx36"/>
             <p:cNvSpPr/>
             <p:nvPr/>
           </p:nvSpPr>
           <p:spPr>
             <a:xfrm rot="-5400000">
-              <a:off x="68446" y="3848213"/>
+              <a:off x="138035" y="2751517"/>
               <a:ext cx="1016904" cy="100218"/>
             </a:xfrm>
             <a:prstGeom prst="rect">
@@ -5114,13 +5149,13 @@
         </p:sp>
         <p:sp>
           <p:nvSpPr>
-            <p:cNvPr id="36" name="tx36"/>
+            <p:cNvPr id="37" name="tx37"/>
             <p:cNvSpPr/>
             <p:nvPr/>
           </p:nvSpPr>
           <p:spPr>
             <a:xfrm>
-              <a:off x="817517" y="1896563"/>
+              <a:off x="887106" y="1966152"/>
               <a:ext cx="6321612" cy="82021"/>
             </a:xfrm>
             <a:prstGeom prst="rect">
@@ -5160,13 +5195,3746 @@
         </p:sp>
         <p:sp>
           <p:nvSpPr>
-            <p:cNvPr id="37" name="tx37"/>
+            <p:cNvPr id="38" name="tx38"/>
             <p:cNvSpPr/>
             <p:nvPr/>
           </p:nvSpPr>
           <p:spPr>
             <a:xfrm>
-              <a:off x="817517" y="1669789"/>
+              <a:off x="887106" y="1739378"/>
+              <a:ext cx="3295040" cy="120152"/>
+            </a:xfrm>
+            <a:prstGeom prst="rect">
+              <a:avLst/>
+            </a:prstGeom>
+            <a:noFill/>
+          </p:spPr>
+          <p:txBody>
+            <a:bodyPr lIns="0" rIns="0" tIns="0" bIns="0" anchorCtr="1" anchor="ctr" wrap="none"/>
+            <a:lstStyle/>
+            <a:p>
+              <a:pPr algn="l" marL="0" marR="0" indent="0">
+                <a:lnSpc>
+                  <a:spcPts val="1320"/>
+                </a:lnSpc>
+                <a:spcBef>
+                  <a:spcPts val="0"/>
+                </a:spcBef>
+                <a:spcAft>
+                  <a:spcPts val="0"/>
+                </a:spcAft>
+              </a:pPr>
+              <a:r>
+                <a:rPr sz="1320">
+                  <a:solidFill>
+                    <a:srgbClr val="000000">
+                      <a:alpha val="100000"/>
+                    </a:srgbClr>
+                  </a:solidFill>
+                  <a:latin typeface="Helvetica"/>
+                  <a:cs typeface="Helvetica"/>
+                </a:rPr>
+                <a:t>Planned Surgery/Port (Carboplatin AUC ≥ 3)</a:t>
+              </a:r>
+            </a:p>
+          </p:txBody>
+        </p:sp>
+        <p:sp>
+          <p:nvSpPr>
+            <p:cNvPr id="39" name="pl39"/>
+            <p:cNvSpPr/>
+            <p:nvPr/>
+          </p:nvSpPr>
+          <p:spPr>
+            <a:xfrm>
+              <a:off x="887106" y="5444019"/>
+              <a:ext cx="7660515" cy="0"/>
+            </a:xfrm>
+            <a:custGeom>
+              <a:avLst/>
+              <a:pathLst>
+                <a:path w="7660515" h="0">
+                  <a:moveTo>
+                    <a:pt x="0" y="0"/>
+                  </a:moveTo>
+                  <a:lnTo>
+                    <a:pt x="7660515" y="0"/>
+                  </a:lnTo>
+                  <a:lnTo>
+                    <a:pt x="7660515" y="0"/>
+                  </a:lnTo>
+                </a:path>
+              </a:pathLst>
+            </a:custGeom>
+            <a:ln w="6775" cap="flat">
+              <a:solidFill>
+                <a:srgbClr val="EBEBEB">
+                  <a:alpha val="100000"/>
+                </a:srgbClr>
+              </a:solidFill>
+              <a:prstDash val="solid"/>
+              <a:round/>
+            </a:ln>
+          </p:spPr>
+          <p:txBody>
+            <a:bodyPr/>
+            <a:lstStyle/>
+            <a:p/>
+          </p:txBody>
+        </p:sp>
+        <p:sp>
+          <p:nvSpPr>
+            <p:cNvPr id="40" name="pl40"/>
+            <p:cNvSpPr/>
+            <p:nvPr/>
+          </p:nvSpPr>
+          <p:spPr>
+            <a:xfrm>
+              <a:off x="887106" y="5144686"/>
+              <a:ext cx="7660515" cy="0"/>
+            </a:xfrm>
+            <a:custGeom>
+              <a:avLst/>
+              <a:pathLst>
+                <a:path w="7660515" h="0">
+                  <a:moveTo>
+                    <a:pt x="0" y="0"/>
+                  </a:moveTo>
+                  <a:lnTo>
+                    <a:pt x="7660515" y="0"/>
+                  </a:lnTo>
+                  <a:lnTo>
+                    <a:pt x="7660515" y="0"/>
+                  </a:lnTo>
+                </a:path>
+              </a:pathLst>
+            </a:custGeom>
+            <a:ln w="6775" cap="flat">
+              <a:solidFill>
+                <a:srgbClr val="EBEBEB">
+                  <a:alpha val="100000"/>
+                </a:srgbClr>
+              </a:solidFill>
+              <a:prstDash val="solid"/>
+              <a:round/>
+            </a:ln>
+          </p:spPr>
+          <p:txBody>
+            <a:bodyPr/>
+            <a:lstStyle/>
+            <a:p/>
+          </p:txBody>
+        </p:sp>
+        <p:sp>
+          <p:nvSpPr>
+            <p:cNvPr id="41" name="pl41"/>
+            <p:cNvSpPr/>
+            <p:nvPr/>
+          </p:nvSpPr>
+          <p:spPr>
+            <a:xfrm>
+              <a:off x="887106" y="4845352"/>
+              <a:ext cx="7660515" cy="0"/>
+            </a:xfrm>
+            <a:custGeom>
+              <a:avLst/>
+              <a:pathLst>
+                <a:path w="7660515" h="0">
+                  <a:moveTo>
+                    <a:pt x="0" y="0"/>
+                  </a:moveTo>
+                  <a:lnTo>
+                    <a:pt x="7660515" y="0"/>
+                  </a:lnTo>
+                  <a:lnTo>
+                    <a:pt x="7660515" y="0"/>
+                  </a:lnTo>
+                </a:path>
+              </a:pathLst>
+            </a:custGeom>
+            <a:ln w="6775" cap="flat">
+              <a:solidFill>
+                <a:srgbClr val="EBEBEB">
+                  <a:alpha val="100000"/>
+                </a:srgbClr>
+              </a:solidFill>
+              <a:prstDash val="solid"/>
+              <a:round/>
+            </a:ln>
+          </p:spPr>
+          <p:txBody>
+            <a:bodyPr/>
+            <a:lstStyle/>
+            <a:p/>
+          </p:txBody>
+        </p:sp>
+        <p:sp>
+          <p:nvSpPr>
+            <p:cNvPr id="42" name="pl42"/>
+            <p:cNvSpPr/>
+            <p:nvPr/>
+          </p:nvSpPr>
+          <p:spPr>
+            <a:xfrm>
+              <a:off x="887106" y="4546018"/>
+              <a:ext cx="7660515" cy="0"/>
+            </a:xfrm>
+            <a:custGeom>
+              <a:avLst/>
+              <a:pathLst>
+                <a:path w="7660515" h="0">
+                  <a:moveTo>
+                    <a:pt x="0" y="0"/>
+                  </a:moveTo>
+                  <a:lnTo>
+                    <a:pt x="7660515" y="0"/>
+                  </a:lnTo>
+                  <a:lnTo>
+                    <a:pt x="7660515" y="0"/>
+                  </a:lnTo>
+                </a:path>
+              </a:pathLst>
+            </a:custGeom>
+            <a:ln w="6775" cap="flat">
+              <a:solidFill>
+                <a:srgbClr val="EBEBEB">
+                  <a:alpha val="100000"/>
+                </a:srgbClr>
+              </a:solidFill>
+              <a:prstDash val="solid"/>
+              <a:round/>
+            </a:ln>
+          </p:spPr>
+          <p:txBody>
+            <a:bodyPr/>
+            <a:lstStyle/>
+            <a:p/>
+          </p:txBody>
+        </p:sp>
+        <p:sp>
+          <p:nvSpPr>
+            <p:cNvPr id="43" name="pl43"/>
+            <p:cNvSpPr/>
+            <p:nvPr/>
+          </p:nvSpPr>
+          <p:spPr>
+            <a:xfrm>
+              <a:off x="983303" y="4336484"/>
+              <a:ext cx="0" cy="1317069"/>
+            </a:xfrm>
+            <a:custGeom>
+              <a:avLst/>
+              <a:pathLst>
+                <a:path w="0" h="1317069">
+                  <a:moveTo>
+                    <a:pt x="0" y="1317069"/>
+                  </a:moveTo>
+                  <a:lnTo>
+                    <a:pt x="0" y="0"/>
+                  </a:lnTo>
+                  <a:lnTo>
+                    <a:pt x="0" y="0"/>
+                  </a:lnTo>
+                </a:path>
+              </a:pathLst>
+            </a:custGeom>
+            <a:ln w="6775" cap="flat">
+              <a:solidFill>
+                <a:srgbClr val="EBEBEB">
+                  <a:alpha val="100000"/>
+                </a:srgbClr>
+              </a:solidFill>
+              <a:prstDash val="solid"/>
+              <a:round/>
+            </a:ln>
+          </p:spPr>
+          <p:txBody>
+            <a:bodyPr/>
+            <a:lstStyle/>
+            <a:p/>
+          </p:txBody>
+        </p:sp>
+        <p:sp>
+          <p:nvSpPr>
+            <p:cNvPr id="44" name="pl44"/>
+            <p:cNvSpPr/>
+            <p:nvPr/>
+          </p:nvSpPr>
+          <p:spPr>
+            <a:xfrm>
+              <a:off x="1790468" y="4336484"/>
+              <a:ext cx="0" cy="1317069"/>
+            </a:xfrm>
+            <a:custGeom>
+              <a:avLst/>
+              <a:pathLst>
+                <a:path w="0" h="1317069">
+                  <a:moveTo>
+                    <a:pt x="0" y="1317069"/>
+                  </a:moveTo>
+                  <a:lnTo>
+                    <a:pt x="0" y="0"/>
+                  </a:lnTo>
+                  <a:lnTo>
+                    <a:pt x="0" y="0"/>
+                  </a:lnTo>
+                </a:path>
+              </a:pathLst>
+            </a:custGeom>
+            <a:ln w="6775" cap="flat">
+              <a:solidFill>
+                <a:srgbClr val="EBEBEB">
+                  <a:alpha val="100000"/>
+                </a:srgbClr>
+              </a:solidFill>
+              <a:prstDash val="solid"/>
+              <a:round/>
+            </a:ln>
+          </p:spPr>
+          <p:txBody>
+            <a:bodyPr/>
+            <a:lstStyle/>
+            <a:p/>
+          </p:txBody>
+        </p:sp>
+        <p:sp>
+          <p:nvSpPr>
+            <p:cNvPr id="45" name="pl45"/>
+            <p:cNvSpPr/>
+            <p:nvPr/>
+          </p:nvSpPr>
+          <p:spPr>
+            <a:xfrm>
+              <a:off x="2597634" y="4336484"/>
+              <a:ext cx="0" cy="1317069"/>
+            </a:xfrm>
+            <a:custGeom>
+              <a:avLst/>
+              <a:pathLst>
+                <a:path w="0" h="1317069">
+                  <a:moveTo>
+                    <a:pt x="0" y="1317069"/>
+                  </a:moveTo>
+                  <a:lnTo>
+                    <a:pt x="0" y="0"/>
+                  </a:lnTo>
+                  <a:lnTo>
+                    <a:pt x="0" y="0"/>
+                  </a:lnTo>
+                </a:path>
+              </a:pathLst>
+            </a:custGeom>
+            <a:ln w="6775" cap="flat">
+              <a:solidFill>
+                <a:srgbClr val="EBEBEB">
+                  <a:alpha val="100000"/>
+                </a:srgbClr>
+              </a:solidFill>
+              <a:prstDash val="solid"/>
+              <a:round/>
+            </a:ln>
+          </p:spPr>
+          <p:txBody>
+            <a:bodyPr/>
+            <a:lstStyle/>
+            <a:p/>
+          </p:txBody>
+        </p:sp>
+        <p:sp>
+          <p:nvSpPr>
+            <p:cNvPr id="46" name="pl46"/>
+            <p:cNvSpPr/>
+            <p:nvPr/>
+          </p:nvSpPr>
+          <p:spPr>
+            <a:xfrm>
+              <a:off x="3404799" y="4336484"/>
+              <a:ext cx="0" cy="1317069"/>
+            </a:xfrm>
+            <a:custGeom>
+              <a:avLst/>
+              <a:pathLst>
+                <a:path w="0" h="1317069">
+                  <a:moveTo>
+                    <a:pt x="0" y="1317069"/>
+                  </a:moveTo>
+                  <a:lnTo>
+                    <a:pt x="0" y="0"/>
+                  </a:lnTo>
+                  <a:lnTo>
+                    <a:pt x="0" y="0"/>
+                  </a:lnTo>
+                </a:path>
+              </a:pathLst>
+            </a:custGeom>
+            <a:ln w="6775" cap="flat">
+              <a:solidFill>
+                <a:srgbClr val="EBEBEB">
+                  <a:alpha val="100000"/>
+                </a:srgbClr>
+              </a:solidFill>
+              <a:prstDash val="solid"/>
+              <a:round/>
+            </a:ln>
+          </p:spPr>
+          <p:txBody>
+            <a:bodyPr/>
+            <a:lstStyle/>
+            <a:p/>
+          </p:txBody>
+        </p:sp>
+        <p:sp>
+          <p:nvSpPr>
+            <p:cNvPr id="47" name="pl47"/>
+            <p:cNvSpPr/>
+            <p:nvPr/>
+          </p:nvSpPr>
+          <p:spPr>
+            <a:xfrm>
+              <a:off x="4211965" y="4336484"/>
+              <a:ext cx="0" cy="1317069"/>
+            </a:xfrm>
+            <a:custGeom>
+              <a:avLst/>
+              <a:pathLst>
+                <a:path w="0" h="1317069">
+                  <a:moveTo>
+                    <a:pt x="0" y="1317069"/>
+                  </a:moveTo>
+                  <a:lnTo>
+                    <a:pt x="0" y="0"/>
+                  </a:lnTo>
+                  <a:lnTo>
+                    <a:pt x="0" y="0"/>
+                  </a:lnTo>
+                </a:path>
+              </a:pathLst>
+            </a:custGeom>
+            <a:ln w="6775" cap="flat">
+              <a:solidFill>
+                <a:srgbClr val="EBEBEB">
+                  <a:alpha val="100000"/>
+                </a:srgbClr>
+              </a:solidFill>
+              <a:prstDash val="solid"/>
+              <a:round/>
+            </a:ln>
+          </p:spPr>
+          <p:txBody>
+            <a:bodyPr/>
+            <a:lstStyle/>
+            <a:p/>
+          </p:txBody>
+        </p:sp>
+        <p:sp>
+          <p:nvSpPr>
+            <p:cNvPr id="48" name="pl48"/>
+            <p:cNvSpPr/>
+            <p:nvPr/>
+          </p:nvSpPr>
+          <p:spPr>
+            <a:xfrm>
+              <a:off x="5019130" y="4336484"/>
+              <a:ext cx="0" cy="1317069"/>
+            </a:xfrm>
+            <a:custGeom>
+              <a:avLst/>
+              <a:pathLst>
+                <a:path w="0" h="1317069">
+                  <a:moveTo>
+                    <a:pt x="0" y="1317069"/>
+                  </a:moveTo>
+                  <a:lnTo>
+                    <a:pt x="0" y="0"/>
+                  </a:lnTo>
+                  <a:lnTo>
+                    <a:pt x="0" y="0"/>
+                  </a:lnTo>
+                </a:path>
+              </a:pathLst>
+            </a:custGeom>
+            <a:ln w="6775" cap="flat">
+              <a:solidFill>
+                <a:srgbClr val="EBEBEB">
+                  <a:alpha val="100000"/>
+                </a:srgbClr>
+              </a:solidFill>
+              <a:prstDash val="solid"/>
+              <a:round/>
+            </a:ln>
+          </p:spPr>
+          <p:txBody>
+            <a:bodyPr/>
+            <a:lstStyle/>
+            <a:p/>
+          </p:txBody>
+        </p:sp>
+        <p:sp>
+          <p:nvSpPr>
+            <p:cNvPr id="49" name="pl49"/>
+            <p:cNvSpPr/>
+            <p:nvPr/>
+          </p:nvSpPr>
+          <p:spPr>
+            <a:xfrm>
+              <a:off x="5826296" y="4336484"/>
+              <a:ext cx="0" cy="1317069"/>
+            </a:xfrm>
+            <a:custGeom>
+              <a:avLst/>
+              <a:pathLst>
+                <a:path w="0" h="1317069">
+                  <a:moveTo>
+                    <a:pt x="0" y="1317069"/>
+                  </a:moveTo>
+                  <a:lnTo>
+                    <a:pt x="0" y="0"/>
+                  </a:lnTo>
+                  <a:lnTo>
+                    <a:pt x="0" y="0"/>
+                  </a:lnTo>
+                </a:path>
+              </a:pathLst>
+            </a:custGeom>
+            <a:ln w="6775" cap="flat">
+              <a:solidFill>
+                <a:srgbClr val="EBEBEB">
+                  <a:alpha val="100000"/>
+                </a:srgbClr>
+              </a:solidFill>
+              <a:prstDash val="solid"/>
+              <a:round/>
+            </a:ln>
+          </p:spPr>
+          <p:txBody>
+            <a:bodyPr/>
+            <a:lstStyle/>
+            <a:p/>
+          </p:txBody>
+        </p:sp>
+        <p:sp>
+          <p:nvSpPr>
+            <p:cNvPr id="50" name="pl50"/>
+            <p:cNvSpPr/>
+            <p:nvPr/>
+          </p:nvSpPr>
+          <p:spPr>
+            <a:xfrm>
+              <a:off x="6633461" y="4336484"/>
+              <a:ext cx="0" cy="1317069"/>
+            </a:xfrm>
+            <a:custGeom>
+              <a:avLst/>
+              <a:pathLst>
+                <a:path w="0" h="1317069">
+                  <a:moveTo>
+                    <a:pt x="0" y="1317069"/>
+                  </a:moveTo>
+                  <a:lnTo>
+                    <a:pt x="0" y="0"/>
+                  </a:lnTo>
+                  <a:lnTo>
+                    <a:pt x="0" y="0"/>
+                  </a:lnTo>
+                </a:path>
+              </a:pathLst>
+            </a:custGeom>
+            <a:ln w="6775" cap="flat">
+              <a:solidFill>
+                <a:srgbClr val="EBEBEB">
+                  <a:alpha val="100000"/>
+                </a:srgbClr>
+              </a:solidFill>
+              <a:prstDash val="solid"/>
+              <a:round/>
+            </a:ln>
+          </p:spPr>
+          <p:txBody>
+            <a:bodyPr/>
+            <a:lstStyle/>
+            <a:p/>
+          </p:txBody>
+        </p:sp>
+        <p:sp>
+          <p:nvSpPr>
+            <p:cNvPr id="51" name="pl51"/>
+            <p:cNvSpPr/>
+            <p:nvPr/>
+          </p:nvSpPr>
+          <p:spPr>
+            <a:xfrm>
+              <a:off x="7440627" y="4336484"/>
+              <a:ext cx="0" cy="1317069"/>
+            </a:xfrm>
+            <a:custGeom>
+              <a:avLst/>
+              <a:pathLst>
+                <a:path w="0" h="1317069">
+                  <a:moveTo>
+                    <a:pt x="0" y="1317069"/>
+                  </a:moveTo>
+                  <a:lnTo>
+                    <a:pt x="0" y="0"/>
+                  </a:lnTo>
+                  <a:lnTo>
+                    <a:pt x="0" y="0"/>
+                  </a:lnTo>
+                </a:path>
+              </a:pathLst>
+            </a:custGeom>
+            <a:ln w="6775" cap="flat">
+              <a:solidFill>
+                <a:srgbClr val="EBEBEB">
+                  <a:alpha val="100000"/>
+                </a:srgbClr>
+              </a:solidFill>
+              <a:prstDash val="solid"/>
+              <a:round/>
+            </a:ln>
+          </p:spPr>
+          <p:txBody>
+            <a:bodyPr/>
+            <a:lstStyle/>
+            <a:p/>
+          </p:txBody>
+        </p:sp>
+        <p:sp>
+          <p:nvSpPr>
+            <p:cNvPr id="52" name="pl52"/>
+            <p:cNvSpPr/>
+            <p:nvPr/>
+          </p:nvSpPr>
+          <p:spPr>
+            <a:xfrm>
+              <a:off x="8247792" y="4336484"/>
+              <a:ext cx="0" cy="1317069"/>
+            </a:xfrm>
+            <a:custGeom>
+              <a:avLst/>
+              <a:pathLst>
+                <a:path w="0" h="1317069">
+                  <a:moveTo>
+                    <a:pt x="0" y="1317069"/>
+                  </a:moveTo>
+                  <a:lnTo>
+                    <a:pt x="0" y="0"/>
+                  </a:lnTo>
+                  <a:lnTo>
+                    <a:pt x="0" y="0"/>
+                  </a:lnTo>
+                </a:path>
+              </a:pathLst>
+            </a:custGeom>
+            <a:ln w="6775" cap="flat">
+              <a:solidFill>
+                <a:srgbClr val="EBEBEB">
+                  <a:alpha val="100000"/>
+                </a:srgbClr>
+              </a:solidFill>
+              <a:prstDash val="solid"/>
+              <a:round/>
+            </a:ln>
+          </p:spPr>
+          <p:txBody>
+            <a:bodyPr/>
+            <a:lstStyle/>
+            <a:p/>
+          </p:txBody>
+        </p:sp>
+        <p:sp>
+          <p:nvSpPr>
+            <p:cNvPr id="53" name="pl53"/>
+            <p:cNvSpPr/>
+            <p:nvPr/>
+          </p:nvSpPr>
+          <p:spPr>
+            <a:xfrm>
+              <a:off x="887106" y="5593686"/>
+              <a:ext cx="7660515" cy="0"/>
+            </a:xfrm>
+            <a:custGeom>
+              <a:avLst/>
+              <a:pathLst>
+                <a:path w="7660515" h="0">
+                  <a:moveTo>
+                    <a:pt x="0" y="0"/>
+                  </a:moveTo>
+                  <a:lnTo>
+                    <a:pt x="7660515" y="0"/>
+                  </a:lnTo>
+                  <a:lnTo>
+                    <a:pt x="7660515" y="0"/>
+                  </a:lnTo>
+                </a:path>
+              </a:pathLst>
+            </a:custGeom>
+            <a:ln w="13550" cap="flat">
+              <a:solidFill>
+                <a:srgbClr val="EBEBEB">
+                  <a:alpha val="100000"/>
+                </a:srgbClr>
+              </a:solidFill>
+              <a:prstDash val="solid"/>
+              <a:round/>
+            </a:ln>
+          </p:spPr>
+          <p:txBody>
+            <a:bodyPr/>
+            <a:lstStyle/>
+            <a:p/>
+          </p:txBody>
+        </p:sp>
+        <p:sp>
+          <p:nvSpPr>
+            <p:cNvPr id="54" name="pl54"/>
+            <p:cNvSpPr/>
+            <p:nvPr/>
+          </p:nvSpPr>
+          <p:spPr>
+            <a:xfrm>
+              <a:off x="887106" y="5294352"/>
+              <a:ext cx="7660515" cy="0"/>
+            </a:xfrm>
+            <a:custGeom>
+              <a:avLst/>
+              <a:pathLst>
+                <a:path w="7660515" h="0">
+                  <a:moveTo>
+                    <a:pt x="0" y="0"/>
+                  </a:moveTo>
+                  <a:lnTo>
+                    <a:pt x="7660515" y="0"/>
+                  </a:lnTo>
+                  <a:lnTo>
+                    <a:pt x="7660515" y="0"/>
+                  </a:lnTo>
+                </a:path>
+              </a:pathLst>
+            </a:custGeom>
+            <a:ln w="13550" cap="flat">
+              <a:solidFill>
+                <a:srgbClr val="EBEBEB">
+                  <a:alpha val="100000"/>
+                </a:srgbClr>
+              </a:solidFill>
+              <a:prstDash val="solid"/>
+              <a:round/>
+            </a:ln>
+          </p:spPr>
+          <p:txBody>
+            <a:bodyPr/>
+            <a:lstStyle/>
+            <a:p/>
+          </p:txBody>
+        </p:sp>
+        <p:sp>
+          <p:nvSpPr>
+            <p:cNvPr id="55" name="pl55"/>
+            <p:cNvSpPr/>
+            <p:nvPr/>
+          </p:nvSpPr>
+          <p:spPr>
+            <a:xfrm>
+              <a:off x="887106" y="4995019"/>
+              <a:ext cx="7660515" cy="0"/>
+            </a:xfrm>
+            <a:custGeom>
+              <a:avLst/>
+              <a:pathLst>
+                <a:path w="7660515" h="0">
+                  <a:moveTo>
+                    <a:pt x="0" y="0"/>
+                  </a:moveTo>
+                  <a:lnTo>
+                    <a:pt x="7660515" y="0"/>
+                  </a:lnTo>
+                  <a:lnTo>
+                    <a:pt x="7660515" y="0"/>
+                  </a:lnTo>
+                </a:path>
+              </a:pathLst>
+            </a:custGeom>
+            <a:ln w="13550" cap="flat">
+              <a:solidFill>
+                <a:srgbClr val="EBEBEB">
+                  <a:alpha val="100000"/>
+                </a:srgbClr>
+              </a:solidFill>
+              <a:prstDash val="solid"/>
+              <a:round/>
+            </a:ln>
+          </p:spPr>
+          <p:txBody>
+            <a:bodyPr/>
+            <a:lstStyle/>
+            <a:p/>
+          </p:txBody>
+        </p:sp>
+        <p:sp>
+          <p:nvSpPr>
+            <p:cNvPr id="56" name="pl56"/>
+            <p:cNvSpPr/>
+            <p:nvPr/>
+          </p:nvSpPr>
+          <p:spPr>
+            <a:xfrm>
+              <a:off x="887106" y="4695685"/>
+              <a:ext cx="7660515" cy="0"/>
+            </a:xfrm>
+            <a:custGeom>
+              <a:avLst/>
+              <a:pathLst>
+                <a:path w="7660515" h="0">
+                  <a:moveTo>
+                    <a:pt x="0" y="0"/>
+                  </a:moveTo>
+                  <a:lnTo>
+                    <a:pt x="7660515" y="0"/>
+                  </a:lnTo>
+                  <a:lnTo>
+                    <a:pt x="7660515" y="0"/>
+                  </a:lnTo>
+                </a:path>
+              </a:pathLst>
+            </a:custGeom>
+            <a:ln w="13550" cap="flat">
+              <a:solidFill>
+                <a:srgbClr val="EBEBEB">
+                  <a:alpha val="100000"/>
+                </a:srgbClr>
+              </a:solidFill>
+              <a:prstDash val="solid"/>
+              <a:round/>
+            </a:ln>
+          </p:spPr>
+          <p:txBody>
+            <a:bodyPr/>
+            <a:lstStyle/>
+            <a:p/>
+          </p:txBody>
+        </p:sp>
+        <p:sp>
+          <p:nvSpPr>
+            <p:cNvPr id="57" name="pl57"/>
+            <p:cNvSpPr/>
+            <p:nvPr/>
+          </p:nvSpPr>
+          <p:spPr>
+            <a:xfrm>
+              <a:off x="887106" y="4396351"/>
+              <a:ext cx="7660515" cy="0"/>
+            </a:xfrm>
+            <a:custGeom>
+              <a:avLst/>
+              <a:pathLst>
+                <a:path w="7660515" h="0">
+                  <a:moveTo>
+                    <a:pt x="0" y="0"/>
+                  </a:moveTo>
+                  <a:lnTo>
+                    <a:pt x="7660515" y="0"/>
+                  </a:lnTo>
+                  <a:lnTo>
+                    <a:pt x="7660515" y="0"/>
+                  </a:lnTo>
+                </a:path>
+              </a:pathLst>
+            </a:custGeom>
+            <a:ln w="13550" cap="flat">
+              <a:solidFill>
+                <a:srgbClr val="EBEBEB">
+                  <a:alpha val="100000"/>
+                </a:srgbClr>
+              </a:solidFill>
+              <a:prstDash val="solid"/>
+              <a:round/>
+            </a:ln>
+          </p:spPr>
+          <p:txBody>
+            <a:bodyPr/>
+            <a:lstStyle/>
+            <a:p/>
+          </p:txBody>
+        </p:sp>
+        <p:sp>
+          <p:nvSpPr>
+            <p:cNvPr id="58" name="pl58"/>
+            <p:cNvSpPr/>
+            <p:nvPr/>
+          </p:nvSpPr>
+          <p:spPr>
+            <a:xfrm>
+              <a:off x="1386885" y="4336484"/>
+              <a:ext cx="0" cy="1317069"/>
+            </a:xfrm>
+            <a:custGeom>
+              <a:avLst/>
+              <a:pathLst>
+                <a:path w="0" h="1317069">
+                  <a:moveTo>
+                    <a:pt x="0" y="1317069"/>
+                  </a:moveTo>
+                  <a:lnTo>
+                    <a:pt x="0" y="0"/>
+                  </a:lnTo>
+                  <a:lnTo>
+                    <a:pt x="0" y="0"/>
+                  </a:lnTo>
+                </a:path>
+              </a:pathLst>
+            </a:custGeom>
+            <a:ln w="13550" cap="flat">
+              <a:solidFill>
+                <a:srgbClr val="EBEBEB">
+                  <a:alpha val="100000"/>
+                </a:srgbClr>
+              </a:solidFill>
+              <a:prstDash val="solid"/>
+              <a:round/>
+            </a:ln>
+          </p:spPr>
+          <p:txBody>
+            <a:bodyPr/>
+            <a:lstStyle/>
+            <a:p/>
+          </p:txBody>
+        </p:sp>
+        <p:sp>
+          <p:nvSpPr>
+            <p:cNvPr id="59" name="pl59"/>
+            <p:cNvSpPr/>
+            <p:nvPr/>
+          </p:nvSpPr>
+          <p:spPr>
+            <a:xfrm>
+              <a:off x="2194051" y="4336484"/>
+              <a:ext cx="0" cy="1317069"/>
+            </a:xfrm>
+            <a:custGeom>
+              <a:avLst/>
+              <a:pathLst>
+                <a:path w="0" h="1317069">
+                  <a:moveTo>
+                    <a:pt x="0" y="1317069"/>
+                  </a:moveTo>
+                  <a:lnTo>
+                    <a:pt x="0" y="0"/>
+                  </a:lnTo>
+                  <a:lnTo>
+                    <a:pt x="0" y="0"/>
+                  </a:lnTo>
+                </a:path>
+              </a:pathLst>
+            </a:custGeom>
+            <a:ln w="13550" cap="flat">
+              <a:solidFill>
+                <a:srgbClr val="EBEBEB">
+                  <a:alpha val="100000"/>
+                </a:srgbClr>
+              </a:solidFill>
+              <a:prstDash val="solid"/>
+              <a:round/>
+            </a:ln>
+          </p:spPr>
+          <p:txBody>
+            <a:bodyPr/>
+            <a:lstStyle/>
+            <a:p/>
+          </p:txBody>
+        </p:sp>
+        <p:sp>
+          <p:nvSpPr>
+            <p:cNvPr id="60" name="pl60"/>
+            <p:cNvSpPr/>
+            <p:nvPr/>
+          </p:nvSpPr>
+          <p:spPr>
+            <a:xfrm>
+              <a:off x="3001216" y="4336484"/>
+              <a:ext cx="0" cy="1317069"/>
+            </a:xfrm>
+            <a:custGeom>
+              <a:avLst/>
+              <a:pathLst>
+                <a:path w="0" h="1317069">
+                  <a:moveTo>
+                    <a:pt x="0" y="1317069"/>
+                  </a:moveTo>
+                  <a:lnTo>
+                    <a:pt x="0" y="0"/>
+                  </a:lnTo>
+                  <a:lnTo>
+                    <a:pt x="0" y="0"/>
+                  </a:lnTo>
+                </a:path>
+              </a:pathLst>
+            </a:custGeom>
+            <a:ln w="13550" cap="flat">
+              <a:solidFill>
+                <a:srgbClr val="EBEBEB">
+                  <a:alpha val="100000"/>
+                </a:srgbClr>
+              </a:solidFill>
+              <a:prstDash val="solid"/>
+              <a:round/>
+            </a:ln>
+          </p:spPr>
+          <p:txBody>
+            <a:bodyPr/>
+            <a:lstStyle/>
+            <a:p/>
+          </p:txBody>
+        </p:sp>
+        <p:sp>
+          <p:nvSpPr>
+            <p:cNvPr id="61" name="pl61"/>
+            <p:cNvSpPr/>
+            <p:nvPr/>
+          </p:nvSpPr>
+          <p:spPr>
+            <a:xfrm>
+              <a:off x="3808382" y="4336484"/>
+              <a:ext cx="0" cy="1317069"/>
+            </a:xfrm>
+            <a:custGeom>
+              <a:avLst/>
+              <a:pathLst>
+                <a:path w="0" h="1317069">
+                  <a:moveTo>
+                    <a:pt x="0" y="1317069"/>
+                  </a:moveTo>
+                  <a:lnTo>
+                    <a:pt x="0" y="0"/>
+                  </a:lnTo>
+                  <a:lnTo>
+                    <a:pt x="0" y="0"/>
+                  </a:lnTo>
+                </a:path>
+              </a:pathLst>
+            </a:custGeom>
+            <a:ln w="13550" cap="flat">
+              <a:solidFill>
+                <a:srgbClr val="EBEBEB">
+                  <a:alpha val="100000"/>
+                </a:srgbClr>
+              </a:solidFill>
+              <a:prstDash val="solid"/>
+              <a:round/>
+            </a:ln>
+          </p:spPr>
+          <p:txBody>
+            <a:bodyPr/>
+            <a:lstStyle/>
+            <a:p/>
+          </p:txBody>
+        </p:sp>
+        <p:sp>
+          <p:nvSpPr>
+            <p:cNvPr id="62" name="pl62"/>
+            <p:cNvSpPr/>
+            <p:nvPr/>
+          </p:nvSpPr>
+          <p:spPr>
+            <a:xfrm>
+              <a:off x="4615547" y="4336484"/>
+              <a:ext cx="0" cy="1317069"/>
+            </a:xfrm>
+            <a:custGeom>
+              <a:avLst/>
+              <a:pathLst>
+                <a:path w="0" h="1317069">
+                  <a:moveTo>
+                    <a:pt x="0" y="1317069"/>
+                  </a:moveTo>
+                  <a:lnTo>
+                    <a:pt x="0" y="0"/>
+                  </a:lnTo>
+                  <a:lnTo>
+                    <a:pt x="0" y="0"/>
+                  </a:lnTo>
+                </a:path>
+              </a:pathLst>
+            </a:custGeom>
+            <a:ln w="13550" cap="flat">
+              <a:solidFill>
+                <a:srgbClr val="EBEBEB">
+                  <a:alpha val="100000"/>
+                </a:srgbClr>
+              </a:solidFill>
+              <a:prstDash val="solid"/>
+              <a:round/>
+            </a:ln>
+          </p:spPr>
+          <p:txBody>
+            <a:bodyPr/>
+            <a:lstStyle/>
+            <a:p/>
+          </p:txBody>
+        </p:sp>
+        <p:sp>
+          <p:nvSpPr>
+            <p:cNvPr id="63" name="pl63"/>
+            <p:cNvSpPr/>
+            <p:nvPr/>
+          </p:nvSpPr>
+          <p:spPr>
+            <a:xfrm>
+              <a:off x="5422713" y="4336484"/>
+              <a:ext cx="0" cy="1317069"/>
+            </a:xfrm>
+            <a:custGeom>
+              <a:avLst/>
+              <a:pathLst>
+                <a:path w="0" h="1317069">
+                  <a:moveTo>
+                    <a:pt x="0" y="1317069"/>
+                  </a:moveTo>
+                  <a:lnTo>
+                    <a:pt x="0" y="0"/>
+                  </a:lnTo>
+                  <a:lnTo>
+                    <a:pt x="0" y="0"/>
+                  </a:lnTo>
+                </a:path>
+              </a:pathLst>
+            </a:custGeom>
+            <a:ln w="13550" cap="flat">
+              <a:solidFill>
+                <a:srgbClr val="EBEBEB">
+                  <a:alpha val="100000"/>
+                </a:srgbClr>
+              </a:solidFill>
+              <a:prstDash val="solid"/>
+              <a:round/>
+            </a:ln>
+          </p:spPr>
+          <p:txBody>
+            <a:bodyPr/>
+            <a:lstStyle/>
+            <a:p/>
+          </p:txBody>
+        </p:sp>
+        <p:sp>
+          <p:nvSpPr>
+            <p:cNvPr id="64" name="pl64"/>
+            <p:cNvSpPr/>
+            <p:nvPr/>
+          </p:nvSpPr>
+          <p:spPr>
+            <a:xfrm>
+              <a:off x="6229878" y="4336484"/>
+              <a:ext cx="0" cy="1317069"/>
+            </a:xfrm>
+            <a:custGeom>
+              <a:avLst/>
+              <a:pathLst>
+                <a:path w="0" h="1317069">
+                  <a:moveTo>
+                    <a:pt x="0" y="1317069"/>
+                  </a:moveTo>
+                  <a:lnTo>
+                    <a:pt x="0" y="0"/>
+                  </a:lnTo>
+                  <a:lnTo>
+                    <a:pt x="0" y="0"/>
+                  </a:lnTo>
+                </a:path>
+              </a:pathLst>
+            </a:custGeom>
+            <a:ln w="13550" cap="flat">
+              <a:solidFill>
+                <a:srgbClr val="EBEBEB">
+                  <a:alpha val="100000"/>
+                </a:srgbClr>
+              </a:solidFill>
+              <a:prstDash val="solid"/>
+              <a:round/>
+            </a:ln>
+          </p:spPr>
+          <p:txBody>
+            <a:bodyPr/>
+            <a:lstStyle/>
+            <a:p/>
+          </p:txBody>
+        </p:sp>
+        <p:sp>
+          <p:nvSpPr>
+            <p:cNvPr id="65" name="pl65"/>
+            <p:cNvSpPr/>
+            <p:nvPr/>
+          </p:nvSpPr>
+          <p:spPr>
+            <a:xfrm>
+              <a:off x="7037044" y="4336484"/>
+              <a:ext cx="0" cy="1317069"/>
+            </a:xfrm>
+            <a:custGeom>
+              <a:avLst/>
+              <a:pathLst>
+                <a:path w="0" h="1317069">
+                  <a:moveTo>
+                    <a:pt x="0" y="1317069"/>
+                  </a:moveTo>
+                  <a:lnTo>
+                    <a:pt x="0" y="0"/>
+                  </a:lnTo>
+                  <a:lnTo>
+                    <a:pt x="0" y="0"/>
+                  </a:lnTo>
+                </a:path>
+              </a:pathLst>
+            </a:custGeom>
+            <a:ln w="13550" cap="flat">
+              <a:solidFill>
+                <a:srgbClr val="EBEBEB">
+                  <a:alpha val="100000"/>
+                </a:srgbClr>
+              </a:solidFill>
+              <a:prstDash val="solid"/>
+              <a:round/>
+            </a:ln>
+          </p:spPr>
+          <p:txBody>
+            <a:bodyPr/>
+            <a:lstStyle/>
+            <a:p/>
+          </p:txBody>
+        </p:sp>
+        <p:sp>
+          <p:nvSpPr>
+            <p:cNvPr id="66" name="pl66"/>
+            <p:cNvSpPr/>
+            <p:nvPr/>
+          </p:nvSpPr>
+          <p:spPr>
+            <a:xfrm>
+              <a:off x="7844209" y="4336484"/>
+              <a:ext cx="0" cy="1317069"/>
+            </a:xfrm>
+            <a:custGeom>
+              <a:avLst/>
+              <a:pathLst>
+                <a:path w="0" h="1317069">
+                  <a:moveTo>
+                    <a:pt x="0" y="1317069"/>
+                  </a:moveTo>
+                  <a:lnTo>
+                    <a:pt x="0" y="0"/>
+                  </a:lnTo>
+                  <a:lnTo>
+                    <a:pt x="0" y="0"/>
+                  </a:lnTo>
+                </a:path>
+              </a:pathLst>
+            </a:custGeom>
+            <a:ln w="13550" cap="flat">
+              <a:solidFill>
+                <a:srgbClr val="EBEBEB">
+                  <a:alpha val="100000"/>
+                </a:srgbClr>
+              </a:solidFill>
+              <a:prstDash val="solid"/>
+              <a:round/>
+            </a:ln>
+          </p:spPr>
+          <p:txBody>
+            <a:bodyPr/>
+            <a:lstStyle/>
+            <a:p/>
+          </p:txBody>
+        </p:sp>
+        <p:sp>
+          <p:nvSpPr>
+            <p:cNvPr id="67" name="pg67"/>
+            <p:cNvSpPr/>
+            <p:nvPr/>
+          </p:nvSpPr>
+          <p:spPr>
+            <a:xfrm>
+              <a:off x="1235312" y="4868934"/>
+              <a:ext cx="6964104" cy="612714"/>
+            </a:xfrm>
+            <a:custGeom>
+              <a:avLst/>
+              <a:pathLst>
+                <a:path w="6964104" h="612714">
+                  <a:moveTo>
+                    <a:pt x="0" y="21786"/>
+                  </a:moveTo>
+                  <a:lnTo>
+                    <a:pt x="70344" y="34706"/>
+                  </a:lnTo>
+                  <a:lnTo>
+                    <a:pt x="140688" y="47389"/>
+                  </a:lnTo>
+                  <a:lnTo>
+                    <a:pt x="211033" y="59838"/>
+                  </a:lnTo>
+                  <a:lnTo>
+                    <a:pt x="281377" y="72059"/>
+                  </a:lnTo>
+                  <a:lnTo>
+                    <a:pt x="351722" y="84055"/>
+                  </a:lnTo>
+                  <a:lnTo>
+                    <a:pt x="422066" y="95830"/>
+                  </a:lnTo>
+                  <a:lnTo>
+                    <a:pt x="492411" y="107389"/>
+                  </a:lnTo>
+                  <a:lnTo>
+                    <a:pt x="562755" y="118736"/>
+                  </a:lnTo>
+                  <a:lnTo>
+                    <a:pt x="633100" y="129874"/>
+                  </a:lnTo>
+                  <a:lnTo>
+                    <a:pt x="703444" y="140807"/>
+                  </a:lnTo>
+                  <a:lnTo>
+                    <a:pt x="773789" y="151540"/>
+                  </a:lnTo>
+                  <a:lnTo>
+                    <a:pt x="844133" y="162075"/>
+                  </a:lnTo>
+                  <a:lnTo>
+                    <a:pt x="914478" y="172416"/>
+                  </a:lnTo>
+                  <a:lnTo>
+                    <a:pt x="984822" y="182568"/>
+                  </a:lnTo>
+                  <a:lnTo>
+                    <a:pt x="1055167" y="192533"/>
+                  </a:lnTo>
+                  <a:lnTo>
+                    <a:pt x="1125511" y="202315"/>
+                  </a:lnTo>
+                  <a:lnTo>
+                    <a:pt x="1195856" y="211916"/>
+                  </a:lnTo>
+                  <a:lnTo>
+                    <a:pt x="1266200" y="221342"/>
+                  </a:lnTo>
+                  <a:lnTo>
+                    <a:pt x="1336545" y="230594"/>
+                  </a:lnTo>
+                  <a:lnTo>
+                    <a:pt x="1406889" y="239676"/>
+                  </a:lnTo>
+                  <a:lnTo>
+                    <a:pt x="1477234" y="248592"/>
+                  </a:lnTo>
+                  <a:lnTo>
+                    <a:pt x="1547578" y="257343"/>
+                  </a:lnTo>
+                  <a:lnTo>
+                    <a:pt x="1617923" y="265934"/>
+                  </a:lnTo>
+                  <a:lnTo>
+                    <a:pt x="1688267" y="274366"/>
+                  </a:lnTo>
+                  <a:lnTo>
+                    <a:pt x="1758612" y="282644"/>
+                  </a:lnTo>
+                  <a:lnTo>
+                    <a:pt x="1828956" y="290770"/>
+                  </a:lnTo>
+                  <a:lnTo>
+                    <a:pt x="1899301" y="298746"/>
+                  </a:lnTo>
+                  <a:lnTo>
+                    <a:pt x="1969645" y="306576"/>
+                  </a:lnTo>
+                  <a:lnTo>
+                    <a:pt x="2039990" y="314261"/>
+                  </a:lnTo>
+                  <a:lnTo>
+                    <a:pt x="2110334" y="321806"/>
+                  </a:lnTo>
+                  <a:lnTo>
+                    <a:pt x="2180679" y="329212"/>
+                  </a:lnTo>
+                  <a:lnTo>
+                    <a:pt x="2251023" y="336481"/>
+                  </a:lnTo>
+                  <a:lnTo>
+                    <a:pt x="2321368" y="343617"/>
+                  </a:lnTo>
+                  <a:lnTo>
+                    <a:pt x="2391712" y="350622"/>
+                  </a:lnTo>
+                  <a:lnTo>
+                    <a:pt x="2462057" y="357499"/>
+                  </a:lnTo>
+                  <a:lnTo>
+                    <a:pt x="2532401" y="364248"/>
+                  </a:lnTo>
+                  <a:lnTo>
+                    <a:pt x="2602746" y="370874"/>
+                  </a:lnTo>
+                  <a:lnTo>
+                    <a:pt x="2673090" y="377378"/>
+                  </a:lnTo>
+                  <a:lnTo>
+                    <a:pt x="2743435" y="383763"/>
+                  </a:lnTo>
+                  <a:lnTo>
+                    <a:pt x="2813779" y="390030"/>
+                  </a:lnTo>
+                  <a:lnTo>
+                    <a:pt x="2884124" y="396182"/>
+                  </a:lnTo>
+                  <a:lnTo>
+                    <a:pt x="2954468" y="402220"/>
+                  </a:lnTo>
+                  <a:lnTo>
+                    <a:pt x="3024813" y="408148"/>
+                  </a:lnTo>
+                  <a:lnTo>
+                    <a:pt x="3095157" y="413967"/>
+                  </a:lnTo>
+                  <a:lnTo>
+                    <a:pt x="3165502" y="419679"/>
+                  </a:lnTo>
+                  <a:lnTo>
+                    <a:pt x="3235846" y="425286"/>
+                  </a:lnTo>
+                  <a:lnTo>
+                    <a:pt x="3306191" y="420500"/>
+                  </a:lnTo>
+                  <a:lnTo>
+                    <a:pt x="3376535" y="415379"/>
+                  </a:lnTo>
+                  <a:lnTo>
+                    <a:pt x="3446880" y="410172"/>
+                  </a:lnTo>
+                  <a:lnTo>
+                    <a:pt x="3517224" y="404877"/>
+                  </a:lnTo>
+                  <a:lnTo>
+                    <a:pt x="3587569" y="399493"/>
+                  </a:lnTo>
+                  <a:lnTo>
+                    <a:pt x="3657913" y="394018"/>
+                  </a:lnTo>
+                  <a:lnTo>
+                    <a:pt x="3728257" y="388451"/>
+                  </a:lnTo>
+                  <a:lnTo>
+                    <a:pt x="3798602" y="382791"/>
+                  </a:lnTo>
+                  <a:lnTo>
+                    <a:pt x="3868946" y="377035"/>
+                  </a:lnTo>
+                  <a:lnTo>
+                    <a:pt x="3939291" y="371182"/>
+                  </a:lnTo>
+                  <a:lnTo>
+                    <a:pt x="4009635" y="365231"/>
+                  </a:lnTo>
+                  <a:lnTo>
+                    <a:pt x="4079980" y="359179"/>
+                  </a:lnTo>
+                  <a:lnTo>
+                    <a:pt x="4150324" y="353026"/>
+                  </a:lnTo>
+                  <a:lnTo>
+                    <a:pt x="4220669" y="346769"/>
+                  </a:lnTo>
+                  <a:lnTo>
+                    <a:pt x="4291013" y="340407"/>
+                  </a:lnTo>
+                  <a:lnTo>
+                    <a:pt x="4361358" y="333938"/>
+                  </a:lnTo>
+                  <a:lnTo>
+                    <a:pt x="4431702" y="327360"/>
+                  </a:lnTo>
+                  <a:lnTo>
+                    <a:pt x="4502047" y="320671"/>
+                  </a:lnTo>
+                  <a:lnTo>
+                    <a:pt x="4572391" y="313869"/>
+                  </a:lnTo>
+                  <a:lnTo>
+                    <a:pt x="4642736" y="306953"/>
+                  </a:lnTo>
+                  <a:lnTo>
+                    <a:pt x="4713080" y="299921"/>
+                  </a:lnTo>
+                  <a:lnTo>
+                    <a:pt x="4783425" y="292770"/>
+                  </a:lnTo>
+                  <a:lnTo>
+                    <a:pt x="4853769" y="285499"/>
+                  </a:lnTo>
+                  <a:lnTo>
+                    <a:pt x="4924114" y="278106"/>
+                  </a:lnTo>
+                  <a:lnTo>
+                    <a:pt x="4994458" y="270588"/>
+                  </a:lnTo>
+                  <a:lnTo>
+                    <a:pt x="5064803" y="262943"/>
+                  </a:lnTo>
+                  <a:lnTo>
+                    <a:pt x="5135147" y="255170"/>
+                  </a:lnTo>
+                  <a:lnTo>
+                    <a:pt x="5205492" y="247266"/>
+                  </a:lnTo>
+                  <a:lnTo>
+                    <a:pt x="5275836" y="239229"/>
+                  </a:lnTo>
+                  <a:lnTo>
+                    <a:pt x="5346181" y="231057"/>
+                  </a:lnTo>
+                  <a:lnTo>
+                    <a:pt x="5416525" y="222747"/>
+                  </a:lnTo>
+                  <a:lnTo>
+                    <a:pt x="5486870" y="214297"/>
+                  </a:lnTo>
+                  <a:lnTo>
+                    <a:pt x="5557214" y="205705"/>
+                  </a:lnTo>
+                  <a:lnTo>
+                    <a:pt x="5627559" y="196969"/>
+                  </a:lnTo>
+                  <a:lnTo>
+                    <a:pt x="5697903" y="188085"/>
+                  </a:lnTo>
+                  <a:lnTo>
+                    <a:pt x="5768248" y="179052"/>
+                  </a:lnTo>
+                  <a:lnTo>
+                    <a:pt x="5838592" y="169867"/>
+                  </a:lnTo>
+                  <a:lnTo>
+                    <a:pt x="5908937" y="160527"/>
+                  </a:lnTo>
+                  <a:lnTo>
+                    <a:pt x="5979281" y="151030"/>
+                  </a:lnTo>
+                  <a:lnTo>
+                    <a:pt x="6049626" y="141373"/>
+                  </a:lnTo>
+                  <a:lnTo>
+                    <a:pt x="6119970" y="131554"/>
+                  </a:lnTo>
+                  <a:lnTo>
+                    <a:pt x="6190315" y="121569"/>
+                  </a:lnTo>
+                  <a:lnTo>
+                    <a:pt x="6260659" y="111417"/>
+                  </a:lnTo>
+                  <a:lnTo>
+                    <a:pt x="6331004" y="101093"/>
+                  </a:lnTo>
+                  <a:lnTo>
+                    <a:pt x="6401348" y="90596"/>
+                  </a:lnTo>
+                  <a:lnTo>
+                    <a:pt x="6471693" y="79922"/>
+                  </a:lnTo>
+                  <a:lnTo>
+                    <a:pt x="6542037" y="69068"/>
+                  </a:lnTo>
+                  <a:lnTo>
+                    <a:pt x="6612382" y="58031"/>
+                  </a:lnTo>
+                  <a:lnTo>
+                    <a:pt x="6682726" y="46809"/>
+                  </a:lnTo>
+                  <a:lnTo>
+                    <a:pt x="6753071" y="35398"/>
+                  </a:lnTo>
+                  <a:lnTo>
+                    <a:pt x="6823415" y="23795"/>
+                  </a:lnTo>
+                  <a:lnTo>
+                    <a:pt x="6893760" y="11997"/>
+                  </a:lnTo>
+                  <a:lnTo>
+                    <a:pt x="6964104" y="0"/>
+                  </a:lnTo>
+                  <a:lnTo>
+                    <a:pt x="6964104" y="612714"/>
+                  </a:lnTo>
+                  <a:lnTo>
+                    <a:pt x="6893760" y="610616"/>
+                  </a:lnTo>
+                  <a:lnTo>
+                    <a:pt x="6823415" y="608479"/>
+                  </a:lnTo>
+                  <a:lnTo>
+                    <a:pt x="6753071" y="606302"/>
+                  </a:lnTo>
+                  <a:lnTo>
+                    <a:pt x="6682726" y="604084"/>
+                  </a:lnTo>
+                  <a:lnTo>
+                    <a:pt x="6612382" y="601825"/>
+                  </a:lnTo>
+                  <a:lnTo>
+                    <a:pt x="6542037" y="599523"/>
+                  </a:lnTo>
+                  <a:lnTo>
+                    <a:pt x="6471693" y="597178"/>
+                  </a:lnTo>
+                  <a:lnTo>
+                    <a:pt x="6401348" y="594790"/>
+                  </a:lnTo>
+                  <a:lnTo>
+                    <a:pt x="6331004" y="592357"/>
+                  </a:lnTo>
+                  <a:lnTo>
+                    <a:pt x="6260659" y="589878"/>
+                  </a:lnTo>
+                  <a:lnTo>
+                    <a:pt x="6190315" y="587352"/>
+                  </a:lnTo>
+                  <a:lnTo>
+                    <a:pt x="6119970" y="584780"/>
+                  </a:lnTo>
+                  <a:lnTo>
+                    <a:pt x="6049626" y="582159"/>
+                  </a:lnTo>
+                  <a:lnTo>
+                    <a:pt x="5979281" y="579489"/>
+                  </a:lnTo>
+                  <a:lnTo>
+                    <a:pt x="5908937" y="576769"/>
+                  </a:lnTo>
+                  <a:lnTo>
+                    <a:pt x="5838592" y="573999"/>
+                  </a:lnTo>
+                  <a:lnTo>
+                    <a:pt x="5768248" y="571176"/>
+                  </a:lnTo>
+                  <a:lnTo>
+                    <a:pt x="5697903" y="568301"/>
+                  </a:lnTo>
+                  <a:lnTo>
+                    <a:pt x="5627559" y="565371"/>
+                  </a:lnTo>
+                  <a:lnTo>
+                    <a:pt x="5557214" y="562387"/>
+                  </a:lnTo>
+                  <a:lnTo>
+                    <a:pt x="5486870" y="559347"/>
+                  </a:lnTo>
+                  <a:lnTo>
+                    <a:pt x="5416525" y="556250"/>
+                  </a:lnTo>
+                  <a:lnTo>
+                    <a:pt x="5346181" y="553095"/>
+                  </a:lnTo>
+                  <a:lnTo>
+                    <a:pt x="5275836" y="549882"/>
+                  </a:lnTo>
+                  <a:lnTo>
+                    <a:pt x="5205492" y="546607"/>
+                  </a:lnTo>
+                  <a:lnTo>
+                    <a:pt x="5135147" y="543272"/>
+                  </a:lnTo>
+                  <a:lnTo>
+                    <a:pt x="5064803" y="539874"/>
+                  </a:lnTo>
+                  <a:lnTo>
+                    <a:pt x="4994458" y="536412"/>
+                  </a:lnTo>
+                  <a:lnTo>
+                    <a:pt x="4924114" y="532886"/>
+                  </a:lnTo>
+                  <a:lnTo>
+                    <a:pt x="4853769" y="529294"/>
+                  </a:lnTo>
+                  <a:lnTo>
+                    <a:pt x="4783425" y="525634"/>
+                  </a:lnTo>
+                  <a:lnTo>
+                    <a:pt x="4713080" y="521906"/>
+                  </a:lnTo>
+                  <a:lnTo>
+                    <a:pt x="4642736" y="518108"/>
+                  </a:lnTo>
+                  <a:lnTo>
+                    <a:pt x="4572391" y="514239"/>
+                  </a:lnTo>
+                  <a:lnTo>
+                    <a:pt x="4502047" y="510298"/>
+                  </a:lnTo>
+                  <a:lnTo>
+                    <a:pt x="4431702" y="506282"/>
+                  </a:lnTo>
+                  <a:lnTo>
+                    <a:pt x="4361358" y="502192"/>
+                  </a:lnTo>
+                  <a:lnTo>
+                    <a:pt x="4291013" y="498025"/>
+                  </a:lnTo>
+                  <a:lnTo>
+                    <a:pt x="4220669" y="493780"/>
+                  </a:lnTo>
+                  <a:lnTo>
+                    <a:pt x="4150324" y="489455"/>
+                  </a:lnTo>
+                  <a:lnTo>
+                    <a:pt x="4079980" y="485050"/>
+                  </a:lnTo>
+                  <a:lnTo>
+                    <a:pt x="4009635" y="480562"/>
+                  </a:lnTo>
+                  <a:lnTo>
+                    <a:pt x="3939291" y="475989"/>
+                  </a:lnTo>
+                  <a:lnTo>
+                    <a:pt x="3868946" y="471332"/>
+                  </a:lnTo>
+                  <a:lnTo>
+                    <a:pt x="3798602" y="466587"/>
+                  </a:lnTo>
+                  <a:lnTo>
+                    <a:pt x="3728257" y="461753"/>
+                  </a:lnTo>
+                  <a:lnTo>
+                    <a:pt x="3657913" y="456829"/>
+                  </a:lnTo>
+                  <a:lnTo>
+                    <a:pt x="3587569" y="451813"/>
+                  </a:lnTo>
+                  <a:lnTo>
+                    <a:pt x="3517224" y="446702"/>
+                  </a:lnTo>
+                  <a:lnTo>
+                    <a:pt x="3446880" y="441496"/>
+                  </a:lnTo>
+                  <a:lnTo>
+                    <a:pt x="3376535" y="436193"/>
+                  </a:lnTo>
+                  <a:lnTo>
+                    <a:pt x="3306191" y="430790"/>
+                  </a:lnTo>
+                  <a:lnTo>
+                    <a:pt x="3235846" y="425537"/>
+                  </a:lnTo>
+                  <a:lnTo>
+                    <a:pt x="3165502" y="430490"/>
+                  </a:lnTo>
+                  <a:lnTo>
+                    <a:pt x="3095157" y="435361"/>
+                  </a:lnTo>
+                  <a:lnTo>
+                    <a:pt x="3024813" y="440151"/>
+                  </a:lnTo>
+                  <a:lnTo>
+                    <a:pt x="2954468" y="444862"/>
+                  </a:lnTo>
+                  <a:lnTo>
+                    <a:pt x="2884124" y="449495"/>
+                  </a:lnTo>
+                  <a:lnTo>
+                    <a:pt x="2813779" y="454052"/>
+                  </a:lnTo>
+                  <a:lnTo>
+                    <a:pt x="2743435" y="458533"/>
+                  </a:lnTo>
+                  <a:lnTo>
+                    <a:pt x="2673090" y="462939"/>
+                  </a:lnTo>
+                  <a:lnTo>
+                    <a:pt x="2602746" y="467273"/>
+                  </a:lnTo>
+                  <a:lnTo>
+                    <a:pt x="2532401" y="471535"/>
+                  </a:lnTo>
+                  <a:lnTo>
+                    <a:pt x="2462057" y="475727"/>
+                  </a:lnTo>
+                  <a:lnTo>
+                    <a:pt x="2391712" y="479849"/>
+                  </a:lnTo>
+                  <a:lnTo>
+                    <a:pt x="2321368" y="483903"/>
+                  </a:lnTo>
+                  <a:lnTo>
+                    <a:pt x="2251023" y="487890"/>
+                  </a:lnTo>
+                  <a:lnTo>
+                    <a:pt x="2180679" y="491811"/>
+                  </a:lnTo>
+                  <a:lnTo>
+                    <a:pt x="2110334" y="495667"/>
+                  </a:lnTo>
+                  <a:lnTo>
+                    <a:pt x="2039990" y="499459"/>
+                  </a:lnTo>
+                  <a:lnTo>
+                    <a:pt x="1969645" y="503188"/>
+                  </a:lnTo>
+                  <a:lnTo>
+                    <a:pt x="1899301" y="506856"/>
+                  </a:lnTo>
+                  <a:lnTo>
+                    <a:pt x="1828956" y="510463"/>
+                  </a:lnTo>
+                  <a:lnTo>
+                    <a:pt x="1758612" y="514010"/>
+                  </a:lnTo>
+                  <a:lnTo>
+                    <a:pt x="1688267" y="517498"/>
+                  </a:lnTo>
+                  <a:lnTo>
+                    <a:pt x="1617923" y="520929"/>
+                  </a:lnTo>
+                  <a:lnTo>
+                    <a:pt x="1547578" y="524303"/>
+                  </a:lnTo>
+                  <a:lnTo>
+                    <a:pt x="1477234" y="527621"/>
+                  </a:lnTo>
+                  <a:lnTo>
+                    <a:pt x="1406889" y="530884"/>
+                  </a:lnTo>
+                  <a:lnTo>
+                    <a:pt x="1336545" y="534093"/>
+                  </a:lnTo>
+                  <a:lnTo>
+                    <a:pt x="1266200" y="537250"/>
+                  </a:lnTo>
+                  <a:lnTo>
+                    <a:pt x="1195856" y="540353"/>
+                  </a:lnTo>
+                  <a:lnTo>
+                    <a:pt x="1125511" y="543406"/>
+                  </a:lnTo>
+                  <a:lnTo>
+                    <a:pt x="1055167" y="546408"/>
+                  </a:lnTo>
+                  <a:lnTo>
+                    <a:pt x="984822" y="549360"/>
+                  </a:lnTo>
+                  <a:lnTo>
+                    <a:pt x="914478" y="552263"/>
+                  </a:lnTo>
+                  <a:lnTo>
+                    <a:pt x="844133" y="555118"/>
+                  </a:lnTo>
+                  <a:lnTo>
+                    <a:pt x="773789" y="557926"/>
+                  </a:lnTo>
+                  <a:lnTo>
+                    <a:pt x="703444" y="560688"/>
+                  </a:lnTo>
+                  <a:lnTo>
+                    <a:pt x="633100" y="563404"/>
+                  </a:lnTo>
+                  <a:lnTo>
+                    <a:pt x="562755" y="566074"/>
+                  </a:lnTo>
+                  <a:lnTo>
+                    <a:pt x="492411" y="568701"/>
+                  </a:lnTo>
+                  <a:lnTo>
+                    <a:pt x="422066" y="571284"/>
+                  </a:lnTo>
+                  <a:lnTo>
+                    <a:pt x="351722" y="573825"/>
+                  </a:lnTo>
+                  <a:lnTo>
+                    <a:pt x="281377" y="576323"/>
+                  </a:lnTo>
+                  <a:lnTo>
+                    <a:pt x="211033" y="578780"/>
+                  </a:lnTo>
+                  <a:lnTo>
+                    <a:pt x="140688" y="581196"/>
+                  </a:lnTo>
+                  <a:lnTo>
+                    <a:pt x="70344" y="583573"/>
+                  </a:lnTo>
+                  <a:lnTo>
+                    <a:pt x="0" y="585910"/>
+                  </a:lnTo>
+                  <a:close/>
+                </a:path>
+              </a:pathLst>
+            </a:custGeom>
+            <a:solidFill>
+              <a:srgbClr val="FF8C00">
+                <a:alpha val="20000"/>
+              </a:srgbClr>
+            </a:solidFill>
+          </p:spPr>
+          <p:txBody>
+            <a:bodyPr/>
+            <a:lstStyle/>
+            <a:p/>
+          </p:txBody>
+        </p:sp>
+        <p:sp>
+          <p:nvSpPr>
+            <p:cNvPr id="68" name="pl68"/>
+            <p:cNvSpPr/>
+            <p:nvPr/>
+          </p:nvSpPr>
+          <p:spPr>
+            <a:xfrm>
+              <a:off x="1235312" y="4868934"/>
+              <a:ext cx="6964104" cy="425286"/>
+            </a:xfrm>
+            <a:custGeom>
+              <a:avLst/>
+              <a:pathLst>
+                <a:path w="6964104" h="425286">
+                  <a:moveTo>
+                    <a:pt x="0" y="21786"/>
+                  </a:moveTo>
+                  <a:lnTo>
+                    <a:pt x="70344" y="34706"/>
+                  </a:lnTo>
+                  <a:lnTo>
+                    <a:pt x="140688" y="47389"/>
+                  </a:lnTo>
+                  <a:lnTo>
+                    <a:pt x="211033" y="59838"/>
+                  </a:lnTo>
+                  <a:lnTo>
+                    <a:pt x="281377" y="72059"/>
+                  </a:lnTo>
+                  <a:lnTo>
+                    <a:pt x="351722" y="84055"/>
+                  </a:lnTo>
+                  <a:lnTo>
+                    <a:pt x="422066" y="95830"/>
+                  </a:lnTo>
+                  <a:lnTo>
+                    <a:pt x="492411" y="107389"/>
+                  </a:lnTo>
+                  <a:lnTo>
+                    <a:pt x="562755" y="118736"/>
+                  </a:lnTo>
+                  <a:lnTo>
+                    <a:pt x="633100" y="129874"/>
+                  </a:lnTo>
+                  <a:lnTo>
+                    <a:pt x="703444" y="140807"/>
+                  </a:lnTo>
+                  <a:lnTo>
+                    <a:pt x="773789" y="151540"/>
+                  </a:lnTo>
+                  <a:lnTo>
+                    <a:pt x="844133" y="162075"/>
+                  </a:lnTo>
+                  <a:lnTo>
+                    <a:pt x="914478" y="172416"/>
+                  </a:lnTo>
+                  <a:lnTo>
+                    <a:pt x="984822" y="182568"/>
+                  </a:lnTo>
+                  <a:lnTo>
+                    <a:pt x="1055167" y="192533"/>
+                  </a:lnTo>
+                  <a:lnTo>
+                    <a:pt x="1125511" y="202315"/>
+                  </a:lnTo>
+                  <a:lnTo>
+                    <a:pt x="1195856" y="211916"/>
+                  </a:lnTo>
+                  <a:lnTo>
+                    <a:pt x="1266200" y="221342"/>
+                  </a:lnTo>
+                  <a:lnTo>
+                    <a:pt x="1336545" y="230594"/>
+                  </a:lnTo>
+                  <a:lnTo>
+                    <a:pt x="1406889" y="239676"/>
+                  </a:lnTo>
+                  <a:lnTo>
+                    <a:pt x="1477234" y="248592"/>
+                  </a:lnTo>
+                  <a:lnTo>
+                    <a:pt x="1547578" y="257343"/>
+                  </a:lnTo>
+                  <a:lnTo>
+                    <a:pt x="1617923" y="265934"/>
+                  </a:lnTo>
+                  <a:lnTo>
+                    <a:pt x="1688267" y="274366"/>
+                  </a:lnTo>
+                  <a:lnTo>
+                    <a:pt x="1758612" y="282644"/>
+                  </a:lnTo>
+                  <a:lnTo>
+                    <a:pt x="1828956" y="290770"/>
+                  </a:lnTo>
+                  <a:lnTo>
+                    <a:pt x="1899301" y="298746"/>
+                  </a:lnTo>
+                  <a:lnTo>
+                    <a:pt x="1969645" y="306576"/>
+                  </a:lnTo>
+                  <a:lnTo>
+                    <a:pt x="2039990" y="314261"/>
+                  </a:lnTo>
+                  <a:lnTo>
+                    <a:pt x="2110334" y="321806"/>
+                  </a:lnTo>
+                  <a:lnTo>
+                    <a:pt x="2180679" y="329212"/>
+                  </a:lnTo>
+                  <a:lnTo>
+                    <a:pt x="2251023" y="336481"/>
+                  </a:lnTo>
+                  <a:lnTo>
+                    <a:pt x="2321368" y="343617"/>
+                  </a:lnTo>
+                  <a:lnTo>
+                    <a:pt x="2391712" y="350622"/>
+                  </a:lnTo>
+                  <a:lnTo>
+                    <a:pt x="2462057" y="357499"/>
+                  </a:lnTo>
+                  <a:lnTo>
+                    <a:pt x="2532401" y="364248"/>
+                  </a:lnTo>
+                  <a:lnTo>
+                    <a:pt x="2602746" y="370874"/>
+                  </a:lnTo>
+                  <a:lnTo>
+                    <a:pt x="2673090" y="377378"/>
+                  </a:lnTo>
+                  <a:lnTo>
+                    <a:pt x="2743435" y="383763"/>
+                  </a:lnTo>
+                  <a:lnTo>
+                    <a:pt x="2813779" y="390030"/>
+                  </a:lnTo>
+                  <a:lnTo>
+                    <a:pt x="2884124" y="396182"/>
+                  </a:lnTo>
+                  <a:lnTo>
+                    <a:pt x="2954468" y="402220"/>
+                  </a:lnTo>
+                  <a:lnTo>
+                    <a:pt x="3024813" y="408148"/>
+                  </a:lnTo>
+                  <a:lnTo>
+                    <a:pt x="3095157" y="413967"/>
+                  </a:lnTo>
+                  <a:lnTo>
+                    <a:pt x="3165502" y="419679"/>
+                  </a:lnTo>
+                  <a:lnTo>
+                    <a:pt x="3235846" y="425286"/>
+                  </a:lnTo>
+                  <a:lnTo>
+                    <a:pt x="3306191" y="420500"/>
+                  </a:lnTo>
+                  <a:lnTo>
+                    <a:pt x="3376535" y="415379"/>
+                  </a:lnTo>
+                  <a:lnTo>
+                    <a:pt x="3446880" y="410172"/>
+                  </a:lnTo>
+                  <a:lnTo>
+                    <a:pt x="3517224" y="404877"/>
+                  </a:lnTo>
+                  <a:lnTo>
+                    <a:pt x="3587569" y="399493"/>
+                  </a:lnTo>
+                  <a:lnTo>
+                    <a:pt x="3657913" y="394018"/>
+                  </a:lnTo>
+                  <a:lnTo>
+                    <a:pt x="3728257" y="388451"/>
+                  </a:lnTo>
+                  <a:lnTo>
+                    <a:pt x="3798602" y="382791"/>
+                  </a:lnTo>
+                  <a:lnTo>
+                    <a:pt x="3868946" y="377035"/>
+                  </a:lnTo>
+                  <a:lnTo>
+                    <a:pt x="3939291" y="371182"/>
+                  </a:lnTo>
+                  <a:lnTo>
+                    <a:pt x="4009635" y="365231"/>
+                  </a:lnTo>
+                  <a:lnTo>
+                    <a:pt x="4079980" y="359179"/>
+                  </a:lnTo>
+                  <a:lnTo>
+                    <a:pt x="4150324" y="353026"/>
+                  </a:lnTo>
+                  <a:lnTo>
+                    <a:pt x="4220669" y="346769"/>
+                  </a:lnTo>
+                  <a:lnTo>
+                    <a:pt x="4291013" y="340407"/>
+                  </a:lnTo>
+                  <a:lnTo>
+                    <a:pt x="4361358" y="333938"/>
+                  </a:lnTo>
+                  <a:lnTo>
+                    <a:pt x="4431702" y="327360"/>
+                  </a:lnTo>
+                  <a:lnTo>
+                    <a:pt x="4502047" y="320671"/>
+                  </a:lnTo>
+                  <a:lnTo>
+                    <a:pt x="4572391" y="313869"/>
+                  </a:lnTo>
+                  <a:lnTo>
+                    <a:pt x="4642736" y="306953"/>
+                  </a:lnTo>
+                  <a:lnTo>
+                    <a:pt x="4713080" y="299921"/>
+                  </a:lnTo>
+                  <a:lnTo>
+                    <a:pt x="4783425" y="292770"/>
+                  </a:lnTo>
+                  <a:lnTo>
+                    <a:pt x="4853769" y="285499"/>
+                  </a:lnTo>
+                  <a:lnTo>
+                    <a:pt x="4924114" y="278106"/>
+                  </a:lnTo>
+                  <a:lnTo>
+                    <a:pt x="4994458" y="270588"/>
+                  </a:lnTo>
+                  <a:lnTo>
+                    <a:pt x="5064803" y="262943"/>
+                  </a:lnTo>
+                  <a:lnTo>
+                    <a:pt x="5135147" y="255170"/>
+                  </a:lnTo>
+                  <a:lnTo>
+                    <a:pt x="5205492" y="247266"/>
+                  </a:lnTo>
+                  <a:lnTo>
+                    <a:pt x="5275836" y="239229"/>
+                  </a:lnTo>
+                  <a:lnTo>
+                    <a:pt x="5346181" y="231057"/>
+                  </a:lnTo>
+                  <a:lnTo>
+                    <a:pt x="5416525" y="222747"/>
+                  </a:lnTo>
+                  <a:lnTo>
+                    <a:pt x="5486870" y="214297"/>
+                  </a:lnTo>
+                  <a:lnTo>
+                    <a:pt x="5557214" y="205705"/>
+                  </a:lnTo>
+                  <a:lnTo>
+                    <a:pt x="5627559" y="196969"/>
+                  </a:lnTo>
+                  <a:lnTo>
+                    <a:pt x="5697903" y="188085"/>
+                  </a:lnTo>
+                  <a:lnTo>
+                    <a:pt x="5768248" y="179052"/>
+                  </a:lnTo>
+                  <a:lnTo>
+                    <a:pt x="5838592" y="169867"/>
+                  </a:lnTo>
+                  <a:lnTo>
+                    <a:pt x="5908937" y="160527"/>
+                  </a:lnTo>
+                  <a:lnTo>
+                    <a:pt x="5979281" y="151030"/>
+                  </a:lnTo>
+                  <a:lnTo>
+                    <a:pt x="6049626" y="141373"/>
+                  </a:lnTo>
+                  <a:lnTo>
+                    <a:pt x="6119970" y="131554"/>
+                  </a:lnTo>
+                  <a:lnTo>
+                    <a:pt x="6190315" y="121569"/>
+                  </a:lnTo>
+                  <a:lnTo>
+                    <a:pt x="6260659" y="111417"/>
+                  </a:lnTo>
+                  <a:lnTo>
+                    <a:pt x="6331004" y="101093"/>
+                  </a:lnTo>
+                  <a:lnTo>
+                    <a:pt x="6401348" y="90596"/>
+                  </a:lnTo>
+                  <a:lnTo>
+                    <a:pt x="6471693" y="79922"/>
+                  </a:lnTo>
+                  <a:lnTo>
+                    <a:pt x="6542037" y="69068"/>
+                  </a:lnTo>
+                  <a:lnTo>
+                    <a:pt x="6612382" y="58031"/>
+                  </a:lnTo>
+                  <a:lnTo>
+                    <a:pt x="6682726" y="46809"/>
+                  </a:lnTo>
+                  <a:lnTo>
+                    <a:pt x="6753071" y="35398"/>
+                  </a:lnTo>
+                  <a:lnTo>
+                    <a:pt x="6823415" y="23795"/>
+                  </a:lnTo>
+                  <a:lnTo>
+                    <a:pt x="6893760" y="11997"/>
+                  </a:lnTo>
+                  <a:lnTo>
+                    <a:pt x="6964104" y="0"/>
+                  </a:lnTo>
+                </a:path>
+              </a:pathLst>
+            </a:custGeom>
+          </p:spPr>
+          <p:txBody>
+            <a:bodyPr/>
+            <a:lstStyle/>
+            <a:p/>
+          </p:txBody>
+        </p:sp>
+        <p:sp>
+          <p:nvSpPr>
+            <p:cNvPr id="69" name="pl69"/>
+            <p:cNvSpPr/>
+            <p:nvPr/>
+          </p:nvSpPr>
+          <p:spPr>
+            <a:xfrm>
+              <a:off x="1235312" y="5294471"/>
+              <a:ext cx="6964104" cy="187176"/>
+            </a:xfrm>
+            <a:custGeom>
+              <a:avLst/>
+              <a:pathLst>
+                <a:path w="6964104" h="187176">
+                  <a:moveTo>
+                    <a:pt x="6964104" y="187176"/>
+                  </a:moveTo>
+                  <a:lnTo>
+                    <a:pt x="6893760" y="185079"/>
+                  </a:lnTo>
+                  <a:lnTo>
+                    <a:pt x="6823415" y="182942"/>
+                  </a:lnTo>
+                  <a:lnTo>
+                    <a:pt x="6753071" y="180765"/>
+                  </a:lnTo>
+                  <a:lnTo>
+                    <a:pt x="6682726" y="178547"/>
+                  </a:lnTo>
+                  <a:lnTo>
+                    <a:pt x="6612382" y="176288"/>
+                  </a:lnTo>
+                  <a:lnTo>
+                    <a:pt x="6542037" y="173986"/>
+                  </a:lnTo>
+                  <a:lnTo>
+                    <a:pt x="6471693" y="171641"/>
+                  </a:lnTo>
+                  <a:lnTo>
+                    <a:pt x="6401348" y="169253"/>
+                  </a:lnTo>
+                  <a:lnTo>
+                    <a:pt x="6331004" y="166819"/>
+                  </a:lnTo>
+                  <a:lnTo>
+                    <a:pt x="6260659" y="164340"/>
+                  </a:lnTo>
+                  <a:lnTo>
+                    <a:pt x="6190315" y="161815"/>
+                  </a:lnTo>
+                  <a:lnTo>
+                    <a:pt x="6119970" y="159243"/>
+                  </a:lnTo>
+                  <a:lnTo>
+                    <a:pt x="6049626" y="156622"/>
+                  </a:lnTo>
+                  <a:lnTo>
+                    <a:pt x="5979281" y="153952"/>
+                  </a:lnTo>
+                  <a:lnTo>
+                    <a:pt x="5908937" y="151232"/>
+                  </a:lnTo>
+                  <a:lnTo>
+                    <a:pt x="5838592" y="148462"/>
+                  </a:lnTo>
+                  <a:lnTo>
+                    <a:pt x="5768248" y="145639"/>
+                  </a:lnTo>
+                  <a:lnTo>
+                    <a:pt x="5697903" y="142764"/>
+                  </a:lnTo>
+                  <a:lnTo>
+                    <a:pt x="5627559" y="139834"/>
+                  </a:lnTo>
+                  <a:lnTo>
+                    <a:pt x="5557214" y="136850"/>
+                  </a:lnTo>
+                  <a:lnTo>
+                    <a:pt x="5486870" y="133810"/>
+                  </a:lnTo>
+                  <a:lnTo>
+                    <a:pt x="5416525" y="130713"/>
+                  </a:lnTo>
+                  <a:lnTo>
+                    <a:pt x="5346181" y="127558"/>
+                  </a:lnTo>
+                  <a:lnTo>
+                    <a:pt x="5275836" y="124344"/>
+                  </a:lnTo>
+                  <a:lnTo>
+                    <a:pt x="5205492" y="121070"/>
+                  </a:lnTo>
+                  <a:lnTo>
+                    <a:pt x="5135147" y="117735"/>
+                  </a:lnTo>
+                  <a:lnTo>
+                    <a:pt x="5064803" y="114337"/>
+                  </a:lnTo>
+                  <a:lnTo>
+                    <a:pt x="4994458" y="110875"/>
+                  </a:lnTo>
+                  <a:lnTo>
+                    <a:pt x="4924114" y="107349"/>
+                  </a:lnTo>
+                  <a:lnTo>
+                    <a:pt x="4853769" y="103757"/>
+                  </a:lnTo>
+                  <a:lnTo>
+                    <a:pt x="4783425" y="100097"/>
+                  </a:lnTo>
+                  <a:lnTo>
+                    <a:pt x="4713080" y="96369"/>
+                  </a:lnTo>
+                  <a:lnTo>
+                    <a:pt x="4642736" y="92571"/>
+                  </a:lnTo>
+                  <a:lnTo>
+                    <a:pt x="4572391" y="88702"/>
+                  </a:lnTo>
+                  <a:lnTo>
+                    <a:pt x="4502047" y="84760"/>
+                  </a:lnTo>
+                  <a:lnTo>
+                    <a:pt x="4431702" y="80745"/>
+                  </a:lnTo>
+                  <a:lnTo>
+                    <a:pt x="4361358" y="76655"/>
+                  </a:lnTo>
+                  <a:lnTo>
+                    <a:pt x="4291013" y="72487"/>
+                  </a:lnTo>
+                  <a:lnTo>
+                    <a:pt x="4220669" y="68242"/>
+                  </a:lnTo>
+                  <a:lnTo>
+                    <a:pt x="4150324" y="63918"/>
+                  </a:lnTo>
+                  <a:lnTo>
+                    <a:pt x="4079980" y="59512"/>
+                  </a:lnTo>
+                  <a:lnTo>
+                    <a:pt x="4009635" y="55024"/>
+                  </a:lnTo>
+                  <a:lnTo>
+                    <a:pt x="3939291" y="50452"/>
+                  </a:lnTo>
+                  <a:lnTo>
+                    <a:pt x="3868946" y="45795"/>
+                  </a:lnTo>
+                  <a:lnTo>
+                    <a:pt x="3798602" y="41050"/>
+                  </a:lnTo>
+                  <a:lnTo>
+                    <a:pt x="3728257" y="36216"/>
+                  </a:lnTo>
+                  <a:lnTo>
+                    <a:pt x="3657913" y="31292"/>
+                  </a:lnTo>
+                  <a:lnTo>
+                    <a:pt x="3587569" y="26275"/>
+                  </a:lnTo>
+                  <a:lnTo>
+                    <a:pt x="3517224" y="21165"/>
+                  </a:lnTo>
+                  <a:lnTo>
+                    <a:pt x="3446880" y="15959"/>
+                  </a:lnTo>
+                  <a:lnTo>
+                    <a:pt x="3376535" y="10656"/>
+                  </a:lnTo>
+                  <a:lnTo>
+                    <a:pt x="3306191" y="5253"/>
+                  </a:lnTo>
+                  <a:lnTo>
+                    <a:pt x="3235846" y="0"/>
+                  </a:lnTo>
+                  <a:lnTo>
+                    <a:pt x="3165502" y="4952"/>
+                  </a:lnTo>
+                  <a:lnTo>
+                    <a:pt x="3095157" y="9824"/>
+                  </a:lnTo>
+                  <a:lnTo>
+                    <a:pt x="3024813" y="14614"/>
+                  </a:lnTo>
+                  <a:lnTo>
+                    <a:pt x="2954468" y="19325"/>
+                  </a:lnTo>
+                  <a:lnTo>
+                    <a:pt x="2884124" y="23958"/>
+                  </a:lnTo>
+                  <a:lnTo>
+                    <a:pt x="2813779" y="28514"/>
+                  </a:lnTo>
+                  <a:lnTo>
+                    <a:pt x="2743435" y="32995"/>
+                  </a:lnTo>
+                  <a:lnTo>
+                    <a:pt x="2673090" y="37402"/>
+                  </a:lnTo>
+                  <a:lnTo>
+                    <a:pt x="2602746" y="41736"/>
+                  </a:lnTo>
+                  <a:lnTo>
+                    <a:pt x="2532401" y="45998"/>
+                  </a:lnTo>
+                  <a:lnTo>
+                    <a:pt x="2462057" y="50190"/>
+                  </a:lnTo>
+                  <a:lnTo>
+                    <a:pt x="2391712" y="54312"/>
+                  </a:lnTo>
+                  <a:lnTo>
+                    <a:pt x="2321368" y="58366"/>
+                  </a:lnTo>
+                  <a:lnTo>
+                    <a:pt x="2251023" y="62353"/>
+                  </a:lnTo>
+                  <a:lnTo>
+                    <a:pt x="2180679" y="66274"/>
+                  </a:lnTo>
+                  <a:lnTo>
+                    <a:pt x="2110334" y="70130"/>
+                  </a:lnTo>
+                  <a:lnTo>
+                    <a:pt x="2039990" y="73922"/>
+                  </a:lnTo>
+                  <a:lnTo>
+                    <a:pt x="1969645" y="77651"/>
+                  </a:lnTo>
+                  <a:lnTo>
+                    <a:pt x="1899301" y="81319"/>
+                  </a:lnTo>
+                  <a:lnTo>
+                    <a:pt x="1828956" y="84926"/>
+                  </a:lnTo>
+                  <a:lnTo>
+                    <a:pt x="1758612" y="88473"/>
+                  </a:lnTo>
+                  <a:lnTo>
+                    <a:pt x="1688267" y="91961"/>
+                  </a:lnTo>
+                  <a:lnTo>
+                    <a:pt x="1617923" y="95392"/>
+                  </a:lnTo>
+                  <a:lnTo>
+                    <a:pt x="1547578" y="98766"/>
+                  </a:lnTo>
+                  <a:lnTo>
+                    <a:pt x="1477234" y="102084"/>
+                  </a:lnTo>
+                  <a:lnTo>
+                    <a:pt x="1406889" y="105347"/>
+                  </a:lnTo>
+                  <a:lnTo>
+                    <a:pt x="1336545" y="108556"/>
+                  </a:lnTo>
+                  <a:lnTo>
+                    <a:pt x="1266200" y="111712"/>
+                  </a:lnTo>
+                  <a:lnTo>
+                    <a:pt x="1195856" y="114816"/>
+                  </a:lnTo>
+                  <a:lnTo>
+                    <a:pt x="1125511" y="117868"/>
+                  </a:lnTo>
+                  <a:lnTo>
+                    <a:pt x="1055167" y="120870"/>
+                  </a:lnTo>
+                  <a:lnTo>
+                    <a:pt x="984822" y="123823"/>
+                  </a:lnTo>
+                  <a:lnTo>
+                    <a:pt x="914478" y="126726"/>
+                  </a:lnTo>
+                  <a:lnTo>
+                    <a:pt x="844133" y="129581"/>
+                  </a:lnTo>
+                  <a:lnTo>
+                    <a:pt x="773789" y="132389"/>
+                  </a:lnTo>
+                  <a:lnTo>
+                    <a:pt x="703444" y="135151"/>
+                  </a:lnTo>
+                  <a:lnTo>
+                    <a:pt x="633100" y="137866"/>
+                  </a:lnTo>
+                  <a:lnTo>
+                    <a:pt x="562755" y="140537"/>
+                  </a:lnTo>
+                  <a:lnTo>
+                    <a:pt x="492411" y="143164"/>
+                  </a:lnTo>
+                  <a:lnTo>
+                    <a:pt x="422066" y="145747"/>
+                  </a:lnTo>
+                  <a:lnTo>
+                    <a:pt x="351722" y="148287"/>
+                  </a:lnTo>
+                  <a:lnTo>
+                    <a:pt x="281377" y="150786"/>
+                  </a:lnTo>
+                  <a:lnTo>
+                    <a:pt x="211033" y="153243"/>
+                  </a:lnTo>
+                  <a:lnTo>
+                    <a:pt x="140688" y="155659"/>
+                  </a:lnTo>
+                  <a:lnTo>
+                    <a:pt x="70344" y="158035"/>
+                  </a:lnTo>
+                  <a:lnTo>
+                    <a:pt x="0" y="160372"/>
+                  </a:lnTo>
+                </a:path>
+              </a:pathLst>
+            </a:custGeom>
+          </p:spPr>
+          <p:txBody>
+            <a:bodyPr/>
+            <a:lstStyle/>
+            <a:p/>
+          </p:txBody>
+        </p:sp>
+        <p:sp>
+          <p:nvSpPr>
+            <p:cNvPr id="70" name="pl70"/>
+            <p:cNvSpPr/>
+            <p:nvPr/>
+          </p:nvSpPr>
+          <p:spPr>
+            <a:xfrm>
+              <a:off x="1235312" y="5281274"/>
+              <a:ext cx="6964104" cy="27455"/>
+            </a:xfrm>
+            <a:custGeom>
+              <a:avLst/>
+              <a:pathLst>
+                <a:path w="6964104" h="27455">
+                  <a:moveTo>
+                    <a:pt x="0" y="0"/>
+                  </a:moveTo>
+                  <a:lnTo>
+                    <a:pt x="70344" y="290"/>
+                  </a:lnTo>
+                  <a:lnTo>
+                    <a:pt x="140688" y="580"/>
+                  </a:lnTo>
+                  <a:lnTo>
+                    <a:pt x="211033" y="869"/>
+                  </a:lnTo>
+                  <a:lnTo>
+                    <a:pt x="281377" y="1158"/>
+                  </a:lnTo>
+                  <a:lnTo>
+                    <a:pt x="351722" y="1448"/>
+                  </a:lnTo>
+                  <a:lnTo>
+                    <a:pt x="422066" y="1736"/>
+                  </a:lnTo>
+                  <a:lnTo>
+                    <a:pt x="492411" y="2025"/>
+                  </a:lnTo>
+                  <a:lnTo>
+                    <a:pt x="562755" y="2313"/>
+                  </a:lnTo>
+                  <a:lnTo>
+                    <a:pt x="633100" y="2601"/>
+                  </a:lnTo>
+                  <a:lnTo>
+                    <a:pt x="703444" y="2889"/>
+                  </a:lnTo>
+                  <a:lnTo>
+                    <a:pt x="773789" y="3176"/>
+                  </a:lnTo>
+                  <a:lnTo>
+                    <a:pt x="844133" y="3464"/>
+                  </a:lnTo>
+                  <a:lnTo>
+                    <a:pt x="914478" y="3750"/>
+                  </a:lnTo>
+                  <a:lnTo>
+                    <a:pt x="984822" y="4037"/>
+                  </a:lnTo>
+                  <a:lnTo>
+                    <a:pt x="1055167" y="4324"/>
+                  </a:lnTo>
+                  <a:lnTo>
+                    <a:pt x="1125511" y="4610"/>
+                  </a:lnTo>
+                  <a:lnTo>
+                    <a:pt x="1195856" y="4896"/>
+                  </a:lnTo>
+                  <a:lnTo>
+                    <a:pt x="1266200" y="5181"/>
+                  </a:lnTo>
+                  <a:lnTo>
+                    <a:pt x="1336545" y="5466"/>
+                  </a:lnTo>
+                  <a:lnTo>
+                    <a:pt x="1406889" y="5752"/>
+                  </a:lnTo>
+                  <a:lnTo>
+                    <a:pt x="1477234" y="6036"/>
+                  </a:lnTo>
+                  <a:lnTo>
+                    <a:pt x="1547578" y="6321"/>
+                  </a:lnTo>
+                  <a:lnTo>
+                    <a:pt x="1617923" y="6605"/>
+                  </a:lnTo>
+                  <a:lnTo>
+                    <a:pt x="1688267" y="6889"/>
+                  </a:lnTo>
+                  <a:lnTo>
+                    <a:pt x="1758612" y="7173"/>
+                  </a:lnTo>
+                  <a:lnTo>
+                    <a:pt x="1828956" y="7456"/>
+                  </a:lnTo>
+                  <a:lnTo>
+                    <a:pt x="1899301" y="7740"/>
+                  </a:lnTo>
+                  <a:lnTo>
+                    <a:pt x="1969645" y="8023"/>
+                  </a:lnTo>
+                  <a:lnTo>
+                    <a:pt x="2039990" y="8305"/>
+                  </a:lnTo>
+                  <a:lnTo>
+                    <a:pt x="2110334" y="8588"/>
+                  </a:lnTo>
+                  <a:lnTo>
+                    <a:pt x="2180679" y="8870"/>
+                  </a:lnTo>
+                  <a:lnTo>
+                    <a:pt x="2251023" y="9152"/>
+                  </a:lnTo>
+                  <a:lnTo>
+                    <a:pt x="2321368" y="9433"/>
+                  </a:lnTo>
+                  <a:lnTo>
+                    <a:pt x="2391712" y="9715"/>
+                  </a:lnTo>
+                  <a:lnTo>
+                    <a:pt x="2462057" y="9996"/>
+                  </a:lnTo>
+                  <a:lnTo>
+                    <a:pt x="2532401" y="10277"/>
+                  </a:lnTo>
+                  <a:lnTo>
+                    <a:pt x="2602746" y="10557"/>
+                  </a:lnTo>
+                  <a:lnTo>
+                    <a:pt x="2673090" y="10838"/>
+                  </a:lnTo>
+                  <a:lnTo>
+                    <a:pt x="2743435" y="11118"/>
+                  </a:lnTo>
+                  <a:lnTo>
+                    <a:pt x="2813779" y="11398"/>
+                  </a:lnTo>
+                  <a:lnTo>
+                    <a:pt x="2884124" y="11677"/>
+                  </a:lnTo>
+                  <a:lnTo>
+                    <a:pt x="2954468" y="11957"/>
+                  </a:lnTo>
+                  <a:lnTo>
+                    <a:pt x="3024813" y="12236"/>
+                  </a:lnTo>
+                  <a:lnTo>
+                    <a:pt x="3095157" y="12514"/>
+                  </a:lnTo>
+                  <a:lnTo>
+                    <a:pt x="3165502" y="12793"/>
+                  </a:lnTo>
+                  <a:lnTo>
+                    <a:pt x="3235846" y="13071"/>
+                  </a:lnTo>
+                  <a:lnTo>
+                    <a:pt x="3306191" y="13349"/>
+                  </a:lnTo>
+                  <a:lnTo>
+                    <a:pt x="3376535" y="13627"/>
+                  </a:lnTo>
+                  <a:lnTo>
+                    <a:pt x="3446880" y="13904"/>
+                  </a:lnTo>
+                  <a:lnTo>
+                    <a:pt x="3517224" y="14182"/>
+                  </a:lnTo>
+                  <a:lnTo>
+                    <a:pt x="3587569" y="14459"/>
+                  </a:lnTo>
+                  <a:lnTo>
+                    <a:pt x="3657913" y="14735"/>
+                  </a:lnTo>
+                  <a:lnTo>
+                    <a:pt x="3728257" y="15012"/>
+                  </a:lnTo>
+                  <a:lnTo>
+                    <a:pt x="3798602" y="15288"/>
+                  </a:lnTo>
+                  <a:lnTo>
+                    <a:pt x="3868946" y="15564"/>
+                  </a:lnTo>
+                  <a:lnTo>
+                    <a:pt x="3939291" y="15840"/>
+                  </a:lnTo>
+                  <a:lnTo>
+                    <a:pt x="4009635" y="16115"/>
+                  </a:lnTo>
+                  <a:lnTo>
+                    <a:pt x="4079980" y="16390"/>
+                  </a:lnTo>
+                  <a:lnTo>
+                    <a:pt x="4150324" y="16665"/>
+                  </a:lnTo>
+                  <a:lnTo>
+                    <a:pt x="4220669" y="16940"/>
+                  </a:lnTo>
+                  <a:lnTo>
+                    <a:pt x="4291013" y="17214"/>
+                  </a:lnTo>
+                  <a:lnTo>
+                    <a:pt x="4361358" y="17488"/>
+                  </a:lnTo>
+                  <a:lnTo>
+                    <a:pt x="4431702" y="17762"/>
+                  </a:lnTo>
+                  <a:lnTo>
+                    <a:pt x="4502047" y="18036"/>
+                  </a:lnTo>
+                  <a:lnTo>
+                    <a:pt x="4572391" y="18309"/>
+                  </a:lnTo>
+                  <a:lnTo>
+                    <a:pt x="4642736" y="18583"/>
+                  </a:lnTo>
+                  <a:lnTo>
+                    <a:pt x="4713080" y="18855"/>
+                  </a:lnTo>
+                  <a:lnTo>
+                    <a:pt x="4783425" y="19128"/>
+                  </a:lnTo>
+                  <a:lnTo>
+                    <a:pt x="4853769" y="19401"/>
+                  </a:lnTo>
+                  <a:lnTo>
+                    <a:pt x="4924114" y="19673"/>
+                  </a:lnTo>
+                  <a:lnTo>
+                    <a:pt x="4994458" y="19945"/>
+                  </a:lnTo>
+                  <a:lnTo>
+                    <a:pt x="5064803" y="20216"/>
+                  </a:lnTo>
+                  <a:lnTo>
+                    <a:pt x="5135147" y="20488"/>
+                  </a:lnTo>
+                  <a:lnTo>
+                    <a:pt x="5205492" y="20759"/>
+                  </a:lnTo>
+                  <a:lnTo>
+                    <a:pt x="5275836" y="21030"/>
+                  </a:lnTo>
+                  <a:lnTo>
+                    <a:pt x="5346181" y="21300"/>
+                  </a:lnTo>
+                  <a:lnTo>
+                    <a:pt x="5416525" y="21570"/>
+                  </a:lnTo>
+                  <a:lnTo>
+                    <a:pt x="5486870" y="21841"/>
+                  </a:lnTo>
+                  <a:lnTo>
+                    <a:pt x="5557214" y="22110"/>
+                  </a:lnTo>
+                  <a:lnTo>
+                    <a:pt x="5627559" y="22380"/>
+                  </a:lnTo>
+                  <a:lnTo>
+                    <a:pt x="5697903" y="22649"/>
+                  </a:lnTo>
+                  <a:lnTo>
+                    <a:pt x="5768248" y="22919"/>
+                  </a:lnTo>
+                  <a:lnTo>
+                    <a:pt x="5838592" y="23187"/>
+                  </a:lnTo>
+                  <a:lnTo>
+                    <a:pt x="5908937" y="23456"/>
+                  </a:lnTo>
+                  <a:lnTo>
+                    <a:pt x="5979281" y="23724"/>
+                  </a:lnTo>
+                  <a:lnTo>
+                    <a:pt x="6049626" y="23993"/>
+                  </a:lnTo>
+                  <a:lnTo>
+                    <a:pt x="6119970" y="24260"/>
+                  </a:lnTo>
+                  <a:lnTo>
+                    <a:pt x="6190315" y="24528"/>
+                  </a:lnTo>
+                  <a:lnTo>
+                    <a:pt x="6260659" y="24795"/>
+                  </a:lnTo>
+                  <a:lnTo>
+                    <a:pt x="6331004" y="25062"/>
+                  </a:lnTo>
+                  <a:lnTo>
+                    <a:pt x="6401348" y="25329"/>
+                  </a:lnTo>
+                  <a:lnTo>
+                    <a:pt x="6471693" y="25596"/>
+                  </a:lnTo>
+                  <a:lnTo>
+                    <a:pt x="6542037" y="25862"/>
+                  </a:lnTo>
+                  <a:lnTo>
+                    <a:pt x="6612382" y="26128"/>
+                  </a:lnTo>
+                  <a:lnTo>
+                    <a:pt x="6682726" y="26394"/>
+                  </a:lnTo>
+                  <a:lnTo>
+                    <a:pt x="6753071" y="26660"/>
+                  </a:lnTo>
+                  <a:lnTo>
+                    <a:pt x="6823415" y="26925"/>
+                  </a:lnTo>
+                  <a:lnTo>
+                    <a:pt x="6893760" y="27191"/>
+                  </a:lnTo>
+                  <a:lnTo>
+                    <a:pt x="6964104" y="27455"/>
+                  </a:lnTo>
+                </a:path>
+              </a:pathLst>
+            </a:custGeom>
+            <a:ln w="27101" cap="flat">
+              <a:solidFill>
+                <a:srgbClr val="FF8C00">
+                  <a:alpha val="100000"/>
+                </a:srgbClr>
+              </a:solidFill>
+              <a:prstDash val="solid"/>
+              <a:round/>
+            </a:ln>
+          </p:spPr>
+          <p:txBody>
+            <a:bodyPr/>
+            <a:lstStyle/>
+            <a:p/>
+          </p:txBody>
+        </p:sp>
+        <p:sp>
+          <p:nvSpPr>
+            <p:cNvPr id="71" name="pl71"/>
+            <p:cNvSpPr/>
+            <p:nvPr/>
+          </p:nvSpPr>
+          <p:spPr>
+            <a:xfrm>
+              <a:off x="887106" y="5294352"/>
+              <a:ext cx="7660515" cy="0"/>
+            </a:xfrm>
+            <a:custGeom>
+              <a:avLst/>
+              <a:pathLst>
+                <a:path w="7660515" h="0">
+                  <a:moveTo>
+                    <a:pt x="0" y="0"/>
+                  </a:moveTo>
+                  <a:lnTo>
+                    <a:pt x="7660515" y="0"/>
+                  </a:lnTo>
+                  <a:lnTo>
+                    <a:pt x="7660515" y="0"/>
+                  </a:lnTo>
+                </a:path>
+              </a:pathLst>
+            </a:custGeom>
+            <a:ln w="13550" cap="flat">
+              <a:solidFill>
+                <a:srgbClr val="7F7F7F">
+                  <a:alpha val="100000"/>
+                </a:srgbClr>
+              </a:solidFill>
+              <a:prstDash val="dash"/>
+              <a:round/>
+            </a:ln>
+          </p:spPr>
+          <p:txBody>
+            <a:bodyPr/>
+            <a:lstStyle/>
+            <a:p/>
+          </p:txBody>
+        </p:sp>
+        <p:sp>
+          <p:nvSpPr>
+            <p:cNvPr id="72" name="pl72"/>
+            <p:cNvSpPr/>
+            <p:nvPr/>
+          </p:nvSpPr>
+          <p:spPr>
+            <a:xfrm>
+              <a:off x="4472829" y="4336484"/>
+              <a:ext cx="0" cy="1317069"/>
+            </a:xfrm>
+            <a:custGeom>
+              <a:avLst/>
+              <a:pathLst>
+                <a:path w="0" h="1317069">
+                  <a:moveTo>
+                    <a:pt x="0" y="1317069"/>
+                  </a:moveTo>
+                  <a:lnTo>
+                    <a:pt x="0" y="0"/>
+                  </a:lnTo>
+                  <a:lnTo>
+                    <a:pt x="0" y="0"/>
+                  </a:lnTo>
+                </a:path>
+              </a:pathLst>
+            </a:custGeom>
+            <a:ln w="13550" cap="flat">
+              <a:solidFill>
+                <a:srgbClr val="666666">
+                  <a:alpha val="100000"/>
+                </a:srgbClr>
+              </a:solidFill>
+              <a:prstDash val="dot"/>
+              <a:round/>
+            </a:ln>
+          </p:spPr>
+          <p:txBody>
+            <a:bodyPr/>
+            <a:lstStyle/>
+            <a:p/>
+          </p:txBody>
+        </p:sp>
+        <p:sp>
+          <p:nvSpPr>
+            <p:cNvPr id="73" name="tx73"/>
+            <p:cNvSpPr/>
+            <p:nvPr/>
+          </p:nvSpPr>
+          <p:spPr>
+            <a:xfrm>
+              <a:off x="762297" y="5553636"/>
+              <a:ext cx="62179" cy="80101"/>
+            </a:xfrm>
+            <a:prstGeom prst="rect">
+              <a:avLst/>
+            </a:prstGeom>
+            <a:noFill/>
+          </p:spPr>
+          <p:txBody>
+            <a:bodyPr lIns="0" rIns="0" tIns="0" bIns="0" anchorCtr="1" anchor="ctr" wrap="none"/>
+            <a:lstStyle/>
+            <a:p>
+              <a:pPr algn="l" marL="0" marR="0" indent="0">
+                <a:lnSpc>
+                  <a:spcPts val="880"/>
+                </a:lnSpc>
+                <a:spcBef>
+                  <a:spcPts val="0"/>
+                </a:spcBef>
+                <a:spcAft>
+                  <a:spcPts val="0"/>
+                </a:spcAft>
+              </a:pPr>
+              <a:r>
+                <a:rPr sz="880">
+                  <a:solidFill>
+                    <a:srgbClr val="4D4D4D">
+                      <a:alpha val="100000"/>
+                    </a:srgbClr>
+                  </a:solidFill>
+                  <a:latin typeface="Helvetica"/>
+                  <a:cs typeface="Helvetica"/>
+                </a:rPr>
+                <a:t>0</a:t>
+              </a:r>
+            </a:p>
+          </p:txBody>
+        </p:sp>
+        <p:sp>
+          <p:nvSpPr>
+            <p:cNvPr id="74" name="tx74"/>
+            <p:cNvSpPr/>
+            <p:nvPr/>
+          </p:nvSpPr>
+          <p:spPr>
+            <a:xfrm>
+              <a:off x="762297" y="5254302"/>
+              <a:ext cx="62179" cy="80101"/>
+            </a:xfrm>
+            <a:prstGeom prst="rect">
+              <a:avLst/>
+            </a:prstGeom>
+            <a:noFill/>
+          </p:spPr>
+          <p:txBody>
+            <a:bodyPr lIns="0" rIns="0" tIns="0" bIns="0" anchorCtr="1" anchor="ctr" wrap="none"/>
+            <a:lstStyle/>
+            <a:p>
+              <a:pPr algn="l" marL="0" marR="0" indent="0">
+                <a:lnSpc>
+                  <a:spcPts val="880"/>
+                </a:lnSpc>
+                <a:spcBef>
+                  <a:spcPts val="0"/>
+                </a:spcBef>
+                <a:spcAft>
+                  <a:spcPts val="0"/>
+                </a:spcAft>
+              </a:pPr>
+              <a:r>
+                <a:rPr sz="880">
+                  <a:solidFill>
+                    <a:srgbClr val="4D4D4D">
+                      <a:alpha val="100000"/>
+                    </a:srgbClr>
+                  </a:solidFill>
+                  <a:latin typeface="Helvetica"/>
+                  <a:cs typeface="Helvetica"/>
+                </a:rPr>
+                <a:t>1</a:t>
+              </a:r>
+            </a:p>
+          </p:txBody>
+        </p:sp>
+        <p:sp>
+          <p:nvSpPr>
+            <p:cNvPr id="75" name="tx75"/>
+            <p:cNvSpPr/>
+            <p:nvPr/>
+          </p:nvSpPr>
+          <p:spPr>
+            <a:xfrm>
+              <a:off x="762297" y="4954968"/>
+              <a:ext cx="62179" cy="80101"/>
+            </a:xfrm>
+            <a:prstGeom prst="rect">
+              <a:avLst/>
+            </a:prstGeom>
+            <a:noFill/>
+          </p:spPr>
+          <p:txBody>
+            <a:bodyPr lIns="0" rIns="0" tIns="0" bIns="0" anchorCtr="1" anchor="ctr" wrap="none"/>
+            <a:lstStyle/>
+            <a:p>
+              <a:pPr algn="l" marL="0" marR="0" indent="0">
+                <a:lnSpc>
+                  <a:spcPts val="880"/>
+                </a:lnSpc>
+                <a:spcBef>
+                  <a:spcPts val="0"/>
+                </a:spcBef>
+                <a:spcAft>
+                  <a:spcPts val="0"/>
+                </a:spcAft>
+              </a:pPr>
+              <a:r>
+                <a:rPr sz="880">
+                  <a:solidFill>
+                    <a:srgbClr val="4D4D4D">
+                      <a:alpha val="100000"/>
+                    </a:srgbClr>
+                  </a:solidFill>
+                  <a:latin typeface="Helvetica"/>
+                  <a:cs typeface="Helvetica"/>
+                </a:rPr>
+                <a:t>2</a:t>
+              </a:r>
+            </a:p>
+          </p:txBody>
+        </p:sp>
+        <p:sp>
+          <p:nvSpPr>
+            <p:cNvPr id="76" name="tx76"/>
+            <p:cNvSpPr/>
+            <p:nvPr/>
+          </p:nvSpPr>
+          <p:spPr>
+            <a:xfrm>
+              <a:off x="762297" y="4655634"/>
+              <a:ext cx="62179" cy="80101"/>
+            </a:xfrm>
+            <a:prstGeom prst="rect">
+              <a:avLst/>
+            </a:prstGeom>
+            <a:noFill/>
+          </p:spPr>
+          <p:txBody>
+            <a:bodyPr lIns="0" rIns="0" tIns="0" bIns="0" anchorCtr="1" anchor="ctr" wrap="none"/>
+            <a:lstStyle/>
+            <a:p>
+              <a:pPr algn="l" marL="0" marR="0" indent="0">
+                <a:lnSpc>
+                  <a:spcPts val="880"/>
+                </a:lnSpc>
+                <a:spcBef>
+                  <a:spcPts val="0"/>
+                </a:spcBef>
+                <a:spcAft>
+                  <a:spcPts val="0"/>
+                </a:spcAft>
+              </a:pPr>
+              <a:r>
+                <a:rPr sz="880">
+                  <a:solidFill>
+                    <a:srgbClr val="4D4D4D">
+                      <a:alpha val="100000"/>
+                    </a:srgbClr>
+                  </a:solidFill>
+                  <a:latin typeface="Helvetica"/>
+                  <a:cs typeface="Helvetica"/>
+                </a:rPr>
+                <a:t>3</a:t>
+              </a:r>
+            </a:p>
+          </p:txBody>
+        </p:sp>
+        <p:sp>
+          <p:nvSpPr>
+            <p:cNvPr id="77" name="tx77"/>
+            <p:cNvSpPr/>
+            <p:nvPr/>
+          </p:nvSpPr>
+          <p:spPr>
+            <a:xfrm>
+              <a:off x="762297" y="4356300"/>
+              <a:ext cx="62179" cy="80101"/>
+            </a:xfrm>
+            <a:prstGeom prst="rect">
+              <a:avLst/>
+            </a:prstGeom>
+            <a:noFill/>
+          </p:spPr>
+          <p:txBody>
+            <a:bodyPr lIns="0" rIns="0" tIns="0" bIns="0" anchorCtr="1" anchor="ctr" wrap="none"/>
+            <a:lstStyle/>
+            <a:p>
+              <a:pPr algn="l" marL="0" marR="0" indent="0">
+                <a:lnSpc>
+                  <a:spcPts val="880"/>
+                </a:lnSpc>
+                <a:spcBef>
+                  <a:spcPts val="0"/>
+                </a:spcBef>
+                <a:spcAft>
+                  <a:spcPts val="0"/>
+                </a:spcAft>
+              </a:pPr>
+              <a:r>
+                <a:rPr sz="880">
+                  <a:solidFill>
+                    <a:srgbClr val="4D4D4D">
+                      <a:alpha val="100000"/>
+                    </a:srgbClr>
+                  </a:solidFill>
+                  <a:latin typeface="Helvetica"/>
+                  <a:cs typeface="Helvetica"/>
+                </a:rPr>
+                <a:t>4</a:t>
+              </a:r>
+            </a:p>
+          </p:txBody>
+        </p:sp>
+        <p:sp>
+          <p:nvSpPr>
+            <p:cNvPr id="78" name="tx78"/>
+            <p:cNvSpPr/>
+            <p:nvPr/>
+          </p:nvSpPr>
+          <p:spPr>
+            <a:xfrm>
+              <a:off x="1306098" y="5716183"/>
+              <a:ext cx="161574" cy="80101"/>
+            </a:xfrm>
+            <a:prstGeom prst="rect">
+              <a:avLst/>
+            </a:prstGeom>
+            <a:noFill/>
+          </p:spPr>
+          <p:txBody>
+            <a:bodyPr lIns="0" rIns="0" tIns="0" bIns="0" anchorCtr="1" anchor="ctr" wrap="none"/>
+            <a:lstStyle/>
+            <a:p>
+              <a:pPr algn="l" marL="0" marR="0" indent="0">
+                <a:lnSpc>
+                  <a:spcPts val="880"/>
+                </a:lnSpc>
+                <a:spcBef>
+                  <a:spcPts val="0"/>
+                </a:spcBef>
+                <a:spcAft>
+                  <a:spcPts val="0"/>
+                </a:spcAft>
+              </a:pPr>
+              <a:r>
+                <a:rPr sz="880">
+                  <a:solidFill>
+                    <a:srgbClr val="4D4D4D">
+                      <a:alpha val="100000"/>
+                    </a:srgbClr>
+                  </a:solidFill>
+                  <a:latin typeface="Helvetica"/>
+                  <a:cs typeface="Helvetica"/>
+                </a:rPr>
+                <a:t>-40</a:t>
+              </a:r>
+            </a:p>
+          </p:txBody>
+        </p:sp>
+        <p:sp>
+          <p:nvSpPr>
+            <p:cNvPr id="79" name="tx79"/>
+            <p:cNvSpPr/>
+            <p:nvPr/>
+          </p:nvSpPr>
+          <p:spPr>
+            <a:xfrm>
+              <a:off x="2113264" y="5716183"/>
+              <a:ext cx="161574" cy="80101"/>
+            </a:xfrm>
+            <a:prstGeom prst="rect">
+              <a:avLst/>
+            </a:prstGeom>
+            <a:noFill/>
+          </p:spPr>
+          <p:txBody>
+            <a:bodyPr lIns="0" rIns="0" tIns="0" bIns="0" anchorCtr="1" anchor="ctr" wrap="none"/>
+            <a:lstStyle/>
+            <a:p>
+              <a:pPr algn="l" marL="0" marR="0" indent="0">
+                <a:lnSpc>
+                  <a:spcPts val="880"/>
+                </a:lnSpc>
+                <a:spcBef>
+                  <a:spcPts val="0"/>
+                </a:spcBef>
+                <a:spcAft>
+                  <a:spcPts val="0"/>
+                </a:spcAft>
+              </a:pPr>
+              <a:r>
+                <a:rPr sz="880">
+                  <a:solidFill>
+                    <a:srgbClr val="4D4D4D">
+                      <a:alpha val="100000"/>
+                    </a:srgbClr>
+                  </a:solidFill>
+                  <a:latin typeface="Helvetica"/>
+                  <a:cs typeface="Helvetica"/>
+                </a:rPr>
+                <a:t>-30</a:t>
+              </a:r>
+            </a:p>
+          </p:txBody>
+        </p:sp>
+        <p:sp>
+          <p:nvSpPr>
+            <p:cNvPr id="80" name="tx80"/>
+            <p:cNvSpPr/>
+            <p:nvPr/>
+          </p:nvSpPr>
+          <p:spPr>
+            <a:xfrm>
+              <a:off x="2920429" y="5716183"/>
+              <a:ext cx="161574" cy="80101"/>
+            </a:xfrm>
+            <a:prstGeom prst="rect">
+              <a:avLst/>
+            </a:prstGeom>
+            <a:noFill/>
+          </p:spPr>
+          <p:txBody>
+            <a:bodyPr lIns="0" rIns="0" tIns="0" bIns="0" anchorCtr="1" anchor="ctr" wrap="none"/>
+            <a:lstStyle/>
+            <a:p>
+              <a:pPr algn="l" marL="0" marR="0" indent="0">
+                <a:lnSpc>
+                  <a:spcPts val="880"/>
+                </a:lnSpc>
+                <a:spcBef>
+                  <a:spcPts val="0"/>
+                </a:spcBef>
+                <a:spcAft>
+                  <a:spcPts val="0"/>
+                </a:spcAft>
+              </a:pPr>
+              <a:r>
+                <a:rPr sz="880">
+                  <a:solidFill>
+                    <a:srgbClr val="4D4D4D">
+                      <a:alpha val="100000"/>
+                    </a:srgbClr>
+                  </a:solidFill>
+                  <a:latin typeface="Helvetica"/>
+                  <a:cs typeface="Helvetica"/>
+                </a:rPr>
+                <a:t>-20</a:t>
+              </a:r>
+            </a:p>
+          </p:txBody>
+        </p:sp>
+        <p:sp>
+          <p:nvSpPr>
+            <p:cNvPr id="81" name="tx81"/>
+            <p:cNvSpPr/>
+            <p:nvPr/>
+          </p:nvSpPr>
+          <p:spPr>
+            <a:xfrm>
+              <a:off x="3727595" y="5716183"/>
+              <a:ext cx="161574" cy="80101"/>
+            </a:xfrm>
+            <a:prstGeom prst="rect">
+              <a:avLst/>
+            </a:prstGeom>
+            <a:noFill/>
+          </p:spPr>
+          <p:txBody>
+            <a:bodyPr lIns="0" rIns="0" tIns="0" bIns="0" anchorCtr="1" anchor="ctr" wrap="none"/>
+            <a:lstStyle/>
+            <a:p>
+              <a:pPr algn="l" marL="0" marR="0" indent="0">
+                <a:lnSpc>
+                  <a:spcPts val="880"/>
+                </a:lnSpc>
+                <a:spcBef>
+                  <a:spcPts val="0"/>
+                </a:spcBef>
+                <a:spcAft>
+                  <a:spcPts val="0"/>
+                </a:spcAft>
+              </a:pPr>
+              <a:r>
+                <a:rPr sz="880">
+                  <a:solidFill>
+                    <a:srgbClr val="4D4D4D">
+                      <a:alpha val="100000"/>
+                    </a:srgbClr>
+                  </a:solidFill>
+                  <a:latin typeface="Helvetica"/>
+                  <a:cs typeface="Helvetica"/>
+                </a:rPr>
+                <a:t>-10</a:t>
+              </a:r>
+            </a:p>
+          </p:txBody>
+        </p:sp>
+        <p:sp>
+          <p:nvSpPr>
+            <p:cNvPr id="82" name="tx82"/>
+            <p:cNvSpPr/>
+            <p:nvPr/>
+          </p:nvSpPr>
+          <p:spPr>
+            <a:xfrm>
+              <a:off x="4584458" y="5716183"/>
+              <a:ext cx="62179" cy="80101"/>
+            </a:xfrm>
+            <a:prstGeom prst="rect">
+              <a:avLst/>
+            </a:prstGeom>
+            <a:noFill/>
+          </p:spPr>
+          <p:txBody>
+            <a:bodyPr lIns="0" rIns="0" tIns="0" bIns="0" anchorCtr="1" anchor="ctr" wrap="none"/>
+            <a:lstStyle/>
+            <a:p>
+              <a:pPr algn="l" marL="0" marR="0" indent="0">
+                <a:lnSpc>
+                  <a:spcPts val="880"/>
+                </a:lnSpc>
+                <a:spcBef>
+                  <a:spcPts val="0"/>
+                </a:spcBef>
+                <a:spcAft>
+                  <a:spcPts val="0"/>
+                </a:spcAft>
+              </a:pPr>
+              <a:r>
+                <a:rPr sz="880">
+                  <a:solidFill>
+                    <a:srgbClr val="4D4D4D">
+                      <a:alpha val="100000"/>
+                    </a:srgbClr>
+                  </a:solidFill>
+                  <a:latin typeface="Helvetica"/>
+                  <a:cs typeface="Helvetica"/>
+                </a:rPr>
+                <a:t>0</a:t>
+              </a:r>
+            </a:p>
+          </p:txBody>
+        </p:sp>
+        <p:sp>
+          <p:nvSpPr>
+            <p:cNvPr id="83" name="tx83"/>
+            <p:cNvSpPr/>
+            <p:nvPr/>
+          </p:nvSpPr>
+          <p:spPr>
+            <a:xfrm>
+              <a:off x="5360534" y="5716183"/>
+              <a:ext cx="124358" cy="80101"/>
+            </a:xfrm>
+            <a:prstGeom prst="rect">
+              <a:avLst/>
+            </a:prstGeom>
+            <a:noFill/>
+          </p:spPr>
+          <p:txBody>
+            <a:bodyPr lIns="0" rIns="0" tIns="0" bIns="0" anchorCtr="1" anchor="ctr" wrap="none"/>
+            <a:lstStyle/>
+            <a:p>
+              <a:pPr algn="l" marL="0" marR="0" indent="0">
+                <a:lnSpc>
+                  <a:spcPts val="880"/>
+                </a:lnSpc>
+                <a:spcBef>
+                  <a:spcPts val="0"/>
+                </a:spcBef>
+                <a:spcAft>
+                  <a:spcPts val="0"/>
+                </a:spcAft>
+              </a:pPr>
+              <a:r>
+                <a:rPr sz="880">
+                  <a:solidFill>
+                    <a:srgbClr val="4D4D4D">
+                      <a:alpha val="100000"/>
+                    </a:srgbClr>
+                  </a:solidFill>
+                  <a:latin typeface="Helvetica"/>
+                  <a:cs typeface="Helvetica"/>
+                </a:rPr>
+                <a:t>10</a:t>
+              </a:r>
+            </a:p>
+          </p:txBody>
+        </p:sp>
+        <p:sp>
+          <p:nvSpPr>
+            <p:cNvPr id="84" name="tx84"/>
+            <p:cNvSpPr/>
+            <p:nvPr/>
+          </p:nvSpPr>
+          <p:spPr>
+            <a:xfrm>
+              <a:off x="6167699" y="5716183"/>
+              <a:ext cx="124358" cy="80101"/>
+            </a:xfrm>
+            <a:prstGeom prst="rect">
+              <a:avLst/>
+            </a:prstGeom>
+            <a:noFill/>
+          </p:spPr>
+          <p:txBody>
+            <a:bodyPr lIns="0" rIns="0" tIns="0" bIns="0" anchorCtr="1" anchor="ctr" wrap="none"/>
+            <a:lstStyle/>
+            <a:p>
+              <a:pPr algn="l" marL="0" marR="0" indent="0">
+                <a:lnSpc>
+                  <a:spcPts val="880"/>
+                </a:lnSpc>
+                <a:spcBef>
+                  <a:spcPts val="0"/>
+                </a:spcBef>
+                <a:spcAft>
+                  <a:spcPts val="0"/>
+                </a:spcAft>
+              </a:pPr>
+              <a:r>
+                <a:rPr sz="880">
+                  <a:solidFill>
+                    <a:srgbClr val="4D4D4D">
+                      <a:alpha val="100000"/>
+                    </a:srgbClr>
+                  </a:solidFill>
+                  <a:latin typeface="Helvetica"/>
+                  <a:cs typeface="Helvetica"/>
+                </a:rPr>
+                <a:t>20</a:t>
+              </a:r>
+            </a:p>
+          </p:txBody>
+        </p:sp>
+        <p:sp>
+          <p:nvSpPr>
+            <p:cNvPr id="85" name="tx85"/>
+            <p:cNvSpPr/>
+            <p:nvPr/>
+          </p:nvSpPr>
+          <p:spPr>
+            <a:xfrm>
+              <a:off x="6974865" y="5716183"/>
+              <a:ext cx="124358" cy="80101"/>
+            </a:xfrm>
+            <a:prstGeom prst="rect">
+              <a:avLst/>
+            </a:prstGeom>
+            <a:noFill/>
+          </p:spPr>
+          <p:txBody>
+            <a:bodyPr lIns="0" rIns="0" tIns="0" bIns="0" anchorCtr="1" anchor="ctr" wrap="none"/>
+            <a:lstStyle/>
+            <a:p>
+              <a:pPr algn="l" marL="0" marR="0" indent="0">
+                <a:lnSpc>
+                  <a:spcPts val="880"/>
+                </a:lnSpc>
+                <a:spcBef>
+                  <a:spcPts val="0"/>
+                </a:spcBef>
+                <a:spcAft>
+                  <a:spcPts val="0"/>
+                </a:spcAft>
+              </a:pPr>
+              <a:r>
+                <a:rPr sz="880">
+                  <a:solidFill>
+                    <a:srgbClr val="4D4D4D">
+                      <a:alpha val="100000"/>
+                    </a:srgbClr>
+                  </a:solidFill>
+                  <a:latin typeface="Helvetica"/>
+                  <a:cs typeface="Helvetica"/>
+                </a:rPr>
+                <a:t>30</a:t>
+              </a:r>
+            </a:p>
+          </p:txBody>
+        </p:sp>
+        <p:sp>
+          <p:nvSpPr>
+            <p:cNvPr id="86" name="tx86"/>
+            <p:cNvSpPr/>
+            <p:nvPr/>
+          </p:nvSpPr>
+          <p:spPr>
+            <a:xfrm>
+              <a:off x="7782030" y="5716183"/>
+              <a:ext cx="124358" cy="80101"/>
+            </a:xfrm>
+            <a:prstGeom prst="rect">
+              <a:avLst/>
+            </a:prstGeom>
+            <a:noFill/>
+          </p:spPr>
+          <p:txBody>
+            <a:bodyPr lIns="0" rIns="0" tIns="0" bIns="0" anchorCtr="1" anchor="ctr" wrap="none"/>
+            <a:lstStyle/>
+            <a:p>
+              <a:pPr algn="l" marL="0" marR="0" indent="0">
+                <a:lnSpc>
+                  <a:spcPts val="880"/>
+                </a:lnSpc>
+                <a:spcBef>
+                  <a:spcPts val="0"/>
+                </a:spcBef>
+                <a:spcAft>
+                  <a:spcPts val="0"/>
+                </a:spcAft>
+              </a:pPr>
+              <a:r>
+                <a:rPr sz="880">
+                  <a:solidFill>
+                    <a:srgbClr val="4D4D4D">
+                      <a:alpha val="100000"/>
+                    </a:srgbClr>
+                  </a:solidFill>
+                  <a:latin typeface="Helvetica"/>
+                  <a:cs typeface="Helvetica"/>
+                </a:rPr>
+                <a:t>40</a:t>
+              </a:r>
+            </a:p>
+          </p:txBody>
+        </p:sp>
+        <p:sp>
+          <p:nvSpPr>
+            <p:cNvPr id="87" name="tx87"/>
+            <p:cNvSpPr/>
+            <p:nvPr/>
+          </p:nvSpPr>
+          <p:spPr>
+            <a:xfrm>
+              <a:off x="2928340" y="5855859"/>
+              <a:ext cx="3578047" cy="100218"/>
+            </a:xfrm>
+            <a:prstGeom prst="rect">
+              <a:avLst/>
+            </a:prstGeom>
+            <a:noFill/>
+          </p:spPr>
+          <p:txBody>
+            <a:bodyPr lIns="0" rIns="0" tIns="0" bIns="0" anchorCtr="1" anchor="ctr" wrap="none"/>
+            <a:lstStyle/>
+            <a:p>
+              <a:pPr algn="l" marL="0" marR="0" indent="0">
+                <a:lnSpc>
+                  <a:spcPts val="1100"/>
+                </a:lnSpc>
+                <a:spcBef>
+                  <a:spcPts val="0"/>
+                </a:spcBef>
+                <a:spcAft>
+                  <a:spcPts val="0"/>
+                </a:spcAft>
+              </a:pPr>
+              <a:r>
+                <a:rPr sz="1100">
+                  <a:solidFill>
+                    <a:srgbClr val="000000">
+                      <a:alpha val="100000"/>
+                    </a:srgbClr>
+                  </a:solidFill>
+                  <a:latin typeface="Helvetica"/>
+                  <a:cs typeface="Helvetica"/>
+                </a:rPr>
+                <a:t>eGFR difference (%): 100 × (CKD-EPI Cr-Cys − CG) / CG</a:t>
+              </a:r>
+            </a:p>
+          </p:txBody>
+        </p:sp>
+        <p:sp>
+          <p:nvSpPr>
+            <p:cNvPr id="88" name="tx88"/>
+            <p:cNvSpPr/>
+            <p:nvPr/>
+          </p:nvSpPr>
+          <p:spPr>
+            <a:xfrm rot="-5400000">
+              <a:off x="138035" y="4944909"/>
+              <a:ext cx="1016904" cy="100218"/>
+            </a:xfrm>
+            <a:prstGeom prst="rect">
+              <a:avLst/>
+            </a:prstGeom>
+            <a:noFill/>
+          </p:spPr>
+          <p:txBody>
+            <a:bodyPr lIns="0" rIns="0" tIns="0" bIns="0" anchorCtr="1" anchor="ctr" wrap="none"/>
+            <a:lstStyle/>
+            <a:p>
+              <a:pPr algn="l" marL="0" marR="0" indent="0">
+                <a:lnSpc>
+                  <a:spcPts val="1100"/>
+                </a:lnSpc>
+                <a:spcBef>
+                  <a:spcPts val="0"/>
+                </a:spcBef>
+                <a:spcAft>
+                  <a:spcPts val="0"/>
+                </a:spcAft>
+              </a:pPr>
+              <a:r>
+                <a:rPr sz="1100">
+                  <a:solidFill>
+                    <a:srgbClr val="000000">
+                      <a:alpha val="100000"/>
+                    </a:srgbClr>
+                  </a:solidFill>
+                  <a:latin typeface="Helvetica"/>
+                  <a:cs typeface="Helvetica"/>
+                </a:rPr>
+                <a:t>subHR (95% CI)</a:t>
+              </a:r>
+            </a:p>
+          </p:txBody>
+        </p:sp>
+        <p:sp>
+          <p:nvSpPr>
+            <p:cNvPr id="89" name="tx89"/>
+            <p:cNvSpPr/>
+            <p:nvPr/>
+          </p:nvSpPr>
+          <p:spPr>
+            <a:xfrm>
+              <a:off x="887106" y="4159544"/>
+              <a:ext cx="6321612" cy="82021"/>
+            </a:xfrm>
+            <a:prstGeom prst="rect">
+              <a:avLst/>
+            </a:prstGeom>
+            <a:noFill/>
+          </p:spPr>
+          <p:txBody>
+            <a:bodyPr lIns="0" rIns="0" tIns="0" bIns="0" anchorCtr="1" anchor="ctr" wrap="none"/>
+            <a:lstStyle/>
+            <a:p>
+              <a:pPr algn="l" marL="0" marR="0" indent="0">
+                <a:lnSpc>
+                  <a:spcPts val="900"/>
+                </a:lnSpc>
+                <a:spcBef>
+                  <a:spcPts val="0"/>
+                </a:spcBef>
+                <a:spcAft>
+                  <a:spcPts val="0"/>
+                </a:spcAft>
+              </a:pPr>
+              <a:r>
+                <a:rPr sz="900">
+                  <a:solidFill>
+                    <a:srgbClr val="404040">
+                      <a:alpha val="100000"/>
+                    </a:srgbClr>
+                  </a:solidFill>
+                  <a:latin typeface="Helvetica"/>
+                  <a:cs typeface="Helvetica"/>
+                </a:rPr>
+                <a:t>subHR per 10 % decline: 1.01 (0.83-1.24), p = 0.918  |  per IQR decline (Δ = 29.5 %): 1.03 (0.57-1.88)  |  IQR: [-15.6, 13.9] %</a:t>
+              </a:r>
+            </a:p>
+          </p:txBody>
+        </p:sp>
+        <p:sp>
+          <p:nvSpPr>
+            <p:cNvPr id="90" name="tx90"/>
+            <p:cNvSpPr/>
+            <p:nvPr/>
+          </p:nvSpPr>
+          <p:spPr>
+            <a:xfrm>
+              <a:off x="887106" y="3932770"/>
               <a:ext cx="3295040" cy="120152"/>
             </a:xfrm>
             <a:prstGeom prst="rect">
